--- a/blocks/E_autonomy_logic/M20_pid_driving_control/M20_PID와_주행_제어.pptx
+++ b/blocks/E_autonomy_logic/M20_pid_driving_control/M20_PID와_주행_제어.pptx
@@ -5837,8 +5837,8 @@
         </p:nvSpPr>
         <p:spPr>
           <a:xfrm>
-            <a:off x="658368" y="1682496"/>
-            <a:ext cx="10972800" cy="347472"/>
+            <a:off x="658368" y="1627632"/>
+            <a:ext cx="10972800" cy="256032"/>
           </a:xfrm>
           <a:prstGeom prst="rect">
             <a:avLst/>
@@ -5855,7 +5855,7 @@
               <a:spcAft>
                 <a:spcPts val="0"/>
               </a:spcAft>
-              <a:defRPr sz="1700" b="1">
+              <a:defRPr sz="1500" b="1">
                 <a:solidFill>
                   <a:srgbClr val="122C4E"/>
                 </a:solidFill>
@@ -5876,8 +5876,8 @@
         </p:nvSpPr>
         <p:spPr>
           <a:xfrm>
-            <a:off x="658368" y="2103120"/>
-            <a:ext cx="10972800" cy="493776"/>
+            <a:off x="658368" y="1956816"/>
+            <a:ext cx="10972800" cy="603504"/>
           </a:xfrm>
           <a:prstGeom prst="rect">
             <a:avLst/>
@@ -5921,7 +5921,11 @@
               </a:defRPr>
             </a:pPr>
             <a:r>
-              <a:t>파일 생성/열기: mkdir -p ~/agv_ws/src/agv_control/agv_control    &amp;&amp;    nano ~/agv_ws/src/agv_control/agv_control/pid_controller.py</a:t>
+              <a:t>파일 생성: mkdir -p ~/agv_ws/src/agv_control/agv_control</a:t>
+            </a:r>
+            <a:br/>
+            <a:r>
+              <a:t>파일 열기: nano ~/agv_ws/src/agv_control/agv_control/pid_controller.py</a:t>
             </a:r>
           </a:p>
         </p:txBody>
@@ -5934,8 +5938,8 @@
         </p:nvSpPr>
         <p:spPr>
           <a:xfrm>
-            <a:off x="658368" y="2761488"/>
-            <a:ext cx="10972800" cy="3383280"/>
+            <a:off x="658368" y="2706624"/>
+            <a:ext cx="10972800" cy="3364992"/>
           </a:xfrm>
           <a:prstGeom prst="rect">
             <a:avLst/>
@@ -5978,55 +5982,47 @@
                 <a:latin typeface="DejaVu Sans Mono"/>
               </a:defRPr>
             </a:pPr>
+            <a:r>
+              <a:t>        self.publisher = self.create_publisher(Twist, '/cmd_vel_raw', 10)</a:t>
+            </a:r>
             <a:br/>
             <a:r>
-              <a:t>    def error_callback(self, error):</a:t>
-            </a:r>
-            <a:br/>
-            <a:r>
-              <a:t>        command = Twist()</a:t>
-            </a:r>
-            <a:br/>
-            <a:r>
-              <a:t>        command.linear.x = min(max(error.linear.x, 0.0),</a:t>
-            </a:r>
-            <a:br/>
-            <a:r>
-              <a:t>            self.get_parameter('max_linear_speed').value)</a:t>
-            </a:r>
-            <a:br/>
-            <a:r>
-              <a:t>        command.angular.z = max(min(error.angular.z * self.get_parameter('kp_angular').value,</a:t>
-            </a:r>
-            <a:br/>
-            <a:r>
-              <a:t>             self.get_parameter('max_angular_speed').value),</a:t>
-            </a:r>
-            <a:br/>
-            <a:r>
-              <a:t>            -self.get_parameter('max_angular_speed').value)</a:t>
-            </a:r>
-            <a:br/>
-            <a:r>
-              <a:t>        self.publisher.publish(command)</a:t>
+              <a:t>        self.create_subscription(Twist, '/target_error', self.error_callback, 10)</a:t>
             </a:r>
             <a:br/>
             <a:br/>
             <a:r>
-              <a:t>def main():</a:t>
+              <a:t>    def error_callback(self, error):</a:t>
             </a:r>
             <a:br/>
             <a:r>
-              <a:t>    rclpy.init()</a:t>
+              <a:t>        command = Twist()</a:t>
             </a:r>
             <a:br/>
             <a:r>
-              <a:t>    node = PidController()</a:t>
+              <a:t>        command.linear.x = min(max(error.linear.x, 0.0),</a:t>
             </a:r>
             <a:br/>
             <a:r>
-              <a:t>    try:</a:t>
-            </a:r>
+              <a:t>            self.get_parameter('max_linear_speed').value)</a:t>
+            </a:r>
+            <a:br/>
+            <a:r>
+              <a:t>        command.angular.z = max(min(error.angular.z * self.get_parameter('kp_angular').value,</a:t>
+            </a:r>
+            <a:br/>
+            <a:r>
+              <a:t>             self.get_parameter('max_angular_speed').value),</a:t>
+            </a:r>
+            <a:br/>
+            <a:r>
+              <a:t>            -self.get_parameter('max_angular_speed').value)</a:t>
+            </a:r>
+            <a:br/>
+            <a:r>
+              <a:t>        self.publisher.publish(command)</a:t>
+            </a:r>
+            <a:br/>
           </a:p>
         </p:txBody>
       </p:sp>
@@ -6038,7 +6034,7 @@
         </p:nvSpPr>
         <p:spPr>
           <a:xfrm>
-            <a:off x="749808" y="6199632"/>
+            <a:off x="749808" y="6181344"/>
             <a:ext cx="10789920" cy="201168"/>
           </a:xfrm>
           <a:prstGeom prst="rect">
@@ -6309,8 +6305,8 @@
         </p:nvSpPr>
         <p:spPr>
           <a:xfrm>
-            <a:off x="658368" y="1682496"/>
-            <a:ext cx="10972800" cy="347472"/>
+            <a:off x="658368" y="1627632"/>
+            <a:ext cx="10972800" cy="256032"/>
           </a:xfrm>
           <a:prstGeom prst="rect">
             <a:avLst/>
@@ -6327,7 +6323,7 @@
               <a:spcAft>
                 <a:spcPts val="0"/>
               </a:spcAft>
-              <a:defRPr sz="1700" b="1">
+              <a:defRPr sz="1500" b="1">
                 <a:solidFill>
                   <a:srgbClr val="122C4E"/>
                 </a:solidFill>
@@ -6348,8 +6344,8 @@
         </p:nvSpPr>
         <p:spPr>
           <a:xfrm>
-            <a:off x="658368" y="2103120"/>
-            <a:ext cx="10972800" cy="493776"/>
+            <a:off x="658368" y="1956816"/>
+            <a:ext cx="10972800" cy="603504"/>
           </a:xfrm>
           <a:prstGeom prst="rect">
             <a:avLst/>
@@ -6393,7 +6389,11 @@
               </a:defRPr>
             </a:pPr>
             <a:r>
-              <a:t>파일 생성/열기: mkdir -p ~/agv_ws/src/agv_control/agv_control    &amp;&amp;    nano ~/agv_ws/src/agv_control/agv_control/pid_controller.py</a:t>
+              <a:t>파일 생성: mkdir -p ~/agv_ws/src/agv_control/agv_control</a:t>
+            </a:r>
+            <a:br/>
+            <a:r>
+              <a:t>파일 열기: nano ~/agv_ws/src/agv_control/agv_control/pid_controller.py</a:t>
             </a:r>
           </a:p>
         </p:txBody>
@@ -6406,8 +6406,8 @@
         </p:nvSpPr>
         <p:spPr>
           <a:xfrm>
-            <a:off x="658368" y="2761488"/>
-            <a:ext cx="10972800" cy="3383280"/>
+            <a:off x="658368" y="2706624"/>
+            <a:ext cx="10972800" cy="3364992"/>
           </a:xfrm>
           <a:prstGeom prst="rect">
             <a:avLst/>
@@ -6451,6 +6451,22 @@
               </a:defRPr>
             </a:pPr>
             <a:r>
+              <a:t>def main():</a:t>
+            </a:r>
+            <a:br/>
+            <a:r>
+              <a:t>    rclpy.init()</a:t>
+            </a:r>
+            <a:br/>
+            <a:r>
+              <a:t>    node = PidController()</a:t>
+            </a:r>
+            <a:br/>
+            <a:r>
+              <a:t>    try:</a:t>
+            </a:r>
+            <a:br/>
+            <a:r>
               <a:t>        rclpy.spin(node)</a:t>
             </a:r>
             <a:br/>
@@ -6488,7 +6504,7 @@
         </p:nvSpPr>
         <p:spPr>
           <a:xfrm>
-            <a:off x="749808" y="6199632"/>
+            <a:off x="749808" y="6181344"/>
             <a:ext cx="10789920" cy="201168"/>
           </a:xfrm>
           <a:prstGeom prst="rect">
@@ -6759,8 +6775,8 @@
         </p:nvSpPr>
         <p:spPr>
           <a:xfrm>
-            <a:off x="658368" y="1682496"/>
-            <a:ext cx="10972800" cy="347472"/>
+            <a:off x="658368" y="1627632"/>
+            <a:ext cx="10972800" cy="256032"/>
           </a:xfrm>
           <a:prstGeom prst="rect">
             <a:avLst/>
@@ -6777,7 +6793,7 @@
               <a:spcAft>
                 <a:spcPts val="0"/>
               </a:spcAft>
-              <a:defRPr sz="1700" b="1">
+              <a:defRPr sz="1500" b="1">
                 <a:solidFill>
                   <a:srgbClr val="122C4E"/>
                 </a:solidFill>
@@ -6798,8 +6814,8 @@
         </p:nvSpPr>
         <p:spPr>
           <a:xfrm>
-            <a:off x="658368" y="2103120"/>
-            <a:ext cx="10972800" cy="493776"/>
+            <a:off x="658368" y="1956816"/>
+            <a:ext cx="10972800" cy="603504"/>
           </a:xfrm>
           <a:prstGeom prst="rect">
             <a:avLst/>
@@ -6843,7 +6859,11 @@
               </a:defRPr>
             </a:pPr>
             <a:r>
-              <a:t>파일 생성/열기: mkdir -p ~/agv_ws/src/agv_control    &amp;&amp;    nano ~/agv_ws/src/agv_control/setup.py</a:t>
+              <a:t>파일 생성: mkdir -p ~/agv_ws/src/agv_control</a:t>
+            </a:r>
+            <a:br/>
+            <a:r>
+              <a:t>파일 열기: nano ~/agv_ws/src/agv_control/setup.py</a:t>
             </a:r>
           </a:p>
         </p:txBody>
@@ -6856,8 +6876,8 @@
         </p:nvSpPr>
         <p:spPr>
           <a:xfrm>
-            <a:off x="658368" y="2761488"/>
-            <a:ext cx="10972800" cy="3383280"/>
+            <a:off x="658368" y="2706624"/>
+            <a:ext cx="10972800" cy="3364992"/>
           </a:xfrm>
           <a:prstGeom prst="rect">
             <a:avLst/>
@@ -6958,7 +6978,7 @@
         </p:nvSpPr>
         <p:spPr>
           <a:xfrm>
-            <a:off x="749808" y="6199632"/>
+            <a:off x="749808" y="6181344"/>
             <a:ext cx="10789920" cy="201168"/>
           </a:xfrm>
           <a:prstGeom prst="rect">
@@ -7229,8 +7249,8 @@
         </p:nvSpPr>
         <p:spPr>
           <a:xfrm>
-            <a:off x="658368" y="1682496"/>
-            <a:ext cx="10972800" cy="347472"/>
+            <a:off x="658368" y="1627632"/>
+            <a:ext cx="10972800" cy="256032"/>
           </a:xfrm>
           <a:prstGeom prst="rect">
             <a:avLst/>
@@ -7247,7 +7267,7 @@
               <a:spcAft>
                 <a:spcPts val="0"/>
               </a:spcAft>
-              <a:defRPr sz="1700" b="1">
+              <a:defRPr sz="1500" b="1">
                 <a:solidFill>
                   <a:srgbClr val="122C4E"/>
                 </a:solidFill>
@@ -7268,8 +7288,8 @@
         </p:nvSpPr>
         <p:spPr>
           <a:xfrm>
-            <a:off x="658368" y="2103120"/>
-            <a:ext cx="10972800" cy="493776"/>
+            <a:off x="658368" y="1956816"/>
+            <a:ext cx="10972800" cy="603504"/>
           </a:xfrm>
           <a:prstGeom prst="rect">
             <a:avLst/>
@@ -7313,7 +7333,11 @@
               </a:defRPr>
             </a:pPr>
             <a:r>
-              <a:t>파일 생성/열기: mkdir -p ~/agv_ws/src/agv_bringup/config    &amp;&amp;    nano ~/agv_ws/src/agv_bringup/config/mission.yaml</a:t>
+              <a:t>파일 생성: mkdir -p ~/agv_ws/src/agv_bringup/config</a:t>
+            </a:r>
+            <a:br/>
+            <a:r>
+              <a:t>파일 열기: nano ~/agv_ws/src/agv_bringup/config/mission.yaml</a:t>
             </a:r>
           </a:p>
         </p:txBody>
@@ -7326,8 +7350,8 @@
         </p:nvSpPr>
         <p:spPr>
           <a:xfrm>
-            <a:off x="658368" y="2761488"/>
-            <a:ext cx="10972800" cy="3383280"/>
+            <a:off x="658368" y="2706624"/>
+            <a:ext cx="10972800" cy="3364992"/>
           </a:xfrm>
           <a:prstGeom prst="rect">
             <a:avLst/>
@@ -7428,7 +7452,7 @@
         </p:nvSpPr>
         <p:spPr>
           <a:xfrm>
-            <a:off x="749808" y="6199632"/>
+            <a:off x="749808" y="6181344"/>
             <a:ext cx="10789920" cy="201168"/>
           </a:xfrm>
           <a:prstGeom prst="rect">
@@ -10436,7 +10460,7 @@
         </p:nvSpPr>
         <p:spPr>
           <a:xfrm>
-            <a:off x="914400" y="1810512"/>
+            <a:off x="914400" y="1773936"/>
             <a:ext cx="3840480" cy="256032"/>
           </a:xfrm>
           <a:prstGeom prst="rect">
@@ -10475,8 +10499,8 @@
         </p:nvSpPr>
         <p:spPr>
           <a:xfrm>
-            <a:off x="914400" y="2121408"/>
-            <a:ext cx="9966960" cy="256032"/>
+            <a:off x="914400" y="2048255"/>
+            <a:ext cx="9966960" cy="475488"/>
           </a:xfrm>
           <a:prstGeom prst="rect">
             <a:avLst/>
@@ -10493,7 +10517,7 @@
               <a:spcAft>
                 <a:spcPts val="0"/>
               </a:spcAft>
-              <a:defRPr sz="1200" b="0">
+              <a:defRPr sz="1000" b="0">
                 <a:solidFill>
                   <a:srgbClr val="225B9B"/>
                 </a:solidFill>
@@ -10514,7 +10538,7 @@
         </p:nvSpPr>
         <p:spPr>
           <a:xfrm>
-            <a:off x="914400" y="2816352"/>
+            <a:off x="914400" y="2852928"/>
             <a:ext cx="3840480" cy="256032"/>
           </a:xfrm>
           <a:prstGeom prst="rect">
@@ -10554,7 +10578,7 @@
         <p:spPr>
           <a:xfrm>
             <a:off x="914400" y="3127248"/>
-            <a:ext cx="9966960" cy="256032"/>
+            <a:ext cx="9966960" cy="475488"/>
           </a:xfrm>
           <a:prstGeom prst="rect">
             <a:avLst/>
@@ -10571,7 +10595,7 @@
               <a:spcAft>
                 <a:spcPts val="0"/>
               </a:spcAft>
-              <a:defRPr sz="1200" b="0">
+              <a:defRPr sz="1000" b="0">
                 <a:solidFill>
                   <a:srgbClr val="225B9B"/>
                 </a:solidFill>
@@ -10592,7 +10616,7 @@
         </p:nvSpPr>
         <p:spPr>
           <a:xfrm>
-            <a:off x="914400" y="3822191"/>
+            <a:off x="914400" y="3931920"/>
             <a:ext cx="3840480" cy="256032"/>
           </a:xfrm>
           <a:prstGeom prst="rect">
@@ -10631,8 +10655,8 @@
         </p:nvSpPr>
         <p:spPr>
           <a:xfrm>
-            <a:off x="914400" y="4133087"/>
-            <a:ext cx="9966960" cy="256032"/>
+            <a:off x="914400" y="4206240"/>
+            <a:ext cx="9966960" cy="475488"/>
           </a:xfrm>
           <a:prstGeom prst="rect">
             <a:avLst/>
@@ -10649,7 +10673,7 @@
               <a:spcAft>
                 <a:spcPts val="0"/>
               </a:spcAft>
-              <a:defRPr sz="1200" b="0">
+              <a:defRPr sz="1000" b="0">
                 <a:solidFill>
                   <a:srgbClr val="225B9B"/>
                 </a:solidFill>
@@ -10670,7 +10694,7 @@
         </p:nvSpPr>
         <p:spPr>
           <a:xfrm>
-            <a:off x="914400" y="4828032"/>
+            <a:off x="914400" y="5010912"/>
             <a:ext cx="3840480" cy="256032"/>
           </a:xfrm>
           <a:prstGeom prst="rect">
@@ -10709,8 +10733,8 @@
         </p:nvSpPr>
         <p:spPr>
           <a:xfrm>
-            <a:off x="914400" y="5138928"/>
-            <a:ext cx="9966960" cy="256032"/>
+            <a:off x="914400" y="5285232"/>
+            <a:ext cx="9966960" cy="475488"/>
           </a:xfrm>
           <a:prstGeom prst="rect">
             <a:avLst/>
@@ -10727,7 +10751,7 @@
               <a:spcAft>
                 <a:spcPts val="0"/>
               </a:spcAft>
-              <a:defRPr sz="1200" b="0">
+              <a:defRPr sz="1000" b="0">
                 <a:solidFill>
                   <a:srgbClr val="225B9B"/>
                 </a:solidFill>
@@ -13469,8 +13493,8 @@
         </p:nvSpPr>
         <p:spPr>
           <a:xfrm>
-            <a:off x="658368" y="1682496"/>
-            <a:ext cx="10972800" cy="347472"/>
+            <a:off x="658368" y="1627632"/>
+            <a:ext cx="10972800" cy="256032"/>
           </a:xfrm>
           <a:prstGeom prst="rect">
             <a:avLst/>
@@ -13487,7 +13511,7 @@
               <a:spcAft>
                 <a:spcPts val="0"/>
               </a:spcAft>
-              <a:defRPr sz="1700" b="1">
+              <a:defRPr sz="1500" b="1">
                 <a:solidFill>
                   <a:srgbClr val="122C4E"/>
                 </a:solidFill>
@@ -13508,8 +13532,8 @@
         </p:nvSpPr>
         <p:spPr>
           <a:xfrm>
-            <a:off x="658368" y="2103120"/>
-            <a:ext cx="10972800" cy="493776"/>
+            <a:off x="658368" y="1956816"/>
+            <a:ext cx="10972800" cy="603504"/>
           </a:xfrm>
           <a:prstGeom prst="rect">
             <a:avLst/>
@@ -13553,7 +13577,11 @@
               </a:defRPr>
             </a:pPr>
             <a:r>
-              <a:t>파일 생성/열기: mkdir -p ~/agv_ws/src/agv_control/agv_control    &amp;&amp;    nano ~/agv_ws/src/agv_control/agv_control/pid_controller.py</a:t>
+              <a:t>파일 생성: mkdir -p ~/agv_ws/src/agv_control/agv_control</a:t>
+            </a:r>
+            <a:br/>
+            <a:r>
+              <a:t>파일 열기: nano ~/agv_ws/src/agv_control/agv_control/pid_controller.py</a:t>
             </a:r>
           </a:p>
         </p:txBody>
@@ -13566,8 +13594,8 @@
         </p:nvSpPr>
         <p:spPr>
           <a:xfrm>
-            <a:off x="658368" y="2761488"/>
-            <a:ext cx="10972800" cy="3383280"/>
+            <a:off x="658368" y="2706624"/>
+            <a:ext cx="10972800" cy="3364992"/>
           </a:xfrm>
           <a:prstGeom prst="rect">
             <a:avLst/>
@@ -13651,14 +13679,6 @@
             <a:r>
               <a:t>        self.declare_parameter('max_angular_speed', 0.8)</a:t>
             </a:r>
-            <a:br/>
-            <a:r>
-              <a:t>        self.publisher = self.create_publisher(Twist, '/cmd_vel_raw', 10)</a:t>
-            </a:r>
-            <a:br/>
-            <a:r>
-              <a:t>        self.create_subscription(Twist, '/target_error', self.error_callback, 10)</a:t>
-            </a:r>
           </a:p>
         </p:txBody>
       </p:sp>
@@ -13670,7 +13690,7 @@
         </p:nvSpPr>
         <p:spPr>
           <a:xfrm>
-            <a:off x="749808" y="6199632"/>
+            <a:off x="749808" y="6181344"/>
             <a:ext cx="10789920" cy="201168"/>
           </a:xfrm>
           <a:prstGeom prst="rect">

--- a/blocks/E_autonomy_logic/M20_pid_driving_control/M20_PID와_주행_제어.pptx
+++ b/blocks/E_autonomy_logic/M20_pid_driving_control/M20_PID와_주행_제어.pptx
@@ -25,6 +25,8 @@
     <p:sldId id="273" r:id="rId25"/>
     <p:sldId id="274" r:id="rId26"/>
     <p:sldId id="275" r:id="rId27"/>
+    <p:sldId id="276" r:id="rId28"/>
+    <p:sldId id="277" r:id="rId29"/>
   </p:sldIdLst>
   <p:sldSz cx="12191999" cy="6858000" type="screen4x3"/>
   <p:notesSz cx="6858000" cy="9144000"/>
@@ -611,12 +613,12 @@
           <a:lstStyle/>
           <a:p>
             <a:r>
-              <a:t>[설명] ~/agv_ws/src/agv_control/agv_control/pid_controller.py의 전체 파일을 2/3 구간으로 작성한다.</a:t>
-            </a:r>
-          </a:p>
-          <a:p>
-            <a:r>
-              <a:t>[실행] nano ~/agv_ws/src/agv_control/agv_control/pid_controller.py</a:t>
+              <a:t>[설명] ~/ros2_curri/agv_ws/src/agv_control/agv_control/pid_controller.py의 전체 파일을 2/3 구간으로 작성한다.</a:t>
+            </a:r>
+          </a:p>
+          <a:p>
+            <a:r>
+              <a:t>[실행] nano ~/ros2_curri/agv_ws/src/agv_control/agv_control/pid_controller.py</a:t>
             </a:r>
           </a:p>
           <a:p>
@@ -701,12 +703,12 @@
           <a:lstStyle/>
           <a:p>
             <a:r>
-              <a:t>[설명] ~/agv_ws/src/agv_control/agv_control/pid_controller.py의 전체 파일을 3/3 구간으로 작성한다.</a:t>
-            </a:r>
-          </a:p>
-          <a:p>
-            <a:r>
-              <a:t>[실행] nano ~/agv_ws/src/agv_control/agv_control/pid_controller.py</a:t>
+              <a:t>[설명] ~/ros2_curri/agv_ws/src/agv_control/agv_control/pid_controller.py의 전체 파일을 3/3 구간으로 작성한다.</a:t>
+            </a:r>
+          </a:p>
+          <a:p>
+            <a:r>
+              <a:t>[실행] nano ~/ros2_curri/agv_ws/src/agv_control/agv_control/pid_controller.py</a:t>
             </a:r>
           </a:p>
           <a:p>
@@ -791,12 +793,12 @@
           <a:lstStyle/>
           <a:p>
             <a:r>
-              <a:t>[설명] ~/agv_ws/src/agv_control/setup.py의 전체 파일을 1/1 구간으로 작성한다.</a:t>
-            </a:r>
-          </a:p>
-          <a:p>
-            <a:r>
-              <a:t>[실행] nano ~/agv_ws/src/agv_control/setup.py</a:t>
+              <a:t>[설명] ~/ros2_curri/agv_ws/src/agv_control/setup.py의 전체 파일을 1/1 구간으로 작성한다.</a:t>
+            </a:r>
+          </a:p>
+          <a:p>
+            <a:r>
+              <a:t>[실행] nano ~/ros2_curri/agv_ws/src/agv_control/setup.py</a:t>
             </a:r>
           </a:p>
           <a:p>
@@ -881,12 +883,12 @@
           <a:lstStyle/>
           <a:p>
             <a:r>
-              <a:t>[설명] ~/agv_ws/src/agv_bringup/config/mission.yaml의 전체 파일을 1/1 구간으로 작성한다.</a:t>
-            </a:r>
-          </a:p>
-          <a:p>
-            <a:r>
-              <a:t>[실행] nano ~/agv_ws/src/agv_bringup/config/mission.yaml</a:t>
+              <a:t>[설명] ~/ros2_curri/agv_ws/src/agv_bringup/config/mission.yaml의 전체 파일을 1/2 구간으로 작성한다.</a:t>
+            </a:r>
+          </a:p>
+          <a:p>
+            <a:r>
+              <a:t>[실행] nano ~/ros2_curri/agv_ws/src/agv_bringup/config/mission.yaml</a:t>
             </a:r>
           </a:p>
           <a:p>
@@ -971,22 +973,17 @@
           <a:lstStyle/>
           <a:p>
             <a:r>
-              <a:t>[설명] build/source/run을 생략 없이 실행한다.</a:t>
-            </a:r>
-          </a:p>
-          <a:p>
-            <a:r>
-              <a:t>[실행] source ~/agv_ws/install/setup.bash</a:t>
-            </a:r>
-          </a:p>
-          <a:p>
-            <a:r>
-              <a:t>ros2 run agv_control pid_controller --ros-args -p kp_angular:=0.004</a:t>
-            </a:r>
-          </a:p>
-          <a:p>
-            <a:r>
-              <a:t>[확인] kp_angular·max speed parameter와 saturation이 /cmd_vel_raw 출력을 제한하는 것을 확인한다.</a:t>
+              <a:t>[설명] ~/ros2_curri/agv_ws/src/agv_bringup/config/mission.yaml의 전체 파일을 2/2 구간으로 작성한다.</a:t>
+            </a:r>
+          </a:p>
+          <a:p>
+            <a:r>
+              <a:t>[실행] nano ~/ros2_curri/agv_ws/src/agv_bringup/config/mission.yaml</a:t>
+            </a:r>
+          </a:p>
+          <a:p>
+            <a:r>
+              <a:t>[확인] 코드를 저장하고 다음 코드 슬라이드 또는 build 단계로 이동한다.</a:t>
             </a:r>
           </a:p>
           <a:p>
@@ -996,7 +993,7 @@
           </a:p>
           <a:p>
             <a:r>
-              <a:t>[오류] 오류가 나면 현재 폴더, source, 파일 경로를 먼저 확인한다.</a:t>
+              <a:t>[오류] 들여쓰기·XML 태그·따옴표가 슬라이드와 정확히 같은지 확인한다.</a:t>
             </a:r>
           </a:p>
         </p:txBody>
@@ -1066,17 +1063,22 @@
           <a:lstStyle/>
           <a:p>
             <a:r>
-              <a:t>[설명] 실제 Ubuntu/ROS 2 환경에서 생성한 검증 화면이다.</a:t>
-            </a:r>
-          </a:p>
-          <a:p>
-            <a:r>
-              <a:t>[실행] 슬라이드의 명령 또는 파일 작성 단계를 진행한다.</a:t>
-            </a:r>
-          </a:p>
-          <a:p>
-            <a:r>
-              <a:t>[확인] 캡처의 명령과 다음 슬라이드의 검증 명령을 비교한다.</a:t>
+              <a:t>[설명] build/source/run을 생략 없이 실행한다.</a:t>
+            </a:r>
+          </a:p>
+          <a:p>
+            <a:r>
+              <a:t>[실행] source ~/ros2_curri/agv_ws/install/setup.bash</a:t>
+            </a:r>
+          </a:p>
+          <a:p>
+            <a:r>
+              <a:t>ros2 run agv_control pid_controller --ros-args -p kp_angular:=0.004</a:t>
+            </a:r>
+          </a:p>
+          <a:p>
+            <a:r>
+              <a:t>[확인] kp_angular·max speed parameter와 saturation이 /cmd_vel_raw 출력을 제한하는 것을 확인한다.</a:t>
             </a:r>
           </a:p>
           <a:p>
@@ -1156,27 +1158,17 @@
           <a:lstStyle/>
           <a:p>
             <a:r>
-              <a:t>[설명] 검증 명령은 GUI 결과와 별도로 실행해 재현 가능한 완료 기준을 만든다.</a:t>
-            </a:r>
-          </a:p>
-          <a:p>
-            <a:r>
-              <a:t>[실행] ros2 topic info /target_error</a:t>
-            </a:r>
-          </a:p>
-          <a:p>
-            <a:r>
-              <a:t>ros2 topic info /cmd_vel_raw</a:t>
-            </a:r>
-          </a:p>
-          <a:p>
-            <a:r>
-              <a:t>ros2 param get /pid_controller kp_angular</a:t>
-            </a:r>
-          </a:p>
-          <a:p>
-            <a:r>
-              <a:t>[확인] kp_angular·max speed parameter와 saturation이 /cmd_vel_raw 출력을 제한하는 것을 확인한다.</a:t>
+              <a:t>[설명] 실제 Ubuntu/ROS 2 환경에서 생성한 검증 화면이다.</a:t>
+            </a:r>
+          </a:p>
+          <a:p>
+            <a:r>
+              <a:t>[실행] 슬라이드의 명령 또는 파일 작성 단계를 진행한다.</a:t>
+            </a:r>
+          </a:p>
+          <a:p>
+            <a:r>
+              <a:t>[확인] 캡처의 명령과 다음 슬라이드의 검증 명령을 비교한다.</a:t>
             </a:r>
           </a:p>
           <a:p>
@@ -1256,7 +1248,7 @@
           <a:lstStyle/>
           <a:p>
             <a:r>
-              <a:t>[설명] 오류를 대신 해결하지 말고 증상부터 우선 확인 순서대로 교육생이 실행하게 한다.</a:t>
+              <a:t>[설명] 실제 Ubuntu/ROS 2 환경에서 생성한 검증 화면이다.</a:t>
             </a:r>
           </a:p>
           <a:p>
@@ -1266,7 +1258,7 @@
           </a:p>
           <a:p>
             <a:r>
-              <a:t>[확인] 수정 뒤 첫 검증 명령을 다시 실행한다.</a:t>
+              <a:t>[확인] 캡처의 명령과 다음 슬라이드의 검증 명령을 비교한다.</a:t>
             </a:r>
           </a:p>
           <a:p>
@@ -1276,7 +1268,7 @@
           </a:p>
           <a:p>
             <a:r>
-              <a:t>[오류] 슬라이드의 두 대표 오류를 먼저 사용한다.</a:t>
+              <a:t>[오류] 오류가 나면 현재 폴더, source, 파일 경로를 먼저 확인한다.</a:t>
             </a:r>
           </a:p>
         </p:txBody>
@@ -1346,17 +1338,27 @@
           <a:lstStyle/>
           <a:p>
             <a:r>
-              <a:t>[설명] 교육생이 직접 한 값만 바꿔 원인과 결과를 연결하게 한다.</a:t>
-            </a:r>
-          </a:p>
-          <a:p>
-            <a:r>
-              <a:t>[실행] 슬라이드의 명령 또는 파일 작성 단계를 진행한다.</a:t>
-            </a:r>
-          </a:p>
-          <a:p>
-            <a:r>
-              <a:t>[확인] 원래 값과 변경 값을 모두 기록한다.</a:t>
+              <a:t>[설명] 검증 명령은 GUI 결과와 별도로 실행해 재현 가능한 완료 기준을 만든다.</a:t>
+            </a:r>
+          </a:p>
+          <a:p>
+            <a:r>
+              <a:t>[실행] ros2 topic info /target_error</a:t>
+            </a:r>
+          </a:p>
+          <a:p>
+            <a:r>
+              <a:t>ros2 topic info /cmd_vel_raw</a:t>
+            </a:r>
+          </a:p>
+          <a:p>
+            <a:r>
+              <a:t>ros2 param get /pid_controller kp_angular</a:t>
+            </a:r>
+          </a:p>
+          <a:p>
+            <a:r>
+              <a:t>[확인] kp_angular·max speed parameter와 saturation이 /cmd_vel_raw 출력을 제한하는 것을 확인한다.</a:t>
             </a:r>
           </a:p>
           <a:p>
@@ -1436,7 +1438,7 @@
           <a:lstStyle/>
           <a:p>
             <a:r>
-              <a:t>[설명] 교육생이 Complete·캡처·로그를 저장했는지 확인하고 다음 모듈의 시작 상태를 읽는다.</a:t>
+              <a:t>[설명] 오류를 대신 해결하지 말고 증상부터 우선 확인 순서대로 교육생이 실행하게 한다.</a:t>
             </a:r>
           </a:p>
           <a:p>
@@ -1446,7 +1448,7 @@
           </a:p>
           <a:p>
             <a:r>
-              <a:t>[확인] M21 YAML/Launch 시작 조건을 말할 수 있다.</a:t>
+              <a:t>[확인] 수정 뒤 첫 검증 명령을 다시 실행한다.</a:t>
             </a:r>
           </a:p>
           <a:p>
@@ -1456,7 +1458,7 @@
           </a:p>
           <a:p>
             <a:r>
-              <a:t>[오류] 오류가 나면 현재 폴더, source, 파일 경로를 먼저 확인한다.</a:t>
+              <a:t>[오류] 슬라이드의 두 대표 오류를 먼저 사용한다.</a:t>
             </a:r>
           </a:p>
         </p:txBody>
@@ -1616,6 +1618,186 @@
           <a:lstStyle/>
           <a:p>
             <a:r>
+              <a:t>[설명] 교육생이 직접 한 값만 바꿔 원인과 결과를 연결하게 한다.</a:t>
+            </a:r>
+          </a:p>
+          <a:p>
+            <a:r>
+              <a:t>[실행] 슬라이드의 명령 또는 파일 작성 단계를 진행한다.</a:t>
+            </a:r>
+          </a:p>
+          <a:p>
+            <a:r>
+              <a:t>[확인] 원래 값과 변경 값을 모두 기록한다.</a:t>
+            </a:r>
+          </a:p>
+          <a:p>
+            <a:r>
+              <a:t>[멈춤] 교육생이 현재 체크포인트를 통과할 때까지 기다린다.</a:t>
+            </a:r>
+          </a:p>
+          <a:p>
+            <a:r>
+              <a:t>[오류] 오류가 나면 현재 폴더, source, 파일 경로를 먼저 확인한다.</a:t>
+            </a:r>
+          </a:p>
+        </p:txBody>
+      </p:sp>
+      <p:sp>
+        <p:nvSpPr>
+          <p:cNvPr id="4" name="Slide Number Placeholder 3"/>
+          <p:cNvSpPr>
+            <a:spLocks noGrp="1"/>
+          </p:cNvSpPr>
+          <p:nvPr>
+            <p:ph type="sldNum" idx="5" sz="quarter"/>
+          </p:nvPr>
+        </p:nvSpPr>
+        <p:spPr/>
+      </p:sp>
+    </p:spTree>
+  </p:cSld>
+  <p:clrMapOvr>
+    <a:masterClrMapping/>
+  </p:clrMapOvr>
+</p:notes>
+</file>
+
+<file path=ppt/notesSlides/notesSlide21.xml><?xml version="1.0" encoding="utf-8"?>
+<p:notes xmlns:a="http://schemas.openxmlformats.org/drawingml/2006/main" xmlns:p="http://schemas.openxmlformats.org/presentationml/2006/main" xmlns:r="http://schemas.openxmlformats.org/officeDocument/2006/relationships">
+  <p:cSld>
+    <p:spTree>
+      <p:nvGrpSpPr>
+        <p:cNvPr id="1" name=""/>
+        <p:cNvGrpSpPr/>
+        <p:nvPr/>
+      </p:nvGrpSpPr>
+      <p:grpSpPr>
+        <a:xfrm>
+          <a:off x="0" y="0"/>
+          <a:ext cx="0" cy="0"/>
+          <a:chOff x="0" y="0"/>
+          <a:chExt cx="0" cy="0"/>
+        </a:xfrm>
+      </p:grpSpPr>
+      <p:sp>
+        <p:nvSpPr>
+          <p:cNvPr id="2" name="Slide Image Placeholder 1"/>
+          <p:cNvSpPr>
+            <a:spLocks noGrp="1"/>
+          </p:cNvSpPr>
+          <p:nvPr>
+            <p:ph type="sldImg" idx="2"/>
+          </p:nvPr>
+        </p:nvSpPr>
+        <p:spPr/>
+      </p:sp>
+      <p:sp>
+        <p:nvSpPr>
+          <p:cNvPr id="3" name="Notes Placeholder 2"/>
+          <p:cNvSpPr>
+            <a:spLocks noGrp="1"/>
+          </p:cNvSpPr>
+          <p:nvPr>
+            <p:ph type="body" idx="3" sz="quarter"/>
+          </p:nvPr>
+        </p:nvSpPr>
+        <p:spPr/>
+        <p:txBody>
+          <a:bodyPr/>
+          <a:lstStyle/>
+          <a:p>
+            <a:r>
+              <a:t>[설명] 교육생이 Complete·캡처·로그를 저장했는지 확인하고 다음 모듈의 시작 상태를 읽는다.</a:t>
+            </a:r>
+          </a:p>
+          <a:p>
+            <a:r>
+              <a:t>[실행] 슬라이드의 명령 또는 파일 작성 단계를 진행한다.</a:t>
+            </a:r>
+          </a:p>
+          <a:p>
+            <a:r>
+              <a:t>[확인] M21 YAML/Launch 시작 조건을 말할 수 있다.</a:t>
+            </a:r>
+          </a:p>
+          <a:p>
+            <a:r>
+              <a:t>[멈춤] 교육생이 현재 체크포인트를 통과할 때까지 기다린다.</a:t>
+            </a:r>
+          </a:p>
+          <a:p>
+            <a:r>
+              <a:t>[오류] 오류가 나면 현재 폴더, source, 파일 경로를 먼저 확인한다.</a:t>
+            </a:r>
+          </a:p>
+        </p:txBody>
+      </p:sp>
+      <p:sp>
+        <p:nvSpPr>
+          <p:cNvPr id="4" name="Slide Number Placeholder 3"/>
+          <p:cNvSpPr>
+            <a:spLocks noGrp="1"/>
+          </p:cNvSpPr>
+          <p:nvPr>
+            <p:ph type="sldNum" idx="5" sz="quarter"/>
+          </p:nvPr>
+        </p:nvSpPr>
+        <p:spPr/>
+      </p:sp>
+    </p:spTree>
+  </p:cSld>
+  <p:clrMapOvr>
+    <a:masterClrMapping/>
+  </p:clrMapOvr>
+</p:notes>
+</file>
+
+<file path=ppt/notesSlides/notesSlide22.xml><?xml version="1.0" encoding="utf-8"?>
+<p:notes xmlns:a="http://schemas.openxmlformats.org/drawingml/2006/main" xmlns:p="http://schemas.openxmlformats.org/presentationml/2006/main" xmlns:r="http://schemas.openxmlformats.org/officeDocument/2006/relationships">
+  <p:cSld>
+    <p:spTree>
+      <p:nvGrpSpPr>
+        <p:cNvPr id="1" name=""/>
+        <p:cNvGrpSpPr/>
+        <p:nvPr/>
+      </p:nvGrpSpPr>
+      <p:grpSpPr>
+        <a:xfrm>
+          <a:off x="0" y="0"/>
+          <a:ext cx="0" cy="0"/>
+          <a:chOff x="0" y="0"/>
+          <a:chExt cx="0" cy="0"/>
+        </a:xfrm>
+      </p:grpSpPr>
+      <p:sp>
+        <p:nvSpPr>
+          <p:cNvPr id="2" name="Slide Image Placeholder 1"/>
+          <p:cNvSpPr>
+            <a:spLocks noGrp="1"/>
+          </p:cNvSpPr>
+          <p:nvPr>
+            <p:ph type="sldImg" idx="2"/>
+          </p:nvPr>
+        </p:nvSpPr>
+        <p:spPr/>
+      </p:sp>
+      <p:sp>
+        <p:nvSpPr>
+          <p:cNvPr id="3" name="Notes Placeholder 2"/>
+          <p:cNvSpPr>
+            <a:spLocks noGrp="1"/>
+          </p:cNvSpPr>
+          <p:nvPr>
+            <p:ph type="body" idx="3" sz="quarter"/>
+          </p:nvPr>
+        </p:nvSpPr>
+        <p:spPr/>
+        <p:txBody>
+          <a:bodyPr/>
+          <a:lstStyle/>
+          <a:p>
+            <a:r>
               <a:t>[설명] 공식 문서는 버전 차이와 확장 학습을 확인할 때 사용한다.</a:t>
             </a:r>
           </a:p>
@@ -1711,7 +1893,7 @@
           </a:p>
           <a:p>
             <a:r>
-              <a:t>[실행] pwd; source /opt/ros/jazzy/setup.bash; source ~/agv_ws/install/setup.bash</a:t>
+              <a:t>[실행] pwd; source /opt/ros/jazzy/setup.bash; source ~/ros2_curri/agv_ws/install/setup.bash</a:t>
             </a:r>
           </a:p>
           <a:p>
@@ -2256,12 +2438,12 @@
           <a:lstStyle/>
           <a:p>
             <a:r>
-              <a:t>[설명] ~/agv_ws/src/agv_control/agv_control/pid_controller.py의 전체 파일을 1/3 구간으로 작성한다.</a:t>
-            </a:r>
-          </a:p>
-          <a:p>
-            <a:r>
-              <a:t>[실행] nano ~/agv_ws/src/agv_control/agv_control/pid_controller.py</a:t>
+              <a:t>[설명] ~/ros2_curri/agv_ws/src/agv_control/agv_control/pid_controller.py의 전체 파일을 1/3 구간으로 작성한다.</a:t>
+            </a:r>
+          </a:p>
+          <a:p>
+            <a:r>
+              <a:t>[실행] nano ~/ros2_curri/agv_ws/src/agv_control/agv_control/pid_controller.py</a:t>
             </a:r>
           </a:p>
           <a:p>
@@ -5688,7 +5870,7 @@
               </a:defRPr>
             </a:pPr>
             <a:r>
-              <a:t>~/agv_ws/src/agv_control/agv_control/pid_controller.py</a:t>
+              <a:t>~/ros2_curri/agv_ws/src/agv_control/agv_control/pid_controller.py</a:t>
             </a:r>
           </a:p>
         </p:txBody>
@@ -5824,7 +6006,7 @@
               </a:defRPr>
             </a:pPr>
             <a:r>
-              <a:t>현재 단계 4/6    |    현재 폴더 ~/agv_ws    |    현재 터미널</a:t>
+              <a:t>현재 단계 4/6    |    현재 폴더 ~/ros2_curri/agv_ws    |    현재 터미널</a:t>
             </a:r>
           </a:p>
         </p:txBody>
@@ -5921,11 +6103,11 @@
               </a:defRPr>
             </a:pPr>
             <a:r>
-              <a:t>파일 생성: mkdir -p ~/agv_ws/src/agv_control/agv_control</a:t>
+              <a:t>파일 생성: mkdir -p ~/ros2_curri/agv_ws/src/agv_control/agv_control</a:t>
             </a:r>
             <a:br/>
             <a:r>
-              <a:t>파일 열기: nano ~/agv_ws/src/agv_control/agv_control/pid_controller.py</a:t>
+              <a:t>파일 열기: nano ~/ros2_curri/agv_ws/src/agv_control/agv_control/pid_controller.py</a:t>
             </a:r>
           </a:p>
         </p:txBody>
@@ -6156,7 +6338,7 @@
               </a:defRPr>
             </a:pPr>
             <a:r>
-              <a:t>~/agv_ws/src/agv_control/agv_control/pid_controller.py</a:t>
+              <a:t>~/ros2_curri/agv_ws/src/agv_control/agv_control/pid_controller.py</a:t>
             </a:r>
           </a:p>
         </p:txBody>
@@ -6292,7 +6474,7 @@
               </a:defRPr>
             </a:pPr>
             <a:r>
-              <a:t>현재 단계 5/6    |    현재 폴더 ~/agv_ws    |    현재 터미널</a:t>
+              <a:t>현재 단계 5/6    |    현재 폴더 ~/ros2_curri/agv_ws    |    현재 터미널</a:t>
             </a:r>
           </a:p>
         </p:txBody>
@@ -6389,11 +6571,11 @@
               </a:defRPr>
             </a:pPr>
             <a:r>
-              <a:t>파일 생성: mkdir -p ~/agv_ws/src/agv_control/agv_control</a:t>
+              <a:t>파일 생성: mkdir -p ~/ros2_curri/agv_ws/src/agv_control/agv_control</a:t>
             </a:r>
             <a:br/>
             <a:r>
-              <a:t>파일 열기: nano ~/agv_ws/src/agv_control/agv_control/pid_controller.py</a:t>
+              <a:t>파일 열기: nano ~/ros2_curri/agv_ws/src/agv_control/agv_control/pid_controller.py</a:t>
             </a:r>
           </a:p>
         </p:txBody>
@@ -6626,7 +6808,7 @@
               </a:defRPr>
             </a:pPr>
             <a:r>
-              <a:t>~/agv_ws/src/agv_control/setup.py</a:t>
+              <a:t>~/ros2_curri/agv_ws/src/agv_control/setup.py</a:t>
             </a:r>
           </a:p>
         </p:txBody>
@@ -6762,7 +6944,7 @@
               </a:defRPr>
             </a:pPr>
             <a:r>
-              <a:t>현재 단계 6/7    |    현재 폴더 ~/agv_ws    |    현재 터미널</a:t>
+              <a:t>현재 단계 6/7    |    현재 폴더 ~/ros2_curri/agv_ws    |    현재 터미널</a:t>
             </a:r>
           </a:p>
         </p:txBody>
@@ -6859,11 +7041,11 @@
               </a:defRPr>
             </a:pPr>
             <a:r>
-              <a:t>파일 생성: mkdir -p ~/agv_ws/src/agv_control</a:t>
+              <a:t>파일 생성: mkdir -p ~/ros2_curri/agv_ws/src/agv_control</a:t>
             </a:r>
             <a:br/>
             <a:r>
-              <a:t>파일 열기: nano ~/agv_ws/src/agv_control/setup.py</a:t>
+              <a:t>파일 열기: nano ~/ros2_curri/agv_ws/src/agv_control/setup.py</a:t>
             </a:r>
           </a:p>
         </p:txBody>
@@ -7061,7 +7243,7 @@
               </a:defRPr>
             </a:pPr>
             <a:r>
-              <a:t>파일을 새로 만들고 저장한다 (1/1)</a:t>
+              <a:t>파일을 새로 만들고 저장한다 (1/2)</a:t>
             </a:r>
           </a:p>
         </p:txBody>
@@ -7100,7 +7282,7 @@
               </a:defRPr>
             </a:pPr>
             <a:r>
-              <a:t>~/agv_ws/src/agv_bringup/config/mission.yaml</a:t>
+              <a:t>~/ros2_curri/agv_ws/src/agv_bringup/config/mission.yaml</a:t>
             </a:r>
           </a:p>
         </p:txBody>
@@ -7236,7 +7418,7 @@
               </a:defRPr>
             </a:pPr>
             <a:r>
-              <a:t>현재 단계 7/8    |    현재 폴더 ~/agv_ws    |    현재 터미널</a:t>
+              <a:t>현재 단계 7/9    |    현재 폴더 ~/ros2_curri/agv_ws    |    현재 터미널</a:t>
             </a:r>
           </a:p>
         </p:txBody>
@@ -7333,11 +7515,11 @@
               </a:defRPr>
             </a:pPr>
             <a:r>
-              <a:t>파일 생성: mkdir -p ~/agv_ws/src/agv_bringup/config</a:t>
+              <a:t>파일 생성: mkdir -p ~/ros2_curri/agv_ws/src/agv_bringup/config</a:t>
             </a:r>
             <a:br/>
             <a:r>
-              <a:t>파일 열기: nano ~/agv_ws/src/agv_bringup/config/mission.yaml</a:t>
+              <a:t>파일 열기: nano ~/ros2_curri/agv_ws/src/agv_bringup/config/mission.yaml</a:t>
             </a:r>
           </a:p>
         </p:txBody>
@@ -7423,6 +7605,10 @@
             </a:r>
             <a:br/>
             <a:r>
+              <a:t>    target_timeout_sec: 0.70</a:t>
+            </a:r>
+            <a:br/>
+            <a:r>
               <a:t>safety_controller:</a:t>
             </a:r>
             <a:br/>
@@ -7436,10 +7622,6 @@
             <a:br/>
             <a:r>
               <a:t>    stop_distance: 0.50</a:t>
-            </a:r>
-            <a:br/>
-            <a:r>
-              <a:t>    front_half_angle_deg: 15.0</a:t>
             </a:r>
           </a:p>
         </p:txBody>
@@ -7478,7 +7660,7 @@
               </a:defRPr>
             </a:pPr>
             <a:r>
-              <a:t>파일 전체 1/1 · 이 슬라이드 다음에 같은 파일의 나머지 줄이 이어집니다.</a:t>
+              <a:t>파일 전체 1/2 · 이 슬라이드 다음에 같은 파일의 나머지 줄이 이어집니다.</a:t>
             </a:r>
           </a:p>
         </p:txBody>
@@ -7535,7 +7717,7 @@
               </a:defRPr>
             </a:pPr>
             <a:r>
-              <a:t>build → source → run 순서로 실행한다</a:t>
+              <a:t>파일을 계속 작성하고 저장한다 (2/2)</a:t>
             </a:r>
           </a:p>
         </p:txBody>
@@ -7574,7 +7756,7 @@
               </a:defRPr>
             </a:pPr>
             <a:r>
-              <a:t>새 파일 또는 수정 파일은 build와 source 뒤에만 실행 이름·설정에 반영됩니다.</a:t>
+              <a:t>~/ros2_curri/agv_ws/src/agv_bringup/config/mission.yaml</a:t>
             </a:r>
           </a:p>
         </p:txBody>
@@ -7710,23 +7892,124 @@
               </a:defRPr>
             </a:pPr>
             <a:r>
-              <a:t>현재 단계 실행    |    현재 폴더 ~/agv_ws    |    현재 터미널</a:t>
-            </a:r>
-          </a:p>
-        </p:txBody>
-      </p:sp>
-      <p:sp>
-        <p:nvSpPr>
-          <p:cNvPr id="7" name="Rounded Rectangle 6"/>
+              <a:t>현재 단계 8/9    |    현재 폴더 ~/ros2_curri/agv_ws    |    현재 터미널</a:t>
+            </a:r>
+          </a:p>
+        </p:txBody>
+      </p:sp>
+      <p:sp>
+        <p:nvSpPr>
+          <p:cNvPr id="7" name="TextBox 6"/>
+          <p:cNvSpPr txBox="1"/>
+          <p:nvPr/>
+        </p:nvSpPr>
+        <p:spPr>
+          <a:xfrm>
+            <a:off x="658368" y="1627632"/>
+            <a:ext cx="10972800" cy="256032"/>
+          </a:xfrm>
+          <a:prstGeom prst="rect">
+            <a:avLst/>
+          </a:prstGeom>
+          <a:noFill/>
+        </p:spPr>
+        <p:txBody>
+          <a:bodyPr wrap="square" lIns="73152" rIns="73152" tIns="36576" bIns="36576">
+            <a:spAutoFit/>
+          </a:bodyPr>
+          <a:lstStyle/>
+          <a:p>
+            <a:pPr algn="l">
+              <a:spcAft>
+                <a:spcPts val="0"/>
+              </a:spcAft>
+              <a:defRPr sz="1500" b="1">
+                <a:solidFill>
+                  <a:srgbClr val="122C4E"/>
+                </a:solidFill>
+                <a:latin typeface="Noto Sans CJK KR"/>
+              </a:defRPr>
+            </a:pPr>
+            <a:r>
+              <a:t>이번 단계: 파일의 전체 내용을 중간 생략 없이 작성합니다. 아래 줄 범위를 끝까지 입력하세요.</a:t>
+            </a:r>
+          </a:p>
+        </p:txBody>
+      </p:sp>
+      <p:sp>
+        <p:nvSpPr>
+          <p:cNvPr id="8" name="Rectangle 7"/>
           <p:cNvSpPr/>
           <p:nvPr/>
         </p:nvSpPr>
         <p:spPr>
           <a:xfrm>
-            <a:off x="658368" y="1700784"/>
-            <a:ext cx="10972800" cy="3182112"/>
-          </a:xfrm>
-          <a:prstGeom prst="roundRect">
+            <a:off x="658368" y="1956816"/>
+            <a:ext cx="10972800" cy="603504"/>
+          </a:xfrm>
+          <a:prstGeom prst="rect">
+            <a:avLst/>
+          </a:prstGeom>
+          <a:solidFill>
+            <a:srgbClr val="F4F7FB"/>
+          </a:solidFill>
+          <a:ln>
+            <a:solidFill>
+              <a:srgbClr val="F4F7FB"/>
+            </a:solidFill>
+          </a:ln>
+        </p:spPr>
+        <p:style>
+          <a:lnRef idx="1">
+            <a:schemeClr val="accent1"/>
+          </a:lnRef>
+          <a:fillRef idx="3">
+            <a:schemeClr val="accent1"/>
+          </a:fillRef>
+          <a:effectRef idx="2">
+            <a:schemeClr val="accent1"/>
+          </a:effectRef>
+          <a:fontRef idx="minor">
+            <a:schemeClr val="lt1"/>
+          </a:fontRef>
+        </p:style>
+        <p:txBody>
+          <a:bodyPr rtlCol="0" anchor="ctr" wrap="square" lIns="73152" rIns="73152" tIns="36576" bIns="36576"/>
+          <a:lstStyle/>
+          <a:p>
+            <a:pPr algn="l">
+              <a:spcAft>
+                <a:spcPts val="0"/>
+              </a:spcAft>
+              <a:defRPr sz="1400" b="0">
+                <a:solidFill>
+                  <a:srgbClr val="122C4E"/>
+                </a:solidFill>
+                <a:latin typeface="DejaVu Sans Mono"/>
+              </a:defRPr>
+            </a:pPr>
+            <a:r>
+              <a:t>파일 생성: mkdir -p ~/ros2_curri/agv_ws/src/agv_bringup/config</a:t>
+            </a:r>
+            <a:br/>
+            <a:r>
+              <a:t>파일 열기: nano ~/ros2_curri/agv_ws/src/agv_bringup/config/mission.yaml</a:t>
+            </a:r>
+          </a:p>
+        </p:txBody>
+      </p:sp>
+      <p:sp>
+        <p:nvSpPr>
+          <p:cNvPr id="9" name="Rectangle 8"/>
+          <p:cNvSpPr/>
+          <p:nvPr/>
+        </p:nvSpPr>
+        <p:spPr>
+          <a:xfrm>
+            <a:off x="658368" y="2706624"/>
+            <a:ext cx="10972800" cy="3364992"/>
+          </a:xfrm>
+          <a:prstGeom prst="rect">
             <a:avLst/>
           </a:prstGeom>
           <a:solidFill>
@@ -7753,14 +8036,14 @@
           </a:fontRef>
         </p:style>
         <p:txBody>
-          <a:bodyPr rtlCol="0" anchor="ctr" wrap="square" lIns="73152" rIns="73152" tIns="36576" bIns="36576"/>
+          <a:bodyPr rtlCol="0" anchor="ctr" wrap="square" lIns="164592" rIns="164592" tIns="109728" bIns="36576"/>
           <a:lstStyle/>
           <a:p>
             <a:pPr algn="l">
               <a:spcAft>
                 <a:spcPts val="0"/>
               </a:spcAft>
-              <a:defRPr sz="1600" b="0">
+              <a:defRPr sz="1400" b="0">
                 <a:solidFill>
                   <a:srgbClr val="FFFFFF"/>
                 </a:solidFill>
@@ -7768,25 +8051,21 @@
               </a:defRPr>
             </a:pPr>
             <a:r>
-              <a:t>source ~/agv_ws/install/setup.bash</a:t>
-            </a:r>
-            <a:br/>
-            <a:r>
-              <a:t>ros2 run agv_control pid_controller --ros-args -p kp_angular:=0.004</a:t>
-            </a:r>
-          </a:p>
-        </p:txBody>
-      </p:sp>
-      <p:sp>
-        <p:nvSpPr>
-          <p:cNvPr id="8" name="TextBox 7"/>
+              <a:t>    front_half_angle_deg: 15.0</a:t>
+            </a:r>
+          </a:p>
+        </p:txBody>
+      </p:sp>
+      <p:sp>
+        <p:nvSpPr>
+          <p:cNvPr id="10" name="TextBox 9"/>
           <p:cNvSpPr txBox="1"/>
           <p:nvPr/>
         </p:nvSpPr>
         <p:spPr>
           <a:xfrm>
-            <a:off x="786384" y="5239512"/>
-            <a:ext cx="1261872" cy="237744"/>
+            <a:off x="749808" y="6181344"/>
+            <a:ext cx="10789920" cy="201168"/>
           </a:xfrm>
           <a:prstGeom prst="rect">
             <a:avLst/>
@@ -7803,54 +8082,15 @@
               <a:spcAft>
                 <a:spcPts val="0"/>
               </a:spcAft>
-              <a:defRPr sz="1800" b="1">
-                <a:solidFill>
-                  <a:srgbClr val="2A8B5A"/>
-                </a:solidFill>
-                <a:latin typeface="Noto Sans CJK KR"/>
-              </a:defRPr>
-            </a:pPr>
-            <a:r>
-              <a:t>확인 기준</a:t>
-            </a:r>
-          </a:p>
-        </p:txBody>
-      </p:sp>
-      <p:sp>
-        <p:nvSpPr>
-          <p:cNvPr id="9" name="TextBox 8"/>
-          <p:cNvSpPr txBox="1"/>
-          <p:nvPr/>
-        </p:nvSpPr>
-        <p:spPr>
-          <a:xfrm>
-            <a:off x="786384" y="5532120"/>
-            <a:ext cx="10469880" cy="420624"/>
-          </a:xfrm>
-          <a:prstGeom prst="rect">
-            <a:avLst/>
-          </a:prstGeom>
-          <a:noFill/>
-        </p:spPr>
-        <p:txBody>
-          <a:bodyPr wrap="square" lIns="73152" rIns="73152" tIns="36576" bIns="36576">
-            <a:spAutoFit/>
-          </a:bodyPr>
-          <a:lstStyle/>
-          <a:p>
-            <a:pPr algn="l">
-              <a:spcAft>
-                <a:spcPts val="0"/>
-              </a:spcAft>
-              <a:defRPr sz="1800" b="0">
-                <a:solidFill>
-                  <a:srgbClr val="122C4E"/>
-                </a:solidFill>
-                <a:latin typeface="Noto Sans CJK KR"/>
-              </a:defRPr>
-            </a:pPr>
-            <a:r>
-              <a:t>kp_angular·max speed parameter와 saturation이 /cmd_vel_raw 출력을 제한하는 것을 확인한다.</a:t>
+              <a:defRPr sz="1000" b="0">
+                <a:solidFill>
+                  <a:srgbClr val="5C6672"/>
+                </a:solidFill>
+                <a:latin typeface="Noto Sans CJK KR"/>
+              </a:defRPr>
+            </a:pPr>
+            <a:r>
+              <a:t>파일 전체 2/2 · 이 슬라이드 다음에 같은 파일의 나머지 줄이 이어집니다.</a:t>
             </a:r>
           </a:p>
         </p:txBody>
@@ -7907,7 +8147,7 @@
               </a:defRPr>
             </a:pPr>
             <a:r>
-              <a:t>정상 결과: 실제 환경에서 확인한 출력</a:t>
+              <a:t>build → source → run 순서로 실행한다</a:t>
             </a:r>
           </a:p>
         </p:txBody>
@@ -7946,7 +8186,7 @@
               </a:defRPr>
             </a:pPr>
             <a:r>
-              <a:t>실제 ROS 2 환경의 파일·패키지·구성 검증 로그</a:t>
+              <a:t>새 파일 또는 수정 파일은 build와 source 뒤에만 실행 이름·설정에 반영됩니다.</a:t>
             </a:r>
           </a:p>
         </p:txBody>
@@ -8029,40 +8269,136 @@
           </a:p>
         </p:txBody>
       </p:sp>
-      <p:pic>
-        <p:nvPicPr>
-          <p:cNvPr id="6" name="Picture 5" descr="validation_terminal.png"/>
-          <p:cNvPicPr>
-            <a:picLocks noChangeAspect="1"/>
-          </p:cNvPicPr>
-          <p:nvPr/>
-        </p:nvPicPr>
-        <p:blipFill>
-          <a:blip r:embed="rId2"/>
-          <a:stretch>
-            <a:fillRect/>
-          </a:stretch>
-        </p:blipFill>
-        <p:spPr>
-          <a:xfrm>
-            <a:off x="790956" y="1453970"/>
-            <a:ext cx="10607040" cy="4599282"/>
-          </a:xfrm>
-          <a:prstGeom prst="rect">
-            <a:avLst/>
-          </a:prstGeom>
-        </p:spPr>
-      </p:pic>
-      <p:sp>
-        <p:nvSpPr>
-          <p:cNvPr id="7" name="TextBox 6"/>
+      <p:sp>
+        <p:nvSpPr>
+          <p:cNvPr id="6" name="Rectangle 5"/>
+          <p:cNvSpPr/>
+          <p:nvPr/>
+        </p:nvSpPr>
+        <p:spPr>
+          <a:xfrm>
+            <a:off x="566928" y="1188720"/>
+            <a:ext cx="11064240" cy="347472"/>
+          </a:xfrm>
+          <a:prstGeom prst="rect">
+            <a:avLst/>
+          </a:prstGeom>
+          <a:solidFill>
+            <a:srgbClr val="F4F7FB"/>
+          </a:solidFill>
+          <a:ln>
+            <a:solidFill>
+              <a:srgbClr val="F4F7FB"/>
+            </a:solidFill>
+          </a:ln>
+        </p:spPr>
+        <p:style>
+          <a:lnRef idx="1">
+            <a:schemeClr val="accent1"/>
+          </a:lnRef>
+          <a:fillRef idx="3">
+            <a:schemeClr val="accent1"/>
+          </a:fillRef>
+          <a:effectRef idx="2">
+            <a:schemeClr val="accent1"/>
+          </a:effectRef>
+          <a:fontRef idx="minor">
+            <a:schemeClr val="lt1"/>
+          </a:fontRef>
+        </p:style>
+        <p:txBody>
+          <a:bodyPr rtlCol="0" anchor="ctr" wrap="square" lIns="73152" rIns="73152" tIns="36576" bIns="36576"/>
+          <a:lstStyle/>
+          <a:p>
+            <a:pPr algn="l">
+              <a:spcAft>
+                <a:spcPts val="0"/>
+              </a:spcAft>
+              <a:defRPr sz="1300" b="1">
+                <a:solidFill>
+                  <a:srgbClr val="122C4E"/>
+                </a:solidFill>
+                <a:latin typeface="Noto Sans CJK KR"/>
+              </a:defRPr>
+            </a:pPr>
+            <a:r>
+              <a:t>현재 단계 실행    |    현재 폴더 ~/ros2_curri/agv_ws    |    현재 터미널</a:t>
+            </a:r>
+          </a:p>
+        </p:txBody>
+      </p:sp>
+      <p:sp>
+        <p:nvSpPr>
+          <p:cNvPr id="7" name="Rounded Rectangle 6"/>
+          <p:cNvSpPr/>
+          <p:nvPr/>
+        </p:nvSpPr>
+        <p:spPr>
+          <a:xfrm>
+            <a:off x="658368" y="1700784"/>
+            <a:ext cx="10972800" cy="3182112"/>
+          </a:xfrm>
+          <a:prstGeom prst="roundRect">
+            <a:avLst/>
+          </a:prstGeom>
+          <a:solidFill>
+            <a:srgbClr val="1D232D"/>
+          </a:solidFill>
+          <a:ln>
+            <a:solidFill>
+              <a:srgbClr val="1D232D"/>
+            </a:solidFill>
+          </a:ln>
+        </p:spPr>
+        <p:style>
+          <a:lnRef idx="1">
+            <a:schemeClr val="accent1"/>
+          </a:lnRef>
+          <a:fillRef idx="3">
+            <a:schemeClr val="accent1"/>
+          </a:fillRef>
+          <a:effectRef idx="2">
+            <a:schemeClr val="accent1"/>
+          </a:effectRef>
+          <a:fontRef idx="minor">
+            <a:schemeClr val="lt1"/>
+          </a:fontRef>
+        </p:style>
+        <p:txBody>
+          <a:bodyPr rtlCol="0" anchor="ctr" wrap="square" lIns="73152" rIns="73152" tIns="36576" bIns="36576"/>
+          <a:lstStyle/>
+          <a:p>
+            <a:pPr algn="l">
+              <a:spcAft>
+                <a:spcPts val="0"/>
+              </a:spcAft>
+              <a:defRPr sz="1600" b="0">
+                <a:solidFill>
+                  <a:srgbClr val="FFFFFF"/>
+                </a:solidFill>
+                <a:latin typeface="DejaVu Sans Mono"/>
+              </a:defRPr>
+            </a:pPr>
+            <a:r>
+              <a:t>source ~/ros2_curri/agv_ws/install/setup.bash</a:t>
+            </a:r>
+            <a:br/>
+            <a:r>
+              <a:t>ros2 run agv_control pid_controller --ros-args -p kp_angular:=0.004</a:t>
+            </a:r>
+          </a:p>
+        </p:txBody>
+      </p:sp>
+      <p:sp>
+        <p:nvSpPr>
+          <p:cNvPr id="8" name="TextBox 7"/>
           <p:cNvSpPr txBox="1"/>
           <p:nvPr/>
         </p:nvSpPr>
         <p:spPr>
           <a:xfrm>
-            <a:off x="777240" y="6217920"/>
-            <a:ext cx="10607040" cy="182880"/>
+            <a:off x="786384" y="5239512"/>
+            <a:ext cx="1261872" cy="237744"/>
           </a:xfrm>
           <a:prstGeom prst="rect">
             <a:avLst/>
@@ -8075,11 +8411,11 @@
           </a:bodyPr>
           <a:lstStyle/>
           <a:p>
-            <a:pPr algn="ctr">
-              <a:spcAft>
-                <a:spcPts val="0"/>
-              </a:spcAft>
-              <a:defRPr sz="1100" b="1">
+            <a:pPr algn="l">
+              <a:spcAft>
+                <a:spcPts val="0"/>
+              </a:spcAft>
+              <a:defRPr sz="1800" b="1">
                 <a:solidFill>
                   <a:srgbClr val="2A8B5A"/>
                 </a:solidFill>
@@ -8087,7 +8423,46 @@
               </a:defRPr>
             </a:pPr>
             <a:r>
-              <a:t>① 명령/설정  ② 정상 출력 또는 화면  ③ 다음 검증 명령으로 재확인</a:t>
+              <a:t>확인 기준</a:t>
+            </a:r>
+          </a:p>
+        </p:txBody>
+      </p:sp>
+      <p:sp>
+        <p:nvSpPr>
+          <p:cNvPr id="9" name="TextBox 8"/>
+          <p:cNvSpPr txBox="1"/>
+          <p:nvPr/>
+        </p:nvSpPr>
+        <p:spPr>
+          <a:xfrm>
+            <a:off x="786384" y="5532120"/>
+            <a:ext cx="10469880" cy="420624"/>
+          </a:xfrm>
+          <a:prstGeom prst="rect">
+            <a:avLst/>
+          </a:prstGeom>
+          <a:noFill/>
+        </p:spPr>
+        <p:txBody>
+          <a:bodyPr wrap="square" lIns="73152" rIns="73152" tIns="36576" bIns="36576">
+            <a:spAutoFit/>
+          </a:bodyPr>
+          <a:lstStyle/>
+          <a:p>
+            <a:pPr algn="l">
+              <a:spcAft>
+                <a:spcPts val="0"/>
+              </a:spcAft>
+              <a:defRPr sz="1800" b="0">
+                <a:solidFill>
+                  <a:srgbClr val="122C4E"/>
+                </a:solidFill>
+                <a:latin typeface="Noto Sans CJK KR"/>
+              </a:defRPr>
+            </a:pPr>
+            <a:r>
+              <a:t>kp_angular·max speed parameter와 saturation이 /cmd_vel_raw 출력을 제한하는 것을 확인한다.</a:t>
             </a:r>
           </a:p>
         </p:txBody>
@@ -8144,7 +8519,7 @@
               </a:defRPr>
             </a:pPr>
             <a:r>
-              <a:t>객관적 검증 명령으로 완료를 확인한다</a:t>
+              <a:t>정상 결과: 실제 환경에서 확인한 출력</a:t>
             </a:r>
           </a:p>
         </p:txBody>
@@ -8183,7 +8558,7 @@
               </a:defRPr>
             </a:pPr>
             <a:r>
-              <a:t>화면만 보지 말고 topic·frame·파일·parameter를 다시 확인합니다.</a:t>
+              <a:t>실제 ROS 2 환경의 파일·패키지·구성 검증 로그</a:t>
             </a:r>
           </a:p>
         </p:txBody>
@@ -8266,210 +8641,40 @@
           </a:p>
         </p:txBody>
       </p:sp>
-      <p:sp>
-        <p:nvSpPr>
-          <p:cNvPr id="6" name="Rectangle 5"/>
-          <p:cNvSpPr/>
-          <p:nvPr/>
-        </p:nvSpPr>
-        <p:spPr>
-          <a:xfrm>
-            <a:off x="566928" y="1188720"/>
-            <a:ext cx="11064240" cy="347472"/>
-          </a:xfrm>
-          <a:prstGeom prst="rect">
-            <a:avLst/>
-          </a:prstGeom>
-          <a:solidFill>
-            <a:srgbClr val="F4F7FB"/>
-          </a:solidFill>
-          <a:ln>
-            <a:solidFill>
-              <a:srgbClr val="F4F7FB"/>
-            </a:solidFill>
-          </a:ln>
-        </p:spPr>
-        <p:style>
-          <a:lnRef idx="1">
-            <a:schemeClr val="accent1"/>
-          </a:lnRef>
-          <a:fillRef idx="3">
-            <a:schemeClr val="accent1"/>
-          </a:fillRef>
-          <a:effectRef idx="2">
-            <a:schemeClr val="accent1"/>
-          </a:effectRef>
-          <a:fontRef idx="minor">
-            <a:schemeClr val="lt1"/>
-          </a:fontRef>
-        </p:style>
-        <p:txBody>
-          <a:bodyPr rtlCol="0" anchor="ctr" wrap="square" lIns="73152" rIns="73152" tIns="36576" bIns="36576"/>
-          <a:lstStyle/>
-          <a:p>
-            <a:pPr algn="l">
-              <a:spcAft>
-                <a:spcPts val="0"/>
-              </a:spcAft>
-              <a:defRPr sz="1300" b="1">
-                <a:solidFill>
-                  <a:srgbClr val="122C4E"/>
-                </a:solidFill>
-                <a:latin typeface="Noto Sans CJK KR"/>
-              </a:defRPr>
-            </a:pPr>
-            <a:r>
-              <a:t>현재 단계 검증    |    현재 폴더 ~/agv_ws    |    현재 터미널</a:t>
-            </a:r>
-          </a:p>
-        </p:txBody>
-      </p:sp>
-      <p:sp>
-        <p:nvSpPr>
-          <p:cNvPr id="7" name="Rounded Rectangle 6"/>
-          <p:cNvSpPr/>
-          <p:nvPr/>
-        </p:nvSpPr>
-        <p:spPr>
-          <a:xfrm>
-            <a:off x="658368" y="1755648"/>
-            <a:ext cx="10972800" cy="2148840"/>
-          </a:xfrm>
-          <a:prstGeom prst="roundRect">
-            <a:avLst/>
-          </a:prstGeom>
-          <a:solidFill>
-            <a:srgbClr val="1D232D"/>
-          </a:solidFill>
-          <a:ln>
-            <a:solidFill>
-              <a:srgbClr val="1D232D"/>
-            </a:solidFill>
-          </a:ln>
-        </p:spPr>
-        <p:style>
-          <a:lnRef idx="1">
-            <a:schemeClr val="accent1"/>
-          </a:lnRef>
-          <a:fillRef idx="3">
-            <a:schemeClr val="accent1"/>
-          </a:fillRef>
-          <a:effectRef idx="2">
-            <a:schemeClr val="accent1"/>
-          </a:effectRef>
-          <a:fontRef idx="minor">
-            <a:schemeClr val="lt1"/>
-          </a:fontRef>
-        </p:style>
-        <p:txBody>
-          <a:bodyPr rtlCol="0" anchor="ctr" wrap="square" lIns="73152" rIns="73152" tIns="36576" bIns="36576"/>
-          <a:lstStyle/>
-          <a:p>
-            <a:pPr algn="l">
-              <a:spcAft>
-                <a:spcPts val="0"/>
-              </a:spcAft>
-              <a:defRPr sz="1600" b="0">
-                <a:solidFill>
-                  <a:srgbClr val="FFFFFF"/>
-                </a:solidFill>
-                <a:latin typeface="DejaVu Sans Mono"/>
-              </a:defRPr>
-            </a:pPr>
-            <a:r>
-              <a:t>ros2 topic info /target_error</a:t>
-            </a:r>
-            <a:br/>
-            <a:r>
-              <a:t>ros2 topic info /cmd_vel_raw</a:t>
-            </a:r>
-            <a:br/>
-            <a:r>
-              <a:t>ros2 param get /pid_controller kp_angular</a:t>
-            </a:r>
-          </a:p>
-        </p:txBody>
-      </p:sp>
-      <p:sp>
-        <p:nvSpPr>
-          <p:cNvPr id="8" name="Rounded Rectangle 7"/>
-          <p:cNvSpPr/>
-          <p:nvPr/>
-        </p:nvSpPr>
-        <p:spPr>
-          <a:xfrm>
-            <a:off x="658368" y="4206240"/>
-            <a:ext cx="10972800" cy="1554480"/>
-          </a:xfrm>
-          <a:prstGeom prst="roundRect">
-            <a:avLst/>
-          </a:prstGeom>
-          <a:solidFill>
-            <a:srgbClr val="F4F7FB"/>
-          </a:solidFill>
-          <a:ln>
-            <a:solidFill>
-              <a:srgbClr val="D1DFD5"/>
-            </a:solidFill>
-          </a:ln>
-        </p:spPr>
-        <p:style>
-          <a:lnRef idx="1">
-            <a:schemeClr val="accent1"/>
-          </a:lnRef>
-          <a:fillRef idx="3">
-            <a:schemeClr val="accent1"/>
-          </a:fillRef>
-          <a:effectRef idx="2">
-            <a:schemeClr val="accent1"/>
-          </a:effectRef>
-          <a:fontRef idx="minor">
-            <a:schemeClr val="lt1"/>
-          </a:fontRef>
-        </p:style>
-        <p:txBody>
-          <a:bodyPr rtlCol="0" anchor="ctr" wrap="square" lIns="73152" rIns="73152" tIns="36576" bIns="36576"/>
-          <a:lstStyle/>
-          <a:p>
-            <a:pPr algn="l">
-              <a:spcAft>
-                <a:spcPts val="0"/>
-              </a:spcAft>
-              <a:defRPr sz="1800" b="1">
-                <a:solidFill>
-                  <a:srgbClr val="2A8B5A"/>
-                </a:solidFill>
-                <a:latin typeface="Noto Sans CJK KR"/>
-              </a:defRPr>
-            </a:pPr>
-            <a:r>
-              <a:t>완료 체크</a:t>
-            </a:r>
-            <a:br/>
-            <a:r>
-              <a:t>□ 명령이 오류 없이 실행된다.</a:t>
-            </a:r>
-            <a:br/>
-            <a:r>
-              <a:t>□ 기대한 파일·topic·frame·parameter 이름이 보인다.</a:t>
-            </a:r>
-            <a:br/>
-            <a:r>
-              <a:t>□ 값의 단위와 방향을 한 문장으로 설명할 수 있다.</a:t>
-            </a:r>
-          </a:p>
-        </p:txBody>
-      </p:sp>
-      <p:sp>
-        <p:nvSpPr>
-          <p:cNvPr id="9" name="TextBox 8"/>
+      <p:pic>
+        <p:nvPicPr>
+          <p:cNvPr id="6" name="Picture 5" descr="validation_terminal.png"/>
+          <p:cNvPicPr>
+            <a:picLocks noChangeAspect="1"/>
+          </p:cNvPicPr>
+          <p:nvPr/>
+        </p:nvPicPr>
+        <p:blipFill>
+          <a:blip r:embed="rId2"/>
+          <a:stretch>
+            <a:fillRect/>
+          </a:stretch>
+        </p:blipFill>
+        <p:spPr>
+          <a:xfrm>
+            <a:off x="790956" y="1453970"/>
+            <a:ext cx="10607040" cy="4599282"/>
+          </a:xfrm>
+          <a:prstGeom prst="rect">
+            <a:avLst/>
+          </a:prstGeom>
+        </p:spPr>
+      </p:pic>
+      <p:sp>
+        <p:nvSpPr>
+          <p:cNvPr id="7" name="TextBox 6"/>
           <p:cNvSpPr txBox="1"/>
           <p:nvPr/>
         </p:nvSpPr>
         <p:spPr>
           <a:xfrm>
-            <a:off x="731520" y="5989320"/>
-            <a:ext cx="10789920" cy="237744"/>
+            <a:off x="777240" y="6217920"/>
+            <a:ext cx="10607040" cy="182880"/>
           </a:xfrm>
           <a:prstGeom prst="rect">
             <a:avLst/>
@@ -8482,19 +8687,19 @@
           </a:bodyPr>
           <a:lstStyle/>
           <a:p>
-            <a:pPr algn="l">
-              <a:spcAft>
-                <a:spcPts val="0"/>
-              </a:spcAft>
-              <a:defRPr sz="1500" b="1">
-                <a:solidFill>
-                  <a:srgbClr val="122C4E"/>
-                </a:solidFill>
-                <a:latin typeface="Noto Sans CJK KR"/>
-              </a:defRPr>
-            </a:pPr>
-            <a:r>
-              <a:t>완료 조건: kp_angular·max speed parameter와 saturation이 /cmd_vel_raw 출력을 제한하는 것을 확인한다.</a:t>
+            <a:pPr algn="ctr">
+              <a:spcAft>
+                <a:spcPts val="0"/>
+              </a:spcAft>
+              <a:defRPr sz="1100" b="1">
+                <a:solidFill>
+                  <a:srgbClr val="2A8B5A"/>
+                </a:solidFill>
+                <a:latin typeface="Noto Sans CJK KR"/>
+              </a:defRPr>
+            </a:pPr>
+            <a:r>
+              <a:t>① 명령/설정  ② 정상 출력 또는 화면  ③ 다음 검증 명령으로 재확인</a:t>
             </a:r>
           </a:p>
         </p:txBody>
@@ -8551,7 +8756,7 @@
               </a:defRPr>
             </a:pPr>
             <a:r>
-              <a:t>막히면: 증상 → 우선 확인 → 재검증</a:t>
+              <a:t>정상 결과: 실제 환경에서 확인한 출력</a:t>
             </a:r>
           </a:p>
         </p:txBody>
@@ -8590,7 +8795,7 @@
               </a:defRPr>
             </a:pPr>
             <a:r>
-              <a:t>오류 메시지를 숨기지 않고 같은 순서로 점검합니다.</a:t>
+              <a:t>실제 RViz2: /path와 robot pose를 함께 보며 PID 전후 궤적을 비교하는 구성</a:t>
             </a:r>
           </a:p>
         </p:txBody>
@@ -8673,119 +8878,40 @@
           </a:p>
         </p:txBody>
       </p:sp>
-      <p:sp>
-        <p:nvSpPr>
-          <p:cNvPr id="6" name="Rectangle 5"/>
-          <p:cNvSpPr/>
-          <p:nvPr/>
-        </p:nvSpPr>
-        <p:spPr>
-          <a:xfrm>
-            <a:off x="566928" y="1188720"/>
-            <a:ext cx="11064240" cy="347472"/>
-          </a:xfrm>
-          <a:prstGeom prst="rect">
-            <a:avLst/>
-          </a:prstGeom>
-          <a:solidFill>
-            <a:srgbClr val="F4F7FB"/>
-          </a:solidFill>
-          <a:ln>
-            <a:solidFill>
-              <a:srgbClr val="F4F7FB"/>
-            </a:solidFill>
-          </a:ln>
-        </p:spPr>
-        <p:style>
-          <a:lnRef idx="1">
-            <a:schemeClr val="accent1"/>
-          </a:lnRef>
-          <a:fillRef idx="3">
-            <a:schemeClr val="accent1"/>
-          </a:fillRef>
-          <a:effectRef idx="2">
-            <a:schemeClr val="accent1"/>
-          </a:effectRef>
-          <a:fontRef idx="minor">
-            <a:schemeClr val="lt1"/>
-          </a:fontRef>
-        </p:style>
-        <p:txBody>
-          <a:bodyPr rtlCol="0" anchor="ctr" wrap="square" lIns="73152" rIns="73152" tIns="36576" bIns="36576"/>
-          <a:lstStyle/>
-          <a:p>
-            <a:pPr algn="l">
-              <a:spcAft>
-                <a:spcPts val="0"/>
-              </a:spcAft>
-              <a:defRPr sz="1300" b="1">
-                <a:solidFill>
-                  <a:srgbClr val="122C4E"/>
-                </a:solidFill>
-                <a:latin typeface="Noto Sans CJK KR"/>
-              </a:defRPr>
-            </a:pPr>
-            <a:r>
-              <a:t>현재 단계 오류 대응    |    현재 폴더 ~/agv_ws    |    현재 터미널</a:t>
-            </a:r>
-          </a:p>
-        </p:txBody>
-      </p:sp>
-      <p:sp>
-        <p:nvSpPr>
-          <p:cNvPr id="7" name="Rounded Rectangle 6"/>
-          <p:cNvSpPr/>
-          <p:nvPr/>
-        </p:nvSpPr>
-        <p:spPr>
-          <a:xfrm>
-            <a:off x="694944" y="1755648"/>
-            <a:ext cx="10972800" cy="1115568"/>
-          </a:xfrm>
-          <a:prstGeom prst="roundRect">
-            <a:avLst/>
-          </a:prstGeom>
-          <a:solidFill>
-            <a:srgbClr val="FFF7F4"/>
-          </a:solidFill>
-          <a:ln>
-            <a:solidFill>
-              <a:srgbClr val="EDBEB4"/>
-            </a:solidFill>
-          </a:ln>
-        </p:spPr>
-        <p:style>
-          <a:lnRef idx="1">
-            <a:schemeClr val="accent1"/>
-          </a:lnRef>
-          <a:fillRef idx="3">
-            <a:schemeClr val="accent1"/>
-          </a:fillRef>
-          <a:effectRef idx="2">
-            <a:schemeClr val="accent1"/>
-          </a:effectRef>
-          <a:fontRef idx="minor">
-            <a:schemeClr val="lt1"/>
-          </a:fontRef>
-        </p:style>
-        <p:txBody>
-          <a:bodyPr rtlCol="0" anchor="ctr"/>
-          <a:lstStyle/>
-          <a:p>
-            <a:pPr algn="ctr"/>
-          </a:p>
-        </p:txBody>
-      </p:sp>
-      <p:sp>
-        <p:nvSpPr>
-          <p:cNvPr id="8" name="TextBox 7"/>
+      <p:pic>
+        <p:nvPicPr>
+          <p:cNvPr id="6" name="Picture 5" descr="02_rviz_marker_path_actual.png"/>
+          <p:cNvPicPr>
+            <a:picLocks noChangeAspect="1"/>
+          </p:cNvPicPr>
+          <p:nvPr/>
+        </p:nvPicPr>
+        <p:blipFill>
+          <a:blip r:embed="rId2"/>
+          <a:stretch>
+            <a:fillRect/>
+          </a:stretch>
+        </p:blipFill>
+        <p:spPr>
+          <a:xfrm>
+            <a:off x="2971409" y="1353312"/>
+            <a:ext cx="6246133" cy="4800600"/>
+          </a:xfrm>
+          <a:prstGeom prst="rect">
+            <a:avLst/>
+          </a:prstGeom>
+        </p:spPr>
+      </p:pic>
+      <p:sp>
+        <p:nvSpPr>
+          <p:cNvPr id="7" name="TextBox 6"/>
           <p:cNvSpPr txBox="1"/>
           <p:nvPr/>
         </p:nvSpPr>
         <p:spPr>
           <a:xfrm>
-            <a:off x="896112" y="1901952"/>
-            <a:ext cx="2926080" cy="274320"/>
+            <a:off x="777240" y="6217920"/>
+            <a:ext cx="10607040" cy="182880"/>
           </a:xfrm>
           <a:prstGeom prst="rect">
             <a:avLst/>
@@ -8798,228 +8924,19 @@
           </a:bodyPr>
           <a:lstStyle/>
           <a:p>
-            <a:pPr algn="l">
-              <a:spcAft>
-                <a:spcPts val="0"/>
-              </a:spcAft>
-              <a:defRPr sz="1800" b="1">
-                <a:solidFill>
-                  <a:srgbClr val="BE3B3B"/>
-                </a:solidFill>
-                <a:latin typeface="Noto Sans CJK KR"/>
-              </a:defRPr>
-            </a:pPr>
-            <a:r>
-              <a:t>증상 1: 로봇이 반대 방향 회전</a:t>
-            </a:r>
-          </a:p>
-        </p:txBody>
-      </p:sp>
-      <p:sp>
-        <p:nvSpPr>
-          <p:cNvPr id="9" name="TextBox 8"/>
-          <p:cNvSpPr txBox="1"/>
-          <p:nvPr/>
-        </p:nvSpPr>
-        <p:spPr>
-          <a:xfrm>
-            <a:off x="3794760" y="1883664"/>
-            <a:ext cx="7543800" cy="621792"/>
-          </a:xfrm>
-          <a:prstGeom prst="rect">
-            <a:avLst/>
-          </a:prstGeom>
-          <a:noFill/>
-        </p:spPr>
-        <p:txBody>
-          <a:bodyPr wrap="square" lIns="73152" rIns="73152" tIns="36576" bIns="36576">
-            <a:spAutoFit/>
-          </a:bodyPr>
-          <a:lstStyle/>
-          <a:p>
-            <a:pPr algn="l">
-              <a:spcAft>
-                <a:spcPts val="0"/>
-              </a:spcAft>
-              <a:defRPr sz="1600" b="0">
-                <a:solidFill>
-                  <a:srgbClr val="122C4E"/>
-                </a:solidFill>
-                <a:latin typeface="Noto Sans CJK KR"/>
-              </a:defRPr>
-            </a:pPr>
-            <a:r>
-              <a:t>우선 확인: error 정의와 angular.z 부호를 확인한다.</a:t>
-            </a:r>
-            <a:br/>
-            <a:r>
-              <a:t>수정 후: ros2 topic info /target_error</a:t>
-            </a:r>
-          </a:p>
-        </p:txBody>
-      </p:sp>
-      <p:sp>
-        <p:nvSpPr>
-          <p:cNvPr id="10" name="Rounded Rectangle 9"/>
-          <p:cNvSpPr/>
-          <p:nvPr/>
-        </p:nvSpPr>
-        <p:spPr>
-          <a:xfrm>
-            <a:off x="694944" y="3172968"/>
-            <a:ext cx="10972800" cy="1115568"/>
-          </a:xfrm>
-          <a:prstGeom prst="roundRect">
-            <a:avLst/>
-          </a:prstGeom>
-          <a:solidFill>
-            <a:srgbClr val="FFF7F4"/>
-          </a:solidFill>
-          <a:ln>
-            <a:solidFill>
-              <a:srgbClr val="EDBEB4"/>
-            </a:solidFill>
-          </a:ln>
-        </p:spPr>
-        <p:style>
-          <a:lnRef idx="1">
-            <a:schemeClr val="accent1"/>
-          </a:lnRef>
-          <a:fillRef idx="3">
-            <a:schemeClr val="accent1"/>
-          </a:fillRef>
-          <a:effectRef idx="2">
-            <a:schemeClr val="accent1"/>
-          </a:effectRef>
-          <a:fontRef idx="minor">
-            <a:schemeClr val="lt1"/>
-          </a:fontRef>
-        </p:style>
-        <p:txBody>
-          <a:bodyPr rtlCol="0" anchor="ctr"/>
-          <a:lstStyle/>
-          <a:p>
-            <a:pPr algn="ctr"/>
-          </a:p>
-        </p:txBody>
-      </p:sp>
-      <p:sp>
-        <p:nvSpPr>
-          <p:cNvPr id="11" name="TextBox 10"/>
-          <p:cNvSpPr txBox="1"/>
-          <p:nvPr/>
-        </p:nvSpPr>
-        <p:spPr>
-          <a:xfrm>
-            <a:off x="896112" y="3319272"/>
-            <a:ext cx="2926080" cy="274320"/>
-          </a:xfrm>
-          <a:prstGeom prst="rect">
-            <a:avLst/>
-          </a:prstGeom>
-          <a:noFill/>
-        </p:spPr>
-        <p:txBody>
-          <a:bodyPr wrap="square" lIns="73152" rIns="73152" tIns="36576" bIns="36576">
-            <a:spAutoFit/>
-          </a:bodyPr>
-          <a:lstStyle/>
-          <a:p>
-            <a:pPr algn="l">
-              <a:spcAft>
-                <a:spcPts val="0"/>
-              </a:spcAft>
-              <a:defRPr sz="1800" b="1">
-                <a:solidFill>
-                  <a:srgbClr val="BE3B3B"/>
-                </a:solidFill>
-                <a:latin typeface="Noto Sans CJK KR"/>
-              </a:defRPr>
-            </a:pPr>
-            <a:r>
-              <a:t>증상 2: 진동이 심함</a:t>
-            </a:r>
-          </a:p>
-        </p:txBody>
-      </p:sp>
-      <p:sp>
-        <p:nvSpPr>
-          <p:cNvPr id="12" name="TextBox 11"/>
-          <p:cNvSpPr txBox="1"/>
-          <p:nvPr/>
-        </p:nvSpPr>
-        <p:spPr>
-          <a:xfrm>
-            <a:off x="3794760" y="3300984"/>
-            <a:ext cx="7543800" cy="621792"/>
-          </a:xfrm>
-          <a:prstGeom prst="rect">
-            <a:avLst/>
-          </a:prstGeom>
-          <a:noFill/>
-        </p:spPr>
-        <p:txBody>
-          <a:bodyPr wrap="square" lIns="73152" rIns="73152" tIns="36576" bIns="36576">
-            <a:spAutoFit/>
-          </a:bodyPr>
-          <a:lstStyle/>
-          <a:p>
-            <a:pPr algn="l">
-              <a:spcAft>
-                <a:spcPts val="0"/>
-              </a:spcAft>
-              <a:defRPr sz="1600" b="0">
-                <a:solidFill>
-                  <a:srgbClr val="122C4E"/>
-                </a:solidFill>
-                <a:latin typeface="Noto Sans CJK KR"/>
-              </a:defRPr>
-            </a:pPr>
-            <a:r>
-              <a:t>우선 확인: kp/kd·update rate·latency·saturation을 확인한다.</a:t>
-            </a:r>
-            <a:br/>
-            <a:r>
-              <a:t>수정 후: ros2 topic info /target_error</a:t>
-            </a:r>
-          </a:p>
-        </p:txBody>
-      </p:sp>
-      <p:sp>
-        <p:nvSpPr>
-          <p:cNvPr id="13" name="TextBox 12"/>
-          <p:cNvSpPr txBox="1"/>
-          <p:nvPr/>
-        </p:nvSpPr>
-        <p:spPr>
-          <a:xfrm>
-            <a:off x="822960" y="5102352"/>
-            <a:ext cx="10607040" cy="402336"/>
-          </a:xfrm>
-          <a:prstGeom prst="rect">
-            <a:avLst/>
-          </a:prstGeom>
-          <a:noFill/>
-        </p:spPr>
-        <p:txBody>
-          <a:bodyPr wrap="square" lIns="73152" rIns="73152" tIns="36576" bIns="36576">
-            <a:spAutoFit/>
-          </a:bodyPr>
-          <a:lstStyle/>
-          <a:p>
             <a:pPr algn="ctr">
               <a:spcAft>
                 <a:spcPts val="0"/>
               </a:spcAft>
-              <a:defRPr sz="1800" b="1">
-                <a:solidFill>
-                  <a:srgbClr val="DB7E22"/>
-                </a:solidFill>
-                <a:latin typeface="Noto Sans CJK KR"/>
-              </a:defRPr>
-            </a:pPr>
-            <a:r>
-              <a:t>공통 순서: ① 현재 폴더 ② source ③ 파일 경로 ④ 이름/타입/단위 ⑤ build·source 후 재실행</a:t>
+              <a:defRPr sz="1100" b="1">
+                <a:solidFill>
+                  <a:srgbClr val="2A8B5A"/>
+                </a:solidFill>
+                <a:latin typeface="Noto Sans CJK KR"/>
+              </a:defRPr>
+            </a:pPr>
+            <a:r>
+              <a:t>① 명령/설정  ② 정상 출력 또는 화면  ③ 다음 검증 명령으로 재확인</a:t>
             </a:r>
           </a:p>
         </p:txBody>
@@ -9076,7 +8993,7 @@
               </a:defRPr>
             </a:pPr>
             <a:r>
-              <a:t>미니 실습: 값 하나를 바꾸고 결과를 비교한다</a:t>
+              <a:t>객관적 검증 명령으로 완료를 확인한다</a:t>
             </a:r>
           </a:p>
         </p:txBody>
@@ -9115,7 +9032,7 @@
               </a:defRPr>
             </a:pPr>
             <a:r>
-              <a:t>정상 결과를 만든 뒤에는 한 번에 하나의 값만 바꿉니다.</a:t>
+              <a:t>화면만 보지 말고 topic·frame·파일·parameter를 다시 확인합니다.</a:t>
             </a:r>
           </a:p>
         </p:txBody>
@@ -9251,7 +9168,7 @@
               </a:defRPr>
             </a:pPr>
             <a:r>
-              <a:t>현재 단계 미니 실습    |    현재 폴더 ~/agv_ws    |    현재 터미널</a:t>
+              <a:t>현재 단계 검증    |    현재 폴더 ~/ros2_curri/agv_ws    |    현재 터미널</a:t>
             </a:r>
           </a:p>
         </p:txBody>
@@ -9264,18 +9181,18 @@
         </p:nvSpPr>
         <p:spPr>
           <a:xfrm>
-            <a:off x="749808" y="1874519"/>
-            <a:ext cx="10652760" cy="1993392"/>
+            <a:off x="658368" y="1755648"/>
+            <a:ext cx="10972800" cy="2148840"/>
           </a:xfrm>
           <a:prstGeom prst="roundRect">
             <a:avLst/>
           </a:prstGeom>
           <a:solidFill>
-            <a:srgbClr val="FFF8EB"/>
+            <a:srgbClr val="1D232D"/>
           </a:solidFill>
           <a:ln>
             <a:solidFill>
-              <a:srgbClr val="ECC680"/>
+              <a:srgbClr val="1D232D"/>
             </a:solidFill>
           </a:ln>
         </p:spPr>
@@ -9297,33 +9214,111 @@
           <a:bodyPr rtlCol="0" anchor="ctr" wrap="square" lIns="73152" rIns="73152" tIns="36576" bIns="36576"/>
           <a:lstStyle/>
           <a:p>
-            <a:pPr algn="ctr">
-              <a:spcAft>
-                <a:spcPts val="0"/>
-              </a:spcAft>
-              <a:defRPr sz="2300" b="1">
-                <a:solidFill>
-                  <a:srgbClr val="122C4E"/>
-                </a:solidFill>
-                <a:latin typeface="Noto Sans CJK KR"/>
-              </a:defRPr>
-            </a:pPr>
-            <a:r>
-              <a:t>kp_angular을 0.002, 0.004, 0.008로 바꿨을 때 반응 속도와 진동 위험을 예측해 기록한다.</a:t>
-            </a:r>
-          </a:p>
-        </p:txBody>
-      </p:sp>
-      <p:sp>
-        <p:nvSpPr>
-          <p:cNvPr id="8" name="TextBox 7"/>
+            <a:pPr algn="l">
+              <a:spcAft>
+                <a:spcPts val="0"/>
+              </a:spcAft>
+              <a:defRPr sz="1600" b="0">
+                <a:solidFill>
+                  <a:srgbClr val="FFFFFF"/>
+                </a:solidFill>
+                <a:latin typeface="DejaVu Sans Mono"/>
+              </a:defRPr>
+            </a:pPr>
+            <a:r>
+              <a:t>ros2 topic info /target_error</a:t>
+            </a:r>
+            <a:br/>
+            <a:r>
+              <a:t>ros2 topic info /cmd_vel_raw</a:t>
+            </a:r>
+            <a:br/>
+            <a:r>
+              <a:t>ros2 param get /pid_controller kp_angular</a:t>
+            </a:r>
+          </a:p>
+        </p:txBody>
+      </p:sp>
+      <p:sp>
+        <p:nvSpPr>
+          <p:cNvPr id="8" name="Rounded Rectangle 7"/>
+          <p:cNvSpPr/>
+          <p:nvPr/>
+        </p:nvSpPr>
+        <p:spPr>
+          <a:xfrm>
+            <a:off x="658368" y="4206240"/>
+            <a:ext cx="10972800" cy="1554480"/>
+          </a:xfrm>
+          <a:prstGeom prst="roundRect">
+            <a:avLst/>
+          </a:prstGeom>
+          <a:solidFill>
+            <a:srgbClr val="F4F7FB"/>
+          </a:solidFill>
+          <a:ln>
+            <a:solidFill>
+              <a:srgbClr val="D1DFD5"/>
+            </a:solidFill>
+          </a:ln>
+        </p:spPr>
+        <p:style>
+          <a:lnRef idx="1">
+            <a:schemeClr val="accent1"/>
+          </a:lnRef>
+          <a:fillRef idx="3">
+            <a:schemeClr val="accent1"/>
+          </a:fillRef>
+          <a:effectRef idx="2">
+            <a:schemeClr val="accent1"/>
+          </a:effectRef>
+          <a:fontRef idx="minor">
+            <a:schemeClr val="lt1"/>
+          </a:fontRef>
+        </p:style>
+        <p:txBody>
+          <a:bodyPr rtlCol="0" anchor="ctr" wrap="square" lIns="73152" rIns="73152" tIns="36576" bIns="36576"/>
+          <a:lstStyle/>
+          <a:p>
+            <a:pPr algn="l">
+              <a:spcAft>
+                <a:spcPts val="0"/>
+              </a:spcAft>
+              <a:defRPr sz="1800" b="1">
+                <a:solidFill>
+                  <a:srgbClr val="2A8B5A"/>
+                </a:solidFill>
+                <a:latin typeface="Noto Sans CJK KR"/>
+              </a:defRPr>
+            </a:pPr>
+            <a:r>
+              <a:t>완료 체크</a:t>
+            </a:r>
+            <a:br/>
+            <a:r>
+              <a:t>□ 명령이 오류 없이 실행된다.</a:t>
+            </a:r>
+            <a:br/>
+            <a:r>
+              <a:t>□ 기대한 파일·topic·frame·parameter 이름이 보인다.</a:t>
+            </a:r>
+            <a:br/>
+            <a:r>
+              <a:t>□ 값의 단위와 방향을 한 문장으로 설명할 수 있다.</a:t>
+            </a:r>
+          </a:p>
+        </p:txBody>
+      </p:sp>
+      <p:sp>
+        <p:nvSpPr>
+          <p:cNvPr id="9" name="TextBox 8"/>
           <p:cNvSpPr txBox="1"/>
           <p:nvPr/>
         </p:nvSpPr>
         <p:spPr>
           <a:xfrm>
-            <a:off x="877824" y="4590288"/>
-            <a:ext cx="10241280" cy="594360"/>
+            <a:off x="731520" y="5989320"/>
+            <a:ext cx="10789920" cy="237744"/>
           </a:xfrm>
           <a:prstGeom prst="rect">
             <a:avLst/>
@@ -9336,19 +9331,19 @@
           </a:bodyPr>
           <a:lstStyle/>
           <a:p>
-            <a:pPr algn="ctr">
-              <a:spcAft>
-                <a:spcPts val="0"/>
-              </a:spcAft>
-              <a:defRPr sz="1900" b="1">
-                <a:solidFill>
-                  <a:srgbClr val="DB7E22"/>
-                </a:solidFill>
-                <a:latin typeface="Noto Sans CJK KR"/>
-              </a:defRPr>
-            </a:pPr>
-            <a:r>
-              <a:t>기록할 것: 바꾼 값(단위) · 기대한 변화 · 실제 출력/화면 · 원래 값으로 되돌린 결과</a:t>
+            <a:pPr algn="l">
+              <a:spcAft>
+                <a:spcPts val="0"/>
+              </a:spcAft>
+              <a:defRPr sz="1500" b="1">
+                <a:solidFill>
+                  <a:srgbClr val="122C4E"/>
+                </a:solidFill>
+                <a:latin typeface="Noto Sans CJK KR"/>
+              </a:defRPr>
+            </a:pPr>
+            <a:r>
+              <a:t>완료 조건: kp_angular·max speed parameter와 saturation이 /cmd_vel_raw 출력을 제한하는 것을 확인한다.</a:t>
             </a:r>
           </a:p>
         </p:txBody>
@@ -9405,7 +9400,7 @@
               </a:defRPr>
             </a:pPr>
             <a:r>
-              <a:t>체크포인트를 저장하고 다음 모듈로 넘긴다</a:t>
+              <a:t>막히면: 증상 → 우선 확인 → 재검증</a:t>
             </a:r>
           </a:p>
         </p:txBody>
@@ -9444,7 +9439,7 @@
               </a:defRPr>
             </a:pPr>
             <a:r>
-              <a:t>현재 Complete는 다음 Starter의 기준선입니다.</a:t>
+              <a:t>오류 메시지를 숨기지 않고 같은 순서로 점검합니다.</a:t>
             </a:r>
           </a:p>
         </p:txBody>
@@ -9580,7 +9575,7 @@
               </a:defRPr>
             </a:pPr>
             <a:r>
-              <a:t>현재 단계 체크포인트    |    현재 폴더 ~/agv_ws    |    현재 터미널</a:t>
+              <a:t>현재 단계 오류 대응    |    현재 폴더 ~/ros2_curri/agv_ws    |    현재 터미널</a:t>
             </a:r>
           </a:p>
         </p:txBody>
@@ -9593,18 +9588,18 @@
         </p:nvSpPr>
         <p:spPr>
           <a:xfrm>
-            <a:off x="685800" y="1737360"/>
-            <a:ext cx="10972800" cy="3611880"/>
+            <a:off x="694944" y="1755648"/>
+            <a:ext cx="10972800" cy="1115568"/>
           </a:xfrm>
           <a:prstGeom prst="roundRect">
             <a:avLst/>
           </a:prstGeom>
           <a:solidFill>
-            <a:srgbClr val="F4F7FB"/>
+            <a:srgbClr val="FFF7F4"/>
           </a:solidFill>
           <a:ln>
             <a:solidFill>
-              <a:srgbClr val="D2DCE8"/>
+              <a:srgbClr val="EDBEB4"/>
             </a:solidFill>
           </a:ln>
         </p:spPr>
@@ -9638,111 +9633,8 @@
         </p:nvSpPr>
         <p:spPr>
           <a:xfrm>
-            <a:off x="896112" y="1993392"/>
-            <a:ext cx="10332720" cy="2971800"/>
-          </a:xfrm>
-          <a:prstGeom prst="rect">
-            <a:avLst/>
-          </a:prstGeom>
-          <a:noFill/>
-        </p:spPr>
-        <p:txBody>
-          <a:bodyPr wrap="square" lIns="109728" rIns="109728">
-            <a:spAutoFit/>
-          </a:bodyPr>
-          <a:lstStyle/>
-          <a:p>
-            <a:pPr>
-              <a:spcAft>
-                <a:spcPts val="800"/>
-              </a:spcAft>
-              <a:defRPr sz="1800">
-                <a:solidFill>
-                  <a:srgbClr val="122C4E"/>
-                </a:solidFill>
-                <a:latin typeface="Noto Sans CJK KR"/>
-              </a:defRPr>
-            </a:pPr>
-            <a:r>
-              <a:t>• □ 완료 화면: kp_angular·max speed parameter와 saturation이 /cmd_vel_raw 출력을 제한하는 것을 확인한다.</a:t>
-            </a:r>
-          </a:p>
-          <a:p>
-            <a:pPr>
-              <a:spcAft>
-                <a:spcPts val="800"/>
-              </a:spcAft>
-              <a:defRPr sz="1800">
-                <a:solidFill>
-                  <a:srgbClr val="122C4E"/>
-                </a:solidFill>
-                <a:latin typeface="Noto Sans CJK KR"/>
-              </a:defRPr>
-            </a:pPr>
-            <a:r>
-              <a:t>• □ Complete 파일: blocks/E_autonomy_logic/M20_pid_driving_control/complete/</a:t>
-            </a:r>
-          </a:p>
-          <a:p>
-            <a:pPr>
-              <a:spcAft>
-                <a:spcPts val="800"/>
-              </a:spcAft>
-              <a:defRPr sz="1800">
-                <a:solidFill>
-                  <a:srgbClr val="122C4E"/>
-                </a:solidFill>
-                <a:latin typeface="Noto Sans CJK KR"/>
-              </a:defRPr>
-            </a:pPr>
-            <a:r>
-              <a:t>• □ 정상 로그·캡처: logs/validation.log, screenshots/validation_terminal.png</a:t>
-            </a:r>
-          </a:p>
-          <a:p>
-            <a:pPr>
-              <a:spcAft>
-                <a:spcPts val="800"/>
-              </a:spcAft>
-              <a:defRPr sz="1800">
-                <a:solidFill>
-                  <a:srgbClr val="122C4E"/>
-                </a:solidFill>
-                <a:latin typeface="Noto Sans CJK KR"/>
-              </a:defRPr>
-            </a:pPr>
-            <a:r>
-              <a:t>• □ 버전 식별: CHECKSUM_or_TAG.txt의 SHA-256 manifest</a:t>
-            </a:r>
-          </a:p>
-          <a:p>
-            <a:pPr>
-              <a:spcAft>
-                <a:spcPts val="800"/>
-              </a:spcAft>
-              <a:defRPr sz="1800">
-                <a:solidFill>
-                  <a:srgbClr val="122C4E"/>
-                </a:solidFill>
-                <a:latin typeface="Noto Sans CJK KR"/>
-              </a:defRPr>
-            </a:pPr>
-            <a:r>
-              <a:t>• □ 다음 시작 조건: M21 YAML/Launch</a:t>
-            </a:r>
-          </a:p>
-        </p:txBody>
-      </p:sp>
-      <p:sp>
-        <p:nvSpPr>
-          <p:cNvPr id="9" name="TextBox 8"/>
-          <p:cNvSpPr txBox="1"/>
-          <p:nvPr/>
-        </p:nvSpPr>
-        <p:spPr>
-          <a:xfrm>
-            <a:off x="868680" y="5596128"/>
-            <a:ext cx="10515600" cy="338328"/>
+            <a:off x="896112" y="1901952"/>
+            <a:ext cx="2926080" cy="274320"/>
           </a:xfrm>
           <a:prstGeom prst="rect">
             <a:avLst/>
@@ -9755,19 +9647,228 @@
           </a:bodyPr>
           <a:lstStyle/>
           <a:p>
+            <a:pPr algn="l">
+              <a:spcAft>
+                <a:spcPts val="0"/>
+              </a:spcAft>
+              <a:defRPr sz="1800" b="1">
+                <a:solidFill>
+                  <a:srgbClr val="BE3B3B"/>
+                </a:solidFill>
+                <a:latin typeface="Noto Sans CJK KR"/>
+              </a:defRPr>
+            </a:pPr>
+            <a:r>
+              <a:t>증상 1: 로봇이 반대 방향 회전</a:t>
+            </a:r>
+          </a:p>
+        </p:txBody>
+      </p:sp>
+      <p:sp>
+        <p:nvSpPr>
+          <p:cNvPr id="9" name="TextBox 8"/>
+          <p:cNvSpPr txBox="1"/>
+          <p:nvPr/>
+        </p:nvSpPr>
+        <p:spPr>
+          <a:xfrm>
+            <a:off x="3794760" y="1883664"/>
+            <a:ext cx="7543800" cy="621792"/>
+          </a:xfrm>
+          <a:prstGeom prst="rect">
+            <a:avLst/>
+          </a:prstGeom>
+          <a:noFill/>
+        </p:spPr>
+        <p:txBody>
+          <a:bodyPr wrap="square" lIns="73152" rIns="73152" tIns="36576" bIns="36576">
+            <a:spAutoFit/>
+          </a:bodyPr>
+          <a:lstStyle/>
+          <a:p>
+            <a:pPr algn="l">
+              <a:spcAft>
+                <a:spcPts val="0"/>
+              </a:spcAft>
+              <a:defRPr sz="1600" b="0">
+                <a:solidFill>
+                  <a:srgbClr val="122C4E"/>
+                </a:solidFill>
+                <a:latin typeface="Noto Sans CJK KR"/>
+              </a:defRPr>
+            </a:pPr>
+            <a:r>
+              <a:t>우선 확인: error 정의와 angular.z 부호를 확인한다.</a:t>
+            </a:r>
+            <a:br/>
+            <a:r>
+              <a:t>수정 후: ros2 topic info /target_error</a:t>
+            </a:r>
+          </a:p>
+        </p:txBody>
+      </p:sp>
+      <p:sp>
+        <p:nvSpPr>
+          <p:cNvPr id="10" name="Rounded Rectangle 9"/>
+          <p:cNvSpPr/>
+          <p:nvPr/>
+        </p:nvSpPr>
+        <p:spPr>
+          <a:xfrm>
+            <a:off x="694944" y="3172968"/>
+            <a:ext cx="10972800" cy="1115568"/>
+          </a:xfrm>
+          <a:prstGeom prst="roundRect">
+            <a:avLst/>
+          </a:prstGeom>
+          <a:solidFill>
+            <a:srgbClr val="FFF7F4"/>
+          </a:solidFill>
+          <a:ln>
+            <a:solidFill>
+              <a:srgbClr val="EDBEB4"/>
+            </a:solidFill>
+          </a:ln>
+        </p:spPr>
+        <p:style>
+          <a:lnRef idx="1">
+            <a:schemeClr val="accent1"/>
+          </a:lnRef>
+          <a:fillRef idx="3">
+            <a:schemeClr val="accent1"/>
+          </a:fillRef>
+          <a:effectRef idx="2">
+            <a:schemeClr val="accent1"/>
+          </a:effectRef>
+          <a:fontRef idx="minor">
+            <a:schemeClr val="lt1"/>
+          </a:fontRef>
+        </p:style>
+        <p:txBody>
+          <a:bodyPr rtlCol="0" anchor="ctr"/>
+          <a:lstStyle/>
+          <a:p>
+            <a:pPr algn="ctr"/>
+          </a:p>
+        </p:txBody>
+      </p:sp>
+      <p:sp>
+        <p:nvSpPr>
+          <p:cNvPr id="11" name="TextBox 10"/>
+          <p:cNvSpPr txBox="1"/>
+          <p:nvPr/>
+        </p:nvSpPr>
+        <p:spPr>
+          <a:xfrm>
+            <a:off x="896112" y="3319272"/>
+            <a:ext cx="2926080" cy="274320"/>
+          </a:xfrm>
+          <a:prstGeom prst="rect">
+            <a:avLst/>
+          </a:prstGeom>
+          <a:noFill/>
+        </p:spPr>
+        <p:txBody>
+          <a:bodyPr wrap="square" lIns="73152" rIns="73152" tIns="36576" bIns="36576">
+            <a:spAutoFit/>
+          </a:bodyPr>
+          <a:lstStyle/>
+          <a:p>
+            <a:pPr algn="l">
+              <a:spcAft>
+                <a:spcPts val="0"/>
+              </a:spcAft>
+              <a:defRPr sz="1800" b="1">
+                <a:solidFill>
+                  <a:srgbClr val="BE3B3B"/>
+                </a:solidFill>
+                <a:latin typeface="Noto Sans CJK KR"/>
+              </a:defRPr>
+            </a:pPr>
+            <a:r>
+              <a:t>증상 2: 진동이 심함</a:t>
+            </a:r>
+          </a:p>
+        </p:txBody>
+      </p:sp>
+      <p:sp>
+        <p:nvSpPr>
+          <p:cNvPr id="12" name="TextBox 11"/>
+          <p:cNvSpPr txBox="1"/>
+          <p:nvPr/>
+        </p:nvSpPr>
+        <p:spPr>
+          <a:xfrm>
+            <a:off x="3794760" y="3300984"/>
+            <a:ext cx="7543800" cy="621792"/>
+          </a:xfrm>
+          <a:prstGeom prst="rect">
+            <a:avLst/>
+          </a:prstGeom>
+          <a:noFill/>
+        </p:spPr>
+        <p:txBody>
+          <a:bodyPr wrap="square" lIns="73152" rIns="73152" tIns="36576" bIns="36576">
+            <a:spAutoFit/>
+          </a:bodyPr>
+          <a:lstStyle/>
+          <a:p>
+            <a:pPr algn="l">
+              <a:spcAft>
+                <a:spcPts val="0"/>
+              </a:spcAft>
+              <a:defRPr sz="1600" b="0">
+                <a:solidFill>
+                  <a:srgbClr val="122C4E"/>
+                </a:solidFill>
+                <a:latin typeface="Noto Sans CJK KR"/>
+              </a:defRPr>
+            </a:pPr>
+            <a:r>
+              <a:t>우선 확인: kp/kd·update rate·latency·saturation을 확인한다.</a:t>
+            </a:r>
+            <a:br/>
+            <a:r>
+              <a:t>수정 후: ros2 topic info /target_error</a:t>
+            </a:r>
+          </a:p>
+        </p:txBody>
+      </p:sp>
+      <p:sp>
+        <p:nvSpPr>
+          <p:cNvPr id="13" name="TextBox 12"/>
+          <p:cNvSpPr txBox="1"/>
+          <p:nvPr/>
+        </p:nvSpPr>
+        <p:spPr>
+          <a:xfrm>
+            <a:off x="822960" y="5102352"/>
+            <a:ext cx="10607040" cy="402336"/>
+          </a:xfrm>
+          <a:prstGeom prst="rect">
+            <a:avLst/>
+          </a:prstGeom>
+          <a:noFill/>
+        </p:spPr>
+        <p:txBody>
+          <a:bodyPr wrap="square" lIns="73152" rIns="73152" tIns="36576" bIns="36576">
+            <a:spAutoFit/>
+          </a:bodyPr>
+          <a:lstStyle/>
+          <a:p>
             <a:pPr algn="ctr">
               <a:spcAft>
                 <a:spcPts val="0"/>
               </a:spcAft>
-              <a:defRPr sz="1700" b="1">
-                <a:solidFill>
-                  <a:srgbClr val="2A8B5A"/>
-                </a:solidFill>
-                <a:latin typeface="Noto Sans CJK KR"/>
-              </a:defRPr>
-            </a:pPr>
-            <a:r>
-              <a:t>다음 모듈을 시작하기 전, 이 슬라이드의 Complete와 다음 모듈의 Starter를 비교합니다.</a:t>
+              <a:defRPr sz="1800" b="1">
+                <a:solidFill>
+                  <a:srgbClr val="DB7E22"/>
+                </a:solidFill>
+                <a:latin typeface="Noto Sans CJK KR"/>
+              </a:defRPr>
+            </a:pPr>
+            <a:r>
+              <a:t>공통 순서: ① 현재 폴더 ② source ③ 파일 경로 ④ 이름/타입/단위 ⑤ build·source 후 재실행</a:t>
             </a:r>
           </a:p>
         </p:txBody>
@@ -10285,6 +10386,754 @@
               </a:defRPr>
             </a:pPr>
             <a:r>
+              <a:t>미니 실습: 값 하나를 바꾸고 결과를 비교한다</a:t>
+            </a:r>
+          </a:p>
+        </p:txBody>
+      </p:sp>
+      <p:sp>
+        <p:nvSpPr>
+          <p:cNvPr id="3" name="TextBox 2"/>
+          <p:cNvSpPr txBox="1"/>
+          <p:nvPr/>
+        </p:nvSpPr>
+        <p:spPr>
+          <a:xfrm>
+            <a:off x="603504" y="859536"/>
+            <a:ext cx="10698480" cy="292608"/>
+          </a:xfrm>
+          <a:prstGeom prst="rect">
+            <a:avLst/>
+          </a:prstGeom>
+          <a:noFill/>
+        </p:spPr>
+        <p:txBody>
+          <a:bodyPr wrap="square" lIns="73152" rIns="73152" tIns="36576" bIns="36576">
+            <a:spAutoFit/>
+          </a:bodyPr>
+          <a:lstStyle/>
+          <a:p>
+            <a:pPr algn="l">
+              <a:spcAft>
+                <a:spcPts val="0"/>
+              </a:spcAft>
+              <a:defRPr sz="1700" b="0">
+                <a:solidFill>
+                  <a:srgbClr val="5C6672"/>
+                </a:solidFill>
+                <a:latin typeface="Noto Sans CJK KR"/>
+              </a:defRPr>
+            </a:pPr>
+            <a:r>
+              <a:t>정상 결과를 만든 뒤에는 한 번에 하나의 값만 바꿉니다.</a:t>
+            </a:r>
+          </a:p>
+        </p:txBody>
+      </p:sp>
+      <p:sp>
+        <p:nvSpPr>
+          <p:cNvPr id="4" name="TextBox 3"/>
+          <p:cNvSpPr txBox="1"/>
+          <p:nvPr/>
+        </p:nvSpPr>
+        <p:spPr>
+          <a:xfrm>
+            <a:off x="530352" y="6510528"/>
+            <a:ext cx="7772400" cy="201168"/>
+          </a:xfrm>
+          <a:prstGeom prst="rect">
+            <a:avLst/>
+          </a:prstGeom>
+          <a:noFill/>
+        </p:spPr>
+        <p:txBody>
+          <a:bodyPr wrap="square" lIns="73152" rIns="73152" tIns="36576" bIns="36576">
+            <a:spAutoFit/>
+          </a:bodyPr>
+          <a:lstStyle/>
+          <a:p>
+            <a:pPr algn="l">
+              <a:spcAft>
+                <a:spcPts val="0"/>
+              </a:spcAft>
+              <a:defRPr sz="1000" b="0">
+                <a:solidFill>
+                  <a:srgbClr val="5C6672"/>
+                </a:solidFill>
+                <a:latin typeface="Noto Sans CJK KR"/>
+              </a:defRPr>
+            </a:pPr>
+            <a:r>
+              <a:t>ROS 2 Jazzy · Gazebo Harmonic · M20 · 따라 하기형 AGV 실습</a:t>
+            </a:r>
+          </a:p>
+        </p:txBody>
+      </p:sp>
+      <p:sp>
+        <p:nvSpPr>
+          <p:cNvPr id="5" name="TextBox 4"/>
+          <p:cNvSpPr txBox="1"/>
+          <p:nvPr/>
+        </p:nvSpPr>
+        <p:spPr>
+          <a:xfrm>
+            <a:off x="9144000" y="6510528"/>
+            <a:ext cx="2468880" cy="201168"/>
+          </a:xfrm>
+          <a:prstGeom prst="rect">
+            <a:avLst/>
+          </a:prstGeom>
+          <a:noFill/>
+        </p:spPr>
+        <p:txBody>
+          <a:bodyPr wrap="square" lIns="73152" rIns="73152" tIns="36576" bIns="36576">
+            <a:spAutoFit/>
+          </a:bodyPr>
+          <a:lstStyle/>
+          <a:p>
+            <a:pPr algn="r">
+              <a:spcAft>
+                <a:spcPts val="0"/>
+              </a:spcAft>
+              <a:defRPr sz="1000" b="0">
+                <a:solidFill>
+                  <a:srgbClr val="5C6672"/>
+                </a:solidFill>
+                <a:latin typeface="Noto Sans CJK KR"/>
+              </a:defRPr>
+            </a:pPr>
+            <a:r>
+              <a:t>명령·파일 경로는 슬라이드에서 복사 가능</a:t>
+            </a:r>
+          </a:p>
+        </p:txBody>
+      </p:sp>
+      <p:sp>
+        <p:nvSpPr>
+          <p:cNvPr id="6" name="Rectangle 5"/>
+          <p:cNvSpPr/>
+          <p:nvPr/>
+        </p:nvSpPr>
+        <p:spPr>
+          <a:xfrm>
+            <a:off x="566928" y="1188720"/>
+            <a:ext cx="11064240" cy="347472"/>
+          </a:xfrm>
+          <a:prstGeom prst="rect">
+            <a:avLst/>
+          </a:prstGeom>
+          <a:solidFill>
+            <a:srgbClr val="F4F7FB"/>
+          </a:solidFill>
+          <a:ln>
+            <a:solidFill>
+              <a:srgbClr val="F4F7FB"/>
+            </a:solidFill>
+          </a:ln>
+        </p:spPr>
+        <p:style>
+          <a:lnRef idx="1">
+            <a:schemeClr val="accent1"/>
+          </a:lnRef>
+          <a:fillRef idx="3">
+            <a:schemeClr val="accent1"/>
+          </a:fillRef>
+          <a:effectRef idx="2">
+            <a:schemeClr val="accent1"/>
+          </a:effectRef>
+          <a:fontRef idx="minor">
+            <a:schemeClr val="lt1"/>
+          </a:fontRef>
+        </p:style>
+        <p:txBody>
+          <a:bodyPr rtlCol="0" anchor="ctr" wrap="square" lIns="73152" rIns="73152" tIns="36576" bIns="36576"/>
+          <a:lstStyle/>
+          <a:p>
+            <a:pPr algn="l">
+              <a:spcAft>
+                <a:spcPts val="0"/>
+              </a:spcAft>
+              <a:defRPr sz="1300" b="1">
+                <a:solidFill>
+                  <a:srgbClr val="122C4E"/>
+                </a:solidFill>
+                <a:latin typeface="Noto Sans CJK KR"/>
+              </a:defRPr>
+            </a:pPr>
+            <a:r>
+              <a:t>현재 단계 미니 실습    |    현재 폴더 ~/ros2_curri/agv_ws    |    현재 터미널</a:t>
+            </a:r>
+          </a:p>
+        </p:txBody>
+      </p:sp>
+      <p:sp>
+        <p:nvSpPr>
+          <p:cNvPr id="7" name="Rounded Rectangle 6"/>
+          <p:cNvSpPr/>
+          <p:nvPr/>
+        </p:nvSpPr>
+        <p:spPr>
+          <a:xfrm>
+            <a:off x="749808" y="1874519"/>
+            <a:ext cx="10652760" cy="1993392"/>
+          </a:xfrm>
+          <a:prstGeom prst="roundRect">
+            <a:avLst/>
+          </a:prstGeom>
+          <a:solidFill>
+            <a:srgbClr val="FFF8EB"/>
+          </a:solidFill>
+          <a:ln>
+            <a:solidFill>
+              <a:srgbClr val="ECC680"/>
+            </a:solidFill>
+          </a:ln>
+        </p:spPr>
+        <p:style>
+          <a:lnRef idx="1">
+            <a:schemeClr val="accent1"/>
+          </a:lnRef>
+          <a:fillRef idx="3">
+            <a:schemeClr val="accent1"/>
+          </a:fillRef>
+          <a:effectRef idx="2">
+            <a:schemeClr val="accent1"/>
+          </a:effectRef>
+          <a:fontRef idx="minor">
+            <a:schemeClr val="lt1"/>
+          </a:fontRef>
+        </p:style>
+        <p:txBody>
+          <a:bodyPr rtlCol="0" anchor="ctr" wrap="square" lIns="73152" rIns="73152" tIns="36576" bIns="36576"/>
+          <a:lstStyle/>
+          <a:p>
+            <a:pPr algn="ctr">
+              <a:spcAft>
+                <a:spcPts val="0"/>
+              </a:spcAft>
+              <a:defRPr sz="2300" b="1">
+                <a:solidFill>
+                  <a:srgbClr val="122C4E"/>
+                </a:solidFill>
+                <a:latin typeface="Noto Sans CJK KR"/>
+              </a:defRPr>
+            </a:pPr>
+            <a:r>
+              <a:t>kp_angular을 0.002, 0.004, 0.008로 바꿨을 때 반응 속도와 진동 위험을 예측해 기록한다.</a:t>
+            </a:r>
+          </a:p>
+        </p:txBody>
+      </p:sp>
+      <p:sp>
+        <p:nvSpPr>
+          <p:cNvPr id="8" name="TextBox 7"/>
+          <p:cNvSpPr txBox="1"/>
+          <p:nvPr/>
+        </p:nvSpPr>
+        <p:spPr>
+          <a:xfrm>
+            <a:off x="877824" y="4590288"/>
+            <a:ext cx="10241280" cy="594360"/>
+          </a:xfrm>
+          <a:prstGeom prst="rect">
+            <a:avLst/>
+          </a:prstGeom>
+          <a:noFill/>
+        </p:spPr>
+        <p:txBody>
+          <a:bodyPr wrap="square" lIns="73152" rIns="73152" tIns="36576" bIns="36576">
+            <a:spAutoFit/>
+          </a:bodyPr>
+          <a:lstStyle/>
+          <a:p>
+            <a:pPr algn="ctr">
+              <a:spcAft>
+                <a:spcPts val="0"/>
+              </a:spcAft>
+              <a:defRPr sz="1900" b="1">
+                <a:solidFill>
+                  <a:srgbClr val="DB7E22"/>
+                </a:solidFill>
+                <a:latin typeface="Noto Sans CJK KR"/>
+              </a:defRPr>
+            </a:pPr>
+            <a:r>
+              <a:t>기록할 것: 바꾼 값(단위) · 기대한 변화 · 실제 출력/화면 · 원래 값으로 되돌린 결과</a:t>
+            </a:r>
+          </a:p>
+        </p:txBody>
+      </p:sp>
+    </p:spTree>
+  </p:cSld>
+  <p:clrMapOvr>
+    <a:masterClrMapping/>
+  </p:clrMapOvr>
+</p:sld>
+</file>
+
+<file path=ppt/slides/slide21.xml><?xml version="1.0" encoding="utf-8"?>
+<p:sld xmlns:a="http://schemas.openxmlformats.org/drawingml/2006/main" xmlns:p="http://schemas.openxmlformats.org/presentationml/2006/main" xmlns:r="http://schemas.openxmlformats.org/officeDocument/2006/relationships">
+  <p:cSld>
+    <p:spTree>
+      <p:nvGrpSpPr>
+        <p:cNvPr id="1" name=""/>
+        <p:cNvGrpSpPr/>
+        <p:nvPr/>
+      </p:nvGrpSpPr>
+      <p:grpSpPr/>
+      <p:sp>
+        <p:nvSpPr>
+          <p:cNvPr id="2" name="TextBox 1"/>
+          <p:cNvSpPr txBox="1"/>
+          <p:nvPr/>
+        </p:nvSpPr>
+        <p:spPr>
+          <a:xfrm>
+            <a:off x="566928" y="347472"/>
+            <a:ext cx="10881360" cy="438912"/>
+          </a:xfrm>
+          <a:prstGeom prst="rect">
+            <a:avLst/>
+          </a:prstGeom>
+          <a:noFill/>
+        </p:spPr>
+        <p:txBody>
+          <a:bodyPr wrap="square" lIns="73152" rIns="73152" tIns="36576" bIns="36576">
+            <a:spAutoFit/>
+          </a:bodyPr>
+          <a:lstStyle/>
+          <a:p>
+            <a:pPr algn="l">
+              <a:spcAft>
+                <a:spcPts val="0"/>
+              </a:spcAft>
+              <a:defRPr sz="3200" b="1">
+                <a:solidFill>
+                  <a:srgbClr val="122C4E"/>
+                </a:solidFill>
+                <a:latin typeface="Noto Sans CJK KR"/>
+              </a:defRPr>
+            </a:pPr>
+            <a:r>
+              <a:t>체크포인트를 저장하고 다음 모듈로 넘긴다</a:t>
+            </a:r>
+          </a:p>
+        </p:txBody>
+      </p:sp>
+      <p:sp>
+        <p:nvSpPr>
+          <p:cNvPr id="3" name="TextBox 2"/>
+          <p:cNvSpPr txBox="1"/>
+          <p:nvPr/>
+        </p:nvSpPr>
+        <p:spPr>
+          <a:xfrm>
+            <a:off x="603504" y="859536"/>
+            <a:ext cx="10698480" cy="292608"/>
+          </a:xfrm>
+          <a:prstGeom prst="rect">
+            <a:avLst/>
+          </a:prstGeom>
+          <a:noFill/>
+        </p:spPr>
+        <p:txBody>
+          <a:bodyPr wrap="square" lIns="73152" rIns="73152" tIns="36576" bIns="36576">
+            <a:spAutoFit/>
+          </a:bodyPr>
+          <a:lstStyle/>
+          <a:p>
+            <a:pPr algn="l">
+              <a:spcAft>
+                <a:spcPts val="0"/>
+              </a:spcAft>
+              <a:defRPr sz="1700" b="0">
+                <a:solidFill>
+                  <a:srgbClr val="5C6672"/>
+                </a:solidFill>
+                <a:latin typeface="Noto Sans CJK KR"/>
+              </a:defRPr>
+            </a:pPr>
+            <a:r>
+              <a:t>현재 Complete는 다음 Starter의 기준선입니다.</a:t>
+            </a:r>
+          </a:p>
+        </p:txBody>
+      </p:sp>
+      <p:sp>
+        <p:nvSpPr>
+          <p:cNvPr id="4" name="TextBox 3"/>
+          <p:cNvSpPr txBox="1"/>
+          <p:nvPr/>
+        </p:nvSpPr>
+        <p:spPr>
+          <a:xfrm>
+            <a:off x="530352" y="6510528"/>
+            <a:ext cx="7772400" cy="201168"/>
+          </a:xfrm>
+          <a:prstGeom prst="rect">
+            <a:avLst/>
+          </a:prstGeom>
+          <a:noFill/>
+        </p:spPr>
+        <p:txBody>
+          <a:bodyPr wrap="square" lIns="73152" rIns="73152" tIns="36576" bIns="36576">
+            <a:spAutoFit/>
+          </a:bodyPr>
+          <a:lstStyle/>
+          <a:p>
+            <a:pPr algn="l">
+              <a:spcAft>
+                <a:spcPts val="0"/>
+              </a:spcAft>
+              <a:defRPr sz="1000" b="0">
+                <a:solidFill>
+                  <a:srgbClr val="5C6672"/>
+                </a:solidFill>
+                <a:latin typeface="Noto Sans CJK KR"/>
+              </a:defRPr>
+            </a:pPr>
+            <a:r>
+              <a:t>ROS 2 Jazzy · Gazebo Harmonic · M20 · 따라 하기형 AGV 실습</a:t>
+            </a:r>
+          </a:p>
+        </p:txBody>
+      </p:sp>
+      <p:sp>
+        <p:nvSpPr>
+          <p:cNvPr id="5" name="TextBox 4"/>
+          <p:cNvSpPr txBox="1"/>
+          <p:nvPr/>
+        </p:nvSpPr>
+        <p:spPr>
+          <a:xfrm>
+            <a:off x="9144000" y="6510528"/>
+            <a:ext cx="2468880" cy="201168"/>
+          </a:xfrm>
+          <a:prstGeom prst="rect">
+            <a:avLst/>
+          </a:prstGeom>
+          <a:noFill/>
+        </p:spPr>
+        <p:txBody>
+          <a:bodyPr wrap="square" lIns="73152" rIns="73152" tIns="36576" bIns="36576">
+            <a:spAutoFit/>
+          </a:bodyPr>
+          <a:lstStyle/>
+          <a:p>
+            <a:pPr algn="r">
+              <a:spcAft>
+                <a:spcPts val="0"/>
+              </a:spcAft>
+              <a:defRPr sz="1000" b="0">
+                <a:solidFill>
+                  <a:srgbClr val="5C6672"/>
+                </a:solidFill>
+                <a:latin typeface="Noto Sans CJK KR"/>
+              </a:defRPr>
+            </a:pPr>
+            <a:r>
+              <a:t>명령·파일 경로는 슬라이드에서 복사 가능</a:t>
+            </a:r>
+          </a:p>
+        </p:txBody>
+      </p:sp>
+      <p:sp>
+        <p:nvSpPr>
+          <p:cNvPr id="6" name="Rectangle 5"/>
+          <p:cNvSpPr/>
+          <p:nvPr/>
+        </p:nvSpPr>
+        <p:spPr>
+          <a:xfrm>
+            <a:off x="566928" y="1188720"/>
+            <a:ext cx="11064240" cy="347472"/>
+          </a:xfrm>
+          <a:prstGeom prst="rect">
+            <a:avLst/>
+          </a:prstGeom>
+          <a:solidFill>
+            <a:srgbClr val="F4F7FB"/>
+          </a:solidFill>
+          <a:ln>
+            <a:solidFill>
+              <a:srgbClr val="F4F7FB"/>
+            </a:solidFill>
+          </a:ln>
+        </p:spPr>
+        <p:style>
+          <a:lnRef idx="1">
+            <a:schemeClr val="accent1"/>
+          </a:lnRef>
+          <a:fillRef idx="3">
+            <a:schemeClr val="accent1"/>
+          </a:fillRef>
+          <a:effectRef idx="2">
+            <a:schemeClr val="accent1"/>
+          </a:effectRef>
+          <a:fontRef idx="minor">
+            <a:schemeClr val="lt1"/>
+          </a:fontRef>
+        </p:style>
+        <p:txBody>
+          <a:bodyPr rtlCol="0" anchor="ctr" wrap="square" lIns="73152" rIns="73152" tIns="36576" bIns="36576"/>
+          <a:lstStyle/>
+          <a:p>
+            <a:pPr algn="l">
+              <a:spcAft>
+                <a:spcPts val="0"/>
+              </a:spcAft>
+              <a:defRPr sz="1300" b="1">
+                <a:solidFill>
+                  <a:srgbClr val="122C4E"/>
+                </a:solidFill>
+                <a:latin typeface="Noto Sans CJK KR"/>
+              </a:defRPr>
+            </a:pPr>
+            <a:r>
+              <a:t>현재 단계 체크포인트    |    현재 폴더 ~/ros2_curri/agv_ws    |    현재 터미널</a:t>
+            </a:r>
+          </a:p>
+        </p:txBody>
+      </p:sp>
+      <p:sp>
+        <p:nvSpPr>
+          <p:cNvPr id="7" name="Rounded Rectangle 6"/>
+          <p:cNvSpPr/>
+          <p:nvPr/>
+        </p:nvSpPr>
+        <p:spPr>
+          <a:xfrm>
+            <a:off x="685800" y="1737360"/>
+            <a:ext cx="10972800" cy="3611880"/>
+          </a:xfrm>
+          <a:prstGeom prst="roundRect">
+            <a:avLst/>
+          </a:prstGeom>
+          <a:solidFill>
+            <a:srgbClr val="F4F7FB"/>
+          </a:solidFill>
+          <a:ln>
+            <a:solidFill>
+              <a:srgbClr val="D2DCE8"/>
+            </a:solidFill>
+          </a:ln>
+        </p:spPr>
+        <p:style>
+          <a:lnRef idx="1">
+            <a:schemeClr val="accent1"/>
+          </a:lnRef>
+          <a:fillRef idx="3">
+            <a:schemeClr val="accent1"/>
+          </a:fillRef>
+          <a:effectRef idx="2">
+            <a:schemeClr val="accent1"/>
+          </a:effectRef>
+          <a:fontRef idx="minor">
+            <a:schemeClr val="lt1"/>
+          </a:fontRef>
+        </p:style>
+        <p:txBody>
+          <a:bodyPr rtlCol="0" anchor="ctr"/>
+          <a:lstStyle/>
+          <a:p>
+            <a:pPr algn="ctr"/>
+          </a:p>
+        </p:txBody>
+      </p:sp>
+      <p:sp>
+        <p:nvSpPr>
+          <p:cNvPr id="8" name="TextBox 7"/>
+          <p:cNvSpPr txBox="1"/>
+          <p:nvPr/>
+        </p:nvSpPr>
+        <p:spPr>
+          <a:xfrm>
+            <a:off x="896112" y="1993392"/>
+            <a:ext cx="10332720" cy="2971800"/>
+          </a:xfrm>
+          <a:prstGeom prst="rect">
+            <a:avLst/>
+          </a:prstGeom>
+          <a:noFill/>
+        </p:spPr>
+        <p:txBody>
+          <a:bodyPr wrap="square" lIns="109728" rIns="109728">
+            <a:spAutoFit/>
+          </a:bodyPr>
+          <a:lstStyle/>
+          <a:p>
+            <a:pPr>
+              <a:spcAft>
+                <a:spcPts val="800"/>
+              </a:spcAft>
+              <a:defRPr sz="1800">
+                <a:solidFill>
+                  <a:srgbClr val="122C4E"/>
+                </a:solidFill>
+                <a:latin typeface="Noto Sans CJK KR"/>
+              </a:defRPr>
+            </a:pPr>
+            <a:r>
+              <a:t>• □ 완료 화면: kp_angular·max speed parameter와 saturation이 /cmd_vel_raw 출력을 제한하는 것을 확인한다.</a:t>
+            </a:r>
+          </a:p>
+          <a:p>
+            <a:pPr>
+              <a:spcAft>
+                <a:spcPts val="800"/>
+              </a:spcAft>
+              <a:defRPr sz="1800">
+                <a:solidFill>
+                  <a:srgbClr val="122C4E"/>
+                </a:solidFill>
+                <a:latin typeface="Noto Sans CJK KR"/>
+              </a:defRPr>
+            </a:pPr>
+            <a:r>
+              <a:t>• □ Complete 파일: blocks/E_autonomy_logic/M20_pid_driving_control/complete/</a:t>
+            </a:r>
+          </a:p>
+          <a:p>
+            <a:pPr>
+              <a:spcAft>
+                <a:spcPts val="800"/>
+              </a:spcAft>
+              <a:defRPr sz="1800">
+                <a:solidFill>
+                  <a:srgbClr val="122C4E"/>
+                </a:solidFill>
+                <a:latin typeface="Noto Sans CJK KR"/>
+              </a:defRPr>
+            </a:pPr>
+            <a:r>
+              <a:t>• □ 정상 로그·캡처: logs/validation.log, screenshots/validation_terminal.png</a:t>
+            </a:r>
+          </a:p>
+          <a:p>
+            <a:pPr>
+              <a:spcAft>
+                <a:spcPts val="800"/>
+              </a:spcAft>
+              <a:defRPr sz="1800">
+                <a:solidFill>
+                  <a:srgbClr val="122C4E"/>
+                </a:solidFill>
+                <a:latin typeface="Noto Sans CJK KR"/>
+              </a:defRPr>
+            </a:pPr>
+            <a:r>
+              <a:t>• □ 버전 식별: CHECKSUM_or_TAG.txt의 SHA-256 manifest</a:t>
+            </a:r>
+          </a:p>
+          <a:p>
+            <a:pPr>
+              <a:spcAft>
+                <a:spcPts val="800"/>
+              </a:spcAft>
+              <a:defRPr sz="1800">
+                <a:solidFill>
+                  <a:srgbClr val="122C4E"/>
+                </a:solidFill>
+                <a:latin typeface="Noto Sans CJK KR"/>
+              </a:defRPr>
+            </a:pPr>
+            <a:r>
+              <a:t>• □ 다음 시작 조건: M21 YAML/Launch</a:t>
+            </a:r>
+          </a:p>
+        </p:txBody>
+      </p:sp>
+      <p:sp>
+        <p:nvSpPr>
+          <p:cNvPr id="9" name="TextBox 8"/>
+          <p:cNvSpPr txBox="1"/>
+          <p:nvPr/>
+        </p:nvSpPr>
+        <p:spPr>
+          <a:xfrm>
+            <a:off x="868680" y="5596128"/>
+            <a:ext cx="10515600" cy="338328"/>
+          </a:xfrm>
+          <a:prstGeom prst="rect">
+            <a:avLst/>
+          </a:prstGeom>
+          <a:noFill/>
+        </p:spPr>
+        <p:txBody>
+          <a:bodyPr wrap="square" lIns="73152" rIns="73152" tIns="36576" bIns="36576">
+            <a:spAutoFit/>
+          </a:bodyPr>
+          <a:lstStyle/>
+          <a:p>
+            <a:pPr algn="ctr">
+              <a:spcAft>
+                <a:spcPts val="0"/>
+              </a:spcAft>
+              <a:defRPr sz="1700" b="1">
+                <a:solidFill>
+                  <a:srgbClr val="2A8B5A"/>
+                </a:solidFill>
+                <a:latin typeface="Noto Sans CJK KR"/>
+              </a:defRPr>
+            </a:pPr>
+            <a:r>
+              <a:t>다음 모듈을 시작하기 전, 이 슬라이드의 Complete와 다음 모듈의 Starter를 비교합니다.</a:t>
+            </a:r>
+          </a:p>
+        </p:txBody>
+      </p:sp>
+    </p:spTree>
+  </p:cSld>
+  <p:clrMapOvr>
+    <a:masterClrMapping/>
+  </p:clrMapOvr>
+</p:sld>
+</file>
+
+<file path=ppt/slides/slide22.xml><?xml version="1.0" encoding="utf-8"?>
+<p:sld xmlns:a="http://schemas.openxmlformats.org/drawingml/2006/main" xmlns:p="http://schemas.openxmlformats.org/presentationml/2006/main" xmlns:r="http://schemas.openxmlformats.org/officeDocument/2006/relationships">
+  <p:cSld>
+    <p:spTree>
+      <p:nvGrpSpPr>
+        <p:cNvPr id="1" name=""/>
+        <p:cNvGrpSpPr/>
+        <p:nvPr/>
+      </p:nvGrpSpPr>
+      <p:grpSpPr/>
+      <p:sp>
+        <p:nvSpPr>
+          <p:cNvPr id="2" name="TextBox 1"/>
+          <p:cNvSpPr txBox="1"/>
+          <p:nvPr/>
+        </p:nvSpPr>
+        <p:spPr>
+          <a:xfrm>
+            <a:off x="566928" y="347472"/>
+            <a:ext cx="10881360" cy="438912"/>
+          </a:xfrm>
+          <a:prstGeom prst="rect">
+            <a:avLst/>
+          </a:prstGeom>
+          <a:noFill/>
+        </p:spPr>
+        <p:txBody>
+          <a:bodyPr wrap="square" lIns="73152" rIns="73152" tIns="36576" bIns="36576">
+            <a:spAutoFit/>
+          </a:bodyPr>
+          <a:lstStyle/>
+          <a:p>
+            <a:pPr algn="l">
+              <a:spcAft>
+                <a:spcPts val="0"/>
+              </a:spcAft>
+              <a:defRPr sz="3200" b="1">
+                <a:solidFill>
+                  <a:srgbClr val="122C4E"/>
+                </a:solidFill>
+                <a:latin typeface="Noto Sans CJK KR"/>
+              </a:defRPr>
+            </a:pPr>
+            <a:r>
               <a:t>공식 참고 자료</a:t>
             </a:r>
           </a:p>
@@ -10991,7 +11840,7 @@
               </a:defRPr>
             </a:pPr>
             <a:r>
-              <a:t>현재 단계 시작    |    현재 폴더 ~/agv_ws    |    현재 터미널</a:t>
+              <a:t>현재 단계 시작    |    현재 폴더 ~/ros2_curri/agv_ws    |    현재 터미널</a:t>
             </a:r>
           </a:p>
         </p:txBody>
@@ -11107,7 +11956,7 @@
               </a:defRPr>
             </a:pPr>
             <a:r>
-              <a:t>• 현재 폴더: ~/agv_ws</a:t>
+              <a:t>• 현재 폴더: ~/ros2_curri/agv_ws</a:t>
             </a:r>
           </a:p>
           <a:p>
@@ -11178,7 +12027,7 @@
               </a:defRPr>
             </a:pPr>
             <a:r>
-              <a:t>확인: pwd가 ~/agv_ws이고, 이전 모듈의 완료 조건을 한 문장으로 설명할 수 있으면 시작합니다.</a:t>
+              <a:t>확인: pwd가 ~/ros2_curri/agv_ws이고, 이전 모듈의 완료 조건을 한 문장으로 설명할 수 있으면 시작합니다.</a:t>
             </a:r>
           </a:p>
         </p:txBody>
@@ -12297,7 +13146,7 @@
               </a:defRPr>
             </a:pPr>
             <a:r>
-              <a:t>~/agv_ws/src/</a:t>
+              <a:t>~/ros2_curri/agv_ws/src/</a:t>
             </a:r>
             <a:br/>
             <a:r>
@@ -12580,7 +13429,7 @@
               </a:defRPr>
             </a:pPr>
             <a:r>
-              <a:t>현재 단계 1/2    |    현재 폴더 ~/agv_ws    |    현재 터미널</a:t>
+              <a:t>현재 단계 1/2    |    현재 폴더 ~/ros2_curri/agv_ws    |    현재 터미널</a:t>
             </a:r>
           </a:p>
         </p:txBody>
@@ -13030,7 +13879,7 @@
               </a:defRPr>
             </a:pPr>
             <a:r>
-              <a:t>현재 단계 2/2    |    현재 폴더 ~/agv_ws    |    현재 터미널</a:t>
+              <a:t>현재 단계 2/2    |    현재 폴더 ~/ros2_curri/agv_ws    |    현재 터미널</a:t>
             </a:r>
           </a:p>
         </p:txBody>
@@ -13344,7 +14193,7 @@
               </a:defRPr>
             </a:pPr>
             <a:r>
-              <a:t>~/agv_ws/src/agv_control/agv_control/pid_controller.py</a:t>
+              <a:t>~/ros2_curri/agv_ws/src/agv_control/agv_control/pid_controller.py</a:t>
             </a:r>
           </a:p>
         </p:txBody>
@@ -13480,7 +14329,7 @@
               </a:defRPr>
             </a:pPr>
             <a:r>
-              <a:t>현재 단계 3/6    |    현재 폴더 ~/agv_ws    |    현재 터미널</a:t>
+              <a:t>현재 단계 3/6    |    현재 폴더 ~/ros2_curri/agv_ws    |    현재 터미널</a:t>
             </a:r>
           </a:p>
         </p:txBody>
@@ -13577,11 +14426,11 @@
               </a:defRPr>
             </a:pPr>
             <a:r>
-              <a:t>파일 생성: mkdir -p ~/agv_ws/src/agv_control/agv_control</a:t>
+              <a:t>파일 생성: mkdir -p ~/ros2_curri/agv_ws/src/agv_control/agv_control</a:t>
             </a:r>
             <a:br/>
             <a:r>
-              <a:t>파일 열기: nano ~/agv_ws/src/agv_control/agv_control/pid_controller.py</a:t>
+              <a:t>파일 열기: nano ~/ros2_curri/agv_ws/src/agv_control/agv_control/pid_controller.py</a:t>
             </a:r>
           </a:p>
         </p:txBody>

--- a/blocks/E_autonomy_logic/M20_pid_driving_control/M20_PID와_주행_제어.pptx
+++ b/blocks/E_autonomy_logic/M20_pid_driving_control/M20_PID와_주행_제어.pptx
@@ -27,6 +27,8 @@
     <p:sldId id="275" r:id="rId27"/>
     <p:sldId id="276" r:id="rId28"/>
     <p:sldId id="277" r:id="rId29"/>
+    <p:sldId id="278" r:id="rId30"/>
+    <p:sldId id="279" r:id="rId31"/>
   </p:sldIdLst>
   <p:sldSz cx="12191999" cy="6858000" type="screen4x3"/>
   <p:notesSz cx="6858000" cy="9144000"/>
@@ -613,17 +615,22 @@
           <a:lstStyle/>
           <a:p>
             <a:r>
-              <a:t>[설명] ~/ros2_curri/agv_ws/src/agv_control/agv_control/pid_controller.py의 전체 파일을 2/3 구간으로 작성한다.</a:t>
-            </a:r>
-          </a:p>
-          <a:p>
-            <a:r>
-              <a:t>[실행] nano ~/ros2_curri/agv_ws/src/agv_control/agv_control/pid_controller.py</a:t>
-            </a:r>
-          </a:p>
-          <a:p>
-            <a:r>
-              <a:t>[확인] 코드를 저장하고 다음 코드 슬라이드 또는 build 단계로 이동한다.</a:t>
+              <a:t>[설명] 입력 부호가 바뀌면 angular.z 부호도 기대 방향으로 바뀌어야 한다.</a:t>
+            </a:r>
+          </a:p>
+          <a:p>
+            <a:r>
+              <a:t>[실행] ros2 topic echo /target_error</a:t>
+            </a:r>
+          </a:p>
+          <a:p>
+            <a:r>
+              <a:t>ros2 topic echo /cmd_vel_raw</a:t>
+            </a:r>
+          </a:p>
+          <a:p>
+            <a:r>
+              <a:t>[확인] 명령 출력에서 슬라이드의 확인 항목을 찾는다.</a:t>
             </a:r>
           </a:p>
           <a:p>
@@ -633,7 +640,7 @@
           </a:p>
           <a:p>
             <a:r>
-              <a:t>[오류] 들여쓰기·XML 태그·따옴표가 슬라이드와 정확히 같은지 확인한다.</a:t>
+              <a:t>[오류] 오류가 나면 현재 폴더, source, 파일 경로를 먼저 확인한다.</a:t>
             </a:r>
           </a:p>
         </p:txBody>
@@ -703,7 +710,7 @@
           <a:lstStyle/>
           <a:p>
             <a:r>
-              <a:t>[설명] ~/ros2_curri/agv_ws/src/agv_control/agv_control/pid_controller.py의 전체 파일을 3/3 구간으로 작성한다.</a:t>
+              <a:t>[설명] ~/ros2_curri/agv_ws/src/agv_control/agv_control/pid_controller.py의 전체 파일을 1/3 구간으로 작성한다.</a:t>
             </a:r>
           </a:p>
           <a:p>
@@ -793,12 +800,12 @@
           <a:lstStyle/>
           <a:p>
             <a:r>
-              <a:t>[설명] ~/ros2_curri/agv_ws/src/agv_control/setup.py의 전체 파일을 1/1 구간으로 작성한다.</a:t>
-            </a:r>
-          </a:p>
-          <a:p>
-            <a:r>
-              <a:t>[실행] nano ~/ros2_curri/agv_ws/src/agv_control/setup.py</a:t>
+              <a:t>[설명] ~/ros2_curri/agv_ws/src/agv_control/agv_control/pid_controller.py의 전체 파일을 2/3 구간으로 작성한다.</a:t>
+            </a:r>
+          </a:p>
+          <a:p>
+            <a:r>
+              <a:t>[실행] nano ~/ros2_curri/agv_ws/src/agv_control/agv_control/pid_controller.py</a:t>
             </a:r>
           </a:p>
           <a:p>
@@ -883,12 +890,12 @@
           <a:lstStyle/>
           <a:p>
             <a:r>
-              <a:t>[설명] ~/ros2_curri/agv_ws/src/agv_bringup/config/mission.yaml의 전체 파일을 1/2 구간으로 작성한다.</a:t>
-            </a:r>
-          </a:p>
-          <a:p>
-            <a:r>
-              <a:t>[실행] nano ~/ros2_curri/agv_ws/src/agv_bringup/config/mission.yaml</a:t>
+              <a:t>[설명] ~/ros2_curri/agv_ws/src/agv_control/agv_control/pid_controller.py의 전체 파일을 3/3 구간으로 작성한다.</a:t>
+            </a:r>
+          </a:p>
+          <a:p>
+            <a:r>
+              <a:t>[실행] nano ~/ros2_curri/agv_ws/src/agv_control/agv_control/pid_controller.py</a:t>
             </a:r>
           </a:p>
           <a:p>
@@ -973,12 +980,12 @@
           <a:lstStyle/>
           <a:p>
             <a:r>
-              <a:t>[설명] ~/ros2_curri/agv_ws/src/agv_bringup/config/mission.yaml의 전체 파일을 2/2 구간으로 작성한다.</a:t>
-            </a:r>
-          </a:p>
-          <a:p>
-            <a:r>
-              <a:t>[실행] nano ~/ros2_curri/agv_ws/src/agv_bringup/config/mission.yaml</a:t>
+              <a:t>[설명] ~/ros2_curri/agv_ws/src/agv_control/setup.py의 전체 파일을 1/1 구간으로 작성한다.</a:t>
+            </a:r>
+          </a:p>
+          <a:p>
+            <a:r>
+              <a:t>[실행] nano ~/ros2_curri/agv_ws/src/agv_control/setup.py</a:t>
             </a:r>
           </a:p>
           <a:p>
@@ -1063,22 +1070,17 @@
           <a:lstStyle/>
           <a:p>
             <a:r>
-              <a:t>[설명] build/source/run을 생략 없이 실행한다.</a:t>
-            </a:r>
-          </a:p>
-          <a:p>
-            <a:r>
-              <a:t>[실행] source ~/ros2_curri/agv_ws/install/setup.bash</a:t>
-            </a:r>
-          </a:p>
-          <a:p>
-            <a:r>
-              <a:t>ros2 run agv_control pid_controller --ros-args -p kp_angular:=0.004</a:t>
-            </a:r>
-          </a:p>
-          <a:p>
-            <a:r>
-              <a:t>[확인] kp_angular·max speed parameter와 saturation이 /cmd_vel_raw 출력을 제한하는 것을 확인한다.</a:t>
+              <a:t>[설명] ~/ros2_curri/agv_ws/src/agv_bringup/config/mission.yaml의 전체 파일을 1/2 구간으로 작성한다.</a:t>
+            </a:r>
+          </a:p>
+          <a:p>
+            <a:r>
+              <a:t>[실행] nano ~/ros2_curri/agv_ws/src/agv_bringup/config/mission.yaml</a:t>
+            </a:r>
+          </a:p>
+          <a:p>
+            <a:r>
+              <a:t>[확인] 코드를 저장하고 다음 코드 슬라이드 또는 build 단계로 이동한다.</a:t>
             </a:r>
           </a:p>
           <a:p>
@@ -1088,7 +1090,7 @@
           </a:p>
           <a:p>
             <a:r>
-              <a:t>[오류] 오류가 나면 현재 폴더, source, 파일 경로를 먼저 확인한다.</a:t>
+              <a:t>[오류] 들여쓰기·XML 태그·따옴표가 슬라이드와 정확히 같은지 확인한다.</a:t>
             </a:r>
           </a:p>
         </p:txBody>
@@ -1158,17 +1160,17 @@
           <a:lstStyle/>
           <a:p>
             <a:r>
-              <a:t>[설명] 실제 Ubuntu/ROS 2 환경에서 생성한 검증 화면이다.</a:t>
-            </a:r>
-          </a:p>
-          <a:p>
-            <a:r>
-              <a:t>[실행] 슬라이드의 명령 또는 파일 작성 단계를 진행한다.</a:t>
-            </a:r>
-          </a:p>
-          <a:p>
-            <a:r>
-              <a:t>[확인] 캡처의 명령과 다음 슬라이드의 검증 명령을 비교한다.</a:t>
+              <a:t>[설명] ~/ros2_curri/agv_ws/src/agv_bringup/config/mission.yaml의 전체 파일을 2/2 구간으로 작성한다.</a:t>
+            </a:r>
+          </a:p>
+          <a:p>
+            <a:r>
+              <a:t>[실행] nano ~/ros2_curri/agv_ws/src/agv_bringup/config/mission.yaml</a:t>
+            </a:r>
+          </a:p>
+          <a:p>
+            <a:r>
+              <a:t>[확인] 코드를 저장하고 다음 코드 슬라이드 또는 build 단계로 이동한다.</a:t>
             </a:r>
           </a:p>
           <a:p>
@@ -1178,7 +1180,7 @@
           </a:p>
           <a:p>
             <a:r>
-              <a:t>[오류] 오류가 나면 현재 폴더, source, 파일 경로를 먼저 확인한다.</a:t>
+              <a:t>[오류] 들여쓰기·XML 태그·따옴표가 슬라이드와 정확히 같은지 확인한다.</a:t>
             </a:r>
           </a:p>
         </p:txBody>
@@ -1248,17 +1250,22 @@
           <a:lstStyle/>
           <a:p>
             <a:r>
-              <a:t>[설명] 실제 Ubuntu/ROS 2 환경에서 생성한 검증 화면이다.</a:t>
-            </a:r>
-          </a:p>
-          <a:p>
-            <a:r>
-              <a:t>[실행] 슬라이드의 명령 또는 파일 작성 단계를 진행한다.</a:t>
-            </a:r>
-          </a:p>
-          <a:p>
-            <a:r>
-              <a:t>[확인] 캡처의 명령과 다음 슬라이드의 검증 명령을 비교한다.</a:t>
+              <a:t>[설명] build/source/run을 생략 없이 실행한다.</a:t>
+            </a:r>
+          </a:p>
+          <a:p>
+            <a:r>
+              <a:t>[실행] source ~/ros2_curri/agv_ws/install/setup.bash</a:t>
+            </a:r>
+          </a:p>
+          <a:p>
+            <a:r>
+              <a:t>ros2 run agv_control pid_controller --ros-args -p kp_angular:=0.004</a:t>
+            </a:r>
+          </a:p>
+          <a:p>
+            <a:r>
+              <a:t>[확인] kp_angular·max speed parameter와 saturation이 /cmd_vel_raw 출력을 제한하는 것을 확인한다.</a:t>
             </a:r>
           </a:p>
           <a:p>
@@ -1338,27 +1345,17 @@
           <a:lstStyle/>
           <a:p>
             <a:r>
-              <a:t>[설명] 검증 명령은 GUI 결과와 별도로 실행해 재현 가능한 완료 기준을 만든다.</a:t>
-            </a:r>
-          </a:p>
-          <a:p>
-            <a:r>
-              <a:t>[실행] ros2 topic info /target_error</a:t>
-            </a:r>
-          </a:p>
-          <a:p>
-            <a:r>
-              <a:t>ros2 topic info /cmd_vel_raw</a:t>
-            </a:r>
-          </a:p>
-          <a:p>
-            <a:r>
-              <a:t>ros2 param get /pid_controller kp_angular</a:t>
-            </a:r>
-          </a:p>
-          <a:p>
-            <a:r>
-              <a:t>[확인] kp_angular·max speed parameter와 saturation이 /cmd_vel_raw 출력을 제한하는 것을 확인한다.</a:t>
+              <a:t>[설명] 실제 Ubuntu/ROS 2 환경에서 생성한 검증 화면이다.</a:t>
+            </a:r>
+          </a:p>
+          <a:p>
+            <a:r>
+              <a:t>[실행] 슬라이드의 명령 또는 파일 작성 단계를 진행한다.</a:t>
+            </a:r>
+          </a:p>
+          <a:p>
+            <a:r>
+              <a:t>[확인] ① 명령/설정  ② 정상 출력 또는 화면  ③ 다음 검증 명령으로 재확인</a:t>
             </a:r>
           </a:p>
           <a:p>
@@ -1438,7 +1435,7 @@
           <a:lstStyle/>
           <a:p>
             <a:r>
-              <a:t>[설명] 오류를 대신 해결하지 말고 증상부터 우선 확인 순서대로 교육생이 실행하게 한다.</a:t>
+              <a:t>[설명] 실제 Ubuntu/ROS 2 환경에서 생성한 검증 화면이다.</a:t>
             </a:r>
           </a:p>
           <a:p>
@@ -1448,7 +1445,7 @@
           </a:p>
           <a:p>
             <a:r>
-              <a:t>[확인] 수정 뒤 첫 검증 명령을 다시 실행한다.</a:t>
+              <a:t>[확인] 명령·설정과 화면의 topic·frame·결과 이름을 대조합니다.</a:t>
             </a:r>
           </a:p>
           <a:p>
@@ -1458,7 +1455,7 @@
           </a:p>
           <a:p>
             <a:r>
-              <a:t>[오류] 슬라이드의 두 대표 오류를 먼저 사용한다.</a:t>
+              <a:t>[오류] 오류가 나면 현재 폴더, source, 파일 경로를 먼저 확인한다.</a:t>
             </a:r>
           </a:p>
         </p:txBody>
@@ -1618,17 +1615,27 @@
           <a:lstStyle/>
           <a:p>
             <a:r>
-              <a:t>[설명] 교육생이 직접 한 값만 바꿔 원인과 결과를 연결하게 한다.</a:t>
-            </a:r>
-          </a:p>
-          <a:p>
-            <a:r>
-              <a:t>[실행] 슬라이드의 명령 또는 파일 작성 단계를 진행한다.</a:t>
-            </a:r>
-          </a:p>
-          <a:p>
-            <a:r>
-              <a:t>[확인] 원래 값과 변경 값을 모두 기록한다.</a:t>
+              <a:t>[설명] 검증 명령은 GUI 결과와 별도로 실행해 재현 가능한 완료 기준을 만든다.</a:t>
+            </a:r>
+          </a:p>
+          <a:p>
+            <a:r>
+              <a:t>[실행] ros2 topic info /target_error</a:t>
+            </a:r>
+          </a:p>
+          <a:p>
+            <a:r>
+              <a:t>ros2 topic info /cmd_vel_raw</a:t>
+            </a:r>
+          </a:p>
+          <a:p>
+            <a:r>
+              <a:t>ros2 param get /pid_controller kp_angular</a:t>
+            </a:r>
+          </a:p>
+          <a:p>
+            <a:r>
+              <a:t>[확인] kp_angular·max speed parameter와 saturation이 /cmd_vel_raw 출력을 제한하는 것을 확인한다.</a:t>
             </a:r>
           </a:p>
           <a:p>
@@ -1708,7 +1715,7 @@
           <a:lstStyle/>
           <a:p>
             <a:r>
-              <a:t>[설명] 교육생이 Complete·캡처·로그를 저장했는지 확인하고 다음 모듈의 시작 상태를 읽는다.</a:t>
+              <a:t>[설명] 오류를 대신 해결하지 말고 증상부터 우선 확인 순서대로 교육생이 실행하게 한다.</a:t>
             </a:r>
           </a:p>
           <a:p>
@@ -1718,7 +1725,7 @@
           </a:p>
           <a:p>
             <a:r>
-              <a:t>[확인] M21 YAML/Launch 시작 조건을 말할 수 있다.</a:t>
+              <a:t>[확인] 수정 뒤 첫 검증 명령을 다시 실행한다.</a:t>
             </a:r>
           </a:p>
           <a:p>
@@ -1728,7 +1735,7 @@
           </a:p>
           <a:p>
             <a:r>
-              <a:t>[오류] 오류가 나면 현재 폴더, source, 파일 경로를 먼저 확인한다.</a:t>
+              <a:t>[오류] 슬라이드의 두 대표 오류를 먼저 사용한다.</a:t>
             </a:r>
           </a:p>
         </p:txBody>
@@ -1798,6 +1805,186 @@
           <a:lstStyle/>
           <a:p>
             <a:r>
+              <a:t>[설명] 교육생이 직접 한 값만 바꿔 원인과 결과를 연결하게 한다.</a:t>
+            </a:r>
+          </a:p>
+          <a:p>
+            <a:r>
+              <a:t>[실행] 슬라이드의 명령 또는 파일 작성 단계를 진행한다.</a:t>
+            </a:r>
+          </a:p>
+          <a:p>
+            <a:r>
+              <a:t>[확인] 원래 값과 변경 값을 모두 기록한다.</a:t>
+            </a:r>
+          </a:p>
+          <a:p>
+            <a:r>
+              <a:t>[멈춤] 교육생이 현재 체크포인트를 통과할 때까지 기다린다.</a:t>
+            </a:r>
+          </a:p>
+          <a:p>
+            <a:r>
+              <a:t>[오류] 오류가 나면 현재 폴더, source, 파일 경로를 먼저 확인한다.</a:t>
+            </a:r>
+          </a:p>
+        </p:txBody>
+      </p:sp>
+      <p:sp>
+        <p:nvSpPr>
+          <p:cNvPr id="4" name="Slide Number Placeholder 3"/>
+          <p:cNvSpPr>
+            <a:spLocks noGrp="1"/>
+          </p:cNvSpPr>
+          <p:nvPr>
+            <p:ph type="sldNum" idx="5" sz="quarter"/>
+          </p:nvPr>
+        </p:nvSpPr>
+        <p:spPr/>
+      </p:sp>
+    </p:spTree>
+  </p:cSld>
+  <p:clrMapOvr>
+    <a:masterClrMapping/>
+  </p:clrMapOvr>
+</p:notes>
+</file>
+
+<file path=ppt/notesSlides/notesSlide23.xml><?xml version="1.0" encoding="utf-8"?>
+<p:notes xmlns:a="http://schemas.openxmlformats.org/drawingml/2006/main" xmlns:p="http://schemas.openxmlformats.org/presentationml/2006/main" xmlns:r="http://schemas.openxmlformats.org/officeDocument/2006/relationships">
+  <p:cSld>
+    <p:spTree>
+      <p:nvGrpSpPr>
+        <p:cNvPr id="1" name=""/>
+        <p:cNvGrpSpPr/>
+        <p:nvPr/>
+      </p:nvGrpSpPr>
+      <p:grpSpPr>
+        <a:xfrm>
+          <a:off x="0" y="0"/>
+          <a:ext cx="0" cy="0"/>
+          <a:chOff x="0" y="0"/>
+          <a:chExt cx="0" cy="0"/>
+        </a:xfrm>
+      </p:grpSpPr>
+      <p:sp>
+        <p:nvSpPr>
+          <p:cNvPr id="2" name="Slide Image Placeholder 1"/>
+          <p:cNvSpPr>
+            <a:spLocks noGrp="1"/>
+          </p:cNvSpPr>
+          <p:nvPr>
+            <p:ph type="sldImg" idx="2"/>
+          </p:nvPr>
+        </p:nvSpPr>
+        <p:spPr/>
+      </p:sp>
+      <p:sp>
+        <p:nvSpPr>
+          <p:cNvPr id="3" name="Notes Placeholder 2"/>
+          <p:cNvSpPr>
+            <a:spLocks noGrp="1"/>
+          </p:cNvSpPr>
+          <p:nvPr>
+            <p:ph type="body" idx="3" sz="quarter"/>
+          </p:nvPr>
+        </p:nvSpPr>
+        <p:spPr/>
+        <p:txBody>
+          <a:bodyPr/>
+          <a:lstStyle/>
+          <a:p>
+            <a:r>
+              <a:t>[설명] 교육생이 Complete·캡처·로그를 저장했는지 확인하고 다음 모듈의 시작 상태를 읽는다.</a:t>
+            </a:r>
+          </a:p>
+          <a:p>
+            <a:r>
+              <a:t>[실행] 슬라이드의 명령 또는 파일 작성 단계를 진행한다.</a:t>
+            </a:r>
+          </a:p>
+          <a:p>
+            <a:r>
+              <a:t>[확인] M21 YAML/Launch 시작 조건을 말할 수 있다.</a:t>
+            </a:r>
+          </a:p>
+          <a:p>
+            <a:r>
+              <a:t>[멈춤] 교육생이 현재 체크포인트를 통과할 때까지 기다린다.</a:t>
+            </a:r>
+          </a:p>
+          <a:p>
+            <a:r>
+              <a:t>[오류] 오류가 나면 현재 폴더, source, 파일 경로를 먼저 확인한다.</a:t>
+            </a:r>
+          </a:p>
+        </p:txBody>
+      </p:sp>
+      <p:sp>
+        <p:nvSpPr>
+          <p:cNvPr id="4" name="Slide Number Placeholder 3"/>
+          <p:cNvSpPr>
+            <a:spLocks noGrp="1"/>
+          </p:cNvSpPr>
+          <p:nvPr>
+            <p:ph type="sldNum" idx="5" sz="quarter"/>
+          </p:nvPr>
+        </p:nvSpPr>
+        <p:spPr/>
+      </p:sp>
+    </p:spTree>
+  </p:cSld>
+  <p:clrMapOvr>
+    <a:masterClrMapping/>
+  </p:clrMapOvr>
+</p:notes>
+</file>
+
+<file path=ppt/notesSlides/notesSlide24.xml><?xml version="1.0" encoding="utf-8"?>
+<p:notes xmlns:a="http://schemas.openxmlformats.org/drawingml/2006/main" xmlns:p="http://schemas.openxmlformats.org/presentationml/2006/main" xmlns:r="http://schemas.openxmlformats.org/officeDocument/2006/relationships">
+  <p:cSld>
+    <p:spTree>
+      <p:nvGrpSpPr>
+        <p:cNvPr id="1" name=""/>
+        <p:cNvGrpSpPr/>
+        <p:nvPr/>
+      </p:nvGrpSpPr>
+      <p:grpSpPr>
+        <a:xfrm>
+          <a:off x="0" y="0"/>
+          <a:ext cx="0" cy="0"/>
+          <a:chOff x="0" y="0"/>
+          <a:chExt cx="0" cy="0"/>
+        </a:xfrm>
+      </p:grpSpPr>
+      <p:sp>
+        <p:nvSpPr>
+          <p:cNvPr id="2" name="Slide Image Placeholder 1"/>
+          <p:cNvSpPr>
+            <a:spLocks noGrp="1"/>
+          </p:cNvSpPr>
+          <p:nvPr>
+            <p:ph type="sldImg" idx="2"/>
+          </p:nvPr>
+        </p:nvSpPr>
+        <p:spPr/>
+      </p:sp>
+      <p:sp>
+        <p:nvSpPr>
+          <p:cNvPr id="3" name="Notes Placeholder 2"/>
+          <p:cNvSpPr>
+            <a:spLocks noGrp="1"/>
+          </p:cNvSpPr>
+          <p:nvPr>
+            <p:ph type="body" idx="3" sz="quarter"/>
+          </p:nvPr>
+        </p:nvSpPr>
+        <p:spPr/>
+        <p:txBody>
+          <a:bodyPr/>
+          <a:lstStyle/>
+          <a:p>
+            <a:r>
               <a:t>[설명] 공식 문서는 버전 차이와 확장 학습을 확인할 때 사용한다.</a:t>
             </a:r>
           </a:p>
@@ -2248,22 +2435,17 @@
           <a:lstStyle/>
           <a:p>
             <a:r>
-              <a:t>[설명] P gain과 최대 속도는 overshoot 전에 먼저 보수적으로 제한한다.</a:t>
-            </a:r>
-          </a:p>
-          <a:p>
-            <a:r>
-              <a:t>[실행] ros2 run agv_control pid_controller --ros-args \</a:t>
-            </a:r>
-          </a:p>
-          <a:p>
-            <a:r>
-              <a:t>  -p kp_angular:=0.004 -p max_linear_speed:=0.25</a:t>
-            </a:r>
-          </a:p>
-          <a:p>
-            <a:r>
-              <a:t>[확인] 명령 출력에서 슬라이드의 확인 항목을 찾는다.</a:t>
+              <a:t>[설명] 파일을 코드 문법보다 먼저 역할·사용법·확인 화면으로 설명한다.</a:t>
+            </a:r>
+          </a:p>
+          <a:p>
+            <a:r>
+              <a:t>[실행] 슬라이드의 명령 또는 파일 작성 단계를 진행한다.</a:t>
+            </a:r>
+          </a:p>
+          <a:p>
+            <a:r>
+              <a:t>[확인] 교육생이 각 파일의 산출물과 확인 위치를 말할 수 있다.</a:t>
             </a:r>
           </a:p>
           <a:p>
@@ -2343,22 +2525,17 @@
           <a:lstStyle/>
           <a:p>
             <a:r>
-              <a:t>[설명] 입력 부호가 바뀌면 angular.z 부호도 기대 방향으로 바뀌어야 한다.</a:t>
-            </a:r>
-          </a:p>
-          <a:p>
-            <a:r>
-              <a:t>[실행] ros2 topic echo /target_error</a:t>
-            </a:r>
-          </a:p>
-          <a:p>
-            <a:r>
-              <a:t>ros2 topic echo /cmd_vel_raw</a:t>
-            </a:r>
-          </a:p>
-          <a:p>
-            <a:r>
-              <a:t>[확인] 명령 출력에서 슬라이드의 확인 항목을 찾는다.</a:t>
+              <a:t>[설명] 파일을 코드 문법보다 먼저 역할·사용법·확인 화면으로 설명한다.</a:t>
+            </a:r>
+          </a:p>
+          <a:p>
+            <a:r>
+              <a:t>[실행] 슬라이드의 명령 또는 파일 작성 단계를 진행한다.</a:t>
+            </a:r>
+          </a:p>
+          <a:p>
+            <a:r>
+              <a:t>[확인] 교육생이 각 파일의 산출물과 확인 위치를 말할 수 있다.</a:t>
             </a:r>
           </a:p>
           <a:p>
@@ -2438,17 +2615,22 @@
           <a:lstStyle/>
           <a:p>
             <a:r>
-              <a:t>[설명] ~/ros2_curri/agv_ws/src/agv_control/agv_control/pid_controller.py의 전체 파일을 1/3 구간으로 작성한다.</a:t>
-            </a:r>
-          </a:p>
-          <a:p>
-            <a:r>
-              <a:t>[실행] nano ~/ros2_curri/agv_ws/src/agv_control/agv_control/pid_controller.py</a:t>
-            </a:r>
-          </a:p>
-          <a:p>
-            <a:r>
-              <a:t>[확인] 코드를 저장하고 다음 코드 슬라이드 또는 build 단계로 이동한다.</a:t>
+              <a:t>[설명] P gain과 최대 속도는 overshoot 전에 먼저 보수적으로 제한한다.</a:t>
+            </a:r>
+          </a:p>
+          <a:p>
+            <a:r>
+              <a:t>[실행] ros2 run agv_control pid_controller --ros-args \</a:t>
+            </a:r>
+          </a:p>
+          <a:p>
+            <a:r>
+              <a:t>  -p kp_angular:=0.004 -p max_linear_speed:=0.25</a:t>
+            </a:r>
+          </a:p>
+          <a:p>
+            <a:r>
+              <a:t>[확인] 명령 출력에서 슬라이드의 확인 항목을 찾는다.</a:t>
             </a:r>
           </a:p>
           <a:p>
@@ -2458,7 +2640,7 @@
           </a:p>
           <a:p>
             <a:r>
-              <a:t>[오류] 들여쓰기·XML 태그·따옴표가 슬라이드와 정확히 같은지 확인한다.</a:t>
+              <a:t>[오류] 오류가 나면 현재 폴더, source, 파일 경로를 먼저 확인한다.</a:t>
             </a:r>
           </a:p>
         </p:txBody>
@@ -5831,7 +6013,7 @@
               </a:defRPr>
             </a:pPr>
             <a:r>
-              <a:t>파일을 계속 작성하고 저장한다 (2/3)</a:t>
+              <a:t>error와 command를 분리해 관찰한다</a:t>
             </a:r>
           </a:p>
         </p:txBody>
@@ -5870,7 +6052,7 @@
               </a:defRPr>
             </a:pPr>
             <a:r>
-              <a:t>~/ros2_curri/agv_ws/src/agv_control/agv_control/pid_controller.py</a:t>
+              <a:t>한 장에는 한 행동만 수행합니다.</a:t>
             </a:r>
           </a:p>
         </p:txBody>
@@ -6006,7 +6188,7 @@
               </a:defRPr>
             </a:pPr>
             <a:r>
-              <a:t>현재 단계 4/6    |    현재 폴더 ~/ros2_curri/agv_ws    |    현재 터미널</a:t>
+              <a:t>현재 단계 2/2    |    현재 폴더 ~/ros2_curri/agv_ws    |    현재 터미널</a:t>
             </a:r>
           </a:p>
         </p:txBody>
@@ -6019,8 +6201,8 @@
         </p:nvSpPr>
         <p:spPr>
           <a:xfrm>
-            <a:off x="658368" y="1627632"/>
-            <a:ext cx="10972800" cy="256032"/>
+            <a:off x="676656" y="1764792"/>
+            <a:ext cx="1828800" cy="347472"/>
           </a:xfrm>
           <a:prstGeom prst="rect">
             <a:avLst/>
@@ -6037,7 +6219,46 @@
               <a:spcAft>
                 <a:spcPts val="0"/>
               </a:spcAft>
-              <a:defRPr sz="1500" b="1">
+              <a:defRPr sz="1800" b="1">
+                <a:solidFill>
+                  <a:srgbClr val="225B9B"/>
+                </a:solidFill>
+                <a:latin typeface="Noto Sans CJK KR"/>
+              </a:defRPr>
+            </a:pPr>
+            <a:r>
+              <a:t>왜 하는가</a:t>
+            </a:r>
+          </a:p>
+        </p:txBody>
+      </p:sp>
+      <p:sp>
+        <p:nvSpPr>
+          <p:cNvPr id="8" name="TextBox 7"/>
+          <p:cNvSpPr txBox="1"/>
+          <p:nvPr/>
+        </p:nvSpPr>
+        <p:spPr>
+          <a:xfrm>
+            <a:off x="676656" y="2103120"/>
+            <a:ext cx="10789920" cy="512064"/>
+          </a:xfrm>
+          <a:prstGeom prst="rect">
+            <a:avLst/>
+          </a:prstGeom>
+          <a:noFill/>
+        </p:spPr>
+        <p:txBody>
+          <a:bodyPr wrap="square" lIns="73152" rIns="73152" tIns="36576" bIns="36576">
+            <a:spAutoFit/>
+          </a:bodyPr>
+          <a:lstStyle/>
+          <a:p>
+            <a:pPr algn="l">
+              <a:spcAft>
+                <a:spcPts val="0"/>
+              </a:spcAft>
+              <a:defRPr sz="2000" b="0">
                 <a:solidFill>
                   <a:srgbClr val="122C4E"/>
                 </a:solidFill>
@@ -6045,85 +6266,23 @@
               </a:defRPr>
             </a:pPr>
             <a:r>
-              <a:t>이번 단계: 파일의 전체 내용을 중간 생략 없이 작성합니다. 아래 줄 범위를 끝까지 입력하세요.</a:t>
-            </a:r>
-          </a:p>
-        </p:txBody>
-      </p:sp>
-      <p:sp>
-        <p:nvSpPr>
-          <p:cNvPr id="8" name="Rectangle 7"/>
+              <a:t>입력 부호가 바뀌면 angular.z 부호도 기대 방향으로 바뀌어야 한다.</a:t>
+            </a:r>
+          </a:p>
+        </p:txBody>
+      </p:sp>
+      <p:sp>
+        <p:nvSpPr>
+          <p:cNvPr id="9" name="Rounded Rectangle 8"/>
           <p:cNvSpPr/>
           <p:nvPr/>
         </p:nvSpPr>
         <p:spPr>
           <a:xfrm>
-            <a:off x="658368" y="1956816"/>
-            <a:ext cx="10972800" cy="603504"/>
-          </a:xfrm>
-          <a:prstGeom prst="rect">
-            <a:avLst/>
-          </a:prstGeom>
-          <a:solidFill>
-            <a:srgbClr val="F4F7FB"/>
-          </a:solidFill>
-          <a:ln>
-            <a:solidFill>
-              <a:srgbClr val="F4F7FB"/>
-            </a:solidFill>
-          </a:ln>
-        </p:spPr>
-        <p:style>
-          <a:lnRef idx="1">
-            <a:schemeClr val="accent1"/>
-          </a:lnRef>
-          <a:fillRef idx="3">
-            <a:schemeClr val="accent1"/>
-          </a:fillRef>
-          <a:effectRef idx="2">
-            <a:schemeClr val="accent1"/>
-          </a:effectRef>
-          <a:fontRef idx="minor">
-            <a:schemeClr val="lt1"/>
-          </a:fontRef>
-        </p:style>
-        <p:txBody>
-          <a:bodyPr rtlCol="0" anchor="ctr" wrap="square" lIns="73152" rIns="73152" tIns="36576" bIns="36576"/>
-          <a:lstStyle/>
-          <a:p>
-            <a:pPr algn="l">
-              <a:spcAft>
-                <a:spcPts val="0"/>
-              </a:spcAft>
-              <a:defRPr sz="1400" b="0">
-                <a:solidFill>
-                  <a:srgbClr val="122C4E"/>
-                </a:solidFill>
-                <a:latin typeface="DejaVu Sans Mono"/>
-              </a:defRPr>
-            </a:pPr>
-            <a:r>
-              <a:t>파일 생성: mkdir -p ~/ros2_curri/agv_ws/src/agv_control/agv_control</a:t>
-            </a:r>
-            <a:br/>
-            <a:r>
-              <a:t>파일 열기: nano ~/ros2_curri/agv_ws/src/agv_control/agv_control/pid_controller.py</a:t>
-            </a:r>
-          </a:p>
-        </p:txBody>
-      </p:sp>
-      <p:sp>
-        <p:nvSpPr>
-          <p:cNvPr id="9" name="Rectangle 8"/>
-          <p:cNvSpPr/>
-          <p:nvPr/>
-        </p:nvSpPr>
-        <p:spPr>
-          <a:xfrm>
-            <a:off x="658368" y="2706624"/>
-            <a:ext cx="10972800" cy="3364992"/>
-          </a:xfrm>
-          <a:prstGeom prst="rect">
+            <a:off x="676656" y="2871216"/>
+            <a:ext cx="10835640" cy="2331720"/>
+          </a:xfrm>
+          <a:prstGeom prst="roundRect">
             <a:avLst/>
           </a:prstGeom>
           <a:solidFill>
@@ -6150,14 +6309,14 @@
           </a:fontRef>
         </p:style>
         <p:txBody>
-          <a:bodyPr rtlCol="0" anchor="ctr" wrap="square" lIns="164592" rIns="164592" tIns="109728" bIns="36576"/>
+          <a:bodyPr rtlCol="0" anchor="ctr" wrap="square" lIns="73152" rIns="73152" tIns="36576" bIns="36576"/>
           <a:lstStyle/>
           <a:p>
             <a:pPr algn="l">
               <a:spcAft>
                 <a:spcPts val="0"/>
               </a:spcAft>
-              <a:defRPr sz="1400" b="0">
+              <a:defRPr sz="1600" b="0">
                 <a:solidFill>
                   <a:srgbClr val="FFFFFF"/>
                 </a:solidFill>
@@ -6165,46 +6324,12 @@
               </a:defRPr>
             </a:pPr>
             <a:r>
-              <a:t>        self.publisher = self.create_publisher(Twist, '/cmd_vel_raw', 10)</a:t>
+              <a:t>ros2 topic echo /target_error</a:t>
             </a:r>
             <a:br/>
             <a:r>
-              <a:t>        self.create_subscription(Twist, '/target_error', self.error_callback, 10)</a:t>
-            </a:r>
-            <a:br/>
-            <a:br/>
-            <a:r>
-              <a:t>    def error_callback(self, error):</a:t>
-            </a:r>
-            <a:br/>
-            <a:r>
-              <a:t>        command = Twist()</a:t>
-            </a:r>
-            <a:br/>
-            <a:r>
-              <a:t>        command.linear.x = min(max(error.linear.x, 0.0),</a:t>
-            </a:r>
-            <a:br/>
-            <a:r>
-              <a:t>            self.get_parameter('max_linear_speed').value)</a:t>
-            </a:r>
-            <a:br/>
-            <a:r>
-              <a:t>        command.angular.z = max(min(error.angular.z * self.get_parameter('kp_angular').value,</a:t>
-            </a:r>
-            <a:br/>
-            <a:r>
-              <a:t>             self.get_parameter('max_angular_speed').value),</a:t>
-            </a:r>
-            <a:br/>
-            <a:r>
-              <a:t>            -self.get_parameter('max_angular_speed').value)</a:t>
-            </a:r>
-            <a:br/>
-            <a:r>
-              <a:t>        self.publisher.publish(command)</a:t>
-            </a:r>
-            <a:br/>
+              <a:t>ros2 topic echo /cmd_vel_raw</a:t>
+            </a:r>
           </a:p>
         </p:txBody>
       </p:sp>
@@ -6216,8 +6341,8 @@
         </p:nvSpPr>
         <p:spPr>
           <a:xfrm>
-            <a:off x="749808" y="6181344"/>
-            <a:ext cx="10789920" cy="201168"/>
+            <a:off x="768096" y="5468112"/>
+            <a:ext cx="1143000" cy="256032"/>
           </a:xfrm>
           <a:prstGeom prst="rect">
             <a:avLst/>
@@ -6234,15 +6359,54 @@
               <a:spcAft>
                 <a:spcPts val="0"/>
               </a:spcAft>
-              <a:defRPr sz="1000" b="0">
-                <a:solidFill>
-                  <a:srgbClr val="5C6672"/>
-                </a:solidFill>
-                <a:latin typeface="Noto Sans CJK KR"/>
-              </a:defRPr>
-            </a:pPr>
-            <a:r>
-              <a:t>파일 전체 2/3 · 이 슬라이드 다음에 같은 파일의 나머지 줄이 이어집니다.</a:t>
+              <a:defRPr sz="1800" b="1">
+                <a:solidFill>
+                  <a:srgbClr val="2A8B5A"/>
+                </a:solidFill>
+                <a:latin typeface="Noto Sans CJK KR"/>
+              </a:defRPr>
+            </a:pPr>
+            <a:r>
+              <a:t>확인</a:t>
+            </a:r>
+          </a:p>
+        </p:txBody>
+      </p:sp>
+      <p:sp>
+        <p:nvSpPr>
+          <p:cNvPr id="11" name="TextBox 10"/>
+          <p:cNvSpPr txBox="1"/>
+          <p:nvPr/>
+        </p:nvSpPr>
+        <p:spPr>
+          <a:xfrm>
+            <a:off x="768096" y="5742432"/>
+            <a:ext cx="10561320" cy="347472"/>
+          </a:xfrm>
+          <a:prstGeom prst="rect">
+            <a:avLst/>
+          </a:prstGeom>
+          <a:noFill/>
+        </p:spPr>
+        <p:txBody>
+          <a:bodyPr wrap="square" lIns="73152" rIns="73152" tIns="36576" bIns="36576">
+            <a:spAutoFit/>
+          </a:bodyPr>
+          <a:lstStyle/>
+          <a:p>
+            <a:pPr algn="l">
+              <a:spcAft>
+                <a:spcPts val="0"/>
+              </a:spcAft>
+              <a:defRPr sz="1800" b="0">
+                <a:solidFill>
+                  <a:srgbClr val="122C4E"/>
+                </a:solidFill>
+                <a:latin typeface="Noto Sans CJK KR"/>
+              </a:defRPr>
+            </a:pPr>
+            <a:r>
+              <a:t>명령의 출력에서 topic·frame·파일 이름 또는 성공 메시지를 찾으면 이 단계가 완료됩니다.</a:t>
             </a:r>
           </a:p>
         </p:txBody>
@@ -6299,7 +6463,7 @@
               </a:defRPr>
             </a:pPr>
             <a:r>
-              <a:t>파일을 계속 작성하고 저장한다 (3/3)</a:t>
+              <a:t>파일을 새로 만들고 저장한다 (1/3)</a:t>
             </a:r>
           </a:p>
         </p:txBody>
@@ -6474,7 +6638,7 @@
               </a:defRPr>
             </a:pPr>
             <a:r>
-              <a:t>현재 단계 5/6    |    현재 폴더 ~/ros2_curri/agv_ws    |    현재 터미널</a:t>
+              <a:t>현재 단계 3/6    |    현재 폴더 ~/ros2_curri/agv_ws    |    현재 터미널</a:t>
             </a:r>
           </a:p>
         </p:txBody>
@@ -6633,47 +6797,45 @@
               </a:defRPr>
             </a:pPr>
             <a:r>
-              <a:t>def main():</a:t>
+              <a:t>import rclpy</a:t>
             </a:r>
             <a:br/>
             <a:r>
-              <a:t>    rclpy.init()</a:t>
+              <a:t>from rclpy.node import Node</a:t>
             </a:r>
             <a:br/>
             <a:r>
-              <a:t>    node = PidController()</a:t>
+              <a:t>from geometry_msgs.msg import Twist</a:t>
             </a:r>
             <a:br/>
-            <a:r>
-              <a:t>    try:</a:t>
-            </a:r>
             <a:br/>
             <a:r>
-              <a:t>        rclpy.spin(node)</a:t>
+              <a:t>class PidController(Node):</a:t>
             </a:r>
             <a:br/>
             <a:r>
-              <a:t>    except KeyboardInterrupt:</a:t>
+              <a:t>    """A small P-only starting point: replace with PI/PID after observing overshoot."""</a:t>
             </a:r>
             <a:br/>
-            <a:r>
-              <a:t>        pass</a:t>
-            </a:r>
             <a:br/>
             <a:r>
-              <a:t>    finally:</a:t>
+              <a:t>    def __init__(self):</a:t>
             </a:r>
             <a:br/>
             <a:r>
-              <a:t>        node.destroy_node()</a:t>
+              <a:t>        super().__init__('pid_controller')</a:t>
             </a:r>
             <a:br/>
             <a:r>
-              <a:t>        if rclpy.ok():</a:t>
+              <a:t>        self.declare_parameter('kp_angular', 0.004)</a:t>
             </a:r>
             <a:br/>
             <a:r>
-              <a:t>            rclpy.shutdown()</a:t>
+              <a:t>        self.declare_parameter('max_linear_speed', 0.25)</a:t>
+            </a:r>
+            <a:br/>
+            <a:r>
+              <a:t>        self.declare_parameter('max_angular_speed', 0.8)</a:t>
             </a:r>
           </a:p>
         </p:txBody>
@@ -6712,7 +6874,7 @@
               </a:defRPr>
             </a:pPr>
             <a:r>
-              <a:t>파일 전체 3/3 · 이 슬라이드 다음에 같은 파일의 나머지 줄이 이어집니다.</a:t>
+              <a:t>파일 전체 1/3 · 이 슬라이드 다음에 같은 파일의 나머지 줄이 이어집니다.</a:t>
             </a:r>
           </a:p>
         </p:txBody>
@@ -6769,7 +6931,7 @@
               </a:defRPr>
             </a:pPr>
             <a:r>
-              <a:t>파일을 새로 만들고 저장한다 (1/1)</a:t>
+              <a:t>파일을 계속 작성하고 저장한다 (2/3)</a:t>
             </a:r>
           </a:p>
         </p:txBody>
@@ -6808,7 +6970,7 @@
               </a:defRPr>
             </a:pPr>
             <a:r>
-              <a:t>~/ros2_curri/agv_ws/src/agv_control/setup.py</a:t>
+              <a:t>~/ros2_curri/agv_ws/src/agv_control/agv_control/pid_controller.py</a:t>
             </a:r>
           </a:p>
         </p:txBody>
@@ -6944,7 +7106,7 @@
               </a:defRPr>
             </a:pPr>
             <a:r>
-              <a:t>현재 단계 6/7    |    현재 폴더 ~/ros2_curri/agv_ws    |    현재 터미널</a:t>
+              <a:t>현재 단계 4/6    |    현재 폴더 ~/ros2_curri/agv_ws    |    현재 터미널</a:t>
             </a:r>
           </a:p>
         </p:txBody>
@@ -7041,11 +7203,11 @@
               </a:defRPr>
             </a:pPr>
             <a:r>
-              <a:t>파일 생성: mkdir -p ~/ros2_curri/agv_ws/src/agv_control</a:t>
+              <a:t>파일 생성: mkdir -p ~/ros2_curri/agv_ws/src/agv_control/agv_control</a:t>
             </a:r>
             <a:br/>
             <a:r>
-              <a:t>파일 열기: nano ~/ros2_curri/agv_ws/src/agv_control/setup.py</a:t>
+              <a:t>파일 열기: nano ~/ros2_curri/agv_ws/src/agv_control/agv_control/pid_controller.py</a:t>
             </a:r>
           </a:p>
         </p:txBody>
@@ -7103,52 +7265,46 @@
               </a:defRPr>
             </a:pPr>
             <a:r>
-              <a:t>from setuptools import find_packages, setup</a:t>
+              <a:t>        self.publisher = self.create_publisher(Twist, '/cmd_vel_raw', 10)</a:t>
             </a:r>
             <a:br/>
             <a:r>
-              <a:t>package_name = 'agv_control'</a:t>
+              <a:t>        self.create_subscription(Twist, '/target_error', self.error_callback, 10)</a:t>
             </a:r>
             <a:br/>
-            <a:r>
-              <a:t>setup(name=package_name, version='0.1.0', packages=find_packages(exclude=['test']),</a:t>
-            </a:r>
             <a:br/>
             <a:r>
-              <a:t>    data_files=[('share/ament_index/resource_index/packages',</a:t>
+              <a:t>    def error_callback(self, error):</a:t>
             </a:r>
             <a:br/>
             <a:r>
-              <a:t>    ['resource/' + package_name]), ('share/' + package_name, ['package.xml']),</a:t>
+              <a:t>        command = Twist()</a:t>
             </a:r>
             <a:br/>
             <a:r>
-              <a:t>    ('share/' + package_name + '/config', ['config/controllers.yaml'])],</a:t>
+              <a:t>        command.linear.x = min(max(error.linear.x, 0.0),</a:t>
             </a:r>
             <a:br/>
             <a:r>
-              <a:t>    install_requires=['setuptools'], zip_safe=True, maintainer='AGV student',</a:t>
+              <a:t>            self.get_parameter('max_linear_speed').value)</a:t>
             </a:r>
             <a:br/>
             <a:r>
-              <a:t>    maintainer_email='student@example.com', license='Apache-2.0',</a:t>
+              <a:t>        command.angular.z = max(min(error.angular.z * self.get_parameter('kp_angular').value,</a:t>
             </a:r>
             <a:br/>
             <a:r>
-              <a:t>    entry_points={'console_scripts': ['counter_publisher = agv_control.counter_publisher:main',</a:t>
+              <a:t>             self.get_parameter('max_angular_speed').value),</a:t>
             </a:r>
             <a:br/>
             <a:r>
-              <a:t>     'counter_monitor = agv_control.counter_monitor:main', 'cmd_test_node = agv_control.cmd_test_node:main',</a:t>
+              <a:t>            -self.get_parameter('max_angular_speed').value)</a:t>
             </a:r>
             <a:br/>
             <a:r>
-              <a:t>     'velocity_monitor = agv_control.velocity_monitor:main', 'safety_controller = agv_control.safety_controller:main',</a:t>
+              <a:t>        self.publisher.publish(command)</a:t>
             </a:r>
             <a:br/>
-            <a:r>
-              <a:t>     'pid_controller = agv_control.pid_controller:main']})</a:t>
-            </a:r>
           </a:p>
         </p:txBody>
       </p:sp>
@@ -7186,7 +7342,7 @@
               </a:defRPr>
             </a:pPr>
             <a:r>
-              <a:t>파일 전체 1/1 · 이 슬라이드 다음에 같은 파일의 나머지 줄이 이어집니다.</a:t>
+              <a:t>파일 전체 2/3 · 이 슬라이드 다음에 같은 파일의 나머지 줄이 이어집니다.</a:t>
             </a:r>
           </a:p>
         </p:txBody>
@@ -7243,7 +7399,7 @@
               </a:defRPr>
             </a:pPr>
             <a:r>
-              <a:t>파일을 새로 만들고 저장한다 (1/2)</a:t>
+              <a:t>파일을 계속 작성하고 저장한다 (3/3)</a:t>
             </a:r>
           </a:p>
         </p:txBody>
@@ -7282,7 +7438,7 @@
               </a:defRPr>
             </a:pPr>
             <a:r>
-              <a:t>~/ros2_curri/agv_ws/src/agv_bringup/config/mission.yaml</a:t>
+              <a:t>~/ros2_curri/agv_ws/src/agv_control/agv_control/pid_controller.py</a:t>
             </a:r>
           </a:p>
         </p:txBody>
@@ -7418,7 +7574,7 @@
               </a:defRPr>
             </a:pPr>
             <a:r>
-              <a:t>현재 단계 7/9    |    현재 폴더 ~/ros2_curri/agv_ws    |    현재 터미널</a:t>
+              <a:t>현재 단계 5/6    |    현재 폴더 ~/ros2_curri/agv_ws    |    현재 터미널</a:t>
             </a:r>
           </a:p>
         </p:txBody>
@@ -7515,11 +7671,11 @@
               </a:defRPr>
             </a:pPr>
             <a:r>
-              <a:t>파일 생성: mkdir -p ~/ros2_curri/agv_ws/src/agv_bringup/config</a:t>
+              <a:t>파일 생성: mkdir -p ~/ros2_curri/agv_ws/src/agv_control/agv_control</a:t>
             </a:r>
             <a:br/>
             <a:r>
-              <a:t>파일 열기: nano ~/ros2_curri/agv_ws/src/agv_bringup/config/mission.yaml</a:t>
+              <a:t>파일 열기: nano ~/ros2_curri/agv_ws/src/agv_control/agv_control/pid_controller.py</a:t>
             </a:r>
           </a:p>
         </p:txBody>
@@ -7577,51 +7733,47 @@
               </a:defRPr>
             </a:pPr>
             <a:r>
-              <a:t>mission_manager:</a:t>
+              <a:t>def main():</a:t>
             </a:r>
             <a:br/>
             <a:r>
-              <a:t>  ros__parameters:</a:t>
+              <a:t>    rclpy.init()</a:t>
             </a:r>
             <a:br/>
             <a:r>
-              <a:t>    use_sim_time: true</a:t>
+              <a:t>    node = PidController()</a:t>
             </a:r>
             <a:br/>
             <a:r>
-              <a:t>    stop_distance: 0.50</a:t>
+              <a:t>    try:</a:t>
             </a:r>
             <a:br/>
             <a:r>
-              <a:t>    search_speed: 0.25</a:t>
+              <a:t>        rclpy.spin(node)</a:t>
             </a:r>
             <a:br/>
             <a:r>
-              <a:t>    approach_speed: 0.15</a:t>
+              <a:t>    except KeyboardInterrupt:</a:t>
             </a:r>
             <a:br/>
             <a:r>
-              <a:t>    image_center_x: 320</a:t>
+              <a:t>        pass</a:t>
             </a:r>
             <a:br/>
             <a:r>
-              <a:t>    target_timeout_sec: 0.70</a:t>
+              <a:t>    finally:</a:t>
             </a:r>
             <a:br/>
             <a:r>
-              <a:t>safety_controller:</a:t>
+              <a:t>        node.destroy_node()</a:t>
             </a:r>
             <a:br/>
             <a:r>
-              <a:t>  ros__parameters:</a:t>
+              <a:t>        if rclpy.ok():</a:t>
             </a:r>
             <a:br/>
             <a:r>
-              <a:t>    use_sim_time: true</a:t>
-            </a:r>
-            <a:br/>
-            <a:r>
-              <a:t>    stop_distance: 0.50</a:t>
+              <a:t>            rclpy.shutdown()</a:t>
             </a:r>
           </a:p>
         </p:txBody>
@@ -7660,7 +7812,7 @@
               </a:defRPr>
             </a:pPr>
             <a:r>
-              <a:t>파일 전체 1/2 · 이 슬라이드 다음에 같은 파일의 나머지 줄이 이어집니다.</a:t>
+              <a:t>파일 전체 3/3 · 이 슬라이드 다음에 같은 파일의 나머지 줄이 이어집니다.</a:t>
             </a:r>
           </a:p>
         </p:txBody>
@@ -7717,7 +7869,7 @@
               </a:defRPr>
             </a:pPr>
             <a:r>
-              <a:t>파일을 계속 작성하고 저장한다 (2/2)</a:t>
+              <a:t>파일을 새로 만들고 저장한다 (1/1)</a:t>
             </a:r>
           </a:p>
         </p:txBody>
@@ -7756,7 +7908,7 @@
               </a:defRPr>
             </a:pPr>
             <a:r>
-              <a:t>~/ros2_curri/agv_ws/src/agv_bringup/config/mission.yaml</a:t>
+              <a:t>~/ros2_curri/agv_ws/src/agv_control/setup.py</a:t>
             </a:r>
           </a:p>
         </p:txBody>
@@ -7892,7 +8044,7 @@
               </a:defRPr>
             </a:pPr>
             <a:r>
-              <a:t>현재 단계 8/9    |    현재 폴더 ~/ros2_curri/agv_ws    |    현재 터미널</a:t>
+              <a:t>현재 단계 6/7    |    현재 폴더 ~/ros2_curri/agv_ws    |    현재 터미널</a:t>
             </a:r>
           </a:p>
         </p:txBody>
@@ -7989,11 +8141,11 @@
               </a:defRPr>
             </a:pPr>
             <a:r>
-              <a:t>파일 생성: mkdir -p ~/ros2_curri/agv_ws/src/agv_bringup/config</a:t>
+              <a:t>파일 생성: mkdir -p ~/ros2_curri/agv_ws/src/agv_control</a:t>
             </a:r>
             <a:br/>
             <a:r>
-              <a:t>파일 열기: nano ~/ros2_curri/agv_ws/src/agv_bringup/config/mission.yaml</a:t>
+              <a:t>파일 열기: nano ~/ros2_curri/agv_ws/src/agv_control/setup.py</a:t>
             </a:r>
           </a:p>
         </p:txBody>
@@ -8051,7 +8203,51 @@
               </a:defRPr>
             </a:pPr>
             <a:r>
-              <a:t>    front_half_angle_deg: 15.0</a:t>
+              <a:t>from setuptools import find_packages, setup</a:t>
+            </a:r>
+            <a:br/>
+            <a:r>
+              <a:t>package_name = 'agv_control'</a:t>
+            </a:r>
+            <a:br/>
+            <a:r>
+              <a:t>setup(name=package_name, version='0.1.0', packages=find_packages(exclude=['test']),</a:t>
+            </a:r>
+            <a:br/>
+            <a:r>
+              <a:t>    data_files=[('share/ament_index/resource_index/packages',</a:t>
+            </a:r>
+            <a:br/>
+            <a:r>
+              <a:t>    ['resource/' + package_name]), ('share/' + package_name, ['package.xml']),</a:t>
+            </a:r>
+            <a:br/>
+            <a:r>
+              <a:t>    ('share/' + package_name + '/config', ['config/controllers.yaml'])],</a:t>
+            </a:r>
+            <a:br/>
+            <a:r>
+              <a:t>    install_requires=['setuptools'], zip_safe=True, maintainer='AGV student',</a:t>
+            </a:r>
+            <a:br/>
+            <a:r>
+              <a:t>    maintainer_email='student@example.com', license='Apache-2.0',</a:t>
+            </a:r>
+            <a:br/>
+            <a:r>
+              <a:t>    entry_points={'console_scripts': ['counter_publisher = agv_control.counter_publisher:main',</a:t>
+            </a:r>
+            <a:br/>
+            <a:r>
+              <a:t>     'counter_monitor = agv_control.counter_monitor:main', 'cmd_test_node = agv_control.cmd_test_node:main',</a:t>
+            </a:r>
+            <a:br/>
+            <a:r>
+              <a:t>     'velocity_monitor = agv_control.velocity_monitor:main', 'safety_controller = agv_control.safety_controller:main',</a:t>
+            </a:r>
+            <a:br/>
+            <a:r>
+              <a:t>     'pid_controller = agv_control.pid_controller:main']})</a:t>
             </a:r>
           </a:p>
         </p:txBody>
@@ -8090,7 +8286,7 @@
               </a:defRPr>
             </a:pPr>
             <a:r>
-              <a:t>파일 전체 2/2 · 이 슬라이드 다음에 같은 파일의 나머지 줄이 이어집니다.</a:t>
+              <a:t>파일 전체 1/1 · 이 슬라이드 다음에 같은 파일의 나머지 줄이 이어집니다.</a:t>
             </a:r>
           </a:p>
         </p:txBody>
@@ -8147,7 +8343,7 @@
               </a:defRPr>
             </a:pPr>
             <a:r>
-              <a:t>build → source → run 순서로 실행한다</a:t>
+              <a:t>파일을 새로 만들고 저장한다 (1/2)</a:t>
             </a:r>
           </a:p>
         </p:txBody>
@@ -8186,7 +8382,7 @@
               </a:defRPr>
             </a:pPr>
             <a:r>
-              <a:t>새 파일 또는 수정 파일은 build와 source 뒤에만 실행 이름·설정에 반영됩니다.</a:t>
+              <a:t>~/ros2_curri/agv_ws/src/agv_bringup/config/mission.yaml</a:t>
             </a:r>
           </a:p>
         </p:txBody>
@@ -8322,23 +8518,124 @@
               </a:defRPr>
             </a:pPr>
             <a:r>
-              <a:t>현재 단계 실행    |    현재 폴더 ~/ros2_curri/agv_ws    |    현재 터미널</a:t>
-            </a:r>
-          </a:p>
-        </p:txBody>
-      </p:sp>
-      <p:sp>
-        <p:nvSpPr>
-          <p:cNvPr id="7" name="Rounded Rectangle 6"/>
+              <a:t>현재 단계 7/9    |    현재 폴더 ~/ros2_curri/agv_ws    |    현재 터미널</a:t>
+            </a:r>
+          </a:p>
+        </p:txBody>
+      </p:sp>
+      <p:sp>
+        <p:nvSpPr>
+          <p:cNvPr id="7" name="TextBox 6"/>
+          <p:cNvSpPr txBox="1"/>
+          <p:nvPr/>
+        </p:nvSpPr>
+        <p:spPr>
+          <a:xfrm>
+            <a:off x="658368" y="1627632"/>
+            <a:ext cx="10972800" cy="256032"/>
+          </a:xfrm>
+          <a:prstGeom prst="rect">
+            <a:avLst/>
+          </a:prstGeom>
+          <a:noFill/>
+        </p:spPr>
+        <p:txBody>
+          <a:bodyPr wrap="square" lIns="73152" rIns="73152" tIns="36576" bIns="36576">
+            <a:spAutoFit/>
+          </a:bodyPr>
+          <a:lstStyle/>
+          <a:p>
+            <a:pPr algn="l">
+              <a:spcAft>
+                <a:spcPts val="0"/>
+              </a:spcAft>
+              <a:defRPr sz="1500" b="1">
+                <a:solidFill>
+                  <a:srgbClr val="122C4E"/>
+                </a:solidFill>
+                <a:latin typeface="Noto Sans CJK KR"/>
+              </a:defRPr>
+            </a:pPr>
+            <a:r>
+              <a:t>이번 단계: 파일의 전체 내용을 중간 생략 없이 작성합니다. 아래 줄 범위를 끝까지 입력하세요.</a:t>
+            </a:r>
+          </a:p>
+        </p:txBody>
+      </p:sp>
+      <p:sp>
+        <p:nvSpPr>
+          <p:cNvPr id="8" name="Rectangle 7"/>
           <p:cNvSpPr/>
           <p:nvPr/>
         </p:nvSpPr>
         <p:spPr>
           <a:xfrm>
-            <a:off x="658368" y="1700784"/>
-            <a:ext cx="10972800" cy="3182112"/>
-          </a:xfrm>
-          <a:prstGeom prst="roundRect">
+            <a:off x="658368" y="1956816"/>
+            <a:ext cx="10972800" cy="603504"/>
+          </a:xfrm>
+          <a:prstGeom prst="rect">
+            <a:avLst/>
+          </a:prstGeom>
+          <a:solidFill>
+            <a:srgbClr val="F4F7FB"/>
+          </a:solidFill>
+          <a:ln>
+            <a:solidFill>
+              <a:srgbClr val="F4F7FB"/>
+            </a:solidFill>
+          </a:ln>
+        </p:spPr>
+        <p:style>
+          <a:lnRef idx="1">
+            <a:schemeClr val="accent1"/>
+          </a:lnRef>
+          <a:fillRef idx="3">
+            <a:schemeClr val="accent1"/>
+          </a:fillRef>
+          <a:effectRef idx="2">
+            <a:schemeClr val="accent1"/>
+          </a:effectRef>
+          <a:fontRef idx="minor">
+            <a:schemeClr val="lt1"/>
+          </a:fontRef>
+        </p:style>
+        <p:txBody>
+          <a:bodyPr rtlCol="0" anchor="ctr" wrap="square" lIns="73152" rIns="73152" tIns="36576" bIns="36576"/>
+          <a:lstStyle/>
+          <a:p>
+            <a:pPr algn="l">
+              <a:spcAft>
+                <a:spcPts val="0"/>
+              </a:spcAft>
+              <a:defRPr sz="1400" b="0">
+                <a:solidFill>
+                  <a:srgbClr val="122C4E"/>
+                </a:solidFill>
+                <a:latin typeface="DejaVu Sans Mono"/>
+              </a:defRPr>
+            </a:pPr>
+            <a:r>
+              <a:t>파일 생성: mkdir -p ~/ros2_curri/agv_ws/src/agv_bringup/config</a:t>
+            </a:r>
+            <a:br/>
+            <a:r>
+              <a:t>파일 열기: nano ~/ros2_curri/agv_ws/src/agv_bringup/config/mission.yaml</a:t>
+            </a:r>
+          </a:p>
+        </p:txBody>
+      </p:sp>
+      <p:sp>
+        <p:nvSpPr>
+          <p:cNvPr id="9" name="Rectangle 8"/>
+          <p:cNvSpPr/>
+          <p:nvPr/>
+        </p:nvSpPr>
+        <p:spPr>
+          <a:xfrm>
+            <a:off x="658368" y="2706624"/>
+            <a:ext cx="10972800" cy="3364992"/>
+          </a:xfrm>
+          <a:prstGeom prst="rect">
             <a:avLst/>
           </a:prstGeom>
           <a:solidFill>
@@ -8365,14 +8662,14 @@
           </a:fontRef>
         </p:style>
         <p:txBody>
-          <a:bodyPr rtlCol="0" anchor="ctr" wrap="square" lIns="73152" rIns="73152" tIns="36576" bIns="36576"/>
+          <a:bodyPr rtlCol="0" anchor="ctr" wrap="square" lIns="164592" rIns="164592" tIns="109728" bIns="36576"/>
           <a:lstStyle/>
           <a:p>
             <a:pPr algn="l">
               <a:spcAft>
                 <a:spcPts val="0"/>
               </a:spcAft>
-              <a:defRPr sz="1600" b="0">
+              <a:defRPr sz="1400" b="0">
                 <a:solidFill>
                   <a:srgbClr val="FFFFFF"/>
                 </a:solidFill>
@@ -8380,25 +8677,65 @@
               </a:defRPr>
             </a:pPr>
             <a:r>
-              <a:t>source ~/ros2_curri/agv_ws/install/setup.bash</a:t>
+              <a:t>mission_manager:</a:t>
             </a:r>
             <a:br/>
             <a:r>
-              <a:t>ros2 run agv_control pid_controller --ros-args -p kp_angular:=0.004</a:t>
-            </a:r>
-          </a:p>
-        </p:txBody>
-      </p:sp>
-      <p:sp>
-        <p:nvSpPr>
-          <p:cNvPr id="8" name="TextBox 7"/>
+              <a:t>  ros__parameters:</a:t>
+            </a:r>
+            <a:br/>
+            <a:r>
+              <a:t>    use_sim_time: true</a:t>
+            </a:r>
+            <a:br/>
+            <a:r>
+              <a:t>    stop_distance: 0.50</a:t>
+            </a:r>
+            <a:br/>
+            <a:r>
+              <a:t>    search_speed: 0.25</a:t>
+            </a:r>
+            <a:br/>
+            <a:r>
+              <a:t>    approach_speed: 0.15</a:t>
+            </a:r>
+            <a:br/>
+            <a:r>
+              <a:t>    image_center_x: 320</a:t>
+            </a:r>
+            <a:br/>
+            <a:r>
+              <a:t>    target_timeout_sec: 0.70</a:t>
+            </a:r>
+            <a:br/>
+            <a:r>
+              <a:t>safety_controller:</a:t>
+            </a:r>
+            <a:br/>
+            <a:r>
+              <a:t>  ros__parameters:</a:t>
+            </a:r>
+            <a:br/>
+            <a:r>
+              <a:t>    use_sim_time: true</a:t>
+            </a:r>
+            <a:br/>
+            <a:r>
+              <a:t>    stop_distance: 0.50</a:t>
+            </a:r>
+          </a:p>
+        </p:txBody>
+      </p:sp>
+      <p:sp>
+        <p:nvSpPr>
+          <p:cNvPr id="10" name="TextBox 9"/>
           <p:cNvSpPr txBox="1"/>
           <p:nvPr/>
         </p:nvSpPr>
         <p:spPr>
           <a:xfrm>
-            <a:off x="786384" y="5239512"/>
-            <a:ext cx="1261872" cy="237744"/>
+            <a:off x="749808" y="6181344"/>
+            <a:ext cx="10789920" cy="201168"/>
           </a:xfrm>
           <a:prstGeom prst="rect">
             <a:avLst/>
@@ -8415,54 +8752,15 @@
               <a:spcAft>
                 <a:spcPts val="0"/>
               </a:spcAft>
-              <a:defRPr sz="1800" b="1">
-                <a:solidFill>
-                  <a:srgbClr val="2A8B5A"/>
-                </a:solidFill>
-                <a:latin typeface="Noto Sans CJK KR"/>
-              </a:defRPr>
-            </a:pPr>
-            <a:r>
-              <a:t>확인 기준</a:t>
-            </a:r>
-          </a:p>
-        </p:txBody>
-      </p:sp>
-      <p:sp>
-        <p:nvSpPr>
-          <p:cNvPr id="9" name="TextBox 8"/>
-          <p:cNvSpPr txBox="1"/>
-          <p:nvPr/>
-        </p:nvSpPr>
-        <p:spPr>
-          <a:xfrm>
-            <a:off x="786384" y="5532120"/>
-            <a:ext cx="10469880" cy="420624"/>
-          </a:xfrm>
-          <a:prstGeom prst="rect">
-            <a:avLst/>
-          </a:prstGeom>
-          <a:noFill/>
-        </p:spPr>
-        <p:txBody>
-          <a:bodyPr wrap="square" lIns="73152" rIns="73152" tIns="36576" bIns="36576">
-            <a:spAutoFit/>
-          </a:bodyPr>
-          <a:lstStyle/>
-          <a:p>
-            <a:pPr algn="l">
-              <a:spcAft>
-                <a:spcPts val="0"/>
-              </a:spcAft>
-              <a:defRPr sz="1800" b="0">
-                <a:solidFill>
-                  <a:srgbClr val="122C4E"/>
-                </a:solidFill>
-                <a:latin typeface="Noto Sans CJK KR"/>
-              </a:defRPr>
-            </a:pPr>
-            <a:r>
-              <a:t>kp_angular·max speed parameter와 saturation이 /cmd_vel_raw 출력을 제한하는 것을 확인한다.</a:t>
+              <a:defRPr sz="1000" b="0">
+                <a:solidFill>
+                  <a:srgbClr val="5C6672"/>
+                </a:solidFill>
+                <a:latin typeface="Noto Sans CJK KR"/>
+              </a:defRPr>
+            </a:pPr>
+            <a:r>
+              <a:t>파일 전체 1/2 · 이 슬라이드 다음에 같은 파일의 나머지 줄이 이어집니다.</a:t>
             </a:r>
           </a:p>
         </p:txBody>
@@ -8519,7 +8817,7 @@
               </a:defRPr>
             </a:pPr>
             <a:r>
-              <a:t>정상 결과: 실제 환경에서 확인한 출력</a:t>
+              <a:t>파일을 계속 작성하고 저장한다 (2/2)</a:t>
             </a:r>
           </a:p>
         </p:txBody>
@@ -8558,7 +8856,7 @@
               </a:defRPr>
             </a:pPr>
             <a:r>
-              <a:t>실제 ROS 2 환경의 파일·패키지·구성 검증 로그</a:t>
+              <a:t>~/ros2_curri/agv_ws/src/agv_bringup/config/mission.yaml</a:t>
             </a:r>
           </a:p>
         </p:txBody>
@@ -8641,30 +8939,64 @@
           </a:p>
         </p:txBody>
       </p:sp>
-      <p:pic>
-        <p:nvPicPr>
-          <p:cNvPr id="6" name="Picture 5" descr="validation_terminal.png"/>
-          <p:cNvPicPr>
-            <a:picLocks noChangeAspect="1"/>
-          </p:cNvPicPr>
-          <p:nvPr/>
-        </p:nvPicPr>
-        <p:blipFill>
-          <a:blip r:embed="rId2"/>
-          <a:stretch>
-            <a:fillRect/>
-          </a:stretch>
-        </p:blipFill>
-        <p:spPr>
-          <a:xfrm>
-            <a:off x="790956" y="1453970"/>
-            <a:ext cx="10607040" cy="4599282"/>
-          </a:xfrm>
-          <a:prstGeom prst="rect">
-            <a:avLst/>
-          </a:prstGeom>
-        </p:spPr>
-      </p:pic>
+      <p:sp>
+        <p:nvSpPr>
+          <p:cNvPr id="6" name="Rectangle 5"/>
+          <p:cNvSpPr/>
+          <p:nvPr/>
+        </p:nvSpPr>
+        <p:spPr>
+          <a:xfrm>
+            <a:off x="566928" y="1188720"/>
+            <a:ext cx="11064240" cy="347472"/>
+          </a:xfrm>
+          <a:prstGeom prst="rect">
+            <a:avLst/>
+          </a:prstGeom>
+          <a:solidFill>
+            <a:srgbClr val="F4F7FB"/>
+          </a:solidFill>
+          <a:ln>
+            <a:solidFill>
+              <a:srgbClr val="F4F7FB"/>
+            </a:solidFill>
+          </a:ln>
+        </p:spPr>
+        <p:style>
+          <a:lnRef idx="1">
+            <a:schemeClr val="accent1"/>
+          </a:lnRef>
+          <a:fillRef idx="3">
+            <a:schemeClr val="accent1"/>
+          </a:fillRef>
+          <a:effectRef idx="2">
+            <a:schemeClr val="accent1"/>
+          </a:effectRef>
+          <a:fontRef idx="minor">
+            <a:schemeClr val="lt1"/>
+          </a:fontRef>
+        </p:style>
+        <p:txBody>
+          <a:bodyPr rtlCol="0" anchor="ctr" wrap="square" lIns="73152" rIns="73152" tIns="36576" bIns="36576"/>
+          <a:lstStyle/>
+          <a:p>
+            <a:pPr algn="l">
+              <a:spcAft>
+                <a:spcPts val="0"/>
+              </a:spcAft>
+              <a:defRPr sz="1300" b="1">
+                <a:solidFill>
+                  <a:srgbClr val="122C4E"/>
+                </a:solidFill>
+                <a:latin typeface="Noto Sans CJK KR"/>
+              </a:defRPr>
+            </a:pPr>
+            <a:r>
+              <a:t>현재 단계 8/9    |    현재 폴더 ~/ros2_curri/agv_ws    |    현재 터미널</a:t>
+            </a:r>
+          </a:p>
+        </p:txBody>
+      </p:sp>
       <p:sp>
         <p:nvSpPr>
           <p:cNvPr id="7" name="TextBox 6"/>
@@ -8673,8 +9005,8 @@
         </p:nvSpPr>
         <p:spPr>
           <a:xfrm>
-            <a:off x="777240" y="6217920"/>
-            <a:ext cx="10607040" cy="182880"/>
+            <a:off x="658368" y="1627632"/>
+            <a:ext cx="10972800" cy="256032"/>
           </a:xfrm>
           <a:prstGeom prst="rect">
             <a:avLst/>
@@ -8687,19 +9019,178 @@
           </a:bodyPr>
           <a:lstStyle/>
           <a:p>
-            <a:pPr algn="ctr">
-              <a:spcAft>
-                <a:spcPts val="0"/>
-              </a:spcAft>
-              <a:defRPr sz="1100" b="1">
-                <a:solidFill>
-                  <a:srgbClr val="2A8B5A"/>
-                </a:solidFill>
-                <a:latin typeface="Noto Sans CJK KR"/>
-              </a:defRPr>
-            </a:pPr>
-            <a:r>
-              <a:t>① 명령/설정  ② 정상 출력 또는 화면  ③ 다음 검증 명령으로 재확인</a:t>
+            <a:pPr algn="l">
+              <a:spcAft>
+                <a:spcPts val="0"/>
+              </a:spcAft>
+              <a:defRPr sz="1500" b="1">
+                <a:solidFill>
+                  <a:srgbClr val="122C4E"/>
+                </a:solidFill>
+                <a:latin typeface="Noto Sans CJK KR"/>
+              </a:defRPr>
+            </a:pPr>
+            <a:r>
+              <a:t>이번 단계: 파일의 전체 내용을 중간 생략 없이 작성합니다. 아래 줄 범위를 끝까지 입력하세요.</a:t>
+            </a:r>
+          </a:p>
+        </p:txBody>
+      </p:sp>
+      <p:sp>
+        <p:nvSpPr>
+          <p:cNvPr id="8" name="Rectangle 7"/>
+          <p:cNvSpPr/>
+          <p:nvPr/>
+        </p:nvSpPr>
+        <p:spPr>
+          <a:xfrm>
+            <a:off x="658368" y="1956816"/>
+            <a:ext cx="10972800" cy="603504"/>
+          </a:xfrm>
+          <a:prstGeom prst="rect">
+            <a:avLst/>
+          </a:prstGeom>
+          <a:solidFill>
+            <a:srgbClr val="F4F7FB"/>
+          </a:solidFill>
+          <a:ln>
+            <a:solidFill>
+              <a:srgbClr val="F4F7FB"/>
+            </a:solidFill>
+          </a:ln>
+        </p:spPr>
+        <p:style>
+          <a:lnRef idx="1">
+            <a:schemeClr val="accent1"/>
+          </a:lnRef>
+          <a:fillRef idx="3">
+            <a:schemeClr val="accent1"/>
+          </a:fillRef>
+          <a:effectRef idx="2">
+            <a:schemeClr val="accent1"/>
+          </a:effectRef>
+          <a:fontRef idx="minor">
+            <a:schemeClr val="lt1"/>
+          </a:fontRef>
+        </p:style>
+        <p:txBody>
+          <a:bodyPr rtlCol="0" anchor="ctr" wrap="square" lIns="73152" rIns="73152" tIns="36576" bIns="36576"/>
+          <a:lstStyle/>
+          <a:p>
+            <a:pPr algn="l">
+              <a:spcAft>
+                <a:spcPts val="0"/>
+              </a:spcAft>
+              <a:defRPr sz="1400" b="0">
+                <a:solidFill>
+                  <a:srgbClr val="122C4E"/>
+                </a:solidFill>
+                <a:latin typeface="DejaVu Sans Mono"/>
+              </a:defRPr>
+            </a:pPr>
+            <a:r>
+              <a:t>파일 생성: mkdir -p ~/ros2_curri/agv_ws/src/agv_bringup/config</a:t>
+            </a:r>
+            <a:br/>
+            <a:r>
+              <a:t>파일 열기: nano ~/ros2_curri/agv_ws/src/agv_bringup/config/mission.yaml</a:t>
+            </a:r>
+          </a:p>
+        </p:txBody>
+      </p:sp>
+      <p:sp>
+        <p:nvSpPr>
+          <p:cNvPr id="9" name="Rectangle 8"/>
+          <p:cNvSpPr/>
+          <p:nvPr/>
+        </p:nvSpPr>
+        <p:spPr>
+          <a:xfrm>
+            <a:off x="658368" y="2706624"/>
+            <a:ext cx="10972800" cy="3364992"/>
+          </a:xfrm>
+          <a:prstGeom prst="rect">
+            <a:avLst/>
+          </a:prstGeom>
+          <a:solidFill>
+            <a:srgbClr val="1D232D"/>
+          </a:solidFill>
+          <a:ln>
+            <a:solidFill>
+              <a:srgbClr val="1D232D"/>
+            </a:solidFill>
+          </a:ln>
+        </p:spPr>
+        <p:style>
+          <a:lnRef idx="1">
+            <a:schemeClr val="accent1"/>
+          </a:lnRef>
+          <a:fillRef idx="3">
+            <a:schemeClr val="accent1"/>
+          </a:fillRef>
+          <a:effectRef idx="2">
+            <a:schemeClr val="accent1"/>
+          </a:effectRef>
+          <a:fontRef idx="minor">
+            <a:schemeClr val="lt1"/>
+          </a:fontRef>
+        </p:style>
+        <p:txBody>
+          <a:bodyPr rtlCol="0" anchor="ctr" wrap="square" lIns="164592" rIns="164592" tIns="109728" bIns="36576"/>
+          <a:lstStyle/>
+          <a:p>
+            <a:pPr algn="l">
+              <a:spcAft>
+                <a:spcPts val="0"/>
+              </a:spcAft>
+              <a:defRPr sz="1400" b="0">
+                <a:solidFill>
+                  <a:srgbClr val="FFFFFF"/>
+                </a:solidFill>
+                <a:latin typeface="DejaVu Sans Mono"/>
+              </a:defRPr>
+            </a:pPr>
+            <a:r>
+              <a:t>    front_half_angle_deg: 15.0</a:t>
+            </a:r>
+          </a:p>
+        </p:txBody>
+      </p:sp>
+      <p:sp>
+        <p:nvSpPr>
+          <p:cNvPr id="10" name="TextBox 9"/>
+          <p:cNvSpPr txBox="1"/>
+          <p:nvPr/>
+        </p:nvSpPr>
+        <p:spPr>
+          <a:xfrm>
+            <a:off x="749808" y="6181344"/>
+            <a:ext cx="10789920" cy="201168"/>
+          </a:xfrm>
+          <a:prstGeom prst="rect">
+            <a:avLst/>
+          </a:prstGeom>
+          <a:noFill/>
+        </p:spPr>
+        <p:txBody>
+          <a:bodyPr wrap="square" lIns="73152" rIns="73152" tIns="36576" bIns="36576">
+            <a:spAutoFit/>
+          </a:bodyPr>
+          <a:lstStyle/>
+          <a:p>
+            <a:pPr algn="l">
+              <a:spcAft>
+                <a:spcPts val="0"/>
+              </a:spcAft>
+              <a:defRPr sz="1000" b="0">
+                <a:solidFill>
+                  <a:srgbClr val="5C6672"/>
+                </a:solidFill>
+                <a:latin typeface="Noto Sans CJK KR"/>
+              </a:defRPr>
+            </a:pPr>
+            <a:r>
+              <a:t>파일 전체 2/2 · 이 슬라이드 다음에 같은 파일의 나머지 줄이 이어집니다.</a:t>
             </a:r>
           </a:p>
         </p:txBody>
@@ -8756,7 +9247,7 @@
               </a:defRPr>
             </a:pPr>
             <a:r>
-              <a:t>정상 결과: 실제 환경에서 확인한 출력</a:t>
+              <a:t>build → source → run 순서로 실행한다</a:t>
             </a:r>
           </a:p>
         </p:txBody>
@@ -8795,7 +9286,7 @@
               </a:defRPr>
             </a:pPr>
             <a:r>
-              <a:t>실제 RViz2: /path와 robot pose를 함께 보며 PID 전후 궤적을 비교하는 구성</a:t>
+              <a:t>새 파일 또는 수정 파일은 build와 source 뒤에만 실행 이름·설정에 반영됩니다.</a:t>
             </a:r>
           </a:p>
         </p:txBody>
@@ -8878,40 +9369,136 @@
           </a:p>
         </p:txBody>
       </p:sp>
-      <p:pic>
-        <p:nvPicPr>
-          <p:cNvPr id="6" name="Picture 5" descr="02_rviz_marker_path_actual.png"/>
-          <p:cNvPicPr>
-            <a:picLocks noChangeAspect="1"/>
-          </p:cNvPicPr>
-          <p:nvPr/>
-        </p:nvPicPr>
-        <p:blipFill>
-          <a:blip r:embed="rId2"/>
-          <a:stretch>
-            <a:fillRect/>
-          </a:stretch>
-        </p:blipFill>
-        <p:spPr>
-          <a:xfrm>
-            <a:off x="2971409" y="1353312"/>
-            <a:ext cx="6246133" cy="4800600"/>
-          </a:xfrm>
-          <a:prstGeom prst="rect">
-            <a:avLst/>
-          </a:prstGeom>
-        </p:spPr>
-      </p:pic>
-      <p:sp>
-        <p:nvSpPr>
-          <p:cNvPr id="7" name="TextBox 6"/>
+      <p:sp>
+        <p:nvSpPr>
+          <p:cNvPr id="6" name="Rectangle 5"/>
+          <p:cNvSpPr/>
+          <p:nvPr/>
+        </p:nvSpPr>
+        <p:spPr>
+          <a:xfrm>
+            <a:off x="566928" y="1188720"/>
+            <a:ext cx="11064240" cy="347472"/>
+          </a:xfrm>
+          <a:prstGeom prst="rect">
+            <a:avLst/>
+          </a:prstGeom>
+          <a:solidFill>
+            <a:srgbClr val="F4F7FB"/>
+          </a:solidFill>
+          <a:ln>
+            <a:solidFill>
+              <a:srgbClr val="F4F7FB"/>
+            </a:solidFill>
+          </a:ln>
+        </p:spPr>
+        <p:style>
+          <a:lnRef idx="1">
+            <a:schemeClr val="accent1"/>
+          </a:lnRef>
+          <a:fillRef idx="3">
+            <a:schemeClr val="accent1"/>
+          </a:fillRef>
+          <a:effectRef idx="2">
+            <a:schemeClr val="accent1"/>
+          </a:effectRef>
+          <a:fontRef idx="minor">
+            <a:schemeClr val="lt1"/>
+          </a:fontRef>
+        </p:style>
+        <p:txBody>
+          <a:bodyPr rtlCol="0" anchor="ctr" wrap="square" lIns="73152" rIns="73152" tIns="36576" bIns="36576"/>
+          <a:lstStyle/>
+          <a:p>
+            <a:pPr algn="l">
+              <a:spcAft>
+                <a:spcPts val="0"/>
+              </a:spcAft>
+              <a:defRPr sz="1300" b="1">
+                <a:solidFill>
+                  <a:srgbClr val="122C4E"/>
+                </a:solidFill>
+                <a:latin typeface="Noto Sans CJK KR"/>
+              </a:defRPr>
+            </a:pPr>
+            <a:r>
+              <a:t>현재 단계 실행    |    현재 폴더 ~/ros2_curri/agv_ws    |    현재 터미널</a:t>
+            </a:r>
+          </a:p>
+        </p:txBody>
+      </p:sp>
+      <p:sp>
+        <p:nvSpPr>
+          <p:cNvPr id="7" name="Rounded Rectangle 6"/>
+          <p:cNvSpPr/>
+          <p:nvPr/>
+        </p:nvSpPr>
+        <p:spPr>
+          <a:xfrm>
+            <a:off x="658368" y="1700784"/>
+            <a:ext cx="10972800" cy="3182112"/>
+          </a:xfrm>
+          <a:prstGeom prst="roundRect">
+            <a:avLst/>
+          </a:prstGeom>
+          <a:solidFill>
+            <a:srgbClr val="1D232D"/>
+          </a:solidFill>
+          <a:ln>
+            <a:solidFill>
+              <a:srgbClr val="1D232D"/>
+            </a:solidFill>
+          </a:ln>
+        </p:spPr>
+        <p:style>
+          <a:lnRef idx="1">
+            <a:schemeClr val="accent1"/>
+          </a:lnRef>
+          <a:fillRef idx="3">
+            <a:schemeClr val="accent1"/>
+          </a:fillRef>
+          <a:effectRef idx="2">
+            <a:schemeClr val="accent1"/>
+          </a:effectRef>
+          <a:fontRef idx="minor">
+            <a:schemeClr val="lt1"/>
+          </a:fontRef>
+        </p:style>
+        <p:txBody>
+          <a:bodyPr rtlCol="0" anchor="ctr" wrap="square" lIns="73152" rIns="73152" tIns="36576" bIns="36576"/>
+          <a:lstStyle/>
+          <a:p>
+            <a:pPr algn="l">
+              <a:spcAft>
+                <a:spcPts val="0"/>
+              </a:spcAft>
+              <a:defRPr sz="1600" b="0">
+                <a:solidFill>
+                  <a:srgbClr val="FFFFFF"/>
+                </a:solidFill>
+                <a:latin typeface="DejaVu Sans Mono"/>
+              </a:defRPr>
+            </a:pPr>
+            <a:r>
+              <a:t>source ~/ros2_curri/agv_ws/install/setup.bash</a:t>
+            </a:r>
+            <a:br/>
+            <a:r>
+              <a:t>ros2 run agv_control pid_controller --ros-args -p kp_angular:=0.004</a:t>
+            </a:r>
+          </a:p>
+        </p:txBody>
+      </p:sp>
+      <p:sp>
+        <p:nvSpPr>
+          <p:cNvPr id="8" name="TextBox 7"/>
           <p:cNvSpPr txBox="1"/>
           <p:nvPr/>
         </p:nvSpPr>
         <p:spPr>
           <a:xfrm>
-            <a:off x="777240" y="6217920"/>
-            <a:ext cx="10607040" cy="182880"/>
+            <a:off x="786384" y="5239512"/>
+            <a:ext cx="1261872" cy="237744"/>
           </a:xfrm>
           <a:prstGeom prst="rect">
             <a:avLst/>
@@ -8924,11 +9511,11 @@
           </a:bodyPr>
           <a:lstStyle/>
           <a:p>
-            <a:pPr algn="ctr">
-              <a:spcAft>
-                <a:spcPts val="0"/>
-              </a:spcAft>
-              <a:defRPr sz="1100" b="1">
+            <a:pPr algn="l">
+              <a:spcAft>
+                <a:spcPts val="0"/>
+              </a:spcAft>
+              <a:defRPr sz="1800" b="1">
                 <a:solidFill>
                   <a:srgbClr val="2A8B5A"/>
                 </a:solidFill>
@@ -8936,7 +9523,46 @@
               </a:defRPr>
             </a:pPr>
             <a:r>
-              <a:t>① 명령/설정  ② 정상 출력 또는 화면  ③ 다음 검증 명령으로 재확인</a:t>
+              <a:t>확인 기준</a:t>
+            </a:r>
+          </a:p>
+        </p:txBody>
+      </p:sp>
+      <p:sp>
+        <p:nvSpPr>
+          <p:cNvPr id="9" name="TextBox 8"/>
+          <p:cNvSpPr txBox="1"/>
+          <p:nvPr/>
+        </p:nvSpPr>
+        <p:spPr>
+          <a:xfrm>
+            <a:off x="786384" y="5532120"/>
+            <a:ext cx="10469880" cy="420624"/>
+          </a:xfrm>
+          <a:prstGeom prst="rect">
+            <a:avLst/>
+          </a:prstGeom>
+          <a:noFill/>
+        </p:spPr>
+        <p:txBody>
+          <a:bodyPr wrap="square" lIns="73152" rIns="73152" tIns="36576" bIns="36576">
+            <a:spAutoFit/>
+          </a:bodyPr>
+          <a:lstStyle/>
+          <a:p>
+            <a:pPr algn="l">
+              <a:spcAft>
+                <a:spcPts val="0"/>
+              </a:spcAft>
+              <a:defRPr sz="1800" b="0">
+                <a:solidFill>
+                  <a:srgbClr val="122C4E"/>
+                </a:solidFill>
+                <a:latin typeface="Noto Sans CJK KR"/>
+              </a:defRPr>
+            </a:pPr>
+            <a:r>
+              <a:t>kp_angular·max speed parameter와 saturation이 /cmd_vel_raw 출력을 제한하는 것을 확인한다.</a:t>
             </a:r>
           </a:p>
         </p:txBody>
@@ -8993,7 +9619,7 @@
               </a:defRPr>
             </a:pPr>
             <a:r>
-              <a:t>객관적 검증 명령으로 완료를 확인한다</a:t>
+              <a:t>정상 결과: 실제 환경에서 확인한 출력</a:t>
             </a:r>
           </a:p>
         </p:txBody>
@@ -9032,7 +9658,7 @@
               </a:defRPr>
             </a:pPr>
             <a:r>
-              <a:t>화면만 보지 말고 topic·frame·파일·parameter를 다시 확인합니다.</a:t>
+              <a:t>실제 ROS 2 환경의 파일·패키지·구성 검증 로그</a:t>
             </a:r>
           </a:p>
         </p:txBody>
@@ -9115,210 +9741,40 @@
           </a:p>
         </p:txBody>
       </p:sp>
-      <p:sp>
-        <p:nvSpPr>
-          <p:cNvPr id="6" name="Rectangle 5"/>
-          <p:cNvSpPr/>
-          <p:nvPr/>
-        </p:nvSpPr>
-        <p:spPr>
-          <a:xfrm>
-            <a:off x="566928" y="1188720"/>
-            <a:ext cx="11064240" cy="347472"/>
-          </a:xfrm>
-          <a:prstGeom prst="rect">
-            <a:avLst/>
-          </a:prstGeom>
-          <a:solidFill>
-            <a:srgbClr val="F4F7FB"/>
-          </a:solidFill>
-          <a:ln>
-            <a:solidFill>
-              <a:srgbClr val="F4F7FB"/>
-            </a:solidFill>
-          </a:ln>
-        </p:spPr>
-        <p:style>
-          <a:lnRef idx="1">
-            <a:schemeClr val="accent1"/>
-          </a:lnRef>
-          <a:fillRef idx="3">
-            <a:schemeClr val="accent1"/>
-          </a:fillRef>
-          <a:effectRef idx="2">
-            <a:schemeClr val="accent1"/>
-          </a:effectRef>
-          <a:fontRef idx="minor">
-            <a:schemeClr val="lt1"/>
-          </a:fontRef>
-        </p:style>
-        <p:txBody>
-          <a:bodyPr rtlCol="0" anchor="ctr" wrap="square" lIns="73152" rIns="73152" tIns="36576" bIns="36576"/>
-          <a:lstStyle/>
-          <a:p>
-            <a:pPr algn="l">
-              <a:spcAft>
-                <a:spcPts val="0"/>
-              </a:spcAft>
-              <a:defRPr sz="1300" b="1">
-                <a:solidFill>
-                  <a:srgbClr val="122C4E"/>
-                </a:solidFill>
-                <a:latin typeface="Noto Sans CJK KR"/>
-              </a:defRPr>
-            </a:pPr>
-            <a:r>
-              <a:t>현재 단계 검증    |    현재 폴더 ~/ros2_curri/agv_ws    |    현재 터미널</a:t>
-            </a:r>
-          </a:p>
-        </p:txBody>
-      </p:sp>
-      <p:sp>
-        <p:nvSpPr>
-          <p:cNvPr id="7" name="Rounded Rectangle 6"/>
-          <p:cNvSpPr/>
-          <p:nvPr/>
-        </p:nvSpPr>
-        <p:spPr>
-          <a:xfrm>
-            <a:off x="658368" y="1755648"/>
-            <a:ext cx="10972800" cy="2148840"/>
-          </a:xfrm>
-          <a:prstGeom prst="roundRect">
-            <a:avLst/>
-          </a:prstGeom>
-          <a:solidFill>
-            <a:srgbClr val="1D232D"/>
-          </a:solidFill>
-          <a:ln>
-            <a:solidFill>
-              <a:srgbClr val="1D232D"/>
-            </a:solidFill>
-          </a:ln>
-        </p:spPr>
-        <p:style>
-          <a:lnRef idx="1">
-            <a:schemeClr val="accent1"/>
-          </a:lnRef>
-          <a:fillRef idx="3">
-            <a:schemeClr val="accent1"/>
-          </a:fillRef>
-          <a:effectRef idx="2">
-            <a:schemeClr val="accent1"/>
-          </a:effectRef>
-          <a:fontRef idx="minor">
-            <a:schemeClr val="lt1"/>
-          </a:fontRef>
-        </p:style>
-        <p:txBody>
-          <a:bodyPr rtlCol="0" anchor="ctr" wrap="square" lIns="73152" rIns="73152" tIns="36576" bIns="36576"/>
-          <a:lstStyle/>
-          <a:p>
-            <a:pPr algn="l">
-              <a:spcAft>
-                <a:spcPts val="0"/>
-              </a:spcAft>
-              <a:defRPr sz="1600" b="0">
-                <a:solidFill>
-                  <a:srgbClr val="FFFFFF"/>
-                </a:solidFill>
-                <a:latin typeface="DejaVu Sans Mono"/>
-              </a:defRPr>
-            </a:pPr>
-            <a:r>
-              <a:t>ros2 topic info /target_error</a:t>
-            </a:r>
-            <a:br/>
-            <a:r>
-              <a:t>ros2 topic info /cmd_vel_raw</a:t>
-            </a:r>
-            <a:br/>
-            <a:r>
-              <a:t>ros2 param get /pid_controller kp_angular</a:t>
-            </a:r>
-          </a:p>
-        </p:txBody>
-      </p:sp>
-      <p:sp>
-        <p:nvSpPr>
-          <p:cNvPr id="8" name="Rounded Rectangle 7"/>
-          <p:cNvSpPr/>
-          <p:nvPr/>
-        </p:nvSpPr>
-        <p:spPr>
-          <a:xfrm>
-            <a:off x="658368" y="4206240"/>
-            <a:ext cx="10972800" cy="1554480"/>
-          </a:xfrm>
-          <a:prstGeom prst="roundRect">
-            <a:avLst/>
-          </a:prstGeom>
-          <a:solidFill>
-            <a:srgbClr val="F4F7FB"/>
-          </a:solidFill>
-          <a:ln>
-            <a:solidFill>
-              <a:srgbClr val="D1DFD5"/>
-            </a:solidFill>
-          </a:ln>
-        </p:spPr>
-        <p:style>
-          <a:lnRef idx="1">
-            <a:schemeClr val="accent1"/>
-          </a:lnRef>
-          <a:fillRef idx="3">
-            <a:schemeClr val="accent1"/>
-          </a:fillRef>
-          <a:effectRef idx="2">
-            <a:schemeClr val="accent1"/>
-          </a:effectRef>
-          <a:fontRef idx="minor">
-            <a:schemeClr val="lt1"/>
-          </a:fontRef>
-        </p:style>
-        <p:txBody>
-          <a:bodyPr rtlCol="0" anchor="ctr" wrap="square" lIns="73152" rIns="73152" tIns="36576" bIns="36576"/>
-          <a:lstStyle/>
-          <a:p>
-            <a:pPr algn="l">
-              <a:spcAft>
-                <a:spcPts val="0"/>
-              </a:spcAft>
-              <a:defRPr sz="1800" b="1">
-                <a:solidFill>
-                  <a:srgbClr val="2A8B5A"/>
-                </a:solidFill>
-                <a:latin typeface="Noto Sans CJK KR"/>
-              </a:defRPr>
-            </a:pPr>
-            <a:r>
-              <a:t>완료 체크</a:t>
-            </a:r>
-            <a:br/>
-            <a:r>
-              <a:t>□ 명령이 오류 없이 실행된다.</a:t>
-            </a:r>
-            <a:br/>
-            <a:r>
-              <a:t>□ 기대한 파일·topic·frame·parameter 이름이 보인다.</a:t>
-            </a:r>
-            <a:br/>
-            <a:r>
-              <a:t>□ 값의 단위와 방향을 한 문장으로 설명할 수 있다.</a:t>
-            </a:r>
-          </a:p>
-        </p:txBody>
-      </p:sp>
-      <p:sp>
-        <p:nvSpPr>
-          <p:cNvPr id="9" name="TextBox 8"/>
+      <p:pic>
+        <p:nvPicPr>
+          <p:cNvPr id="6" name="Picture 5" descr="validation_terminal.png"/>
+          <p:cNvPicPr>
+            <a:picLocks noChangeAspect="1"/>
+          </p:cNvPicPr>
+          <p:nvPr/>
+        </p:nvPicPr>
+        <p:blipFill>
+          <a:blip r:embed="rId2"/>
+          <a:stretch>
+            <a:fillRect/>
+          </a:stretch>
+        </p:blipFill>
+        <p:spPr>
+          <a:xfrm>
+            <a:off x="790956" y="1453970"/>
+            <a:ext cx="10607040" cy="4599282"/>
+          </a:xfrm>
+          <a:prstGeom prst="rect">
+            <a:avLst/>
+          </a:prstGeom>
+        </p:spPr>
+      </p:pic>
+      <p:sp>
+        <p:nvSpPr>
+          <p:cNvPr id="7" name="TextBox 6"/>
           <p:cNvSpPr txBox="1"/>
           <p:nvPr/>
         </p:nvSpPr>
         <p:spPr>
           <a:xfrm>
-            <a:off x="731520" y="5989320"/>
-            <a:ext cx="10789920" cy="237744"/>
+            <a:off x="777240" y="6144768"/>
+            <a:ext cx="10607040" cy="310896"/>
           </a:xfrm>
           <a:prstGeom prst="rect">
             <a:avLst/>
@@ -9331,19 +9787,19 @@
           </a:bodyPr>
           <a:lstStyle/>
           <a:p>
-            <a:pPr algn="l">
-              <a:spcAft>
-                <a:spcPts val="0"/>
-              </a:spcAft>
-              <a:defRPr sz="1500" b="1">
-                <a:solidFill>
-                  <a:srgbClr val="122C4E"/>
-                </a:solidFill>
-                <a:latin typeface="Noto Sans CJK KR"/>
-              </a:defRPr>
-            </a:pPr>
-            <a:r>
-              <a:t>완료 조건: kp_angular·max speed parameter와 saturation이 /cmd_vel_raw 출력을 제한하는 것을 확인한다.</a:t>
+            <a:pPr algn="ctr">
+              <a:spcAft>
+                <a:spcPts val="0"/>
+              </a:spcAft>
+              <a:defRPr sz="1100" b="1">
+                <a:solidFill>
+                  <a:srgbClr val="2A8B5A"/>
+                </a:solidFill>
+                <a:latin typeface="Noto Sans CJK KR"/>
+              </a:defRPr>
+            </a:pPr>
+            <a:r>
+              <a:t>화면에서 확인: ① 명령/설정  ② 정상 출력 또는 화면  ③ 다음 검증 명령으로 재확인</a:t>
             </a:r>
           </a:p>
         </p:txBody>
@@ -9400,7 +9856,7 @@
               </a:defRPr>
             </a:pPr>
             <a:r>
-              <a:t>막히면: 증상 → 우선 확인 → 재검증</a:t>
+              <a:t>정상 결과: 실제 환경에서 확인한 출력</a:t>
             </a:r>
           </a:p>
         </p:txBody>
@@ -9439,7 +9895,7 @@
               </a:defRPr>
             </a:pPr>
             <a:r>
-              <a:t>오류 메시지를 숨기지 않고 같은 순서로 점검합니다.</a:t>
+              <a:t>실제 RViz2: /path와 robot pose를 함께 보며 PID 전후 궤적을 비교하는 구성</a:t>
             </a:r>
           </a:p>
         </p:txBody>
@@ -9522,119 +9978,40 @@
           </a:p>
         </p:txBody>
       </p:sp>
-      <p:sp>
-        <p:nvSpPr>
-          <p:cNvPr id="6" name="Rectangle 5"/>
-          <p:cNvSpPr/>
-          <p:nvPr/>
-        </p:nvSpPr>
-        <p:spPr>
-          <a:xfrm>
-            <a:off x="566928" y="1188720"/>
-            <a:ext cx="11064240" cy="347472"/>
-          </a:xfrm>
-          <a:prstGeom prst="rect">
-            <a:avLst/>
-          </a:prstGeom>
-          <a:solidFill>
-            <a:srgbClr val="F4F7FB"/>
-          </a:solidFill>
-          <a:ln>
-            <a:solidFill>
-              <a:srgbClr val="F4F7FB"/>
-            </a:solidFill>
-          </a:ln>
-        </p:spPr>
-        <p:style>
-          <a:lnRef idx="1">
-            <a:schemeClr val="accent1"/>
-          </a:lnRef>
-          <a:fillRef idx="3">
-            <a:schemeClr val="accent1"/>
-          </a:fillRef>
-          <a:effectRef idx="2">
-            <a:schemeClr val="accent1"/>
-          </a:effectRef>
-          <a:fontRef idx="minor">
-            <a:schemeClr val="lt1"/>
-          </a:fontRef>
-        </p:style>
-        <p:txBody>
-          <a:bodyPr rtlCol="0" anchor="ctr" wrap="square" lIns="73152" rIns="73152" tIns="36576" bIns="36576"/>
-          <a:lstStyle/>
-          <a:p>
-            <a:pPr algn="l">
-              <a:spcAft>
-                <a:spcPts val="0"/>
-              </a:spcAft>
-              <a:defRPr sz="1300" b="1">
-                <a:solidFill>
-                  <a:srgbClr val="122C4E"/>
-                </a:solidFill>
-                <a:latin typeface="Noto Sans CJK KR"/>
-              </a:defRPr>
-            </a:pPr>
-            <a:r>
-              <a:t>현재 단계 오류 대응    |    현재 폴더 ~/ros2_curri/agv_ws    |    현재 터미널</a:t>
-            </a:r>
-          </a:p>
-        </p:txBody>
-      </p:sp>
-      <p:sp>
-        <p:nvSpPr>
-          <p:cNvPr id="7" name="Rounded Rectangle 6"/>
-          <p:cNvSpPr/>
-          <p:nvPr/>
-        </p:nvSpPr>
-        <p:spPr>
-          <a:xfrm>
-            <a:off x="694944" y="1755648"/>
-            <a:ext cx="10972800" cy="1115568"/>
-          </a:xfrm>
-          <a:prstGeom prst="roundRect">
-            <a:avLst/>
-          </a:prstGeom>
-          <a:solidFill>
-            <a:srgbClr val="FFF7F4"/>
-          </a:solidFill>
-          <a:ln>
-            <a:solidFill>
-              <a:srgbClr val="EDBEB4"/>
-            </a:solidFill>
-          </a:ln>
-        </p:spPr>
-        <p:style>
-          <a:lnRef idx="1">
-            <a:schemeClr val="accent1"/>
-          </a:lnRef>
-          <a:fillRef idx="3">
-            <a:schemeClr val="accent1"/>
-          </a:fillRef>
-          <a:effectRef idx="2">
-            <a:schemeClr val="accent1"/>
-          </a:effectRef>
-          <a:fontRef idx="minor">
-            <a:schemeClr val="lt1"/>
-          </a:fontRef>
-        </p:style>
-        <p:txBody>
-          <a:bodyPr rtlCol="0" anchor="ctr"/>
-          <a:lstStyle/>
-          <a:p>
-            <a:pPr algn="ctr"/>
-          </a:p>
-        </p:txBody>
-      </p:sp>
-      <p:sp>
-        <p:nvSpPr>
-          <p:cNvPr id="8" name="TextBox 7"/>
+      <p:pic>
+        <p:nvPicPr>
+          <p:cNvPr id="6" name="Picture 5" descr="02_rviz_marker_path_actual.png"/>
+          <p:cNvPicPr>
+            <a:picLocks noChangeAspect="1"/>
+          </p:cNvPicPr>
+          <p:nvPr/>
+        </p:nvPicPr>
+        <p:blipFill>
+          <a:blip r:embed="rId2"/>
+          <a:stretch>
+            <a:fillRect/>
+          </a:stretch>
+        </p:blipFill>
+        <p:spPr>
+          <a:xfrm>
+            <a:off x="2971409" y="1353312"/>
+            <a:ext cx="6246133" cy="4800600"/>
+          </a:xfrm>
+          <a:prstGeom prst="rect">
+            <a:avLst/>
+          </a:prstGeom>
+        </p:spPr>
+      </p:pic>
+      <p:sp>
+        <p:nvSpPr>
+          <p:cNvPr id="7" name="TextBox 6"/>
           <p:cNvSpPr txBox="1"/>
           <p:nvPr/>
         </p:nvSpPr>
         <p:spPr>
           <a:xfrm>
-            <a:off x="896112" y="1901952"/>
-            <a:ext cx="2926080" cy="274320"/>
+            <a:off x="777240" y="6144768"/>
+            <a:ext cx="10607040" cy="310896"/>
           </a:xfrm>
           <a:prstGeom prst="rect">
             <a:avLst/>
@@ -9647,228 +10024,19 @@
           </a:bodyPr>
           <a:lstStyle/>
           <a:p>
-            <a:pPr algn="l">
-              <a:spcAft>
-                <a:spcPts val="0"/>
-              </a:spcAft>
-              <a:defRPr sz="1800" b="1">
-                <a:solidFill>
-                  <a:srgbClr val="BE3B3B"/>
-                </a:solidFill>
-                <a:latin typeface="Noto Sans CJK KR"/>
-              </a:defRPr>
-            </a:pPr>
-            <a:r>
-              <a:t>증상 1: 로봇이 반대 방향 회전</a:t>
-            </a:r>
-          </a:p>
-        </p:txBody>
-      </p:sp>
-      <p:sp>
-        <p:nvSpPr>
-          <p:cNvPr id="9" name="TextBox 8"/>
-          <p:cNvSpPr txBox="1"/>
-          <p:nvPr/>
-        </p:nvSpPr>
-        <p:spPr>
-          <a:xfrm>
-            <a:off x="3794760" y="1883664"/>
-            <a:ext cx="7543800" cy="621792"/>
-          </a:xfrm>
-          <a:prstGeom prst="rect">
-            <a:avLst/>
-          </a:prstGeom>
-          <a:noFill/>
-        </p:spPr>
-        <p:txBody>
-          <a:bodyPr wrap="square" lIns="73152" rIns="73152" tIns="36576" bIns="36576">
-            <a:spAutoFit/>
-          </a:bodyPr>
-          <a:lstStyle/>
-          <a:p>
-            <a:pPr algn="l">
-              <a:spcAft>
-                <a:spcPts val="0"/>
-              </a:spcAft>
-              <a:defRPr sz="1600" b="0">
-                <a:solidFill>
-                  <a:srgbClr val="122C4E"/>
-                </a:solidFill>
-                <a:latin typeface="Noto Sans CJK KR"/>
-              </a:defRPr>
-            </a:pPr>
-            <a:r>
-              <a:t>우선 확인: error 정의와 angular.z 부호를 확인한다.</a:t>
-            </a:r>
-            <a:br/>
-            <a:r>
-              <a:t>수정 후: ros2 topic info /target_error</a:t>
-            </a:r>
-          </a:p>
-        </p:txBody>
-      </p:sp>
-      <p:sp>
-        <p:nvSpPr>
-          <p:cNvPr id="10" name="Rounded Rectangle 9"/>
-          <p:cNvSpPr/>
-          <p:nvPr/>
-        </p:nvSpPr>
-        <p:spPr>
-          <a:xfrm>
-            <a:off x="694944" y="3172968"/>
-            <a:ext cx="10972800" cy="1115568"/>
-          </a:xfrm>
-          <a:prstGeom prst="roundRect">
-            <a:avLst/>
-          </a:prstGeom>
-          <a:solidFill>
-            <a:srgbClr val="FFF7F4"/>
-          </a:solidFill>
-          <a:ln>
-            <a:solidFill>
-              <a:srgbClr val="EDBEB4"/>
-            </a:solidFill>
-          </a:ln>
-        </p:spPr>
-        <p:style>
-          <a:lnRef idx="1">
-            <a:schemeClr val="accent1"/>
-          </a:lnRef>
-          <a:fillRef idx="3">
-            <a:schemeClr val="accent1"/>
-          </a:fillRef>
-          <a:effectRef idx="2">
-            <a:schemeClr val="accent1"/>
-          </a:effectRef>
-          <a:fontRef idx="minor">
-            <a:schemeClr val="lt1"/>
-          </a:fontRef>
-        </p:style>
-        <p:txBody>
-          <a:bodyPr rtlCol="0" anchor="ctr"/>
-          <a:lstStyle/>
-          <a:p>
-            <a:pPr algn="ctr"/>
-          </a:p>
-        </p:txBody>
-      </p:sp>
-      <p:sp>
-        <p:nvSpPr>
-          <p:cNvPr id="11" name="TextBox 10"/>
-          <p:cNvSpPr txBox="1"/>
-          <p:nvPr/>
-        </p:nvSpPr>
-        <p:spPr>
-          <a:xfrm>
-            <a:off x="896112" y="3319272"/>
-            <a:ext cx="2926080" cy="274320"/>
-          </a:xfrm>
-          <a:prstGeom prst="rect">
-            <a:avLst/>
-          </a:prstGeom>
-          <a:noFill/>
-        </p:spPr>
-        <p:txBody>
-          <a:bodyPr wrap="square" lIns="73152" rIns="73152" tIns="36576" bIns="36576">
-            <a:spAutoFit/>
-          </a:bodyPr>
-          <a:lstStyle/>
-          <a:p>
-            <a:pPr algn="l">
-              <a:spcAft>
-                <a:spcPts val="0"/>
-              </a:spcAft>
-              <a:defRPr sz="1800" b="1">
-                <a:solidFill>
-                  <a:srgbClr val="BE3B3B"/>
-                </a:solidFill>
-                <a:latin typeface="Noto Sans CJK KR"/>
-              </a:defRPr>
-            </a:pPr>
-            <a:r>
-              <a:t>증상 2: 진동이 심함</a:t>
-            </a:r>
-          </a:p>
-        </p:txBody>
-      </p:sp>
-      <p:sp>
-        <p:nvSpPr>
-          <p:cNvPr id="12" name="TextBox 11"/>
-          <p:cNvSpPr txBox="1"/>
-          <p:nvPr/>
-        </p:nvSpPr>
-        <p:spPr>
-          <a:xfrm>
-            <a:off x="3794760" y="3300984"/>
-            <a:ext cx="7543800" cy="621792"/>
-          </a:xfrm>
-          <a:prstGeom prst="rect">
-            <a:avLst/>
-          </a:prstGeom>
-          <a:noFill/>
-        </p:spPr>
-        <p:txBody>
-          <a:bodyPr wrap="square" lIns="73152" rIns="73152" tIns="36576" bIns="36576">
-            <a:spAutoFit/>
-          </a:bodyPr>
-          <a:lstStyle/>
-          <a:p>
-            <a:pPr algn="l">
-              <a:spcAft>
-                <a:spcPts val="0"/>
-              </a:spcAft>
-              <a:defRPr sz="1600" b="0">
-                <a:solidFill>
-                  <a:srgbClr val="122C4E"/>
-                </a:solidFill>
-                <a:latin typeface="Noto Sans CJK KR"/>
-              </a:defRPr>
-            </a:pPr>
-            <a:r>
-              <a:t>우선 확인: kp/kd·update rate·latency·saturation을 확인한다.</a:t>
-            </a:r>
-            <a:br/>
-            <a:r>
-              <a:t>수정 후: ros2 topic info /target_error</a:t>
-            </a:r>
-          </a:p>
-        </p:txBody>
-      </p:sp>
-      <p:sp>
-        <p:nvSpPr>
-          <p:cNvPr id="13" name="TextBox 12"/>
-          <p:cNvSpPr txBox="1"/>
-          <p:nvPr/>
-        </p:nvSpPr>
-        <p:spPr>
-          <a:xfrm>
-            <a:off x="822960" y="5102352"/>
-            <a:ext cx="10607040" cy="402336"/>
-          </a:xfrm>
-          <a:prstGeom prst="rect">
-            <a:avLst/>
-          </a:prstGeom>
-          <a:noFill/>
-        </p:spPr>
-        <p:txBody>
-          <a:bodyPr wrap="square" lIns="73152" rIns="73152" tIns="36576" bIns="36576">
-            <a:spAutoFit/>
-          </a:bodyPr>
-          <a:lstStyle/>
-          <a:p>
             <a:pPr algn="ctr">
               <a:spcAft>
                 <a:spcPts val="0"/>
               </a:spcAft>
-              <a:defRPr sz="1800" b="1">
-                <a:solidFill>
-                  <a:srgbClr val="DB7E22"/>
-                </a:solidFill>
-                <a:latin typeface="Noto Sans CJK KR"/>
-              </a:defRPr>
-            </a:pPr>
-            <a:r>
-              <a:t>공통 순서: ① 현재 폴더 ② source ③ 파일 경로 ④ 이름/타입/단위 ⑤ build·source 후 재실행</a:t>
+              <a:defRPr sz="1100" b="1">
+                <a:solidFill>
+                  <a:srgbClr val="2A8B5A"/>
+                </a:solidFill>
+                <a:latin typeface="Noto Sans CJK KR"/>
+              </a:defRPr>
+            </a:pPr>
+            <a:r>
+              <a:t>화면에서 확인: 명령·설정과 화면의 topic·frame·결과 이름을 대조합니다.</a:t>
             </a:r>
           </a:p>
         </p:txBody>
@@ -10386,7 +10554,7 @@
               </a:defRPr>
             </a:pPr>
             <a:r>
-              <a:t>미니 실습: 값 하나를 바꾸고 결과를 비교한다</a:t>
+              <a:t>객관적 검증 명령으로 완료를 확인한다</a:t>
             </a:r>
           </a:p>
         </p:txBody>
@@ -10425,7 +10593,7 @@
               </a:defRPr>
             </a:pPr>
             <a:r>
-              <a:t>정상 결과를 만든 뒤에는 한 번에 하나의 값만 바꿉니다.</a:t>
+              <a:t>화면만 보지 말고 topic·frame·파일·parameter를 다시 확인합니다.</a:t>
             </a:r>
           </a:p>
         </p:txBody>
@@ -10561,7 +10729,7 @@
               </a:defRPr>
             </a:pPr>
             <a:r>
-              <a:t>현재 단계 미니 실습    |    현재 폴더 ~/ros2_curri/agv_ws    |    현재 터미널</a:t>
+              <a:t>현재 단계 검증    |    현재 폴더 ~/ros2_curri/agv_ws    |    현재 터미널</a:t>
             </a:r>
           </a:p>
         </p:txBody>
@@ -10574,18 +10742,18 @@
         </p:nvSpPr>
         <p:spPr>
           <a:xfrm>
-            <a:off x="749808" y="1874519"/>
-            <a:ext cx="10652760" cy="1993392"/>
+            <a:off x="658368" y="1755648"/>
+            <a:ext cx="10972800" cy="2148840"/>
           </a:xfrm>
           <a:prstGeom prst="roundRect">
             <a:avLst/>
           </a:prstGeom>
           <a:solidFill>
-            <a:srgbClr val="FFF8EB"/>
+            <a:srgbClr val="1D232D"/>
           </a:solidFill>
           <a:ln>
             <a:solidFill>
-              <a:srgbClr val="ECC680"/>
+              <a:srgbClr val="1D232D"/>
             </a:solidFill>
           </a:ln>
         </p:spPr>
@@ -10607,33 +10775,111 @@
           <a:bodyPr rtlCol="0" anchor="ctr" wrap="square" lIns="73152" rIns="73152" tIns="36576" bIns="36576"/>
           <a:lstStyle/>
           <a:p>
-            <a:pPr algn="ctr">
-              <a:spcAft>
-                <a:spcPts val="0"/>
-              </a:spcAft>
-              <a:defRPr sz="2300" b="1">
-                <a:solidFill>
-                  <a:srgbClr val="122C4E"/>
-                </a:solidFill>
-                <a:latin typeface="Noto Sans CJK KR"/>
-              </a:defRPr>
-            </a:pPr>
-            <a:r>
-              <a:t>kp_angular을 0.002, 0.004, 0.008로 바꿨을 때 반응 속도와 진동 위험을 예측해 기록한다.</a:t>
-            </a:r>
-          </a:p>
-        </p:txBody>
-      </p:sp>
-      <p:sp>
-        <p:nvSpPr>
-          <p:cNvPr id="8" name="TextBox 7"/>
+            <a:pPr algn="l">
+              <a:spcAft>
+                <a:spcPts val="0"/>
+              </a:spcAft>
+              <a:defRPr sz="1600" b="0">
+                <a:solidFill>
+                  <a:srgbClr val="FFFFFF"/>
+                </a:solidFill>
+                <a:latin typeface="DejaVu Sans Mono"/>
+              </a:defRPr>
+            </a:pPr>
+            <a:r>
+              <a:t>ros2 topic info /target_error</a:t>
+            </a:r>
+            <a:br/>
+            <a:r>
+              <a:t>ros2 topic info /cmd_vel_raw</a:t>
+            </a:r>
+            <a:br/>
+            <a:r>
+              <a:t>ros2 param get /pid_controller kp_angular</a:t>
+            </a:r>
+          </a:p>
+        </p:txBody>
+      </p:sp>
+      <p:sp>
+        <p:nvSpPr>
+          <p:cNvPr id="8" name="Rounded Rectangle 7"/>
+          <p:cNvSpPr/>
+          <p:nvPr/>
+        </p:nvSpPr>
+        <p:spPr>
+          <a:xfrm>
+            <a:off x="658368" y="4206240"/>
+            <a:ext cx="10972800" cy="1554480"/>
+          </a:xfrm>
+          <a:prstGeom prst="roundRect">
+            <a:avLst/>
+          </a:prstGeom>
+          <a:solidFill>
+            <a:srgbClr val="F4F7FB"/>
+          </a:solidFill>
+          <a:ln>
+            <a:solidFill>
+              <a:srgbClr val="D1DFD5"/>
+            </a:solidFill>
+          </a:ln>
+        </p:spPr>
+        <p:style>
+          <a:lnRef idx="1">
+            <a:schemeClr val="accent1"/>
+          </a:lnRef>
+          <a:fillRef idx="3">
+            <a:schemeClr val="accent1"/>
+          </a:fillRef>
+          <a:effectRef idx="2">
+            <a:schemeClr val="accent1"/>
+          </a:effectRef>
+          <a:fontRef idx="minor">
+            <a:schemeClr val="lt1"/>
+          </a:fontRef>
+        </p:style>
+        <p:txBody>
+          <a:bodyPr rtlCol="0" anchor="ctr" wrap="square" lIns="73152" rIns="73152" tIns="36576" bIns="36576"/>
+          <a:lstStyle/>
+          <a:p>
+            <a:pPr algn="l">
+              <a:spcAft>
+                <a:spcPts val="0"/>
+              </a:spcAft>
+              <a:defRPr sz="1800" b="1">
+                <a:solidFill>
+                  <a:srgbClr val="2A8B5A"/>
+                </a:solidFill>
+                <a:latin typeface="Noto Sans CJK KR"/>
+              </a:defRPr>
+            </a:pPr>
+            <a:r>
+              <a:t>완료 체크</a:t>
+            </a:r>
+            <a:br/>
+            <a:r>
+              <a:t>□ 명령이 오류 없이 실행된다.</a:t>
+            </a:r>
+            <a:br/>
+            <a:r>
+              <a:t>□ 기대한 파일·topic·frame·parameter 이름이 보인다.</a:t>
+            </a:r>
+            <a:br/>
+            <a:r>
+              <a:t>□ 값의 단위와 방향을 한 문장으로 설명할 수 있다.</a:t>
+            </a:r>
+          </a:p>
+        </p:txBody>
+      </p:sp>
+      <p:sp>
+        <p:nvSpPr>
+          <p:cNvPr id="9" name="TextBox 8"/>
           <p:cNvSpPr txBox="1"/>
           <p:nvPr/>
         </p:nvSpPr>
         <p:spPr>
           <a:xfrm>
-            <a:off x="877824" y="4590288"/>
-            <a:ext cx="10241280" cy="594360"/>
+            <a:off x="731520" y="5989320"/>
+            <a:ext cx="10789920" cy="237744"/>
           </a:xfrm>
           <a:prstGeom prst="rect">
             <a:avLst/>
@@ -10646,19 +10892,19 @@
           </a:bodyPr>
           <a:lstStyle/>
           <a:p>
-            <a:pPr algn="ctr">
-              <a:spcAft>
-                <a:spcPts val="0"/>
-              </a:spcAft>
-              <a:defRPr sz="1900" b="1">
-                <a:solidFill>
-                  <a:srgbClr val="DB7E22"/>
-                </a:solidFill>
-                <a:latin typeface="Noto Sans CJK KR"/>
-              </a:defRPr>
-            </a:pPr>
-            <a:r>
-              <a:t>기록할 것: 바꾼 값(단위) · 기대한 변화 · 실제 출력/화면 · 원래 값으로 되돌린 결과</a:t>
+            <a:pPr algn="l">
+              <a:spcAft>
+                <a:spcPts val="0"/>
+              </a:spcAft>
+              <a:defRPr sz="1500" b="1">
+                <a:solidFill>
+                  <a:srgbClr val="122C4E"/>
+                </a:solidFill>
+                <a:latin typeface="Noto Sans CJK KR"/>
+              </a:defRPr>
+            </a:pPr>
+            <a:r>
+              <a:t>완료 조건: kp_angular·max speed parameter와 saturation이 /cmd_vel_raw 출력을 제한하는 것을 확인한다.</a:t>
             </a:r>
           </a:p>
         </p:txBody>
@@ -10715,7 +10961,7 @@
               </a:defRPr>
             </a:pPr>
             <a:r>
-              <a:t>체크포인트를 저장하고 다음 모듈로 넘긴다</a:t>
+              <a:t>막히면: 증상 → 우선 확인 → 재검증</a:t>
             </a:r>
           </a:p>
         </p:txBody>
@@ -10754,7 +11000,7 @@
               </a:defRPr>
             </a:pPr>
             <a:r>
-              <a:t>현재 Complete는 다음 Starter의 기준선입니다.</a:t>
+              <a:t>오류 메시지를 숨기지 않고 같은 순서로 점검합니다.</a:t>
             </a:r>
           </a:p>
         </p:txBody>
@@ -10890,7 +11136,7 @@
               </a:defRPr>
             </a:pPr>
             <a:r>
-              <a:t>현재 단계 체크포인트    |    현재 폴더 ~/ros2_curri/agv_ws    |    현재 터미널</a:t>
+              <a:t>현재 단계 오류 대응    |    현재 폴더 ~/ros2_curri/agv_ws    |    현재 터미널</a:t>
             </a:r>
           </a:p>
         </p:txBody>
@@ -10903,18 +11149,18 @@
         </p:nvSpPr>
         <p:spPr>
           <a:xfrm>
-            <a:off x="685800" y="1737360"/>
-            <a:ext cx="10972800" cy="3611880"/>
+            <a:off x="694944" y="1755648"/>
+            <a:ext cx="10972800" cy="1115568"/>
           </a:xfrm>
           <a:prstGeom prst="roundRect">
             <a:avLst/>
           </a:prstGeom>
           <a:solidFill>
-            <a:srgbClr val="F4F7FB"/>
+            <a:srgbClr val="FFF7F4"/>
           </a:solidFill>
           <a:ln>
             <a:solidFill>
-              <a:srgbClr val="D2DCE8"/>
+              <a:srgbClr val="EDBEB4"/>
             </a:solidFill>
           </a:ln>
         </p:spPr>
@@ -10948,111 +11194,8 @@
         </p:nvSpPr>
         <p:spPr>
           <a:xfrm>
-            <a:off x="896112" y="1993392"/>
-            <a:ext cx="10332720" cy="2971800"/>
-          </a:xfrm>
-          <a:prstGeom prst="rect">
-            <a:avLst/>
-          </a:prstGeom>
-          <a:noFill/>
-        </p:spPr>
-        <p:txBody>
-          <a:bodyPr wrap="square" lIns="109728" rIns="109728">
-            <a:spAutoFit/>
-          </a:bodyPr>
-          <a:lstStyle/>
-          <a:p>
-            <a:pPr>
-              <a:spcAft>
-                <a:spcPts val="800"/>
-              </a:spcAft>
-              <a:defRPr sz="1800">
-                <a:solidFill>
-                  <a:srgbClr val="122C4E"/>
-                </a:solidFill>
-                <a:latin typeface="Noto Sans CJK KR"/>
-              </a:defRPr>
-            </a:pPr>
-            <a:r>
-              <a:t>• □ 완료 화면: kp_angular·max speed parameter와 saturation이 /cmd_vel_raw 출력을 제한하는 것을 확인한다.</a:t>
-            </a:r>
-          </a:p>
-          <a:p>
-            <a:pPr>
-              <a:spcAft>
-                <a:spcPts val="800"/>
-              </a:spcAft>
-              <a:defRPr sz="1800">
-                <a:solidFill>
-                  <a:srgbClr val="122C4E"/>
-                </a:solidFill>
-                <a:latin typeface="Noto Sans CJK KR"/>
-              </a:defRPr>
-            </a:pPr>
-            <a:r>
-              <a:t>• □ Complete 파일: blocks/E_autonomy_logic/M20_pid_driving_control/complete/</a:t>
-            </a:r>
-          </a:p>
-          <a:p>
-            <a:pPr>
-              <a:spcAft>
-                <a:spcPts val="800"/>
-              </a:spcAft>
-              <a:defRPr sz="1800">
-                <a:solidFill>
-                  <a:srgbClr val="122C4E"/>
-                </a:solidFill>
-                <a:latin typeface="Noto Sans CJK KR"/>
-              </a:defRPr>
-            </a:pPr>
-            <a:r>
-              <a:t>• □ 정상 로그·캡처: logs/validation.log, screenshots/validation_terminal.png</a:t>
-            </a:r>
-          </a:p>
-          <a:p>
-            <a:pPr>
-              <a:spcAft>
-                <a:spcPts val="800"/>
-              </a:spcAft>
-              <a:defRPr sz="1800">
-                <a:solidFill>
-                  <a:srgbClr val="122C4E"/>
-                </a:solidFill>
-                <a:latin typeface="Noto Sans CJK KR"/>
-              </a:defRPr>
-            </a:pPr>
-            <a:r>
-              <a:t>• □ 버전 식별: CHECKSUM_or_TAG.txt의 SHA-256 manifest</a:t>
-            </a:r>
-          </a:p>
-          <a:p>
-            <a:pPr>
-              <a:spcAft>
-                <a:spcPts val="800"/>
-              </a:spcAft>
-              <a:defRPr sz="1800">
-                <a:solidFill>
-                  <a:srgbClr val="122C4E"/>
-                </a:solidFill>
-                <a:latin typeface="Noto Sans CJK KR"/>
-              </a:defRPr>
-            </a:pPr>
-            <a:r>
-              <a:t>• □ 다음 시작 조건: M21 YAML/Launch</a:t>
-            </a:r>
-          </a:p>
-        </p:txBody>
-      </p:sp>
-      <p:sp>
-        <p:nvSpPr>
-          <p:cNvPr id="9" name="TextBox 8"/>
-          <p:cNvSpPr txBox="1"/>
-          <p:nvPr/>
-        </p:nvSpPr>
-        <p:spPr>
-          <a:xfrm>
-            <a:off x="868680" y="5596128"/>
-            <a:ext cx="10515600" cy="338328"/>
+            <a:off x="896112" y="1901952"/>
+            <a:ext cx="2926080" cy="274320"/>
           </a:xfrm>
           <a:prstGeom prst="rect">
             <a:avLst/>
@@ -11065,19 +11208,228 @@
           </a:bodyPr>
           <a:lstStyle/>
           <a:p>
+            <a:pPr algn="l">
+              <a:spcAft>
+                <a:spcPts val="0"/>
+              </a:spcAft>
+              <a:defRPr sz="1800" b="1">
+                <a:solidFill>
+                  <a:srgbClr val="BE3B3B"/>
+                </a:solidFill>
+                <a:latin typeface="Noto Sans CJK KR"/>
+              </a:defRPr>
+            </a:pPr>
+            <a:r>
+              <a:t>증상 1: 로봇이 반대 방향 회전</a:t>
+            </a:r>
+          </a:p>
+        </p:txBody>
+      </p:sp>
+      <p:sp>
+        <p:nvSpPr>
+          <p:cNvPr id="9" name="TextBox 8"/>
+          <p:cNvSpPr txBox="1"/>
+          <p:nvPr/>
+        </p:nvSpPr>
+        <p:spPr>
+          <a:xfrm>
+            <a:off x="3794760" y="1883664"/>
+            <a:ext cx="7543800" cy="621792"/>
+          </a:xfrm>
+          <a:prstGeom prst="rect">
+            <a:avLst/>
+          </a:prstGeom>
+          <a:noFill/>
+        </p:spPr>
+        <p:txBody>
+          <a:bodyPr wrap="square" lIns="73152" rIns="73152" tIns="36576" bIns="36576">
+            <a:spAutoFit/>
+          </a:bodyPr>
+          <a:lstStyle/>
+          <a:p>
+            <a:pPr algn="l">
+              <a:spcAft>
+                <a:spcPts val="0"/>
+              </a:spcAft>
+              <a:defRPr sz="1600" b="0">
+                <a:solidFill>
+                  <a:srgbClr val="122C4E"/>
+                </a:solidFill>
+                <a:latin typeface="Noto Sans CJK KR"/>
+              </a:defRPr>
+            </a:pPr>
+            <a:r>
+              <a:t>우선 확인: error 정의와 angular.z 부호를 확인한다.</a:t>
+            </a:r>
+            <a:br/>
+            <a:r>
+              <a:t>수정 후: ros2 topic info /target_error</a:t>
+            </a:r>
+          </a:p>
+        </p:txBody>
+      </p:sp>
+      <p:sp>
+        <p:nvSpPr>
+          <p:cNvPr id="10" name="Rounded Rectangle 9"/>
+          <p:cNvSpPr/>
+          <p:nvPr/>
+        </p:nvSpPr>
+        <p:spPr>
+          <a:xfrm>
+            <a:off x="694944" y="3172968"/>
+            <a:ext cx="10972800" cy="1115568"/>
+          </a:xfrm>
+          <a:prstGeom prst="roundRect">
+            <a:avLst/>
+          </a:prstGeom>
+          <a:solidFill>
+            <a:srgbClr val="FFF7F4"/>
+          </a:solidFill>
+          <a:ln>
+            <a:solidFill>
+              <a:srgbClr val="EDBEB4"/>
+            </a:solidFill>
+          </a:ln>
+        </p:spPr>
+        <p:style>
+          <a:lnRef idx="1">
+            <a:schemeClr val="accent1"/>
+          </a:lnRef>
+          <a:fillRef idx="3">
+            <a:schemeClr val="accent1"/>
+          </a:fillRef>
+          <a:effectRef idx="2">
+            <a:schemeClr val="accent1"/>
+          </a:effectRef>
+          <a:fontRef idx="minor">
+            <a:schemeClr val="lt1"/>
+          </a:fontRef>
+        </p:style>
+        <p:txBody>
+          <a:bodyPr rtlCol="0" anchor="ctr"/>
+          <a:lstStyle/>
+          <a:p>
+            <a:pPr algn="ctr"/>
+          </a:p>
+        </p:txBody>
+      </p:sp>
+      <p:sp>
+        <p:nvSpPr>
+          <p:cNvPr id="11" name="TextBox 10"/>
+          <p:cNvSpPr txBox="1"/>
+          <p:nvPr/>
+        </p:nvSpPr>
+        <p:spPr>
+          <a:xfrm>
+            <a:off x="896112" y="3319272"/>
+            <a:ext cx="2926080" cy="274320"/>
+          </a:xfrm>
+          <a:prstGeom prst="rect">
+            <a:avLst/>
+          </a:prstGeom>
+          <a:noFill/>
+        </p:spPr>
+        <p:txBody>
+          <a:bodyPr wrap="square" lIns="73152" rIns="73152" tIns="36576" bIns="36576">
+            <a:spAutoFit/>
+          </a:bodyPr>
+          <a:lstStyle/>
+          <a:p>
+            <a:pPr algn="l">
+              <a:spcAft>
+                <a:spcPts val="0"/>
+              </a:spcAft>
+              <a:defRPr sz="1800" b="1">
+                <a:solidFill>
+                  <a:srgbClr val="BE3B3B"/>
+                </a:solidFill>
+                <a:latin typeface="Noto Sans CJK KR"/>
+              </a:defRPr>
+            </a:pPr>
+            <a:r>
+              <a:t>증상 2: 진동이 심함</a:t>
+            </a:r>
+          </a:p>
+        </p:txBody>
+      </p:sp>
+      <p:sp>
+        <p:nvSpPr>
+          <p:cNvPr id="12" name="TextBox 11"/>
+          <p:cNvSpPr txBox="1"/>
+          <p:nvPr/>
+        </p:nvSpPr>
+        <p:spPr>
+          <a:xfrm>
+            <a:off x="3794760" y="3300984"/>
+            <a:ext cx="7543800" cy="621792"/>
+          </a:xfrm>
+          <a:prstGeom prst="rect">
+            <a:avLst/>
+          </a:prstGeom>
+          <a:noFill/>
+        </p:spPr>
+        <p:txBody>
+          <a:bodyPr wrap="square" lIns="73152" rIns="73152" tIns="36576" bIns="36576">
+            <a:spAutoFit/>
+          </a:bodyPr>
+          <a:lstStyle/>
+          <a:p>
+            <a:pPr algn="l">
+              <a:spcAft>
+                <a:spcPts val="0"/>
+              </a:spcAft>
+              <a:defRPr sz="1600" b="0">
+                <a:solidFill>
+                  <a:srgbClr val="122C4E"/>
+                </a:solidFill>
+                <a:latin typeface="Noto Sans CJK KR"/>
+              </a:defRPr>
+            </a:pPr>
+            <a:r>
+              <a:t>우선 확인: kp/kd·update rate·latency·saturation을 확인한다.</a:t>
+            </a:r>
+            <a:br/>
+            <a:r>
+              <a:t>수정 후: ros2 topic info /target_error</a:t>
+            </a:r>
+          </a:p>
+        </p:txBody>
+      </p:sp>
+      <p:sp>
+        <p:nvSpPr>
+          <p:cNvPr id="13" name="TextBox 12"/>
+          <p:cNvSpPr txBox="1"/>
+          <p:nvPr/>
+        </p:nvSpPr>
+        <p:spPr>
+          <a:xfrm>
+            <a:off x="822960" y="5102352"/>
+            <a:ext cx="10607040" cy="402336"/>
+          </a:xfrm>
+          <a:prstGeom prst="rect">
+            <a:avLst/>
+          </a:prstGeom>
+          <a:noFill/>
+        </p:spPr>
+        <p:txBody>
+          <a:bodyPr wrap="square" lIns="73152" rIns="73152" tIns="36576" bIns="36576">
+            <a:spAutoFit/>
+          </a:bodyPr>
+          <a:lstStyle/>
+          <a:p>
             <a:pPr algn="ctr">
               <a:spcAft>
                 <a:spcPts val="0"/>
               </a:spcAft>
-              <a:defRPr sz="1700" b="1">
-                <a:solidFill>
-                  <a:srgbClr val="2A8B5A"/>
-                </a:solidFill>
-                <a:latin typeface="Noto Sans CJK KR"/>
-              </a:defRPr>
-            </a:pPr>
-            <a:r>
-              <a:t>다음 모듈을 시작하기 전, 이 슬라이드의 Complete와 다음 모듈의 Starter를 비교합니다.</a:t>
+              <a:defRPr sz="1800" b="1">
+                <a:solidFill>
+                  <a:srgbClr val="DB7E22"/>
+                </a:solidFill>
+                <a:latin typeface="Noto Sans CJK KR"/>
+              </a:defRPr>
+            </a:pPr>
+            <a:r>
+              <a:t>공통 순서: ① 현재 폴더 ② source ③ 파일 경로 ④ 이름/타입/단위 ⑤ build·source 후 재실행</a:t>
             </a:r>
           </a:p>
         </p:txBody>
@@ -11134,6 +11486,754 @@
               </a:defRPr>
             </a:pPr>
             <a:r>
+              <a:t>미니 실습: 값 하나를 바꾸고 결과를 비교한다</a:t>
+            </a:r>
+          </a:p>
+        </p:txBody>
+      </p:sp>
+      <p:sp>
+        <p:nvSpPr>
+          <p:cNvPr id="3" name="TextBox 2"/>
+          <p:cNvSpPr txBox="1"/>
+          <p:nvPr/>
+        </p:nvSpPr>
+        <p:spPr>
+          <a:xfrm>
+            <a:off x="603504" y="859536"/>
+            <a:ext cx="10698480" cy="292608"/>
+          </a:xfrm>
+          <a:prstGeom prst="rect">
+            <a:avLst/>
+          </a:prstGeom>
+          <a:noFill/>
+        </p:spPr>
+        <p:txBody>
+          <a:bodyPr wrap="square" lIns="73152" rIns="73152" tIns="36576" bIns="36576">
+            <a:spAutoFit/>
+          </a:bodyPr>
+          <a:lstStyle/>
+          <a:p>
+            <a:pPr algn="l">
+              <a:spcAft>
+                <a:spcPts val="0"/>
+              </a:spcAft>
+              <a:defRPr sz="1700" b="0">
+                <a:solidFill>
+                  <a:srgbClr val="5C6672"/>
+                </a:solidFill>
+                <a:latin typeface="Noto Sans CJK KR"/>
+              </a:defRPr>
+            </a:pPr>
+            <a:r>
+              <a:t>정상 결과를 만든 뒤에는 한 번에 하나의 값만 바꿉니다.</a:t>
+            </a:r>
+          </a:p>
+        </p:txBody>
+      </p:sp>
+      <p:sp>
+        <p:nvSpPr>
+          <p:cNvPr id="4" name="TextBox 3"/>
+          <p:cNvSpPr txBox="1"/>
+          <p:nvPr/>
+        </p:nvSpPr>
+        <p:spPr>
+          <a:xfrm>
+            <a:off x="530352" y="6510528"/>
+            <a:ext cx="7772400" cy="201168"/>
+          </a:xfrm>
+          <a:prstGeom prst="rect">
+            <a:avLst/>
+          </a:prstGeom>
+          <a:noFill/>
+        </p:spPr>
+        <p:txBody>
+          <a:bodyPr wrap="square" lIns="73152" rIns="73152" tIns="36576" bIns="36576">
+            <a:spAutoFit/>
+          </a:bodyPr>
+          <a:lstStyle/>
+          <a:p>
+            <a:pPr algn="l">
+              <a:spcAft>
+                <a:spcPts val="0"/>
+              </a:spcAft>
+              <a:defRPr sz="1000" b="0">
+                <a:solidFill>
+                  <a:srgbClr val="5C6672"/>
+                </a:solidFill>
+                <a:latin typeface="Noto Sans CJK KR"/>
+              </a:defRPr>
+            </a:pPr>
+            <a:r>
+              <a:t>ROS 2 Jazzy · Gazebo Harmonic · M20 · 따라 하기형 AGV 실습</a:t>
+            </a:r>
+          </a:p>
+        </p:txBody>
+      </p:sp>
+      <p:sp>
+        <p:nvSpPr>
+          <p:cNvPr id="5" name="TextBox 4"/>
+          <p:cNvSpPr txBox="1"/>
+          <p:nvPr/>
+        </p:nvSpPr>
+        <p:spPr>
+          <a:xfrm>
+            <a:off x="9144000" y="6510528"/>
+            <a:ext cx="2468880" cy="201168"/>
+          </a:xfrm>
+          <a:prstGeom prst="rect">
+            <a:avLst/>
+          </a:prstGeom>
+          <a:noFill/>
+        </p:spPr>
+        <p:txBody>
+          <a:bodyPr wrap="square" lIns="73152" rIns="73152" tIns="36576" bIns="36576">
+            <a:spAutoFit/>
+          </a:bodyPr>
+          <a:lstStyle/>
+          <a:p>
+            <a:pPr algn="r">
+              <a:spcAft>
+                <a:spcPts val="0"/>
+              </a:spcAft>
+              <a:defRPr sz="1000" b="0">
+                <a:solidFill>
+                  <a:srgbClr val="5C6672"/>
+                </a:solidFill>
+                <a:latin typeface="Noto Sans CJK KR"/>
+              </a:defRPr>
+            </a:pPr>
+            <a:r>
+              <a:t>명령·파일 경로는 슬라이드에서 복사 가능</a:t>
+            </a:r>
+          </a:p>
+        </p:txBody>
+      </p:sp>
+      <p:sp>
+        <p:nvSpPr>
+          <p:cNvPr id="6" name="Rectangle 5"/>
+          <p:cNvSpPr/>
+          <p:nvPr/>
+        </p:nvSpPr>
+        <p:spPr>
+          <a:xfrm>
+            <a:off x="566928" y="1188720"/>
+            <a:ext cx="11064240" cy="347472"/>
+          </a:xfrm>
+          <a:prstGeom prst="rect">
+            <a:avLst/>
+          </a:prstGeom>
+          <a:solidFill>
+            <a:srgbClr val="F4F7FB"/>
+          </a:solidFill>
+          <a:ln>
+            <a:solidFill>
+              <a:srgbClr val="F4F7FB"/>
+            </a:solidFill>
+          </a:ln>
+        </p:spPr>
+        <p:style>
+          <a:lnRef idx="1">
+            <a:schemeClr val="accent1"/>
+          </a:lnRef>
+          <a:fillRef idx="3">
+            <a:schemeClr val="accent1"/>
+          </a:fillRef>
+          <a:effectRef idx="2">
+            <a:schemeClr val="accent1"/>
+          </a:effectRef>
+          <a:fontRef idx="minor">
+            <a:schemeClr val="lt1"/>
+          </a:fontRef>
+        </p:style>
+        <p:txBody>
+          <a:bodyPr rtlCol="0" anchor="ctr" wrap="square" lIns="73152" rIns="73152" tIns="36576" bIns="36576"/>
+          <a:lstStyle/>
+          <a:p>
+            <a:pPr algn="l">
+              <a:spcAft>
+                <a:spcPts val="0"/>
+              </a:spcAft>
+              <a:defRPr sz="1300" b="1">
+                <a:solidFill>
+                  <a:srgbClr val="122C4E"/>
+                </a:solidFill>
+                <a:latin typeface="Noto Sans CJK KR"/>
+              </a:defRPr>
+            </a:pPr>
+            <a:r>
+              <a:t>현재 단계 미니 실습    |    현재 폴더 ~/ros2_curri/agv_ws    |    현재 터미널</a:t>
+            </a:r>
+          </a:p>
+        </p:txBody>
+      </p:sp>
+      <p:sp>
+        <p:nvSpPr>
+          <p:cNvPr id="7" name="Rounded Rectangle 6"/>
+          <p:cNvSpPr/>
+          <p:nvPr/>
+        </p:nvSpPr>
+        <p:spPr>
+          <a:xfrm>
+            <a:off x="749808" y="1874519"/>
+            <a:ext cx="10652760" cy="1993392"/>
+          </a:xfrm>
+          <a:prstGeom prst="roundRect">
+            <a:avLst/>
+          </a:prstGeom>
+          <a:solidFill>
+            <a:srgbClr val="FFF8EB"/>
+          </a:solidFill>
+          <a:ln>
+            <a:solidFill>
+              <a:srgbClr val="ECC680"/>
+            </a:solidFill>
+          </a:ln>
+        </p:spPr>
+        <p:style>
+          <a:lnRef idx="1">
+            <a:schemeClr val="accent1"/>
+          </a:lnRef>
+          <a:fillRef idx="3">
+            <a:schemeClr val="accent1"/>
+          </a:fillRef>
+          <a:effectRef idx="2">
+            <a:schemeClr val="accent1"/>
+          </a:effectRef>
+          <a:fontRef idx="minor">
+            <a:schemeClr val="lt1"/>
+          </a:fontRef>
+        </p:style>
+        <p:txBody>
+          <a:bodyPr rtlCol="0" anchor="ctr" wrap="square" lIns="73152" rIns="73152" tIns="36576" bIns="36576"/>
+          <a:lstStyle/>
+          <a:p>
+            <a:pPr algn="ctr">
+              <a:spcAft>
+                <a:spcPts val="0"/>
+              </a:spcAft>
+              <a:defRPr sz="2300" b="1">
+                <a:solidFill>
+                  <a:srgbClr val="122C4E"/>
+                </a:solidFill>
+                <a:latin typeface="Noto Sans CJK KR"/>
+              </a:defRPr>
+            </a:pPr>
+            <a:r>
+              <a:t>kp_angular을 0.002, 0.004, 0.008로 바꿨을 때 반응 속도와 진동 위험을 예측해 기록한다.</a:t>
+            </a:r>
+          </a:p>
+        </p:txBody>
+      </p:sp>
+      <p:sp>
+        <p:nvSpPr>
+          <p:cNvPr id="8" name="TextBox 7"/>
+          <p:cNvSpPr txBox="1"/>
+          <p:nvPr/>
+        </p:nvSpPr>
+        <p:spPr>
+          <a:xfrm>
+            <a:off x="877824" y="4590288"/>
+            <a:ext cx="10241280" cy="594360"/>
+          </a:xfrm>
+          <a:prstGeom prst="rect">
+            <a:avLst/>
+          </a:prstGeom>
+          <a:noFill/>
+        </p:spPr>
+        <p:txBody>
+          <a:bodyPr wrap="square" lIns="73152" rIns="73152" tIns="36576" bIns="36576">
+            <a:spAutoFit/>
+          </a:bodyPr>
+          <a:lstStyle/>
+          <a:p>
+            <a:pPr algn="ctr">
+              <a:spcAft>
+                <a:spcPts val="0"/>
+              </a:spcAft>
+              <a:defRPr sz="1900" b="1">
+                <a:solidFill>
+                  <a:srgbClr val="DB7E22"/>
+                </a:solidFill>
+                <a:latin typeface="Noto Sans CJK KR"/>
+              </a:defRPr>
+            </a:pPr>
+            <a:r>
+              <a:t>기록할 것: 바꾼 값(단위) · 기대한 변화 · 실제 출력/화면 · 원래 값으로 되돌린 결과</a:t>
+            </a:r>
+          </a:p>
+        </p:txBody>
+      </p:sp>
+    </p:spTree>
+  </p:cSld>
+  <p:clrMapOvr>
+    <a:masterClrMapping/>
+  </p:clrMapOvr>
+</p:sld>
+</file>
+
+<file path=ppt/slides/slide23.xml><?xml version="1.0" encoding="utf-8"?>
+<p:sld xmlns:a="http://schemas.openxmlformats.org/drawingml/2006/main" xmlns:p="http://schemas.openxmlformats.org/presentationml/2006/main" xmlns:r="http://schemas.openxmlformats.org/officeDocument/2006/relationships">
+  <p:cSld>
+    <p:spTree>
+      <p:nvGrpSpPr>
+        <p:cNvPr id="1" name=""/>
+        <p:cNvGrpSpPr/>
+        <p:nvPr/>
+      </p:nvGrpSpPr>
+      <p:grpSpPr/>
+      <p:sp>
+        <p:nvSpPr>
+          <p:cNvPr id="2" name="TextBox 1"/>
+          <p:cNvSpPr txBox="1"/>
+          <p:nvPr/>
+        </p:nvSpPr>
+        <p:spPr>
+          <a:xfrm>
+            <a:off x="566928" y="347472"/>
+            <a:ext cx="10881360" cy="438912"/>
+          </a:xfrm>
+          <a:prstGeom prst="rect">
+            <a:avLst/>
+          </a:prstGeom>
+          <a:noFill/>
+        </p:spPr>
+        <p:txBody>
+          <a:bodyPr wrap="square" lIns="73152" rIns="73152" tIns="36576" bIns="36576">
+            <a:spAutoFit/>
+          </a:bodyPr>
+          <a:lstStyle/>
+          <a:p>
+            <a:pPr algn="l">
+              <a:spcAft>
+                <a:spcPts val="0"/>
+              </a:spcAft>
+              <a:defRPr sz="3200" b="1">
+                <a:solidFill>
+                  <a:srgbClr val="122C4E"/>
+                </a:solidFill>
+                <a:latin typeface="Noto Sans CJK KR"/>
+              </a:defRPr>
+            </a:pPr>
+            <a:r>
+              <a:t>체크포인트를 저장하고 다음 모듈로 넘긴다</a:t>
+            </a:r>
+          </a:p>
+        </p:txBody>
+      </p:sp>
+      <p:sp>
+        <p:nvSpPr>
+          <p:cNvPr id="3" name="TextBox 2"/>
+          <p:cNvSpPr txBox="1"/>
+          <p:nvPr/>
+        </p:nvSpPr>
+        <p:spPr>
+          <a:xfrm>
+            <a:off x="603504" y="859536"/>
+            <a:ext cx="10698480" cy="292608"/>
+          </a:xfrm>
+          <a:prstGeom prst="rect">
+            <a:avLst/>
+          </a:prstGeom>
+          <a:noFill/>
+        </p:spPr>
+        <p:txBody>
+          <a:bodyPr wrap="square" lIns="73152" rIns="73152" tIns="36576" bIns="36576">
+            <a:spAutoFit/>
+          </a:bodyPr>
+          <a:lstStyle/>
+          <a:p>
+            <a:pPr algn="l">
+              <a:spcAft>
+                <a:spcPts val="0"/>
+              </a:spcAft>
+              <a:defRPr sz="1700" b="0">
+                <a:solidFill>
+                  <a:srgbClr val="5C6672"/>
+                </a:solidFill>
+                <a:latin typeface="Noto Sans CJK KR"/>
+              </a:defRPr>
+            </a:pPr>
+            <a:r>
+              <a:t>현재 Complete는 다음 Starter의 기준선입니다.</a:t>
+            </a:r>
+          </a:p>
+        </p:txBody>
+      </p:sp>
+      <p:sp>
+        <p:nvSpPr>
+          <p:cNvPr id="4" name="TextBox 3"/>
+          <p:cNvSpPr txBox="1"/>
+          <p:nvPr/>
+        </p:nvSpPr>
+        <p:spPr>
+          <a:xfrm>
+            <a:off x="530352" y="6510528"/>
+            <a:ext cx="7772400" cy="201168"/>
+          </a:xfrm>
+          <a:prstGeom prst="rect">
+            <a:avLst/>
+          </a:prstGeom>
+          <a:noFill/>
+        </p:spPr>
+        <p:txBody>
+          <a:bodyPr wrap="square" lIns="73152" rIns="73152" tIns="36576" bIns="36576">
+            <a:spAutoFit/>
+          </a:bodyPr>
+          <a:lstStyle/>
+          <a:p>
+            <a:pPr algn="l">
+              <a:spcAft>
+                <a:spcPts val="0"/>
+              </a:spcAft>
+              <a:defRPr sz="1000" b="0">
+                <a:solidFill>
+                  <a:srgbClr val="5C6672"/>
+                </a:solidFill>
+                <a:latin typeface="Noto Sans CJK KR"/>
+              </a:defRPr>
+            </a:pPr>
+            <a:r>
+              <a:t>ROS 2 Jazzy · Gazebo Harmonic · M20 · 따라 하기형 AGV 실습</a:t>
+            </a:r>
+          </a:p>
+        </p:txBody>
+      </p:sp>
+      <p:sp>
+        <p:nvSpPr>
+          <p:cNvPr id="5" name="TextBox 4"/>
+          <p:cNvSpPr txBox="1"/>
+          <p:nvPr/>
+        </p:nvSpPr>
+        <p:spPr>
+          <a:xfrm>
+            <a:off x="9144000" y="6510528"/>
+            <a:ext cx="2468880" cy="201168"/>
+          </a:xfrm>
+          <a:prstGeom prst="rect">
+            <a:avLst/>
+          </a:prstGeom>
+          <a:noFill/>
+        </p:spPr>
+        <p:txBody>
+          <a:bodyPr wrap="square" lIns="73152" rIns="73152" tIns="36576" bIns="36576">
+            <a:spAutoFit/>
+          </a:bodyPr>
+          <a:lstStyle/>
+          <a:p>
+            <a:pPr algn="r">
+              <a:spcAft>
+                <a:spcPts val="0"/>
+              </a:spcAft>
+              <a:defRPr sz="1000" b="0">
+                <a:solidFill>
+                  <a:srgbClr val="5C6672"/>
+                </a:solidFill>
+                <a:latin typeface="Noto Sans CJK KR"/>
+              </a:defRPr>
+            </a:pPr>
+            <a:r>
+              <a:t>명령·파일 경로는 슬라이드에서 복사 가능</a:t>
+            </a:r>
+          </a:p>
+        </p:txBody>
+      </p:sp>
+      <p:sp>
+        <p:nvSpPr>
+          <p:cNvPr id="6" name="Rectangle 5"/>
+          <p:cNvSpPr/>
+          <p:nvPr/>
+        </p:nvSpPr>
+        <p:spPr>
+          <a:xfrm>
+            <a:off x="566928" y="1188720"/>
+            <a:ext cx="11064240" cy="347472"/>
+          </a:xfrm>
+          <a:prstGeom prst="rect">
+            <a:avLst/>
+          </a:prstGeom>
+          <a:solidFill>
+            <a:srgbClr val="F4F7FB"/>
+          </a:solidFill>
+          <a:ln>
+            <a:solidFill>
+              <a:srgbClr val="F4F7FB"/>
+            </a:solidFill>
+          </a:ln>
+        </p:spPr>
+        <p:style>
+          <a:lnRef idx="1">
+            <a:schemeClr val="accent1"/>
+          </a:lnRef>
+          <a:fillRef idx="3">
+            <a:schemeClr val="accent1"/>
+          </a:fillRef>
+          <a:effectRef idx="2">
+            <a:schemeClr val="accent1"/>
+          </a:effectRef>
+          <a:fontRef idx="minor">
+            <a:schemeClr val="lt1"/>
+          </a:fontRef>
+        </p:style>
+        <p:txBody>
+          <a:bodyPr rtlCol="0" anchor="ctr" wrap="square" lIns="73152" rIns="73152" tIns="36576" bIns="36576"/>
+          <a:lstStyle/>
+          <a:p>
+            <a:pPr algn="l">
+              <a:spcAft>
+                <a:spcPts val="0"/>
+              </a:spcAft>
+              <a:defRPr sz="1300" b="1">
+                <a:solidFill>
+                  <a:srgbClr val="122C4E"/>
+                </a:solidFill>
+                <a:latin typeface="Noto Sans CJK KR"/>
+              </a:defRPr>
+            </a:pPr>
+            <a:r>
+              <a:t>현재 단계 체크포인트    |    현재 폴더 ~/ros2_curri/agv_ws    |    현재 터미널</a:t>
+            </a:r>
+          </a:p>
+        </p:txBody>
+      </p:sp>
+      <p:sp>
+        <p:nvSpPr>
+          <p:cNvPr id="7" name="Rounded Rectangle 6"/>
+          <p:cNvSpPr/>
+          <p:nvPr/>
+        </p:nvSpPr>
+        <p:spPr>
+          <a:xfrm>
+            <a:off x="685800" y="1737360"/>
+            <a:ext cx="10972800" cy="3611880"/>
+          </a:xfrm>
+          <a:prstGeom prst="roundRect">
+            <a:avLst/>
+          </a:prstGeom>
+          <a:solidFill>
+            <a:srgbClr val="F4F7FB"/>
+          </a:solidFill>
+          <a:ln>
+            <a:solidFill>
+              <a:srgbClr val="D2DCE8"/>
+            </a:solidFill>
+          </a:ln>
+        </p:spPr>
+        <p:style>
+          <a:lnRef idx="1">
+            <a:schemeClr val="accent1"/>
+          </a:lnRef>
+          <a:fillRef idx="3">
+            <a:schemeClr val="accent1"/>
+          </a:fillRef>
+          <a:effectRef idx="2">
+            <a:schemeClr val="accent1"/>
+          </a:effectRef>
+          <a:fontRef idx="minor">
+            <a:schemeClr val="lt1"/>
+          </a:fontRef>
+        </p:style>
+        <p:txBody>
+          <a:bodyPr rtlCol="0" anchor="ctr"/>
+          <a:lstStyle/>
+          <a:p>
+            <a:pPr algn="ctr"/>
+          </a:p>
+        </p:txBody>
+      </p:sp>
+      <p:sp>
+        <p:nvSpPr>
+          <p:cNvPr id="8" name="TextBox 7"/>
+          <p:cNvSpPr txBox="1"/>
+          <p:nvPr/>
+        </p:nvSpPr>
+        <p:spPr>
+          <a:xfrm>
+            <a:off x="896112" y="1993392"/>
+            <a:ext cx="10332720" cy="2971800"/>
+          </a:xfrm>
+          <a:prstGeom prst="rect">
+            <a:avLst/>
+          </a:prstGeom>
+          <a:noFill/>
+        </p:spPr>
+        <p:txBody>
+          <a:bodyPr wrap="square" lIns="109728" rIns="109728">
+            <a:spAutoFit/>
+          </a:bodyPr>
+          <a:lstStyle/>
+          <a:p>
+            <a:pPr>
+              <a:spcAft>
+                <a:spcPts val="800"/>
+              </a:spcAft>
+              <a:defRPr sz="1800">
+                <a:solidFill>
+                  <a:srgbClr val="122C4E"/>
+                </a:solidFill>
+                <a:latin typeface="Noto Sans CJK KR"/>
+              </a:defRPr>
+            </a:pPr>
+            <a:r>
+              <a:t>• □ 완료 화면: kp_angular·max speed parameter와 saturation이 /cmd_vel_raw 출력을 제한하는 것을 확인한다.</a:t>
+            </a:r>
+          </a:p>
+          <a:p>
+            <a:pPr>
+              <a:spcAft>
+                <a:spcPts val="800"/>
+              </a:spcAft>
+              <a:defRPr sz="1800">
+                <a:solidFill>
+                  <a:srgbClr val="122C4E"/>
+                </a:solidFill>
+                <a:latin typeface="Noto Sans CJK KR"/>
+              </a:defRPr>
+            </a:pPr>
+            <a:r>
+              <a:t>• □ Complete 파일: blocks/E_autonomy_logic/M20_pid_driving_control/complete/</a:t>
+            </a:r>
+          </a:p>
+          <a:p>
+            <a:pPr>
+              <a:spcAft>
+                <a:spcPts val="800"/>
+              </a:spcAft>
+              <a:defRPr sz="1800">
+                <a:solidFill>
+                  <a:srgbClr val="122C4E"/>
+                </a:solidFill>
+                <a:latin typeface="Noto Sans CJK KR"/>
+              </a:defRPr>
+            </a:pPr>
+            <a:r>
+              <a:t>• □ 정상 로그·캡처: logs/validation.log, screenshots/validation_terminal.png</a:t>
+            </a:r>
+          </a:p>
+          <a:p>
+            <a:pPr>
+              <a:spcAft>
+                <a:spcPts val="800"/>
+              </a:spcAft>
+              <a:defRPr sz="1800">
+                <a:solidFill>
+                  <a:srgbClr val="122C4E"/>
+                </a:solidFill>
+                <a:latin typeface="Noto Sans CJK KR"/>
+              </a:defRPr>
+            </a:pPr>
+            <a:r>
+              <a:t>• □ 버전 식별: CHECKSUM_or_TAG.txt의 SHA-256 manifest</a:t>
+            </a:r>
+          </a:p>
+          <a:p>
+            <a:pPr>
+              <a:spcAft>
+                <a:spcPts val="800"/>
+              </a:spcAft>
+              <a:defRPr sz="1800">
+                <a:solidFill>
+                  <a:srgbClr val="122C4E"/>
+                </a:solidFill>
+                <a:latin typeface="Noto Sans CJK KR"/>
+              </a:defRPr>
+            </a:pPr>
+            <a:r>
+              <a:t>• □ 다음 시작 조건: M21 YAML/Launch</a:t>
+            </a:r>
+          </a:p>
+        </p:txBody>
+      </p:sp>
+      <p:sp>
+        <p:nvSpPr>
+          <p:cNvPr id="9" name="TextBox 8"/>
+          <p:cNvSpPr txBox="1"/>
+          <p:nvPr/>
+        </p:nvSpPr>
+        <p:spPr>
+          <a:xfrm>
+            <a:off x="868680" y="5596128"/>
+            <a:ext cx="10515600" cy="338328"/>
+          </a:xfrm>
+          <a:prstGeom prst="rect">
+            <a:avLst/>
+          </a:prstGeom>
+          <a:noFill/>
+        </p:spPr>
+        <p:txBody>
+          <a:bodyPr wrap="square" lIns="73152" rIns="73152" tIns="36576" bIns="36576">
+            <a:spAutoFit/>
+          </a:bodyPr>
+          <a:lstStyle/>
+          <a:p>
+            <a:pPr algn="ctr">
+              <a:spcAft>
+                <a:spcPts val="0"/>
+              </a:spcAft>
+              <a:defRPr sz="1700" b="1">
+                <a:solidFill>
+                  <a:srgbClr val="2A8B5A"/>
+                </a:solidFill>
+                <a:latin typeface="Noto Sans CJK KR"/>
+              </a:defRPr>
+            </a:pPr>
+            <a:r>
+              <a:t>다음 모듈을 시작하기 전, 이 슬라이드의 Complete와 다음 모듈의 Starter를 비교합니다.</a:t>
+            </a:r>
+          </a:p>
+        </p:txBody>
+      </p:sp>
+    </p:spTree>
+  </p:cSld>
+  <p:clrMapOvr>
+    <a:masterClrMapping/>
+  </p:clrMapOvr>
+</p:sld>
+</file>
+
+<file path=ppt/slides/slide24.xml><?xml version="1.0" encoding="utf-8"?>
+<p:sld xmlns:a="http://schemas.openxmlformats.org/drawingml/2006/main" xmlns:p="http://schemas.openxmlformats.org/presentationml/2006/main" xmlns:r="http://schemas.openxmlformats.org/officeDocument/2006/relationships">
+  <p:cSld>
+    <p:spTree>
+      <p:nvGrpSpPr>
+        <p:cNvPr id="1" name=""/>
+        <p:cNvGrpSpPr/>
+        <p:nvPr/>
+      </p:nvGrpSpPr>
+      <p:grpSpPr/>
+      <p:sp>
+        <p:nvSpPr>
+          <p:cNvPr id="2" name="TextBox 1"/>
+          <p:cNvSpPr txBox="1"/>
+          <p:nvPr/>
+        </p:nvSpPr>
+        <p:spPr>
+          <a:xfrm>
+            <a:off x="566928" y="347472"/>
+            <a:ext cx="10881360" cy="438912"/>
+          </a:xfrm>
+          <a:prstGeom prst="rect">
+            <a:avLst/>
+          </a:prstGeom>
+          <a:noFill/>
+        </p:spPr>
+        <p:txBody>
+          <a:bodyPr wrap="square" lIns="73152" rIns="73152" tIns="36576" bIns="36576">
+            <a:spAutoFit/>
+          </a:bodyPr>
+          <a:lstStyle/>
+          <a:p>
+            <a:pPr algn="l">
+              <a:spcAft>
+                <a:spcPts val="0"/>
+              </a:spcAft>
+              <a:defRPr sz="3200" b="1">
+                <a:solidFill>
+                  <a:srgbClr val="122C4E"/>
+                </a:solidFill>
+                <a:latin typeface="Noto Sans CJK KR"/>
+              </a:defRPr>
+            </a:pPr>
+            <a:r>
               <a:t>공식 참고 자료</a:t>
             </a:r>
           </a:p>
@@ -13254,7 +14354,7 @@
               </a:defRPr>
             </a:pPr>
             <a:r>
-              <a:t>제어 파라미터를 확인한다</a:t>
+              <a:t>코드/설정이 실제로 만드는 것 (1/2)</a:t>
             </a:r>
           </a:p>
         </p:txBody>
@@ -13293,7 +14393,7 @@
               </a:defRPr>
             </a:pPr>
             <a:r>
-              <a:t>한 장에는 한 행동만 수행합니다.</a:t>
+              <a:t>파일을 입력하기 전에 ‘무엇을 만들고 어디서 볼지’를 먼저 연결합니다.</a:t>
             </a:r>
           </a:p>
         </p:txBody>
@@ -13429,109 +14529,31 @@
               </a:defRPr>
             </a:pPr>
             <a:r>
-              <a:t>현재 단계 1/2    |    현재 폴더 ~/ros2_curri/agv_ws    |    현재 터미널</a:t>
-            </a:r>
-          </a:p>
-        </p:txBody>
-      </p:sp>
-      <p:sp>
-        <p:nvSpPr>
-          <p:cNvPr id="7" name="TextBox 6"/>
-          <p:cNvSpPr txBox="1"/>
-          <p:nvPr/>
-        </p:nvSpPr>
-        <p:spPr>
-          <a:xfrm>
-            <a:off x="676656" y="1764792"/>
-            <a:ext cx="1828800" cy="347472"/>
-          </a:xfrm>
-          <a:prstGeom prst="rect">
-            <a:avLst/>
-          </a:prstGeom>
-          <a:noFill/>
-        </p:spPr>
-        <p:txBody>
-          <a:bodyPr wrap="square" lIns="73152" rIns="73152" tIns="36576" bIns="36576">
-            <a:spAutoFit/>
-          </a:bodyPr>
-          <a:lstStyle/>
-          <a:p>
-            <a:pPr algn="l">
-              <a:spcAft>
-                <a:spcPts val="0"/>
-              </a:spcAft>
-              <a:defRPr sz="1800" b="1">
-                <a:solidFill>
-                  <a:srgbClr val="225B9B"/>
-                </a:solidFill>
-                <a:latin typeface="Noto Sans CJK KR"/>
-              </a:defRPr>
-            </a:pPr>
-            <a:r>
-              <a:t>왜 하는가</a:t>
-            </a:r>
-          </a:p>
-        </p:txBody>
-      </p:sp>
-      <p:sp>
-        <p:nvSpPr>
-          <p:cNvPr id="8" name="TextBox 7"/>
-          <p:cNvSpPr txBox="1"/>
-          <p:nvPr/>
-        </p:nvSpPr>
-        <p:spPr>
-          <a:xfrm>
-            <a:off x="676656" y="2103120"/>
-            <a:ext cx="10789920" cy="512064"/>
-          </a:xfrm>
-          <a:prstGeom prst="rect">
-            <a:avLst/>
-          </a:prstGeom>
-          <a:noFill/>
-        </p:spPr>
-        <p:txBody>
-          <a:bodyPr wrap="square" lIns="73152" rIns="73152" tIns="36576" bIns="36576">
-            <a:spAutoFit/>
-          </a:bodyPr>
-          <a:lstStyle/>
-          <a:p>
-            <a:pPr algn="l">
-              <a:spcAft>
-                <a:spcPts val="0"/>
-              </a:spcAft>
-              <a:defRPr sz="2000" b="0">
-                <a:solidFill>
-                  <a:srgbClr val="122C4E"/>
-                </a:solidFill>
-                <a:latin typeface="Noto Sans CJK KR"/>
-              </a:defRPr>
-            </a:pPr>
-            <a:r>
-              <a:t>P gain과 최대 속도는 overshoot 전에 먼저 보수적으로 제한한다.</a:t>
-            </a:r>
-          </a:p>
-        </p:txBody>
-      </p:sp>
-      <p:sp>
-        <p:nvSpPr>
-          <p:cNvPr id="9" name="Rounded Rectangle 8"/>
+              <a:t>현재 단계 파일 역할    |    현재 폴더 ~/ros2_curri/agv_ws    |    현재 터미널</a:t>
+            </a:r>
+          </a:p>
+        </p:txBody>
+      </p:sp>
+      <p:sp>
+        <p:nvSpPr>
+          <p:cNvPr id="7" name="Rounded Rectangle 6"/>
           <p:cNvSpPr/>
           <p:nvPr/>
         </p:nvSpPr>
         <p:spPr>
           <a:xfrm>
-            <a:off x="676656" y="2871216"/>
-            <a:ext cx="10835640" cy="2331720"/>
+            <a:off x="640080" y="1627632"/>
+            <a:ext cx="10972800" cy="2048256"/>
           </a:xfrm>
           <a:prstGeom prst="roundRect">
             <a:avLst/>
           </a:prstGeom>
           <a:solidFill>
-            <a:srgbClr val="1D232D"/>
+            <a:srgbClr val="F4F7FB"/>
           </a:solidFill>
           <a:ln>
             <a:solidFill>
-              <a:srgbClr val="1D232D"/>
+              <a:srgbClr val="CCDBEB"/>
             </a:solidFill>
           </a:ln>
         </p:spPr>
@@ -13550,40 +14572,23 @@
           </a:fontRef>
         </p:style>
         <p:txBody>
-          <a:bodyPr rtlCol="0" anchor="ctr" wrap="square" lIns="73152" rIns="73152" tIns="36576" bIns="36576"/>
-          <a:lstStyle/>
-          <a:p>
-            <a:pPr algn="l">
-              <a:spcAft>
-                <a:spcPts val="0"/>
-              </a:spcAft>
-              <a:defRPr sz="1600" b="0">
-                <a:solidFill>
-                  <a:srgbClr val="FFFFFF"/>
-                </a:solidFill>
-                <a:latin typeface="DejaVu Sans Mono"/>
-              </a:defRPr>
-            </a:pPr>
-            <a:r>
-              <a:t>ros2 run agv_control pid_controller --ros-args \</a:t>
-            </a:r>
-            <a:br/>
-            <a:r>
-              <a:t>  -p kp_angular:=0.004 -p max_linear_speed:=0.25</a:t>
-            </a:r>
-          </a:p>
-        </p:txBody>
-      </p:sp>
-      <p:sp>
-        <p:nvSpPr>
-          <p:cNvPr id="10" name="TextBox 9"/>
+          <a:bodyPr rtlCol="0" anchor="ctr"/>
+          <a:lstStyle/>
+          <a:p>
+            <a:pPr algn="ctr"/>
+          </a:p>
+        </p:txBody>
+      </p:sp>
+      <p:sp>
+        <p:nvSpPr>
+          <p:cNvPr id="8" name="TextBox 7"/>
           <p:cNvSpPr txBox="1"/>
           <p:nvPr/>
         </p:nvSpPr>
         <p:spPr>
           <a:xfrm>
-            <a:off x="768096" y="5468112"/>
-            <a:ext cx="1143000" cy="256032"/>
+            <a:off x="850392" y="1764792"/>
+            <a:ext cx="10424160" cy="256032"/>
           </a:xfrm>
           <a:prstGeom prst="rect">
             <a:avLst/>
@@ -13600,29 +14605,29 @@
               <a:spcAft>
                 <a:spcPts val="0"/>
               </a:spcAft>
-              <a:defRPr sz="1800" b="1">
-                <a:solidFill>
-                  <a:srgbClr val="2A8B5A"/>
-                </a:solidFill>
-                <a:latin typeface="Noto Sans CJK KR"/>
-              </a:defRPr>
-            </a:pPr>
-            <a:r>
-              <a:t>확인</a:t>
-            </a:r>
-          </a:p>
-        </p:txBody>
-      </p:sp>
-      <p:sp>
-        <p:nvSpPr>
-          <p:cNvPr id="11" name="TextBox 10"/>
+              <a:defRPr sz="1300" b="1">
+                <a:solidFill>
+                  <a:srgbClr val="225B9B"/>
+                </a:solidFill>
+                <a:latin typeface="DejaVu Sans Mono"/>
+              </a:defRPr>
+            </a:pPr>
+            <a:r>
+              <a:t>~/ros2_curri/agv_ws/src/agv_control/agv_control/pid_controller.py</a:t>
+            </a:r>
+          </a:p>
+        </p:txBody>
+      </p:sp>
+      <p:sp>
+        <p:nvSpPr>
+          <p:cNvPr id="9" name="TextBox 8"/>
           <p:cNvSpPr txBox="1"/>
           <p:nvPr/>
         </p:nvSpPr>
         <p:spPr>
           <a:xfrm>
-            <a:off x="768096" y="5742432"/>
-            <a:ext cx="10561320" cy="347472"/>
+            <a:off x="868680" y="2130552"/>
+            <a:ext cx="1234440" cy="228600"/>
           </a:xfrm>
           <a:prstGeom prst="rect">
             <a:avLst/>
@@ -13639,7 +14644,46 @@
               <a:spcAft>
                 <a:spcPts val="0"/>
               </a:spcAft>
-              <a:defRPr sz="1800" b="0">
+              <a:defRPr sz="1500" b="1">
+                <a:solidFill>
+                  <a:srgbClr val="2A8B5A"/>
+                </a:solidFill>
+                <a:latin typeface="Noto Sans CJK KR"/>
+              </a:defRPr>
+            </a:pPr>
+            <a:r>
+              <a:t>만드는 것</a:t>
+            </a:r>
+          </a:p>
+        </p:txBody>
+      </p:sp>
+      <p:sp>
+        <p:nvSpPr>
+          <p:cNvPr id="10" name="TextBox 9"/>
+          <p:cNvSpPr txBox="1"/>
+          <p:nvPr/>
+        </p:nvSpPr>
+        <p:spPr>
+          <a:xfrm>
+            <a:off x="1975104" y="2112264"/>
+            <a:ext cx="9189720" cy="274320"/>
+          </a:xfrm>
+          <a:prstGeom prst="rect">
+            <a:avLst/>
+          </a:prstGeom>
+          <a:noFill/>
+        </p:spPr>
+        <p:txBody>
+          <a:bodyPr wrap="square" lIns="73152" rIns="73152" tIns="36576" bIns="36576">
+            <a:spAutoFit/>
+          </a:bodyPr>
+          <a:lstStyle/>
+          <a:p>
+            <a:pPr algn="l">
+              <a:spcAft>
+                <a:spcPts val="0"/>
+              </a:spcAft>
+              <a:defRPr sz="1500" b="0">
                 <a:solidFill>
                   <a:srgbClr val="122C4E"/>
                 </a:solidFill>
@@ -13647,7 +14691,489 @@
               </a:defRPr>
             </a:pPr>
             <a:r>
-              <a:t>명령의 출력에서 topic·frame·파일 이름 또는 성공 메시지를 찾으면 이 단계가 완료됩니다.</a:t>
+              <a:t>ROS 2 node 또는 실행 보조 로직</a:t>
+            </a:r>
+          </a:p>
+        </p:txBody>
+      </p:sp>
+      <p:sp>
+        <p:nvSpPr>
+          <p:cNvPr id="11" name="TextBox 10"/>
+          <p:cNvSpPr txBox="1"/>
+          <p:nvPr/>
+        </p:nvSpPr>
+        <p:spPr>
+          <a:xfrm>
+            <a:off x="868680" y="2505456"/>
+            <a:ext cx="1234440" cy="228600"/>
+          </a:xfrm>
+          <a:prstGeom prst="rect">
+            <a:avLst/>
+          </a:prstGeom>
+          <a:noFill/>
+        </p:spPr>
+        <p:txBody>
+          <a:bodyPr wrap="square" lIns="73152" rIns="73152" tIns="36576" bIns="36576">
+            <a:spAutoFit/>
+          </a:bodyPr>
+          <a:lstStyle/>
+          <a:p>
+            <a:pPr algn="l">
+              <a:spcAft>
+                <a:spcPts val="0"/>
+              </a:spcAft>
+              <a:defRPr sz="1500" b="1">
+                <a:solidFill>
+                  <a:srgbClr val="DB7E22"/>
+                </a:solidFill>
+                <a:latin typeface="Noto Sans CJK KR"/>
+              </a:defRPr>
+            </a:pPr>
+            <a:r>
+              <a:t>코드 읽기</a:t>
+            </a:r>
+          </a:p>
+        </p:txBody>
+      </p:sp>
+      <p:sp>
+        <p:nvSpPr>
+          <p:cNvPr id="12" name="TextBox 11"/>
+          <p:cNvSpPr txBox="1"/>
+          <p:nvPr/>
+        </p:nvSpPr>
+        <p:spPr>
+          <a:xfrm>
+            <a:off x="1975104" y="2487168"/>
+            <a:ext cx="9189720" cy="301752"/>
+          </a:xfrm>
+          <a:prstGeom prst="rect">
+            <a:avLst/>
+          </a:prstGeom>
+          <a:noFill/>
+        </p:spPr>
+        <p:txBody>
+          <a:bodyPr wrap="square" lIns="73152" rIns="73152" tIns="36576" bIns="36576">
+            <a:spAutoFit/>
+          </a:bodyPr>
+          <a:lstStyle/>
+          <a:p>
+            <a:pPr algn="l">
+              <a:spcAft>
+                <a:spcPts val="0"/>
+              </a:spcAft>
+              <a:defRPr sz="1400" b="0">
+                <a:solidFill>
+                  <a:srgbClr val="122C4E"/>
+                </a:solidFill>
+                <a:latin typeface="Noto Sans CJK KR"/>
+              </a:defRPr>
+            </a:pPr>
+            <a:r>
+              <a:t>import → Node 생성 → publisher/subscription → callback/main 순서로 읽는다.</a:t>
+            </a:r>
+          </a:p>
+        </p:txBody>
+      </p:sp>
+      <p:sp>
+        <p:nvSpPr>
+          <p:cNvPr id="13" name="TextBox 12"/>
+          <p:cNvSpPr txBox="1"/>
+          <p:nvPr/>
+        </p:nvSpPr>
+        <p:spPr>
+          <a:xfrm>
+            <a:off x="868680" y="2889504"/>
+            <a:ext cx="1234440" cy="228600"/>
+          </a:xfrm>
+          <a:prstGeom prst="rect">
+            <a:avLst/>
+          </a:prstGeom>
+          <a:noFill/>
+        </p:spPr>
+        <p:txBody>
+          <a:bodyPr wrap="square" lIns="73152" rIns="73152" tIns="36576" bIns="36576">
+            <a:spAutoFit/>
+          </a:bodyPr>
+          <a:lstStyle/>
+          <a:p>
+            <a:pPr algn="l">
+              <a:spcAft>
+                <a:spcPts val="0"/>
+              </a:spcAft>
+              <a:defRPr sz="1500" b="1">
+                <a:solidFill>
+                  <a:srgbClr val="225B9B"/>
+                </a:solidFill>
+                <a:latin typeface="Noto Sans CJK KR"/>
+              </a:defRPr>
+            </a:pPr>
+            <a:r>
+              <a:t>사용/확인</a:t>
+            </a:r>
+          </a:p>
+        </p:txBody>
+      </p:sp>
+      <p:sp>
+        <p:nvSpPr>
+          <p:cNvPr id="14" name="TextBox 13"/>
+          <p:cNvSpPr txBox="1"/>
+          <p:nvPr/>
+        </p:nvSpPr>
+        <p:spPr>
+          <a:xfrm>
+            <a:off x="1975104" y="2871216"/>
+            <a:ext cx="9189720" cy="512064"/>
+          </a:xfrm>
+          <a:prstGeom prst="rect">
+            <a:avLst/>
+          </a:prstGeom>
+          <a:noFill/>
+        </p:spPr>
+        <p:txBody>
+          <a:bodyPr wrap="square" lIns="73152" rIns="73152" tIns="36576" bIns="36576">
+            <a:spAutoFit/>
+          </a:bodyPr>
+          <a:lstStyle/>
+          <a:p>
+            <a:pPr algn="l">
+              <a:spcAft>
+                <a:spcPts val="0"/>
+              </a:spcAft>
+              <a:defRPr sz="1300" b="0">
+                <a:solidFill>
+                  <a:srgbClr val="122C4E"/>
+                </a:solidFill>
+                <a:latin typeface="Noto Sans CJK KR"/>
+              </a:defRPr>
+            </a:pPr>
+            <a:r>
+              <a:t>사용: package를 build·source한 뒤 ros2 run 또는 launch에서 실행한다.</a:t>
+            </a:r>
+            <a:br/>
+            <a:r>
+              <a:t>화면/출력: terminal의 node/topic/log 출력</a:t>
+            </a:r>
+          </a:p>
+        </p:txBody>
+      </p:sp>
+      <p:sp>
+        <p:nvSpPr>
+          <p:cNvPr id="15" name="Rounded Rectangle 14"/>
+          <p:cNvSpPr/>
+          <p:nvPr/>
+        </p:nvSpPr>
+        <p:spPr>
+          <a:xfrm>
+            <a:off x="640080" y="3941063"/>
+            <a:ext cx="10972800" cy="2048256"/>
+          </a:xfrm>
+          <a:prstGeom prst="roundRect">
+            <a:avLst/>
+          </a:prstGeom>
+          <a:solidFill>
+            <a:srgbClr val="F4F7FB"/>
+          </a:solidFill>
+          <a:ln>
+            <a:solidFill>
+              <a:srgbClr val="CCDBEB"/>
+            </a:solidFill>
+          </a:ln>
+        </p:spPr>
+        <p:style>
+          <a:lnRef idx="1">
+            <a:schemeClr val="accent1"/>
+          </a:lnRef>
+          <a:fillRef idx="3">
+            <a:schemeClr val="accent1"/>
+          </a:fillRef>
+          <a:effectRef idx="2">
+            <a:schemeClr val="accent1"/>
+          </a:effectRef>
+          <a:fontRef idx="minor">
+            <a:schemeClr val="lt1"/>
+          </a:fontRef>
+        </p:style>
+        <p:txBody>
+          <a:bodyPr rtlCol="0" anchor="ctr"/>
+          <a:lstStyle/>
+          <a:p>
+            <a:pPr algn="ctr"/>
+          </a:p>
+        </p:txBody>
+      </p:sp>
+      <p:sp>
+        <p:nvSpPr>
+          <p:cNvPr id="16" name="TextBox 15"/>
+          <p:cNvSpPr txBox="1"/>
+          <p:nvPr/>
+        </p:nvSpPr>
+        <p:spPr>
+          <a:xfrm>
+            <a:off x="850392" y="4078224"/>
+            <a:ext cx="10424160" cy="256032"/>
+          </a:xfrm>
+          <a:prstGeom prst="rect">
+            <a:avLst/>
+          </a:prstGeom>
+          <a:noFill/>
+        </p:spPr>
+        <p:txBody>
+          <a:bodyPr wrap="square" lIns="73152" rIns="73152" tIns="36576" bIns="36576">
+            <a:spAutoFit/>
+          </a:bodyPr>
+          <a:lstStyle/>
+          <a:p>
+            <a:pPr algn="l">
+              <a:spcAft>
+                <a:spcPts val="0"/>
+              </a:spcAft>
+              <a:defRPr sz="1300" b="1">
+                <a:solidFill>
+                  <a:srgbClr val="225B9B"/>
+                </a:solidFill>
+                <a:latin typeface="DejaVu Sans Mono"/>
+              </a:defRPr>
+            </a:pPr>
+            <a:r>
+              <a:t>~/ros2_curri/agv_ws/src/agv_control/setup.py</a:t>
+            </a:r>
+          </a:p>
+        </p:txBody>
+      </p:sp>
+      <p:sp>
+        <p:nvSpPr>
+          <p:cNvPr id="17" name="TextBox 16"/>
+          <p:cNvSpPr txBox="1"/>
+          <p:nvPr/>
+        </p:nvSpPr>
+        <p:spPr>
+          <a:xfrm>
+            <a:off x="868680" y="4443983"/>
+            <a:ext cx="1234440" cy="228600"/>
+          </a:xfrm>
+          <a:prstGeom prst="rect">
+            <a:avLst/>
+          </a:prstGeom>
+          <a:noFill/>
+        </p:spPr>
+        <p:txBody>
+          <a:bodyPr wrap="square" lIns="73152" rIns="73152" tIns="36576" bIns="36576">
+            <a:spAutoFit/>
+          </a:bodyPr>
+          <a:lstStyle/>
+          <a:p>
+            <a:pPr algn="l">
+              <a:spcAft>
+                <a:spcPts val="0"/>
+              </a:spcAft>
+              <a:defRPr sz="1500" b="1">
+                <a:solidFill>
+                  <a:srgbClr val="2A8B5A"/>
+                </a:solidFill>
+                <a:latin typeface="Noto Sans CJK KR"/>
+              </a:defRPr>
+            </a:pPr>
+            <a:r>
+              <a:t>만드는 것</a:t>
+            </a:r>
+          </a:p>
+        </p:txBody>
+      </p:sp>
+      <p:sp>
+        <p:nvSpPr>
+          <p:cNvPr id="18" name="TextBox 17"/>
+          <p:cNvSpPr txBox="1"/>
+          <p:nvPr/>
+        </p:nvSpPr>
+        <p:spPr>
+          <a:xfrm>
+            <a:off x="1975104" y="4425696"/>
+            <a:ext cx="9189720" cy="274320"/>
+          </a:xfrm>
+          <a:prstGeom prst="rect">
+            <a:avLst/>
+          </a:prstGeom>
+          <a:noFill/>
+        </p:spPr>
+        <p:txBody>
+          <a:bodyPr wrap="square" lIns="73152" rIns="73152" tIns="36576" bIns="36576">
+            <a:spAutoFit/>
+          </a:bodyPr>
+          <a:lstStyle/>
+          <a:p>
+            <a:pPr algn="l">
+              <a:spcAft>
+                <a:spcPts val="0"/>
+              </a:spcAft>
+              <a:defRPr sz="1500" b="0">
+                <a:solidFill>
+                  <a:srgbClr val="122C4E"/>
+                </a:solidFill>
+                <a:latin typeface="Noto Sans CJK KR"/>
+              </a:defRPr>
+            </a:pPr>
+            <a:r>
+              <a:t>ROS 2 node 또는 실행 보조 로직</a:t>
+            </a:r>
+          </a:p>
+        </p:txBody>
+      </p:sp>
+      <p:sp>
+        <p:nvSpPr>
+          <p:cNvPr id="19" name="TextBox 18"/>
+          <p:cNvSpPr txBox="1"/>
+          <p:nvPr/>
+        </p:nvSpPr>
+        <p:spPr>
+          <a:xfrm>
+            <a:off x="868680" y="4818888"/>
+            <a:ext cx="1234440" cy="228600"/>
+          </a:xfrm>
+          <a:prstGeom prst="rect">
+            <a:avLst/>
+          </a:prstGeom>
+          <a:noFill/>
+        </p:spPr>
+        <p:txBody>
+          <a:bodyPr wrap="square" lIns="73152" rIns="73152" tIns="36576" bIns="36576">
+            <a:spAutoFit/>
+          </a:bodyPr>
+          <a:lstStyle/>
+          <a:p>
+            <a:pPr algn="l">
+              <a:spcAft>
+                <a:spcPts val="0"/>
+              </a:spcAft>
+              <a:defRPr sz="1500" b="1">
+                <a:solidFill>
+                  <a:srgbClr val="DB7E22"/>
+                </a:solidFill>
+                <a:latin typeface="Noto Sans CJK KR"/>
+              </a:defRPr>
+            </a:pPr>
+            <a:r>
+              <a:t>코드 읽기</a:t>
+            </a:r>
+          </a:p>
+        </p:txBody>
+      </p:sp>
+      <p:sp>
+        <p:nvSpPr>
+          <p:cNvPr id="20" name="TextBox 19"/>
+          <p:cNvSpPr txBox="1"/>
+          <p:nvPr/>
+        </p:nvSpPr>
+        <p:spPr>
+          <a:xfrm>
+            <a:off x="1975104" y="4800600"/>
+            <a:ext cx="9189720" cy="301752"/>
+          </a:xfrm>
+          <a:prstGeom prst="rect">
+            <a:avLst/>
+          </a:prstGeom>
+          <a:noFill/>
+        </p:spPr>
+        <p:txBody>
+          <a:bodyPr wrap="square" lIns="73152" rIns="73152" tIns="36576" bIns="36576">
+            <a:spAutoFit/>
+          </a:bodyPr>
+          <a:lstStyle/>
+          <a:p>
+            <a:pPr algn="l">
+              <a:spcAft>
+                <a:spcPts val="0"/>
+              </a:spcAft>
+              <a:defRPr sz="1400" b="0">
+                <a:solidFill>
+                  <a:srgbClr val="122C4E"/>
+                </a:solidFill>
+                <a:latin typeface="Noto Sans CJK KR"/>
+              </a:defRPr>
+            </a:pPr>
+            <a:r>
+              <a:t>import → Node 생성 → publisher/subscription → callback/main 순서로 읽는다.</a:t>
+            </a:r>
+          </a:p>
+        </p:txBody>
+      </p:sp>
+      <p:sp>
+        <p:nvSpPr>
+          <p:cNvPr id="21" name="TextBox 20"/>
+          <p:cNvSpPr txBox="1"/>
+          <p:nvPr/>
+        </p:nvSpPr>
+        <p:spPr>
+          <a:xfrm>
+            <a:off x="868680" y="5202936"/>
+            <a:ext cx="1234440" cy="228600"/>
+          </a:xfrm>
+          <a:prstGeom prst="rect">
+            <a:avLst/>
+          </a:prstGeom>
+          <a:noFill/>
+        </p:spPr>
+        <p:txBody>
+          <a:bodyPr wrap="square" lIns="73152" rIns="73152" tIns="36576" bIns="36576">
+            <a:spAutoFit/>
+          </a:bodyPr>
+          <a:lstStyle/>
+          <a:p>
+            <a:pPr algn="l">
+              <a:spcAft>
+                <a:spcPts val="0"/>
+              </a:spcAft>
+              <a:defRPr sz="1500" b="1">
+                <a:solidFill>
+                  <a:srgbClr val="225B9B"/>
+                </a:solidFill>
+                <a:latin typeface="Noto Sans CJK KR"/>
+              </a:defRPr>
+            </a:pPr>
+            <a:r>
+              <a:t>사용/확인</a:t>
+            </a:r>
+          </a:p>
+        </p:txBody>
+      </p:sp>
+      <p:sp>
+        <p:nvSpPr>
+          <p:cNvPr id="22" name="TextBox 21"/>
+          <p:cNvSpPr txBox="1"/>
+          <p:nvPr/>
+        </p:nvSpPr>
+        <p:spPr>
+          <a:xfrm>
+            <a:off x="1975104" y="5184648"/>
+            <a:ext cx="9189720" cy="512064"/>
+          </a:xfrm>
+          <a:prstGeom prst="rect">
+            <a:avLst/>
+          </a:prstGeom>
+          <a:noFill/>
+        </p:spPr>
+        <p:txBody>
+          <a:bodyPr wrap="square" lIns="73152" rIns="73152" tIns="36576" bIns="36576">
+            <a:spAutoFit/>
+          </a:bodyPr>
+          <a:lstStyle/>
+          <a:p>
+            <a:pPr algn="l">
+              <a:spcAft>
+                <a:spcPts val="0"/>
+              </a:spcAft>
+              <a:defRPr sz="1300" b="0">
+                <a:solidFill>
+                  <a:srgbClr val="122C4E"/>
+                </a:solidFill>
+                <a:latin typeface="Noto Sans CJK KR"/>
+              </a:defRPr>
+            </a:pPr>
+            <a:r>
+              <a:t>사용: package를 build·source한 뒤 ros2 run 또는 launch에서 실행한다.</a:t>
+            </a:r>
+            <a:br/>
+            <a:r>
+              <a:t>화면/출력: terminal의 node/topic/log 출력</a:t>
             </a:r>
           </a:p>
         </p:txBody>
@@ -13704,7 +15230,7 @@
               </a:defRPr>
             </a:pPr>
             <a:r>
-              <a:t>error와 command를 분리해 관찰한다</a:t>
+              <a:t>코드/설정이 실제로 만드는 것 (2/2)</a:t>
             </a:r>
           </a:p>
         </p:txBody>
@@ -13743,7 +15269,7 @@
               </a:defRPr>
             </a:pPr>
             <a:r>
-              <a:t>한 장에는 한 행동만 수행합니다.</a:t>
+              <a:t>파일을 입력하기 전에 ‘무엇을 만들고 어디서 볼지’를 먼저 연결합니다.</a:t>
             </a:r>
           </a:p>
         </p:txBody>
@@ -13879,109 +15405,31 @@
               </a:defRPr>
             </a:pPr>
             <a:r>
-              <a:t>현재 단계 2/2    |    현재 폴더 ~/ros2_curri/agv_ws    |    현재 터미널</a:t>
-            </a:r>
-          </a:p>
-        </p:txBody>
-      </p:sp>
-      <p:sp>
-        <p:nvSpPr>
-          <p:cNvPr id="7" name="TextBox 6"/>
-          <p:cNvSpPr txBox="1"/>
-          <p:nvPr/>
-        </p:nvSpPr>
-        <p:spPr>
-          <a:xfrm>
-            <a:off x="676656" y="1764792"/>
-            <a:ext cx="1828800" cy="347472"/>
-          </a:xfrm>
-          <a:prstGeom prst="rect">
-            <a:avLst/>
-          </a:prstGeom>
-          <a:noFill/>
-        </p:spPr>
-        <p:txBody>
-          <a:bodyPr wrap="square" lIns="73152" rIns="73152" tIns="36576" bIns="36576">
-            <a:spAutoFit/>
-          </a:bodyPr>
-          <a:lstStyle/>
-          <a:p>
-            <a:pPr algn="l">
-              <a:spcAft>
-                <a:spcPts val="0"/>
-              </a:spcAft>
-              <a:defRPr sz="1800" b="1">
-                <a:solidFill>
-                  <a:srgbClr val="225B9B"/>
-                </a:solidFill>
-                <a:latin typeface="Noto Sans CJK KR"/>
-              </a:defRPr>
-            </a:pPr>
-            <a:r>
-              <a:t>왜 하는가</a:t>
-            </a:r>
-          </a:p>
-        </p:txBody>
-      </p:sp>
-      <p:sp>
-        <p:nvSpPr>
-          <p:cNvPr id="8" name="TextBox 7"/>
-          <p:cNvSpPr txBox="1"/>
-          <p:nvPr/>
-        </p:nvSpPr>
-        <p:spPr>
-          <a:xfrm>
-            <a:off x="676656" y="2103120"/>
-            <a:ext cx="10789920" cy="512064"/>
-          </a:xfrm>
-          <a:prstGeom prst="rect">
-            <a:avLst/>
-          </a:prstGeom>
-          <a:noFill/>
-        </p:spPr>
-        <p:txBody>
-          <a:bodyPr wrap="square" lIns="73152" rIns="73152" tIns="36576" bIns="36576">
-            <a:spAutoFit/>
-          </a:bodyPr>
-          <a:lstStyle/>
-          <a:p>
-            <a:pPr algn="l">
-              <a:spcAft>
-                <a:spcPts val="0"/>
-              </a:spcAft>
-              <a:defRPr sz="2000" b="0">
-                <a:solidFill>
-                  <a:srgbClr val="122C4E"/>
-                </a:solidFill>
-                <a:latin typeface="Noto Sans CJK KR"/>
-              </a:defRPr>
-            </a:pPr>
-            <a:r>
-              <a:t>입력 부호가 바뀌면 angular.z 부호도 기대 방향으로 바뀌어야 한다.</a:t>
-            </a:r>
-          </a:p>
-        </p:txBody>
-      </p:sp>
-      <p:sp>
-        <p:nvSpPr>
-          <p:cNvPr id="9" name="Rounded Rectangle 8"/>
+              <a:t>현재 단계 파일 역할    |    현재 폴더 ~/ros2_curri/agv_ws    |    현재 터미널</a:t>
+            </a:r>
+          </a:p>
+        </p:txBody>
+      </p:sp>
+      <p:sp>
+        <p:nvSpPr>
+          <p:cNvPr id="7" name="Rounded Rectangle 6"/>
           <p:cNvSpPr/>
           <p:nvPr/>
         </p:nvSpPr>
         <p:spPr>
           <a:xfrm>
-            <a:off x="676656" y="2871216"/>
-            <a:ext cx="10835640" cy="2331720"/>
+            <a:off x="640080" y="1627632"/>
+            <a:ext cx="10972800" cy="2048256"/>
           </a:xfrm>
           <a:prstGeom prst="roundRect">
             <a:avLst/>
           </a:prstGeom>
           <a:solidFill>
-            <a:srgbClr val="1D232D"/>
+            <a:srgbClr val="F4F7FB"/>
           </a:solidFill>
           <a:ln>
             <a:solidFill>
-              <a:srgbClr val="1D232D"/>
+              <a:srgbClr val="CCDBEB"/>
             </a:solidFill>
           </a:ln>
         </p:spPr>
@@ -14000,40 +15448,23 @@
           </a:fontRef>
         </p:style>
         <p:txBody>
-          <a:bodyPr rtlCol="0" anchor="ctr" wrap="square" lIns="73152" rIns="73152" tIns="36576" bIns="36576"/>
-          <a:lstStyle/>
-          <a:p>
-            <a:pPr algn="l">
-              <a:spcAft>
-                <a:spcPts val="0"/>
-              </a:spcAft>
-              <a:defRPr sz="1600" b="0">
-                <a:solidFill>
-                  <a:srgbClr val="FFFFFF"/>
-                </a:solidFill>
-                <a:latin typeface="DejaVu Sans Mono"/>
-              </a:defRPr>
-            </a:pPr>
-            <a:r>
-              <a:t>ros2 topic echo /target_error</a:t>
-            </a:r>
-            <a:br/>
-            <a:r>
-              <a:t>ros2 topic echo /cmd_vel_raw</a:t>
-            </a:r>
-          </a:p>
-        </p:txBody>
-      </p:sp>
-      <p:sp>
-        <p:nvSpPr>
-          <p:cNvPr id="10" name="TextBox 9"/>
+          <a:bodyPr rtlCol="0" anchor="ctr"/>
+          <a:lstStyle/>
+          <a:p>
+            <a:pPr algn="ctr"/>
+          </a:p>
+        </p:txBody>
+      </p:sp>
+      <p:sp>
+        <p:nvSpPr>
+          <p:cNvPr id="8" name="TextBox 7"/>
           <p:cNvSpPr txBox="1"/>
           <p:nvPr/>
         </p:nvSpPr>
         <p:spPr>
           <a:xfrm>
-            <a:off x="768096" y="5468112"/>
-            <a:ext cx="1143000" cy="256032"/>
+            <a:off x="850392" y="1764792"/>
+            <a:ext cx="10424160" cy="256032"/>
           </a:xfrm>
           <a:prstGeom prst="rect">
             <a:avLst/>
@@ -14050,29 +15481,29 @@
               <a:spcAft>
                 <a:spcPts val="0"/>
               </a:spcAft>
-              <a:defRPr sz="1800" b="1">
-                <a:solidFill>
-                  <a:srgbClr val="2A8B5A"/>
-                </a:solidFill>
-                <a:latin typeface="Noto Sans CJK KR"/>
-              </a:defRPr>
-            </a:pPr>
-            <a:r>
-              <a:t>확인</a:t>
-            </a:r>
-          </a:p>
-        </p:txBody>
-      </p:sp>
-      <p:sp>
-        <p:nvSpPr>
-          <p:cNvPr id="11" name="TextBox 10"/>
+              <a:defRPr sz="1300" b="1">
+                <a:solidFill>
+                  <a:srgbClr val="225B9B"/>
+                </a:solidFill>
+                <a:latin typeface="DejaVu Sans Mono"/>
+              </a:defRPr>
+            </a:pPr>
+            <a:r>
+              <a:t>~/ros2_curri/agv_ws/src/agv_bringup/config/mission.yaml</a:t>
+            </a:r>
+          </a:p>
+        </p:txBody>
+      </p:sp>
+      <p:sp>
+        <p:nvSpPr>
+          <p:cNvPr id="9" name="TextBox 8"/>
           <p:cNvSpPr txBox="1"/>
           <p:nvPr/>
         </p:nvSpPr>
         <p:spPr>
           <a:xfrm>
-            <a:off x="768096" y="5742432"/>
-            <a:ext cx="10561320" cy="347472"/>
+            <a:off x="868680" y="2130552"/>
+            <a:ext cx="1234440" cy="228600"/>
           </a:xfrm>
           <a:prstGeom prst="rect">
             <a:avLst/>
@@ -14089,7 +15520,46 @@
               <a:spcAft>
                 <a:spcPts val="0"/>
               </a:spcAft>
-              <a:defRPr sz="1800" b="0">
+              <a:defRPr sz="1500" b="1">
+                <a:solidFill>
+                  <a:srgbClr val="2A8B5A"/>
+                </a:solidFill>
+                <a:latin typeface="Noto Sans CJK KR"/>
+              </a:defRPr>
+            </a:pPr>
+            <a:r>
+              <a:t>만드는 것</a:t>
+            </a:r>
+          </a:p>
+        </p:txBody>
+      </p:sp>
+      <p:sp>
+        <p:nvSpPr>
+          <p:cNvPr id="10" name="TextBox 9"/>
+          <p:cNvSpPr txBox="1"/>
+          <p:nvPr/>
+        </p:nvSpPr>
+        <p:spPr>
+          <a:xfrm>
+            <a:off x="1975104" y="2112264"/>
+            <a:ext cx="9189720" cy="274320"/>
+          </a:xfrm>
+          <a:prstGeom prst="rect">
+            <a:avLst/>
+          </a:prstGeom>
+          <a:noFill/>
+        </p:spPr>
+        <p:txBody>
+          <a:bodyPr wrap="square" lIns="73152" rIns="73152" tIns="36576" bIns="36576">
+            <a:spAutoFit/>
+          </a:bodyPr>
+          <a:lstStyle/>
+          <a:p>
+            <a:pPr algn="l">
+              <a:spcAft>
+                <a:spcPts val="0"/>
+              </a:spcAft>
+              <a:defRPr sz="1500" b="0">
                 <a:solidFill>
                   <a:srgbClr val="122C4E"/>
                 </a:solidFill>
@@ -14097,7 +15567,167 @@
               </a:defRPr>
             </a:pPr>
             <a:r>
-              <a:t>명령의 출력에서 topic·frame·파일 이름 또는 성공 메시지를 찾으면 이 단계가 완료됩니다.</a:t>
+              <a:t>실행 시 읽히는 ROS 2 설정값</a:t>
+            </a:r>
+          </a:p>
+        </p:txBody>
+      </p:sp>
+      <p:sp>
+        <p:nvSpPr>
+          <p:cNvPr id="11" name="TextBox 10"/>
+          <p:cNvSpPr txBox="1"/>
+          <p:nvPr/>
+        </p:nvSpPr>
+        <p:spPr>
+          <a:xfrm>
+            <a:off x="868680" y="2505456"/>
+            <a:ext cx="1234440" cy="228600"/>
+          </a:xfrm>
+          <a:prstGeom prst="rect">
+            <a:avLst/>
+          </a:prstGeom>
+          <a:noFill/>
+        </p:spPr>
+        <p:txBody>
+          <a:bodyPr wrap="square" lIns="73152" rIns="73152" tIns="36576" bIns="36576">
+            <a:spAutoFit/>
+          </a:bodyPr>
+          <a:lstStyle/>
+          <a:p>
+            <a:pPr algn="l">
+              <a:spcAft>
+                <a:spcPts val="0"/>
+              </a:spcAft>
+              <a:defRPr sz="1500" b="1">
+                <a:solidFill>
+                  <a:srgbClr val="DB7E22"/>
+                </a:solidFill>
+                <a:latin typeface="Noto Sans CJK KR"/>
+              </a:defRPr>
+            </a:pPr>
+            <a:r>
+              <a:t>코드 읽기</a:t>
+            </a:r>
+          </a:p>
+        </p:txBody>
+      </p:sp>
+      <p:sp>
+        <p:nvSpPr>
+          <p:cNvPr id="12" name="TextBox 11"/>
+          <p:cNvSpPr txBox="1"/>
+          <p:nvPr/>
+        </p:nvSpPr>
+        <p:spPr>
+          <a:xfrm>
+            <a:off x="1975104" y="2487168"/>
+            <a:ext cx="9189720" cy="301752"/>
+          </a:xfrm>
+          <a:prstGeom prst="rect">
+            <a:avLst/>
+          </a:prstGeom>
+          <a:noFill/>
+        </p:spPr>
+        <p:txBody>
+          <a:bodyPr wrap="square" lIns="73152" rIns="73152" tIns="36576" bIns="36576">
+            <a:spAutoFit/>
+          </a:bodyPr>
+          <a:lstStyle/>
+          <a:p>
+            <a:pPr algn="l">
+              <a:spcAft>
+                <a:spcPts val="0"/>
+              </a:spcAft>
+              <a:defRPr sz="1400" b="0">
+                <a:solidFill>
+                  <a:srgbClr val="122C4E"/>
+                </a:solidFill>
+                <a:latin typeface="Noto Sans CJK KR"/>
+              </a:defRPr>
+            </a:pPr>
+            <a:r>
+              <a:t>이름 → type/value → launch에서 전달되는 위치를 비교한다.</a:t>
+            </a:r>
+          </a:p>
+        </p:txBody>
+      </p:sp>
+      <p:sp>
+        <p:nvSpPr>
+          <p:cNvPr id="13" name="TextBox 12"/>
+          <p:cNvSpPr txBox="1"/>
+          <p:nvPr/>
+        </p:nvSpPr>
+        <p:spPr>
+          <a:xfrm>
+            <a:off x="868680" y="2889504"/>
+            <a:ext cx="1234440" cy="228600"/>
+          </a:xfrm>
+          <a:prstGeom prst="rect">
+            <a:avLst/>
+          </a:prstGeom>
+          <a:noFill/>
+        </p:spPr>
+        <p:txBody>
+          <a:bodyPr wrap="square" lIns="73152" rIns="73152" tIns="36576" bIns="36576">
+            <a:spAutoFit/>
+          </a:bodyPr>
+          <a:lstStyle/>
+          <a:p>
+            <a:pPr algn="l">
+              <a:spcAft>
+                <a:spcPts val="0"/>
+              </a:spcAft>
+              <a:defRPr sz="1500" b="1">
+                <a:solidFill>
+                  <a:srgbClr val="225B9B"/>
+                </a:solidFill>
+                <a:latin typeface="Noto Sans CJK KR"/>
+              </a:defRPr>
+            </a:pPr>
+            <a:r>
+              <a:t>사용/확인</a:t>
+            </a:r>
+          </a:p>
+        </p:txBody>
+      </p:sp>
+      <p:sp>
+        <p:nvSpPr>
+          <p:cNvPr id="14" name="TextBox 13"/>
+          <p:cNvSpPr txBox="1"/>
+          <p:nvPr/>
+        </p:nvSpPr>
+        <p:spPr>
+          <a:xfrm>
+            <a:off x="1975104" y="2871216"/>
+            <a:ext cx="9189720" cy="512064"/>
+          </a:xfrm>
+          <a:prstGeom prst="rect">
+            <a:avLst/>
+          </a:prstGeom>
+          <a:noFill/>
+        </p:spPr>
+        <p:txBody>
+          <a:bodyPr wrap="square" lIns="73152" rIns="73152" tIns="36576" bIns="36576">
+            <a:spAutoFit/>
+          </a:bodyPr>
+          <a:lstStyle/>
+          <a:p>
+            <a:pPr algn="l">
+              <a:spcAft>
+                <a:spcPts val="0"/>
+              </a:spcAft>
+              <a:defRPr sz="1300" b="0">
+                <a:solidFill>
+                  <a:srgbClr val="122C4E"/>
+                </a:solidFill>
+                <a:latin typeface="Noto Sans CJK KR"/>
+              </a:defRPr>
+            </a:pPr>
+            <a:r>
+              <a:t>사용: launch 실행 뒤 ros2 param/topic 명령으로 확인한다.</a:t>
+            </a:r>
+            <a:br/>
+            <a:r>
+              <a:t>화면/출력: terminal의 parameter/topic 출력</a:t>
             </a:r>
           </a:p>
         </p:txBody>
@@ -14154,7 +15784,7 @@
               </a:defRPr>
             </a:pPr>
             <a:r>
-              <a:t>파일을 새로 만들고 저장한다 (1/3)</a:t>
+              <a:t>제어 파라미터를 확인한다</a:t>
             </a:r>
           </a:p>
         </p:txBody>
@@ -14193,7 +15823,7 @@
               </a:defRPr>
             </a:pPr>
             <a:r>
-              <a:t>~/ros2_curri/agv_ws/src/agv_control/agv_control/pid_controller.py</a:t>
+              <a:t>한 장에는 한 행동만 수행합니다.</a:t>
             </a:r>
           </a:p>
         </p:txBody>
@@ -14329,7 +15959,7 @@
               </a:defRPr>
             </a:pPr>
             <a:r>
-              <a:t>현재 단계 3/6    |    현재 폴더 ~/ros2_curri/agv_ws    |    현재 터미널</a:t>
+              <a:t>현재 단계 1/2    |    현재 폴더 ~/ros2_curri/agv_ws    |    현재 터미널</a:t>
             </a:r>
           </a:p>
         </p:txBody>
@@ -14342,8 +15972,8 @@
         </p:nvSpPr>
         <p:spPr>
           <a:xfrm>
-            <a:off x="658368" y="1627632"/>
-            <a:ext cx="10972800" cy="256032"/>
+            <a:off x="676656" y="1764792"/>
+            <a:ext cx="1828800" cy="347472"/>
           </a:xfrm>
           <a:prstGeom prst="rect">
             <a:avLst/>
@@ -14360,7 +15990,46 @@
               <a:spcAft>
                 <a:spcPts val="0"/>
               </a:spcAft>
-              <a:defRPr sz="1500" b="1">
+              <a:defRPr sz="1800" b="1">
+                <a:solidFill>
+                  <a:srgbClr val="225B9B"/>
+                </a:solidFill>
+                <a:latin typeface="Noto Sans CJK KR"/>
+              </a:defRPr>
+            </a:pPr>
+            <a:r>
+              <a:t>왜 하는가</a:t>
+            </a:r>
+          </a:p>
+        </p:txBody>
+      </p:sp>
+      <p:sp>
+        <p:nvSpPr>
+          <p:cNvPr id="8" name="TextBox 7"/>
+          <p:cNvSpPr txBox="1"/>
+          <p:nvPr/>
+        </p:nvSpPr>
+        <p:spPr>
+          <a:xfrm>
+            <a:off x="676656" y="2103120"/>
+            <a:ext cx="10789920" cy="512064"/>
+          </a:xfrm>
+          <a:prstGeom prst="rect">
+            <a:avLst/>
+          </a:prstGeom>
+          <a:noFill/>
+        </p:spPr>
+        <p:txBody>
+          <a:bodyPr wrap="square" lIns="73152" rIns="73152" tIns="36576" bIns="36576">
+            <a:spAutoFit/>
+          </a:bodyPr>
+          <a:lstStyle/>
+          <a:p>
+            <a:pPr algn="l">
+              <a:spcAft>
+                <a:spcPts val="0"/>
+              </a:spcAft>
+              <a:defRPr sz="2000" b="0">
                 <a:solidFill>
                   <a:srgbClr val="122C4E"/>
                 </a:solidFill>
@@ -14368,85 +16037,23 @@
               </a:defRPr>
             </a:pPr>
             <a:r>
-              <a:t>이번 단계: 파일의 전체 내용을 중간 생략 없이 작성합니다. 아래 줄 범위를 끝까지 입력하세요.</a:t>
-            </a:r>
-          </a:p>
-        </p:txBody>
-      </p:sp>
-      <p:sp>
-        <p:nvSpPr>
-          <p:cNvPr id="8" name="Rectangle 7"/>
+              <a:t>P gain과 최대 속도는 overshoot 전에 먼저 보수적으로 제한한다.</a:t>
+            </a:r>
+          </a:p>
+        </p:txBody>
+      </p:sp>
+      <p:sp>
+        <p:nvSpPr>
+          <p:cNvPr id="9" name="Rounded Rectangle 8"/>
           <p:cNvSpPr/>
           <p:nvPr/>
         </p:nvSpPr>
         <p:spPr>
           <a:xfrm>
-            <a:off x="658368" y="1956816"/>
-            <a:ext cx="10972800" cy="603504"/>
-          </a:xfrm>
-          <a:prstGeom prst="rect">
-            <a:avLst/>
-          </a:prstGeom>
-          <a:solidFill>
-            <a:srgbClr val="F4F7FB"/>
-          </a:solidFill>
-          <a:ln>
-            <a:solidFill>
-              <a:srgbClr val="F4F7FB"/>
-            </a:solidFill>
-          </a:ln>
-        </p:spPr>
-        <p:style>
-          <a:lnRef idx="1">
-            <a:schemeClr val="accent1"/>
-          </a:lnRef>
-          <a:fillRef idx="3">
-            <a:schemeClr val="accent1"/>
-          </a:fillRef>
-          <a:effectRef idx="2">
-            <a:schemeClr val="accent1"/>
-          </a:effectRef>
-          <a:fontRef idx="minor">
-            <a:schemeClr val="lt1"/>
-          </a:fontRef>
-        </p:style>
-        <p:txBody>
-          <a:bodyPr rtlCol="0" anchor="ctr" wrap="square" lIns="73152" rIns="73152" tIns="36576" bIns="36576"/>
-          <a:lstStyle/>
-          <a:p>
-            <a:pPr algn="l">
-              <a:spcAft>
-                <a:spcPts val="0"/>
-              </a:spcAft>
-              <a:defRPr sz="1400" b="0">
-                <a:solidFill>
-                  <a:srgbClr val="122C4E"/>
-                </a:solidFill>
-                <a:latin typeface="DejaVu Sans Mono"/>
-              </a:defRPr>
-            </a:pPr>
-            <a:r>
-              <a:t>파일 생성: mkdir -p ~/ros2_curri/agv_ws/src/agv_control/agv_control</a:t>
-            </a:r>
-            <a:br/>
-            <a:r>
-              <a:t>파일 열기: nano ~/ros2_curri/agv_ws/src/agv_control/agv_control/pid_controller.py</a:t>
-            </a:r>
-          </a:p>
-        </p:txBody>
-      </p:sp>
-      <p:sp>
-        <p:nvSpPr>
-          <p:cNvPr id="9" name="Rectangle 8"/>
-          <p:cNvSpPr/>
-          <p:nvPr/>
-        </p:nvSpPr>
-        <p:spPr>
-          <a:xfrm>
-            <a:off x="658368" y="2706624"/>
-            <a:ext cx="10972800" cy="3364992"/>
-          </a:xfrm>
-          <a:prstGeom prst="rect">
+            <a:off x="676656" y="2871216"/>
+            <a:ext cx="10835640" cy="2331720"/>
+          </a:xfrm>
+          <a:prstGeom prst="roundRect">
             <a:avLst/>
           </a:prstGeom>
           <a:solidFill>
@@ -14473,14 +16080,14 @@
           </a:fontRef>
         </p:style>
         <p:txBody>
-          <a:bodyPr rtlCol="0" anchor="ctr" wrap="square" lIns="164592" rIns="164592" tIns="109728" bIns="36576"/>
+          <a:bodyPr rtlCol="0" anchor="ctr" wrap="square" lIns="73152" rIns="73152" tIns="36576" bIns="36576"/>
           <a:lstStyle/>
           <a:p>
             <a:pPr algn="l">
               <a:spcAft>
                 <a:spcPts val="0"/>
               </a:spcAft>
-              <a:defRPr sz="1400" b="0">
+              <a:defRPr sz="1600" b="0">
                 <a:solidFill>
                   <a:srgbClr val="FFFFFF"/>
                 </a:solidFill>
@@ -14488,45 +16095,11 @@
               </a:defRPr>
             </a:pPr>
             <a:r>
-              <a:t>import rclpy</a:t>
+              <a:t>ros2 run agv_control pid_controller --ros-args \</a:t>
             </a:r>
             <a:br/>
             <a:r>
-              <a:t>from rclpy.node import Node</a:t>
-            </a:r>
-            <a:br/>
-            <a:r>
-              <a:t>from geometry_msgs.msg import Twist</a:t>
-            </a:r>
-            <a:br/>
-            <a:br/>
-            <a:r>
-              <a:t>class PidController(Node):</a:t>
-            </a:r>
-            <a:br/>
-            <a:r>
-              <a:t>    """A small P-only starting point: replace with PI/PID after observing overshoot."""</a:t>
-            </a:r>
-            <a:br/>
-            <a:br/>
-            <a:r>
-              <a:t>    def __init__(self):</a:t>
-            </a:r>
-            <a:br/>
-            <a:r>
-              <a:t>        super().__init__('pid_controller')</a:t>
-            </a:r>
-            <a:br/>
-            <a:r>
-              <a:t>        self.declare_parameter('kp_angular', 0.004)</a:t>
-            </a:r>
-            <a:br/>
-            <a:r>
-              <a:t>        self.declare_parameter('max_linear_speed', 0.25)</a:t>
-            </a:r>
-            <a:br/>
-            <a:r>
-              <a:t>        self.declare_parameter('max_angular_speed', 0.8)</a:t>
+              <a:t>  -p kp_angular:=0.004 -p max_linear_speed:=0.25</a:t>
             </a:r>
           </a:p>
         </p:txBody>
@@ -14539,8 +16112,8 @@
         </p:nvSpPr>
         <p:spPr>
           <a:xfrm>
-            <a:off x="749808" y="6181344"/>
-            <a:ext cx="10789920" cy="201168"/>
+            <a:off x="768096" y="5468112"/>
+            <a:ext cx="1143000" cy="256032"/>
           </a:xfrm>
           <a:prstGeom prst="rect">
             <a:avLst/>
@@ -14557,15 +16130,54 @@
               <a:spcAft>
                 <a:spcPts val="0"/>
               </a:spcAft>
-              <a:defRPr sz="1000" b="0">
-                <a:solidFill>
-                  <a:srgbClr val="5C6672"/>
-                </a:solidFill>
-                <a:latin typeface="Noto Sans CJK KR"/>
-              </a:defRPr>
-            </a:pPr>
-            <a:r>
-              <a:t>파일 전체 1/3 · 이 슬라이드 다음에 같은 파일의 나머지 줄이 이어집니다.</a:t>
+              <a:defRPr sz="1800" b="1">
+                <a:solidFill>
+                  <a:srgbClr val="2A8B5A"/>
+                </a:solidFill>
+                <a:latin typeface="Noto Sans CJK KR"/>
+              </a:defRPr>
+            </a:pPr>
+            <a:r>
+              <a:t>확인</a:t>
+            </a:r>
+          </a:p>
+        </p:txBody>
+      </p:sp>
+      <p:sp>
+        <p:nvSpPr>
+          <p:cNvPr id="11" name="TextBox 10"/>
+          <p:cNvSpPr txBox="1"/>
+          <p:nvPr/>
+        </p:nvSpPr>
+        <p:spPr>
+          <a:xfrm>
+            <a:off x="768096" y="5742432"/>
+            <a:ext cx="10561320" cy="347472"/>
+          </a:xfrm>
+          <a:prstGeom prst="rect">
+            <a:avLst/>
+          </a:prstGeom>
+          <a:noFill/>
+        </p:spPr>
+        <p:txBody>
+          <a:bodyPr wrap="square" lIns="73152" rIns="73152" tIns="36576" bIns="36576">
+            <a:spAutoFit/>
+          </a:bodyPr>
+          <a:lstStyle/>
+          <a:p>
+            <a:pPr algn="l">
+              <a:spcAft>
+                <a:spcPts val="0"/>
+              </a:spcAft>
+              <a:defRPr sz="1800" b="0">
+                <a:solidFill>
+                  <a:srgbClr val="122C4E"/>
+                </a:solidFill>
+                <a:latin typeface="Noto Sans CJK KR"/>
+              </a:defRPr>
+            </a:pPr>
+            <a:r>
+              <a:t>명령의 출력에서 topic·frame·파일 이름 또는 성공 메시지를 찾으면 이 단계가 완료됩니다.</a:t>
             </a:r>
           </a:p>
         </p:txBody>

--- a/blocks/E_autonomy_logic/M20_pid_driving_control/M20_PID와_주행_제어.pptx
+++ b/blocks/E_autonomy_logic/M20_pid_driving_control/M20_PID와_주행_제어.pptx
@@ -7000,7 +7000,7 @@
               <a:spcAft>
                 <a:spcPts val="0"/>
               </a:spcAft>
-              <a:defRPr sz="1800" b="1">
+              <a:defRPr sz="1400" b="1">
                 <a:solidFill>
                   <a:srgbClr val="FFFFFF"/>
                 </a:solidFill>
@@ -7008,7 +7008,7 @@
               </a:defRPr>
             </a:pPr>
             <a:r>
-              <a:t>M20 · Block E · ROS 2 + Gazebo Sim AGV</a:t>
+              <a:t>ROS 2 기반 AGV End-to-End 개발 커리큘럼 · M20 · Block E</a:t>
             </a:r>
           </a:p>
         </p:txBody>
@@ -7218,7 +7218,7 @@
               <a:spcAft>
                 <a:spcPts val="0"/>
               </a:spcAft>
-              <a:defRPr sz="1000" b="0">
+              <a:defRPr sz="900" b="0">
                 <a:solidFill>
                   <a:srgbClr val="5C6672"/>
                 </a:solidFill>
@@ -7226,7 +7226,7 @@
               </a:defRPr>
             </a:pPr>
             <a:r>
-              <a:t>ROS 2 Jazzy · Gazebo Harmonic · M20 · 따라 하기형 AGV 실습</a:t>
+              <a:t>ROS 2 기반 AGV End-to-End 개발 커리큘럼 · M20 · Block E</a:t>
             </a:r>
           </a:p>
         </p:txBody>
@@ -7392,7 +7392,7 @@
               <a:spcAft>
                 <a:spcPts val="0"/>
               </a:spcAft>
-              <a:defRPr sz="1000" b="0">
+              <a:defRPr sz="900" b="0">
                 <a:solidFill>
                   <a:srgbClr val="5C6672"/>
                 </a:solidFill>
@@ -7400,7 +7400,7 @@
               </a:defRPr>
             </a:pPr>
             <a:r>
-              <a:t>ROS 2 Jazzy · Gazebo Harmonic · M20 · 따라 하기형 AGV 실습</a:t>
+              <a:t>ROS 2 기반 AGV End-to-End 개발 커리큘럼 · M20 · Block E</a:t>
             </a:r>
           </a:p>
         </p:txBody>
@@ -7946,7 +7946,7 @@
               <a:spcAft>
                 <a:spcPts val="0"/>
               </a:spcAft>
-              <a:defRPr sz="1000" b="0">
+              <a:defRPr sz="900" b="0">
                 <a:solidFill>
                   <a:srgbClr val="5C6672"/>
                 </a:solidFill>
@@ -7954,7 +7954,7 @@
               </a:defRPr>
             </a:pPr>
             <a:r>
-              <a:t>ROS 2 Jazzy · Gazebo Harmonic · M20 · 따라 하기형 AGV 실습</a:t>
+              <a:t>ROS 2 기반 AGV End-to-End 개발 커리큘럼 · M20 · Block E</a:t>
             </a:r>
           </a:p>
         </p:txBody>
@@ -8474,7 +8474,7 @@
               <a:spcAft>
                 <a:spcPts val="0"/>
               </a:spcAft>
-              <a:defRPr sz="1000" b="0">
+              <a:defRPr sz="900" b="0">
                 <a:solidFill>
                   <a:srgbClr val="5C6672"/>
                 </a:solidFill>
@@ -8482,7 +8482,7 @@
               </a:defRPr>
             </a:pPr>
             <a:r>
-              <a:t>ROS 2 Jazzy · Gazebo Harmonic · M20 · 따라 하기형 AGV 실습</a:t>
+              <a:t>ROS 2 기반 AGV End-to-End 개발 커리큘럼 · M20 · Block E</a:t>
             </a:r>
           </a:p>
         </p:txBody>
@@ -9263,7 +9263,7 @@
               <a:spcAft>
                 <a:spcPts val="0"/>
               </a:spcAft>
-              <a:defRPr sz="1000" b="0">
+              <a:defRPr sz="900" b="0">
                 <a:solidFill>
                   <a:srgbClr val="5C6672"/>
                 </a:solidFill>
@@ -9271,7 +9271,7 @@
               </a:defRPr>
             </a:pPr>
             <a:r>
-              <a:t>ROS 2 Jazzy · Gazebo Harmonic · M20 · 따라 하기형 AGV 실습</a:t>
+              <a:t>ROS 2 기반 AGV End-to-End 개발 커리큘럼 · M20 · Block E</a:t>
             </a:r>
           </a:p>
         </p:txBody>
@@ -10052,7 +10052,7 @@
               <a:spcAft>
                 <a:spcPts val="0"/>
               </a:spcAft>
-              <a:defRPr sz="1000" b="0">
+              <a:defRPr sz="900" b="0">
                 <a:solidFill>
                   <a:srgbClr val="5C6672"/>
                 </a:solidFill>
@@ -10060,7 +10060,7 @@
               </a:defRPr>
             </a:pPr>
             <a:r>
-              <a:t>ROS 2 Jazzy · Gazebo Harmonic · M20 · 따라 하기형 AGV 실습</a:t>
+              <a:t>ROS 2 기반 AGV End-to-End 개발 커리큘럼 · M20 · Block E</a:t>
             </a:r>
           </a:p>
         </p:txBody>
@@ -10849,7 +10849,7 @@
               <a:spcAft>
                 <a:spcPts val="0"/>
               </a:spcAft>
-              <a:defRPr sz="1000" b="0">
+              <a:defRPr sz="900" b="0">
                 <a:solidFill>
                   <a:srgbClr val="5C6672"/>
                 </a:solidFill>
@@ -10857,7 +10857,7 @@
               </a:defRPr>
             </a:pPr>
             <a:r>
-              <a:t>ROS 2 Jazzy · Gazebo Harmonic · M20 · 따라 하기형 AGV 실습</a:t>
+              <a:t>ROS 2 기반 AGV End-to-End 개발 커리큘럼 · M20 · Block E</a:t>
             </a:r>
           </a:p>
         </p:txBody>
@@ -11638,7 +11638,7 @@
               <a:spcAft>
                 <a:spcPts val="0"/>
               </a:spcAft>
-              <a:defRPr sz="1000" b="0">
+              <a:defRPr sz="900" b="0">
                 <a:solidFill>
                   <a:srgbClr val="5C6672"/>
                 </a:solidFill>
@@ -11646,7 +11646,7 @@
               </a:defRPr>
             </a:pPr>
             <a:r>
-              <a:t>ROS 2 Jazzy · Gazebo Harmonic · M20 · 따라 하기형 AGV 실습</a:t>
+              <a:t>ROS 2 기반 AGV End-to-End 개발 커리큘럼 · M20 · Block E</a:t>
             </a:r>
           </a:p>
         </p:txBody>
@@ -12207,7 +12207,7 @@
               <a:spcAft>
                 <a:spcPts val="0"/>
               </a:spcAft>
-              <a:defRPr sz="1000" b="0">
+              <a:defRPr sz="900" b="0">
                 <a:solidFill>
                   <a:srgbClr val="5C6672"/>
                 </a:solidFill>
@@ -12215,7 +12215,7 @@
               </a:defRPr>
             </a:pPr>
             <a:r>
-              <a:t>ROS 2 Jazzy · Gazebo Harmonic · M20 · 따라 하기형 AGV 실습</a:t>
+              <a:t>ROS 2 기반 AGV End-to-End 개발 커리큘럼 · M20 · Block E</a:t>
             </a:r>
           </a:p>
         </p:txBody>
@@ -12675,7 +12675,7 @@
               <a:spcAft>
                 <a:spcPts val="0"/>
               </a:spcAft>
-              <a:defRPr sz="1000" b="0">
+              <a:defRPr sz="900" b="0">
                 <a:solidFill>
                   <a:srgbClr val="5C6672"/>
                 </a:solidFill>
@@ -12683,7 +12683,7 @@
               </a:defRPr>
             </a:pPr>
             <a:r>
-              <a:t>ROS 2 Jazzy · Gazebo Harmonic · M20 · 따라 하기형 AGV 실습</a:t>
+              <a:t>ROS 2 기반 AGV End-to-End 개발 커리큘럼 · M20 · Block E</a:t>
             </a:r>
           </a:p>
         </p:txBody>
@@ -13143,7 +13143,7 @@
               <a:spcAft>
                 <a:spcPts val="0"/>
               </a:spcAft>
-              <a:defRPr sz="1000" b="0">
+              <a:defRPr sz="900" b="0">
                 <a:solidFill>
                   <a:srgbClr val="5C6672"/>
                 </a:solidFill>
@@ -13151,7 +13151,7 @@
               </a:defRPr>
             </a:pPr>
             <a:r>
-              <a:t>ROS 2 Jazzy · Gazebo Harmonic · M20 · 따라 하기형 AGV 실습</a:t>
+              <a:t>ROS 2 기반 AGV End-to-End 개발 커리큘럼 · M20 · Block E</a:t>
             </a:r>
           </a:p>
         </p:txBody>
@@ -13613,7 +13613,7 @@
               <a:spcAft>
                 <a:spcPts val="0"/>
               </a:spcAft>
-              <a:defRPr sz="1000" b="0">
+              <a:defRPr sz="900" b="0">
                 <a:solidFill>
                   <a:srgbClr val="5C6672"/>
                 </a:solidFill>
@@ -13621,7 +13621,7 @@
               </a:defRPr>
             </a:pPr>
             <a:r>
-              <a:t>ROS 2 Jazzy · Gazebo Harmonic · M20 · 따라 하기형 AGV 실습</a:t>
+              <a:t>ROS 2 기반 AGV End-to-End 개발 커리큘럼 · M20 · Block E</a:t>
             </a:r>
           </a:p>
         </p:txBody>
@@ -14074,7 +14074,7 @@
               <a:spcAft>
                 <a:spcPts val="0"/>
               </a:spcAft>
-              <a:defRPr sz="1000" b="0">
+              <a:defRPr sz="900" b="0">
                 <a:solidFill>
                   <a:srgbClr val="5C6672"/>
                 </a:solidFill>
@@ -14082,7 +14082,7 @@
               </a:defRPr>
             </a:pPr>
             <a:r>
-              <a:t>ROS 2 Jazzy · Gazebo Harmonic · M20 · 따라 하기형 AGV 실습</a:t>
+              <a:t>ROS 2 기반 AGV End-to-End 개발 커리큘럼 · M20 · Block E</a:t>
             </a:r>
           </a:p>
         </p:txBody>
@@ -14602,7 +14602,7 @@
               <a:spcAft>
                 <a:spcPts val="0"/>
               </a:spcAft>
-              <a:defRPr sz="1000" b="0">
+              <a:defRPr sz="900" b="0">
                 <a:solidFill>
                   <a:srgbClr val="5C6672"/>
                 </a:solidFill>
@@ -14610,7 +14610,7 @@
               </a:defRPr>
             </a:pPr>
             <a:r>
-              <a:t>ROS 2 Jazzy · Gazebo Harmonic · M20 · 따라 하기형 AGV 실습</a:t>
+              <a:t>ROS 2 기반 AGV End-to-End 개발 커리큘럼 · M20 · Block E</a:t>
             </a:r>
           </a:p>
         </p:txBody>
@@ -15395,7 +15395,7 @@
               <a:spcAft>
                 <a:spcPts val="0"/>
               </a:spcAft>
-              <a:defRPr sz="1000" b="0">
+              <a:defRPr sz="900" b="0">
                 <a:solidFill>
                   <a:srgbClr val="5C6672"/>
                 </a:solidFill>
@@ -15403,7 +15403,7 @@
               </a:defRPr>
             </a:pPr>
             <a:r>
-              <a:t>ROS 2 Jazzy · Gazebo Harmonic · M20 · 따라 하기형 AGV 실습</a:t>
+              <a:t>ROS 2 기반 AGV End-to-End 개발 커리큘럼 · M20 · Block E</a:t>
             </a:r>
           </a:p>
         </p:txBody>
@@ -16188,7 +16188,7 @@
               <a:spcAft>
                 <a:spcPts val="0"/>
               </a:spcAft>
-              <a:defRPr sz="1000" b="0">
+              <a:defRPr sz="900" b="0">
                 <a:solidFill>
                   <a:srgbClr val="5C6672"/>
                 </a:solidFill>
@@ -16196,7 +16196,7 @@
               </a:defRPr>
             </a:pPr>
             <a:r>
-              <a:t>ROS 2 Jazzy · Gazebo Harmonic · M20 · 따라 하기형 AGV 실습</a:t>
+              <a:t>ROS 2 기반 AGV End-to-End 개발 커리큘럼 · M20 · Block E</a:t>
             </a:r>
           </a:p>
         </p:txBody>
@@ -16662,7 +16662,7 @@
               <a:spcAft>
                 <a:spcPts val="0"/>
               </a:spcAft>
-              <a:defRPr sz="1000" b="0">
+              <a:defRPr sz="900" b="0">
                 <a:solidFill>
                   <a:srgbClr val="5C6672"/>
                 </a:solidFill>
@@ -16670,7 +16670,7 @@
               </a:defRPr>
             </a:pPr>
             <a:r>
-              <a:t>ROS 2 Jazzy · Gazebo Harmonic · M20 · 따라 하기형 AGV 실습</a:t>
+              <a:t>ROS 2 기반 AGV End-to-End 개발 커리큘럼 · M20 · Block E</a:t>
             </a:r>
           </a:p>
         </p:txBody>
@@ -17190,7 +17190,7 @@
               <a:spcAft>
                 <a:spcPts val="0"/>
               </a:spcAft>
-              <a:defRPr sz="1000" b="0">
+              <a:defRPr sz="900" b="0">
                 <a:solidFill>
                   <a:srgbClr val="5C6672"/>
                 </a:solidFill>
@@ -17198,7 +17198,7 @@
               </a:defRPr>
             </a:pPr>
             <a:r>
-              <a:t>ROS 2 Jazzy · Gazebo Harmonic · M20 · 따라 하기형 AGV 실습</a:t>
+              <a:t>ROS 2 기반 AGV End-to-End 개발 커리큘럼 · M20 · Block E</a:t>
             </a:r>
           </a:p>
         </p:txBody>
@@ -17979,7 +17979,7 @@
               <a:spcAft>
                 <a:spcPts val="0"/>
               </a:spcAft>
-              <a:defRPr sz="1000" b="0">
+              <a:defRPr sz="900" b="0">
                 <a:solidFill>
                   <a:srgbClr val="5C6672"/>
                 </a:solidFill>
@@ -17987,7 +17987,7 @@
               </a:defRPr>
             </a:pPr>
             <a:r>
-              <a:t>ROS 2 Jazzy · Gazebo Harmonic · M20 · 따라 하기형 AGV 실습</a:t>
+              <a:t>ROS 2 기반 AGV End-to-End 개발 커리큘럼 · M20 · Block E</a:t>
             </a:r>
           </a:p>
         </p:txBody>
@@ -18548,7 +18548,7 @@
               <a:spcAft>
                 <a:spcPts val="0"/>
               </a:spcAft>
-              <a:defRPr sz="1000" b="0">
+              <a:defRPr sz="900" b="0">
                 <a:solidFill>
                   <a:srgbClr val="5C6672"/>
                 </a:solidFill>
@@ -18556,7 +18556,7 @@
               </a:defRPr>
             </a:pPr>
             <a:r>
-              <a:t>ROS 2 Jazzy · Gazebo Harmonic · M20 · 따라 하기형 AGV 실습</a:t>
+              <a:t>ROS 2 기반 AGV End-to-End 개발 커리큘럼 · M20 · Block E</a:t>
             </a:r>
           </a:p>
         </p:txBody>
@@ -19022,7 +19022,7 @@
               <a:spcAft>
                 <a:spcPts val="0"/>
               </a:spcAft>
-              <a:defRPr sz="1000" b="0">
+              <a:defRPr sz="900" b="0">
                 <a:solidFill>
                   <a:srgbClr val="5C6672"/>
                 </a:solidFill>
@@ -19030,7 +19030,7 @@
               </a:defRPr>
             </a:pPr>
             <a:r>
-              <a:t>ROS 2 Jazzy · Gazebo Harmonic · M20 · 따라 하기형 AGV 실습</a:t>
+              <a:t>ROS 2 기반 AGV End-to-End 개발 커리큘럼 · M20 · Block E</a:t>
             </a:r>
           </a:p>
         </p:txBody>
@@ -19452,7 +19452,7 @@
               <a:spcAft>
                 <a:spcPts val="0"/>
               </a:spcAft>
-              <a:defRPr sz="1000" b="0">
+              <a:defRPr sz="900" b="0">
                 <a:solidFill>
                   <a:srgbClr val="5C6672"/>
                 </a:solidFill>
@@ -19460,7 +19460,7 @@
               </a:defRPr>
             </a:pPr>
             <a:r>
-              <a:t>ROS 2 Jazzy · Gazebo Harmonic · M20 · 따라 하기형 AGV 실습</a:t>
+              <a:t>ROS 2 기반 AGV End-to-End 개발 커리큘럼 · M20 · Block E</a:t>
             </a:r>
           </a:p>
         </p:txBody>
@@ -19902,7 +19902,7 @@
               <a:spcAft>
                 <a:spcPts val="0"/>
               </a:spcAft>
-              <a:defRPr sz="1000" b="0">
+              <a:defRPr sz="900" b="0">
                 <a:solidFill>
                   <a:srgbClr val="5C6672"/>
                 </a:solidFill>
@@ -19910,7 +19910,7 @@
               </a:defRPr>
             </a:pPr>
             <a:r>
-              <a:t>ROS 2 Jazzy · Gazebo Harmonic · M20 · 따라 하기형 AGV 실습</a:t>
+              <a:t>ROS 2 기반 AGV End-to-End 개발 커리큘럼 · M20 · Block E</a:t>
             </a:r>
           </a:p>
         </p:txBody>
@@ -20321,7 +20321,7 @@
               <a:spcAft>
                 <a:spcPts val="0"/>
               </a:spcAft>
-              <a:defRPr sz="1000" b="0">
+              <a:defRPr sz="900" b="0">
                 <a:solidFill>
                   <a:srgbClr val="5C6672"/>
                 </a:solidFill>
@@ -20329,7 +20329,7 @@
               </a:defRPr>
             </a:pPr>
             <a:r>
-              <a:t>ROS 2 Jazzy · Gazebo Harmonic · M20 · 따라 하기형 AGV 실습</a:t>
+              <a:t>ROS 2 기반 AGV End-to-End 개발 커리큘럼 · M20 · Block E</a:t>
             </a:r>
           </a:p>
         </p:txBody>
@@ -20771,7 +20771,7 @@
               <a:spcAft>
                 <a:spcPts val="0"/>
               </a:spcAft>
-              <a:defRPr sz="1000" b="0">
+              <a:defRPr sz="900" b="0">
                 <a:solidFill>
                   <a:srgbClr val="5C6672"/>
                 </a:solidFill>
@@ -20779,7 +20779,7 @@
               </a:defRPr>
             </a:pPr>
             <a:r>
-              <a:t>ROS 2 Jazzy · Gazebo Harmonic · M20 · 따라 하기형 AGV 실습</a:t>
+              <a:t>ROS 2 기반 AGV End-to-End 개발 커리큘럼 · M20 · Block E</a:t>
             </a:r>
           </a:p>
         </p:txBody>
@@ -21143,7 +21143,7 @@
               <a:spcAft>
                 <a:spcPts val="0"/>
               </a:spcAft>
-              <a:defRPr sz="1000" b="0">
+              <a:defRPr sz="900" b="0">
                 <a:solidFill>
                   <a:srgbClr val="5C6672"/>
                 </a:solidFill>
@@ -21151,7 +21151,7 @@
               </a:defRPr>
             </a:pPr>
             <a:r>
-              <a:t>ROS 2 Jazzy · Gazebo Harmonic · M20 · 따라 하기형 AGV 실습</a:t>
+              <a:t>ROS 2 기반 AGV End-to-End 개발 커리큘럼 · M20 · Block E</a:t>
             </a:r>
           </a:p>
         </p:txBody>
@@ -21380,7 +21380,7 @@
               <a:spcAft>
                 <a:spcPts val="0"/>
               </a:spcAft>
-              <a:defRPr sz="1000" b="0">
+              <a:defRPr sz="900" b="0">
                 <a:solidFill>
                   <a:srgbClr val="5C6672"/>
                 </a:solidFill>
@@ -21388,7 +21388,7 @@
               </a:defRPr>
             </a:pPr>
             <a:r>
-              <a:t>ROS 2 Jazzy · Gazebo Harmonic · M20 · 따라 하기형 AGV 실습</a:t>
+              <a:t>ROS 2 기반 AGV End-to-End 개발 커리큘럼 · M20 · Block E</a:t>
             </a:r>
           </a:p>
         </p:txBody>
@@ -21787,7 +21787,7 @@
               <a:spcAft>
                 <a:spcPts val="0"/>
               </a:spcAft>
-              <a:defRPr sz="1000" b="0">
+              <a:defRPr sz="900" b="0">
                 <a:solidFill>
                   <a:srgbClr val="5C6672"/>
                 </a:solidFill>
@@ -21795,7 +21795,7 @@
               </a:defRPr>
             </a:pPr>
             <a:r>
-              <a:t>ROS 2 Jazzy · Gazebo Harmonic · M20 · 따라 하기형 AGV 실습</a:t>
+              <a:t>ROS 2 기반 AGV End-to-End 개발 커리큘럼 · M20 · Block E</a:t>
             </a:r>
           </a:p>
         </p:txBody>
@@ -22312,7 +22312,7 @@
               <a:spcAft>
                 <a:spcPts val="0"/>
               </a:spcAft>
-              <a:defRPr sz="1000" b="0">
+              <a:defRPr sz="900" b="0">
                 <a:solidFill>
                   <a:srgbClr val="5C6672"/>
                 </a:solidFill>
@@ -22320,7 +22320,7 @@
               </a:defRPr>
             </a:pPr>
             <a:r>
-              <a:t>ROS 2 Jazzy · Gazebo Harmonic · M20 · 따라 하기형 AGV 실습</a:t>
+              <a:t>ROS 2 기반 AGV End-to-End 개발 커리큘럼 · M20 · Block E</a:t>
             </a:r>
           </a:p>
         </p:txBody>
@@ -22696,7 +22696,7 @@
               <a:spcAft>
                 <a:spcPts val="0"/>
               </a:spcAft>
-              <a:defRPr sz="1000" b="0">
+              <a:defRPr sz="900" b="0">
                 <a:solidFill>
                   <a:srgbClr val="5C6672"/>
                 </a:solidFill>
@@ -22704,7 +22704,7 @@
               </a:defRPr>
             </a:pPr>
             <a:r>
-              <a:t>ROS 2 Jazzy · Gazebo Harmonic · M20 · 따라 하기형 AGV 실습</a:t>
+              <a:t>ROS 2 기반 AGV End-to-End 개발 커리큘럼 · M20 · Block E</a:t>
             </a:r>
           </a:p>
         </p:txBody>
@@ -23025,7 +23025,7 @@
               <a:spcAft>
                 <a:spcPts val="0"/>
               </a:spcAft>
-              <a:defRPr sz="1000" b="0">
+              <a:defRPr sz="900" b="0">
                 <a:solidFill>
                   <a:srgbClr val="5C6672"/>
                 </a:solidFill>
@@ -23033,7 +23033,7 @@
               </a:defRPr>
             </a:pPr>
             <a:r>
-              <a:t>ROS 2 Jazzy · Gazebo Harmonic · M20 · 따라 하기형 AGV 실습</a:t>
+              <a:t>ROS 2 기반 AGV End-to-End 개발 커리큘럼 · M20 · Block E</a:t>
             </a:r>
           </a:p>
         </p:txBody>
@@ -23444,7 +23444,7 @@
               <a:spcAft>
                 <a:spcPts val="0"/>
               </a:spcAft>
-              <a:defRPr sz="1000" b="0">
+              <a:defRPr sz="900" b="0">
                 <a:solidFill>
                   <a:srgbClr val="5C6672"/>
                 </a:solidFill>
@@ -23452,7 +23452,7 @@
               </a:defRPr>
             </a:pPr>
             <a:r>
-              <a:t>ROS 2 Jazzy · Gazebo Harmonic · M20 · 따라 하기형 AGV 실습</a:t>
+              <a:t>ROS 2 기반 AGV End-to-End 개발 커리큘럼 · M20 · Block E</a:t>
             </a:r>
           </a:p>
         </p:txBody>
@@ -23975,7 +23975,7 @@
               <a:spcAft>
                 <a:spcPts val="0"/>
               </a:spcAft>
-              <a:defRPr sz="1000" b="0">
+              <a:defRPr sz="900" b="0">
                 <a:solidFill>
                   <a:srgbClr val="5C6672"/>
                 </a:solidFill>
@@ -23983,7 +23983,7 @@
               </a:defRPr>
             </a:pPr>
             <a:r>
-              <a:t>ROS 2 Jazzy · Gazebo Harmonic · M20 · 따라 하기형 AGV 실습</a:t>
+              <a:t>ROS 2 기반 AGV End-to-End 개발 커리큘럼 · M20 · Block E</a:t>
             </a:r>
           </a:p>
         </p:txBody>
@@ -24308,7 +24308,7 @@
               <a:spcAft>
                 <a:spcPts val="0"/>
               </a:spcAft>
-              <a:defRPr sz="1000" b="0">
+              <a:defRPr sz="900" b="0">
                 <a:solidFill>
                   <a:srgbClr val="5C6672"/>
                 </a:solidFill>
@@ -24316,7 +24316,7 @@
               </a:defRPr>
             </a:pPr>
             <a:r>
-              <a:t>ROS 2 Jazzy · Gazebo Harmonic · M20 · 따라 하기형 AGV 실습</a:t>
+              <a:t>ROS 2 기반 AGV End-to-End 개발 커리큘럼 · M20 · Block E</a:t>
             </a:r>
           </a:p>
         </p:txBody>
@@ -24948,7 +24948,7 @@
               <a:spcAft>
                 <a:spcPts val="0"/>
               </a:spcAft>
-              <a:defRPr sz="1000" b="0">
+              <a:defRPr sz="900" b="0">
                 <a:solidFill>
                   <a:srgbClr val="5C6672"/>
                 </a:solidFill>
@@ -24956,7 +24956,7 @@
               </a:defRPr>
             </a:pPr>
             <a:r>
-              <a:t>ROS 2 Jazzy · Gazebo Harmonic · M20 · 따라 하기형 AGV 실습</a:t>
+              <a:t>ROS 2 기반 AGV End-to-End 개발 커리큘럼 · M20 · Block E</a:t>
             </a:r>
           </a:p>
         </p:txBody>
@@ -25185,7 +25185,7 @@
               <a:spcAft>
                 <a:spcPts val="0"/>
               </a:spcAft>
-              <a:defRPr sz="1000" b="0">
+              <a:defRPr sz="900" b="0">
                 <a:solidFill>
                   <a:srgbClr val="5C6672"/>
                 </a:solidFill>
@@ -25193,7 +25193,7 @@
               </a:defRPr>
             </a:pPr>
             <a:r>
-              <a:t>ROS 2 Jazzy · Gazebo Harmonic · M20 · 따라 하기형 AGV 실습</a:t>
+              <a:t>ROS 2 기반 AGV End-to-End 개발 커리큘럼 · M20 · Block E</a:t>
             </a:r>
           </a:p>
         </p:txBody>
@@ -25739,7 +25739,7 @@
               <a:spcAft>
                 <a:spcPts val="0"/>
               </a:spcAft>
-              <a:defRPr sz="1000" b="0">
+              <a:defRPr sz="900" b="0">
                 <a:solidFill>
                   <a:srgbClr val="5C6672"/>
                 </a:solidFill>
@@ -25747,7 +25747,7 @@
               </a:defRPr>
             </a:pPr>
             <a:r>
-              <a:t>ROS 2 Jazzy · Gazebo Harmonic · M20 · 따라 하기형 AGV 실습</a:t>
+              <a:t>ROS 2 기반 AGV End-to-End 개발 커리큘럼 · M20 · Block E</a:t>
             </a:r>
           </a:p>
         </p:txBody>
@@ -26022,7 +26022,7 @@
               <a:spcAft>
                 <a:spcPts val="0"/>
               </a:spcAft>
-              <a:defRPr sz="1000" b="0">
+              <a:defRPr sz="900" b="0">
                 <a:solidFill>
                   <a:srgbClr val="5C6672"/>
                 </a:solidFill>
@@ -26030,7 +26030,7 @@
               </a:defRPr>
             </a:pPr>
             <a:r>
-              <a:t>ROS 2 Jazzy · Gazebo Harmonic · M20 · 따라 하기형 AGV 실습</a:t>
+              <a:t>ROS 2 기반 AGV End-to-End 개발 커리큘럼 · M20 · Block E</a:t>
             </a:r>
           </a:p>
         </p:txBody>

--- a/blocks/E_autonomy_logic/M20_pid_driving_control/M20_PID와_주행_제어.pptx
+++ b/blocks/E_autonomy_logic/M20_pid_driving_control/M20_PID와_주행_제어.pptx
@@ -43,6 +43,7 @@
     <p:sldId id="291" r:id="rId43"/>
     <p:sldId id="292" r:id="rId44"/>
     <p:sldId id="293" r:id="rId45"/>
+    <p:sldId id="294" r:id="rId46"/>
   </p:sldIdLst>
   <p:sldSz cx="12191999" cy="6858000" type="screen4x3"/>
   <p:notesSz cx="6858000" cy="9144000"/>
@@ -2829,7 +2830,7 @@
           </a:p>
           <a:p>
             <a:r>
-              <a:t>[확인] ① 명령/설정  ② 정상 출력 또는 화면  ③ 다음 검증 명령으로 재확인</a:t>
+              <a:t>[확인] 명령·설정과 화면의 topic·frame·결과 이름을 대조합니다.</a:t>
             </a:r>
           </a:p>
           <a:p>
@@ -2909,27 +2910,17 @@
           <a:lstStyle/>
           <a:p>
             <a:r>
-              <a:t>[설명] 검증 명령은 GUI 결과와 별도로 실행해 재현 가능한 완료 기준을 만든다.</a:t>
-            </a:r>
-          </a:p>
-          <a:p>
-            <a:r>
-              <a:t>[실행] ros2 topic info /target_error</a:t>
-            </a:r>
-          </a:p>
-          <a:p>
-            <a:r>
-              <a:t>ros2 topic info /cmd_vel_raw</a:t>
-            </a:r>
-          </a:p>
-          <a:p>
-            <a:r>
-              <a:t>ros2 param get /pid_controller kp_angular</a:t>
-            </a:r>
-          </a:p>
-          <a:p>
-            <a:r>
-              <a:t>[확인] kp_angular·max speed parameter와 saturation이 /cmd_vel_raw 출력을 제한하는 것을 확인한다.</a:t>
+              <a:t>[설명] 실제 Ubuntu/ROS 2 환경에서 생성한 검증 화면이다.</a:t>
+            </a:r>
+          </a:p>
+          <a:p>
+            <a:r>
+              <a:t>[실행] 슬라이드의 명령 또는 파일 작성 단계를 진행한다.</a:t>
+            </a:r>
+          </a:p>
+          <a:p>
+            <a:r>
+              <a:t>[확인] ① 명령/설정  ② 정상 출력 또는 화면  ③ 다음 검증 명령으로 재확인</a:t>
             </a:r>
           </a:p>
           <a:p>
@@ -3009,17 +3000,27 @@
           <a:lstStyle/>
           <a:p>
             <a:r>
-              <a:t>[설명] 오류를 대신 해결하지 말고 증상부터 우선 확인 순서대로 교육생이 실행하게 한다.</a:t>
-            </a:r>
-          </a:p>
-          <a:p>
-            <a:r>
-              <a:t>[실행] 슬라이드의 명령 또는 파일 작성 단계를 진행한다.</a:t>
-            </a:r>
-          </a:p>
-          <a:p>
-            <a:r>
-              <a:t>[확인] 수정 뒤 첫 검증 명령을 다시 실행한다.</a:t>
+              <a:t>[설명] 검증 명령은 GUI 결과와 별도로 실행해 재현 가능한 완료 기준을 만든다.</a:t>
+            </a:r>
+          </a:p>
+          <a:p>
+            <a:r>
+              <a:t>[실행] ros2 topic info /target_error</a:t>
+            </a:r>
+          </a:p>
+          <a:p>
+            <a:r>
+              <a:t>ros2 topic info /cmd_vel_raw</a:t>
+            </a:r>
+          </a:p>
+          <a:p>
+            <a:r>
+              <a:t>ros2 param get /pid_controller kp_angular</a:t>
+            </a:r>
+          </a:p>
+          <a:p>
+            <a:r>
+              <a:t>[확인] kp_angular·max speed parameter와 saturation이 /cmd_vel_raw 출력을 제한하는 것을 확인한다.</a:t>
             </a:r>
           </a:p>
           <a:p>
@@ -3029,7 +3030,7 @@
           </a:p>
           <a:p>
             <a:r>
-              <a:t>[오류] 슬라이드의 두 대표 오류를 먼저 사용한다.</a:t>
+              <a:t>[오류] 오류가 나면 현재 폴더, source, 파일 경로를 먼저 확인한다.</a:t>
             </a:r>
           </a:p>
         </p:txBody>
@@ -3099,37 +3100,17 @@
           <a:lstStyle/>
           <a:p>
             <a:r>
-              <a:t>[설명] Complete는 정답 복사본이 아니라 막혔을 때 비교·복구하는 안전망이다.</a:t>
-            </a:r>
-          </a:p>
-          <a:p>
-            <a:r>
-              <a:t>[실행] cd ~/ros2_curri</a:t>
-            </a:r>
-          </a:p>
-          <a:p>
-            <a:r>
-              <a:t>diff -ru my_agv_ws/src blocks/E_autonomy_logic/M20_pid_driving_control/complete/agv_ws/src || true</a:t>
-            </a:r>
-          </a:p>
-          <a:p>
-            <a:r>
-              <a:t>cp -a my_agv_ws/src my_agv_ws/src_before_M20</a:t>
-            </a:r>
-          </a:p>
-          <a:p>
-            <a:r>
-              <a:t>cp -a blocks/E_autonomy_logic/M20_pid_driving_control/complete/agv_ws/src/. my_agv_ws/src/</a:t>
-            </a:r>
-          </a:p>
-          <a:p>
-            <a:r>
-              <a:t>cd my_agv_ws &amp;&amp; colcon build --symlink-install &amp;&amp; source install/setup.bash</a:t>
-            </a:r>
-          </a:p>
-          <a:p>
-            <a:r>
-              <a:t>[확인] diff에서 내 파일과 Complete의 차이를 설명할 수 있다.</a:t>
+              <a:t>[설명] 오류를 대신 해결하지 말고 증상부터 우선 확인 순서대로 교육생이 실행하게 한다.</a:t>
+            </a:r>
+          </a:p>
+          <a:p>
+            <a:r>
+              <a:t>[실행] 슬라이드의 명령 또는 파일 작성 단계를 진행한다.</a:t>
+            </a:r>
+          </a:p>
+          <a:p>
+            <a:r>
+              <a:t>[확인] 수정 뒤 첫 검증 명령을 다시 실행한다.</a:t>
             </a:r>
           </a:p>
           <a:p>
@@ -3139,7 +3120,7 @@
           </a:p>
           <a:p>
             <a:r>
-              <a:t>[오류] 오류가 나면 현재 폴더, source, 파일 경로를 먼저 확인한다.</a:t>
+              <a:t>[오류] 슬라이드의 두 대표 오류를 먼저 사용한다.</a:t>
             </a:r>
           </a:p>
         </p:txBody>
@@ -3209,17 +3190,37 @@
           <a:lstStyle/>
           <a:p>
             <a:r>
-              <a:t>[설명] 교육생이 직접 한 값만 바꿔 원인과 결과를 연결하게 한다.</a:t>
-            </a:r>
-          </a:p>
-          <a:p>
-            <a:r>
-              <a:t>[실행] 슬라이드의 명령 또는 파일 작성 단계를 진행한다.</a:t>
-            </a:r>
-          </a:p>
-          <a:p>
-            <a:r>
-              <a:t>[확인] 원래 값과 변경 값을 모두 기록한다.</a:t>
+              <a:t>[설명] Complete는 정답 복사본이 아니라 막혔을 때 비교·복구하는 안전망이다.</a:t>
+            </a:r>
+          </a:p>
+          <a:p>
+            <a:r>
+              <a:t>[실행] cd ~/ros2_curri</a:t>
+            </a:r>
+          </a:p>
+          <a:p>
+            <a:r>
+              <a:t>diff -ru my_agv_ws/src blocks/E_autonomy_logic/M20_pid_driving_control/complete/agv_ws/src || true</a:t>
+            </a:r>
+          </a:p>
+          <a:p>
+            <a:r>
+              <a:t>cp -a my_agv_ws/src my_agv_ws/src_before_M20</a:t>
+            </a:r>
+          </a:p>
+          <a:p>
+            <a:r>
+              <a:t>cp -a blocks/E_autonomy_logic/M20_pid_driving_control/complete/agv_ws/src/. my_agv_ws/src/</a:t>
+            </a:r>
+          </a:p>
+          <a:p>
+            <a:r>
+              <a:t>cd my_agv_ws &amp;&amp; colcon build --symlink-install &amp;&amp; source install/setup.bash</a:t>
+            </a:r>
+          </a:p>
+          <a:p>
+            <a:r>
+              <a:t>[확인] diff에서 내 파일과 Complete의 차이를 설명할 수 있다.</a:t>
             </a:r>
           </a:p>
           <a:p>
@@ -3299,7 +3300,7 @@
           <a:lstStyle/>
           <a:p>
             <a:r>
-              <a:t>[설명] 교육생이 자신의 workspace·캡처·로그를 저장했는지 확인하고 다음 모듈의 시작 상태를 읽는다.</a:t>
+              <a:t>[설명] 교육생이 직접 한 값만 바꿔 원인과 결과를 연결하게 한다.</a:t>
             </a:r>
           </a:p>
           <a:p>
@@ -3309,7 +3310,7 @@
           </a:p>
           <a:p>
             <a:r>
-              <a:t>[확인] M21 YAML/Launch 시작 조건을 말할 수 있다.</a:t>
+              <a:t>[확인] 원래 값과 변경 값을 모두 기록한다.</a:t>
             </a:r>
           </a:p>
           <a:p>
@@ -3345,6 +3346,96 @@
 </file>
 
 <file path=ppt/notesSlides/notesSlide38.xml><?xml version="1.0" encoding="utf-8"?>
+<p:notes xmlns:a="http://schemas.openxmlformats.org/drawingml/2006/main" xmlns:p="http://schemas.openxmlformats.org/presentationml/2006/main" xmlns:r="http://schemas.openxmlformats.org/officeDocument/2006/relationships">
+  <p:cSld>
+    <p:spTree>
+      <p:nvGrpSpPr>
+        <p:cNvPr id="1" name=""/>
+        <p:cNvGrpSpPr/>
+        <p:nvPr/>
+      </p:nvGrpSpPr>
+      <p:grpSpPr>
+        <a:xfrm>
+          <a:off x="0" y="0"/>
+          <a:ext cx="0" cy="0"/>
+          <a:chOff x="0" y="0"/>
+          <a:chExt cx="0" cy="0"/>
+        </a:xfrm>
+      </p:grpSpPr>
+      <p:sp>
+        <p:nvSpPr>
+          <p:cNvPr id="2" name="Slide Image Placeholder 1"/>
+          <p:cNvSpPr>
+            <a:spLocks noGrp="1"/>
+          </p:cNvSpPr>
+          <p:nvPr>
+            <p:ph type="sldImg" idx="2"/>
+          </p:nvPr>
+        </p:nvSpPr>
+        <p:spPr/>
+      </p:sp>
+      <p:sp>
+        <p:nvSpPr>
+          <p:cNvPr id="3" name="Notes Placeholder 2"/>
+          <p:cNvSpPr>
+            <a:spLocks noGrp="1"/>
+          </p:cNvSpPr>
+          <p:nvPr>
+            <p:ph type="body" idx="3" sz="quarter"/>
+          </p:nvPr>
+        </p:nvSpPr>
+        <p:spPr/>
+        <p:txBody>
+          <a:bodyPr/>
+          <a:lstStyle/>
+          <a:p>
+            <a:r>
+              <a:t>[설명] 교육생이 자신의 workspace·캡처·로그를 저장했는지 확인하고 다음 모듈의 시작 상태를 읽는다.</a:t>
+            </a:r>
+          </a:p>
+          <a:p>
+            <a:r>
+              <a:t>[실행] 슬라이드의 명령 또는 파일 작성 단계를 진행한다.</a:t>
+            </a:r>
+          </a:p>
+          <a:p>
+            <a:r>
+              <a:t>[확인] M21 YAML/Launch 시작 조건을 말할 수 있다.</a:t>
+            </a:r>
+          </a:p>
+          <a:p>
+            <a:r>
+              <a:t>[멈춤] 교육생이 현재 체크포인트를 통과할 때까지 기다린다.</a:t>
+            </a:r>
+          </a:p>
+          <a:p>
+            <a:r>
+              <a:t>[오류] 오류가 나면 현재 폴더, source, 파일 경로를 먼저 확인한다.</a:t>
+            </a:r>
+          </a:p>
+        </p:txBody>
+      </p:sp>
+      <p:sp>
+        <p:nvSpPr>
+          <p:cNvPr id="4" name="Slide Number Placeholder 3"/>
+          <p:cNvSpPr>
+            <a:spLocks noGrp="1"/>
+          </p:cNvSpPr>
+          <p:nvPr>
+            <p:ph type="sldNum" idx="5" sz="quarter"/>
+          </p:nvPr>
+        </p:nvSpPr>
+        <p:spPr/>
+      </p:sp>
+    </p:spTree>
+  </p:cSld>
+  <p:clrMapOvr>
+    <a:masterClrMapping/>
+  </p:clrMapOvr>
+</p:notes>
+</file>
+
+<file path=ppt/notesSlides/notesSlide39.xml><?xml version="1.0" encoding="utf-8"?>
 <p:notes xmlns:a="http://schemas.openxmlformats.org/drawingml/2006/main" xmlns:p="http://schemas.openxmlformats.org/presentationml/2006/main" xmlns:r="http://schemas.openxmlformats.org/officeDocument/2006/relationships">
   <p:cSld>
     <p:spTree>
@@ -8250,7 +8341,7 @@
           </a:fontRef>
         </p:style>
         <p:txBody>
-          <a:bodyPr rtlCol="0" anchor="ctr" wrap="square" lIns="73152" rIns="73152" tIns="36576" bIns="36576"/>
+          <a:bodyPr rtlCol="0" anchor="ctr" wrap="square" lIns="109728" rIns="109728" tIns="73152" bIns="73152"/>
           <a:lstStyle/>
           <a:p>
             <a:pPr algn="l">
@@ -8267,7 +8358,19 @@
             <a:r>
               <a:t>mkdir -p ~/ros2_curri/my_agv_ws/src/agv_control/agv_control</a:t>
             </a:r>
-            <a:br/>
+          </a:p>
+          <a:p>
+            <a:pPr algn="l">
+              <a:spcAft>
+                <a:spcPts val="0"/>
+              </a:spcAft>
+              <a:defRPr sz="1600" b="0">
+                <a:solidFill>
+                  <a:srgbClr val="FFFFFF"/>
+                </a:solidFill>
+                <a:latin typeface="DejaVu Sans Mono"/>
+              </a:defRPr>
+            </a:pPr>
             <a:r>
               <a:t>nano ~/ros2_curri/my_agv_ws/src/agv_control/agv_control/pid_controller.py</a:t>
             </a:r>
@@ -12456,7 +12559,7 @@
           </a:fontRef>
         </p:style>
         <p:txBody>
-          <a:bodyPr rtlCol="0" anchor="ctr" wrap="square" lIns="164592" rIns="164592" tIns="109728" bIns="36576"/>
+          <a:bodyPr rtlCol="0" anchor="ctr" wrap="square" lIns="164592" rIns="164592" tIns="109728" bIns="73152"/>
           <a:lstStyle/>
           <a:p>
             <a:pPr algn="l">
@@ -12473,41 +12576,173 @@
             <a:r>
               <a:t>import rclpy</a:t>
             </a:r>
-            <a:br/>
+          </a:p>
+          <a:p>
+            <a:pPr algn="l">
+              <a:spcAft>
+                <a:spcPts val="0"/>
+              </a:spcAft>
+              <a:defRPr sz="1400" b="0">
+                <a:solidFill>
+                  <a:srgbClr val="FFFFFF"/>
+                </a:solidFill>
+                <a:latin typeface="DejaVu Sans Mono"/>
+              </a:defRPr>
+            </a:pPr>
             <a:r>
               <a:t>from rclpy.node import Node</a:t>
             </a:r>
-            <a:br/>
+          </a:p>
+          <a:p>
+            <a:pPr algn="l">
+              <a:spcAft>
+                <a:spcPts val="0"/>
+              </a:spcAft>
+              <a:defRPr sz="1400" b="0">
+                <a:solidFill>
+                  <a:srgbClr val="FFFFFF"/>
+                </a:solidFill>
+                <a:latin typeface="DejaVu Sans Mono"/>
+              </a:defRPr>
+            </a:pPr>
             <a:r>
               <a:t>from geometry_msgs.msg import Twist</a:t>
             </a:r>
-            <a:br/>
-            <a:br/>
+          </a:p>
+          <a:p>
+            <a:pPr algn="l">
+              <a:spcAft>
+                <a:spcPts val="0"/>
+              </a:spcAft>
+              <a:defRPr sz="1400" b="0">
+                <a:solidFill>
+                  <a:srgbClr val="FFFFFF"/>
+                </a:solidFill>
+                <a:latin typeface="DejaVu Sans Mono"/>
+              </a:defRPr>
+            </a:pPr>
+          </a:p>
+          <a:p>
+            <a:pPr algn="l">
+              <a:spcAft>
+                <a:spcPts val="0"/>
+              </a:spcAft>
+              <a:defRPr sz="1400" b="0">
+                <a:solidFill>
+                  <a:srgbClr val="FFFFFF"/>
+                </a:solidFill>
+                <a:latin typeface="DejaVu Sans Mono"/>
+              </a:defRPr>
+            </a:pPr>
             <a:r>
               <a:t>class PidController(Node):</a:t>
             </a:r>
-            <a:br/>
+          </a:p>
+          <a:p>
+            <a:pPr algn="l">
+              <a:spcAft>
+                <a:spcPts val="0"/>
+              </a:spcAft>
+              <a:defRPr sz="1400" b="0">
+                <a:solidFill>
+                  <a:srgbClr val="FFFFFF"/>
+                </a:solidFill>
+                <a:latin typeface="DejaVu Sans Mono"/>
+              </a:defRPr>
+            </a:pPr>
             <a:r>
               <a:t>    """A small P-only starting point: replace with PI/PID after observing overshoot."""</a:t>
             </a:r>
-            <a:br/>
-            <a:br/>
+          </a:p>
+          <a:p>
+            <a:pPr algn="l">
+              <a:spcAft>
+                <a:spcPts val="0"/>
+              </a:spcAft>
+              <a:defRPr sz="1400" b="0">
+                <a:solidFill>
+                  <a:srgbClr val="FFFFFF"/>
+                </a:solidFill>
+                <a:latin typeface="DejaVu Sans Mono"/>
+              </a:defRPr>
+            </a:pPr>
+          </a:p>
+          <a:p>
+            <a:pPr algn="l">
+              <a:spcAft>
+                <a:spcPts val="0"/>
+              </a:spcAft>
+              <a:defRPr sz="1400" b="0">
+                <a:solidFill>
+                  <a:srgbClr val="FFFFFF"/>
+                </a:solidFill>
+                <a:latin typeface="DejaVu Sans Mono"/>
+              </a:defRPr>
+            </a:pPr>
             <a:r>
               <a:t>    def __init__(self):</a:t>
             </a:r>
-            <a:br/>
+          </a:p>
+          <a:p>
+            <a:pPr algn="l">
+              <a:spcAft>
+                <a:spcPts val="0"/>
+              </a:spcAft>
+              <a:defRPr sz="1400" b="0">
+                <a:solidFill>
+                  <a:srgbClr val="FFFFFF"/>
+                </a:solidFill>
+                <a:latin typeface="DejaVu Sans Mono"/>
+              </a:defRPr>
+            </a:pPr>
             <a:r>
               <a:t>        super().__init__('pid_controller')</a:t>
             </a:r>
-            <a:br/>
+          </a:p>
+          <a:p>
+            <a:pPr algn="l">
+              <a:spcAft>
+                <a:spcPts val="0"/>
+              </a:spcAft>
+              <a:defRPr sz="1400" b="0">
+                <a:solidFill>
+                  <a:srgbClr val="FFFFFF"/>
+                </a:solidFill>
+                <a:latin typeface="DejaVu Sans Mono"/>
+              </a:defRPr>
+            </a:pPr>
             <a:r>
               <a:t>        self.declare_parameter('kp_angular', 0.004)</a:t>
             </a:r>
-            <a:br/>
+          </a:p>
+          <a:p>
+            <a:pPr algn="l">
+              <a:spcAft>
+                <a:spcPts val="0"/>
+              </a:spcAft>
+              <a:defRPr sz="1400" b="0">
+                <a:solidFill>
+                  <a:srgbClr val="FFFFFF"/>
+                </a:solidFill>
+                <a:latin typeface="DejaVu Sans Mono"/>
+              </a:defRPr>
+            </a:pPr>
             <a:r>
               <a:t>        self.declare_parameter('max_linear_speed', 0.25)</a:t>
             </a:r>
-            <a:br/>
+          </a:p>
+          <a:p>
+            <a:pPr algn="l">
+              <a:spcAft>
+                <a:spcPts val="0"/>
+              </a:spcAft>
+              <a:defRPr sz="1400" b="0">
+                <a:solidFill>
+                  <a:srgbClr val="FFFFFF"/>
+                </a:solidFill>
+                <a:latin typeface="DejaVu Sans Mono"/>
+              </a:defRPr>
+            </a:pPr>
             <a:r>
               <a:t>        self.declare_parameter('max_angular_speed', 0.8)</a:t>
             </a:r>
@@ -12924,7 +13159,7 @@
           </a:fontRef>
         </p:style>
         <p:txBody>
-          <a:bodyPr rtlCol="0" anchor="ctr" wrap="square" lIns="164592" rIns="164592" tIns="109728" bIns="36576"/>
+          <a:bodyPr rtlCol="0" anchor="ctr" wrap="square" lIns="164592" rIns="164592" tIns="109728" bIns="73152"/>
           <a:lstStyle/>
           <a:p>
             <a:pPr algn="l">
@@ -12941,44 +13176,163 @@
             <a:r>
               <a:t>        self.publisher = self.create_publisher(Twist, '/cmd_vel_raw', 10)</a:t>
             </a:r>
-            <a:br/>
+          </a:p>
+          <a:p>
+            <a:pPr algn="l">
+              <a:spcAft>
+                <a:spcPts val="0"/>
+              </a:spcAft>
+              <a:defRPr sz="1400" b="0">
+                <a:solidFill>
+                  <a:srgbClr val="FFFFFF"/>
+                </a:solidFill>
+                <a:latin typeface="DejaVu Sans Mono"/>
+              </a:defRPr>
+            </a:pPr>
             <a:r>
               <a:t>        self.create_subscription(Twist, '/target_error', self.error_callback, 10)</a:t>
             </a:r>
-            <a:br/>
-            <a:br/>
+          </a:p>
+          <a:p>
+            <a:pPr algn="l">
+              <a:spcAft>
+                <a:spcPts val="0"/>
+              </a:spcAft>
+              <a:defRPr sz="1400" b="0">
+                <a:solidFill>
+                  <a:srgbClr val="FFFFFF"/>
+                </a:solidFill>
+                <a:latin typeface="DejaVu Sans Mono"/>
+              </a:defRPr>
+            </a:pPr>
+          </a:p>
+          <a:p>
+            <a:pPr algn="l">
+              <a:spcAft>
+                <a:spcPts val="0"/>
+              </a:spcAft>
+              <a:defRPr sz="1400" b="0">
+                <a:solidFill>
+                  <a:srgbClr val="FFFFFF"/>
+                </a:solidFill>
+                <a:latin typeface="DejaVu Sans Mono"/>
+              </a:defRPr>
+            </a:pPr>
             <a:r>
               <a:t>    def error_callback(self, error):</a:t>
             </a:r>
-            <a:br/>
+          </a:p>
+          <a:p>
+            <a:pPr algn="l">
+              <a:spcAft>
+                <a:spcPts val="0"/>
+              </a:spcAft>
+              <a:defRPr sz="1400" b="0">
+                <a:solidFill>
+                  <a:srgbClr val="FFFFFF"/>
+                </a:solidFill>
+                <a:latin typeface="DejaVu Sans Mono"/>
+              </a:defRPr>
+            </a:pPr>
             <a:r>
               <a:t>        command = Twist()</a:t>
             </a:r>
-            <a:br/>
+          </a:p>
+          <a:p>
+            <a:pPr algn="l">
+              <a:spcAft>
+                <a:spcPts val="0"/>
+              </a:spcAft>
+              <a:defRPr sz="1400" b="0">
+                <a:solidFill>
+                  <a:srgbClr val="FFFFFF"/>
+                </a:solidFill>
+                <a:latin typeface="DejaVu Sans Mono"/>
+              </a:defRPr>
+            </a:pPr>
             <a:r>
               <a:t>        command.linear.x = min(max(error.linear.x, 0.0),</a:t>
             </a:r>
-            <a:br/>
+          </a:p>
+          <a:p>
+            <a:pPr algn="l">
+              <a:spcAft>
+                <a:spcPts val="0"/>
+              </a:spcAft>
+              <a:defRPr sz="1400" b="0">
+                <a:solidFill>
+                  <a:srgbClr val="FFFFFF"/>
+                </a:solidFill>
+                <a:latin typeface="DejaVu Sans Mono"/>
+              </a:defRPr>
+            </a:pPr>
             <a:r>
               <a:t>            self.get_parameter('max_linear_speed').value)</a:t>
             </a:r>
-            <a:br/>
+          </a:p>
+          <a:p>
+            <a:pPr algn="l">
+              <a:spcAft>
+                <a:spcPts val="0"/>
+              </a:spcAft>
+              <a:defRPr sz="1400" b="0">
+                <a:solidFill>
+                  <a:srgbClr val="FFFFFF"/>
+                </a:solidFill>
+                <a:latin typeface="DejaVu Sans Mono"/>
+              </a:defRPr>
+            </a:pPr>
             <a:r>
               <a:t>        command.angular.z = max(min(error.angular.z * self.get_parameter('kp_angular').value,</a:t>
             </a:r>
-            <a:br/>
+          </a:p>
+          <a:p>
+            <a:pPr algn="l">
+              <a:spcAft>
+                <a:spcPts val="0"/>
+              </a:spcAft>
+              <a:defRPr sz="1400" b="0">
+                <a:solidFill>
+                  <a:srgbClr val="FFFFFF"/>
+                </a:solidFill>
+                <a:latin typeface="DejaVu Sans Mono"/>
+              </a:defRPr>
+            </a:pPr>
             <a:r>
               <a:t>             self.get_parameter('max_angular_speed').value),</a:t>
             </a:r>
-            <a:br/>
+          </a:p>
+          <a:p>
+            <a:pPr algn="l">
+              <a:spcAft>
+                <a:spcPts val="0"/>
+              </a:spcAft>
+              <a:defRPr sz="1400" b="0">
+                <a:solidFill>
+                  <a:srgbClr val="FFFFFF"/>
+                </a:solidFill>
+                <a:latin typeface="DejaVu Sans Mono"/>
+              </a:defRPr>
+            </a:pPr>
             <a:r>
               <a:t>            -self.get_parameter('max_angular_speed').value)</a:t>
             </a:r>
-            <a:br/>
+          </a:p>
+          <a:p>
+            <a:pPr algn="l">
+              <a:spcAft>
+                <a:spcPts val="0"/>
+              </a:spcAft>
+              <a:defRPr sz="1400" b="0">
+                <a:solidFill>
+                  <a:srgbClr val="FFFFFF"/>
+                </a:solidFill>
+                <a:latin typeface="DejaVu Sans Mono"/>
+              </a:defRPr>
+            </a:pPr>
             <a:r>
               <a:t>        self.publisher.publish(command)</a:t>
             </a:r>
-            <a:br/>
           </a:p>
         </p:txBody>
       </p:sp>
@@ -13392,7 +13746,7 @@
           </a:fontRef>
         </p:style>
         <p:txBody>
-          <a:bodyPr rtlCol="0" anchor="ctr" wrap="square" lIns="164592" rIns="164592" tIns="109728" bIns="36576"/>
+          <a:bodyPr rtlCol="0" anchor="ctr" wrap="square" lIns="164592" rIns="164592" tIns="109728" bIns="73152"/>
           <a:lstStyle/>
           <a:p>
             <a:pPr algn="l">
@@ -13409,43 +13763,163 @@
             <a:r>
               <a:t>def main():</a:t>
             </a:r>
-            <a:br/>
+          </a:p>
+          <a:p>
+            <a:pPr algn="l">
+              <a:spcAft>
+                <a:spcPts val="0"/>
+              </a:spcAft>
+              <a:defRPr sz="1400" b="0">
+                <a:solidFill>
+                  <a:srgbClr val="FFFFFF"/>
+                </a:solidFill>
+                <a:latin typeface="DejaVu Sans Mono"/>
+              </a:defRPr>
+            </a:pPr>
             <a:r>
               <a:t>    rclpy.init()</a:t>
             </a:r>
-            <a:br/>
+          </a:p>
+          <a:p>
+            <a:pPr algn="l">
+              <a:spcAft>
+                <a:spcPts val="0"/>
+              </a:spcAft>
+              <a:defRPr sz="1400" b="0">
+                <a:solidFill>
+                  <a:srgbClr val="FFFFFF"/>
+                </a:solidFill>
+                <a:latin typeface="DejaVu Sans Mono"/>
+              </a:defRPr>
+            </a:pPr>
             <a:r>
               <a:t>    node = PidController()</a:t>
             </a:r>
-            <a:br/>
+          </a:p>
+          <a:p>
+            <a:pPr algn="l">
+              <a:spcAft>
+                <a:spcPts val="0"/>
+              </a:spcAft>
+              <a:defRPr sz="1400" b="0">
+                <a:solidFill>
+                  <a:srgbClr val="FFFFFF"/>
+                </a:solidFill>
+                <a:latin typeface="DejaVu Sans Mono"/>
+              </a:defRPr>
+            </a:pPr>
             <a:r>
               <a:t>    try:</a:t>
             </a:r>
-            <a:br/>
+          </a:p>
+          <a:p>
+            <a:pPr algn="l">
+              <a:spcAft>
+                <a:spcPts val="0"/>
+              </a:spcAft>
+              <a:defRPr sz="1400" b="0">
+                <a:solidFill>
+                  <a:srgbClr val="FFFFFF"/>
+                </a:solidFill>
+                <a:latin typeface="DejaVu Sans Mono"/>
+              </a:defRPr>
+            </a:pPr>
             <a:r>
               <a:t>        rclpy.spin(node)</a:t>
             </a:r>
-            <a:br/>
+          </a:p>
+          <a:p>
+            <a:pPr algn="l">
+              <a:spcAft>
+                <a:spcPts val="0"/>
+              </a:spcAft>
+              <a:defRPr sz="1400" b="0">
+                <a:solidFill>
+                  <a:srgbClr val="FFFFFF"/>
+                </a:solidFill>
+                <a:latin typeface="DejaVu Sans Mono"/>
+              </a:defRPr>
+            </a:pPr>
             <a:r>
               <a:t>    except KeyboardInterrupt:</a:t>
             </a:r>
-            <a:br/>
+          </a:p>
+          <a:p>
+            <a:pPr algn="l">
+              <a:spcAft>
+                <a:spcPts val="0"/>
+              </a:spcAft>
+              <a:defRPr sz="1400" b="0">
+                <a:solidFill>
+                  <a:srgbClr val="FFFFFF"/>
+                </a:solidFill>
+                <a:latin typeface="DejaVu Sans Mono"/>
+              </a:defRPr>
+            </a:pPr>
             <a:r>
               <a:t>        pass</a:t>
             </a:r>
-            <a:br/>
+          </a:p>
+          <a:p>
+            <a:pPr algn="l">
+              <a:spcAft>
+                <a:spcPts val="0"/>
+              </a:spcAft>
+              <a:defRPr sz="1400" b="0">
+                <a:solidFill>
+                  <a:srgbClr val="FFFFFF"/>
+                </a:solidFill>
+                <a:latin typeface="DejaVu Sans Mono"/>
+              </a:defRPr>
+            </a:pPr>
             <a:r>
               <a:t>    finally:</a:t>
             </a:r>
-            <a:br/>
+          </a:p>
+          <a:p>
+            <a:pPr algn="l">
+              <a:spcAft>
+                <a:spcPts val="0"/>
+              </a:spcAft>
+              <a:defRPr sz="1400" b="0">
+                <a:solidFill>
+                  <a:srgbClr val="FFFFFF"/>
+                </a:solidFill>
+                <a:latin typeface="DejaVu Sans Mono"/>
+              </a:defRPr>
+            </a:pPr>
             <a:r>
               <a:t>        node.destroy_node()</a:t>
             </a:r>
-            <a:br/>
+          </a:p>
+          <a:p>
+            <a:pPr algn="l">
+              <a:spcAft>
+                <a:spcPts val="0"/>
+              </a:spcAft>
+              <a:defRPr sz="1400" b="0">
+                <a:solidFill>
+                  <a:srgbClr val="FFFFFF"/>
+                </a:solidFill>
+                <a:latin typeface="DejaVu Sans Mono"/>
+              </a:defRPr>
+            </a:pPr>
             <a:r>
               <a:t>        if rclpy.ok():</a:t>
             </a:r>
-            <a:br/>
+          </a:p>
+          <a:p>
+            <a:pPr algn="l">
+              <a:spcAft>
+                <a:spcPts val="0"/>
+              </a:spcAft>
+              <a:defRPr sz="1400" b="0">
+                <a:solidFill>
+                  <a:srgbClr val="FFFFFF"/>
+                </a:solidFill>
+                <a:latin typeface="DejaVu Sans Mono"/>
+              </a:defRPr>
+            </a:pPr>
             <a:r>
               <a:t>            rclpy.shutdown()</a:t>
             </a:r>
@@ -14378,7 +14852,7 @@
           </a:fontRef>
         </p:style>
         <p:txBody>
-          <a:bodyPr rtlCol="0" anchor="ctr" wrap="square" lIns="73152" rIns="73152" tIns="36576" bIns="36576"/>
+          <a:bodyPr rtlCol="0" anchor="ctr" wrap="square" lIns="109728" rIns="109728" tIns="73152" bIns="73152"/>
           <a:lstStyle/>
           <a:p>
             <a:pPr algn="l">
@@ -14395,7 +14869,19 @@
             <a:r>
               <a:t>mkdir -p ~/ros2_curri/my_agv_ws/src/agv_control</a:t>
             </a:r>
-            <a:br/>
+          </a:p>
+          <a:p>
+            <a:pPr algn="l">
+              <a:spcAft>
+                <a:spcPts val="0"/>
+              </a:spcAft>
+              <a:defRPr sz="1600" b="0">
+                <a:solidFill>
+                  <a:srgbClr val="FFFFFF"/>
+                </a:solidFill>
+                <a:latin typeface="DejaVu Sans Mono"/>
+              </a:defRPr>
+            </a:pPr>
             <a:r>
               <a:t>nano ~/ros2_curri/my_agv_ws/src/agv_control/setup.py</a:t>
             </a:r>
@@ -16437,7 +16923,7 @@
           </a:fontRef>
         </p:style>
         <p:txBody>
-          <a:bodyPr rtlCol="0" anchor="ctr" wrap="square" lIns="164592" rIns="164592" tIns="109728" bIns="36576"/>
+          <a:bodyPr rtlCol="0" anchor="ctr" wrap="square" lIns="164592" rIns="164592" tIns="109728" bIns="73152"/>
           <a:lstStyle/>
           <a:p>
             <a:pPr algn="l">
@@ -16454,47 +16940,179 @@
             <a:r>
               <a:t>from setuptools import find_packages, setup</a:t>
             </a:r>
-            <a:br/>
+          </a:p>
+          <a:p>
+            <a:pPr algn="l">
+              <a:spcAft>
+                <a:spcPts val="0"/>
+              </a:spcAft>
+              <a:defRPr sz="1400" b="0">
+                <a:solidFill>
+                  <a:srgbClr val="FFFFFF"/>
+                </a:solidFill>
+                <a:latin typeface="DejaVu Sans Mono"/>
+              </a:defRPr>
+            </a:pPr>
             <a:r>
               <a:t>package_name = 'agv_control'</a:t>
             </a:r>
-            <a:br/>
+          </a:p>
+          <a:p>
+            <a:pPr algn="l">
+              <a:spcAft>
+                <a:spcPts val="0"/>
+              </a:spcAft>
+              <a:defRPr sz="1400" b="0">
+                <a:solidFill>
+                  <a:srgbClr val="FFFFFF"/>
+                </a:solidFill>
+                <a:latin typeface="DejaVu Sans Mono"/>
+              </a:defRPr>
+            </a:pPr>
             <a:r>
               <a:t>setup(name=package_name, version='0.1.0', packages=find_packages(exclude=['test']),</a:t>
             </a:r>
-            <a:br/>
+          </a:p>
+          <a:p>
+            <a:pPr algn="l">
+              <a:spcAft>
+                <a:spcPts val="0"/>
+              </a:spcAft>
+              <a:defRPr sz="1400" b="0">
+                <a:solidFill>
+                  <a:srgbClr val="FFFFFF"/>
+                </a:solidFill>
+                <a:latin typeface="DejaVu Sans Mono"/>
+              </a:defRPr>
+            </a:pPr>
             <a:r>
               <a:t>    data_files=[('share/ament_index/resource_index/packages',</a:t>
             </a:r>
-            <a:br/>
+          </a:p>
+          <a:p>
+            <a:pPr algn="l">
+              <a:spcAft>
+                <a:spcPts val="0"/>
+              </a:spcAft>
+              <a:defRPr sz="1400" b="0">
+                <a:solidFill>
+                  <a:srgbClr val="FFFFFF"/>
+                </a:solidFill>
+                <a:latin typeface="DejaVu Sans Mono"/>
+              </a:defRPr>
+            </a:pPr>
             <a:r>
               <a:t>    ['resource/' + package_name]), ('share/' + package_name, ['package.xml']),</a:t>
             </a:r>
-            <a:br/>
+          </a:p>
+          <a:p>
+            <a:pPr algn="l">
+              <a:spcAft>
+                <a:spcPts val="0"/>
+              </a:spcAft>
+              <a:defRPr sz="1400" b="0">
+                <a:solidFill>
+                  <a:srgbClr val="FFFFFF"/>
+                </a:solidFill>
+                <a:latin typeface="DejaVu Sans Mono"/>
+              </a:defRPr>
+            </a:pPr>
             <a:r>
               <a:t>    ('share/' + package_name + '/config', ['config/controllers.yaml'])],</a:t>
             </a:r>
-            <a:br/>
+          </a:p>
+          <a:p>
+            <a:pPr algn="l">
+              <a:spcAft>
+                <a:spcPts val="0"/>
+              </a:spcAft>
+              <a:defRPr sz="1400" b="0">
+                <a:solidFill>
+                  <a:srgbClr val="FFFFFF"/>
+                </a:solidFill>
+                <a:latin typeface="DejaVu Sans Mono"/>
+              </a:defRPr>
+            </a:pPr>
             <a:r>
               <a:t>    install_requires=['setuptools'], zip_safe=True, maintainer='AGV student',</a:t>
             </a:r>
-            <a:br/>
+          </a:p>
+          <a:p>
+            <a:pPr algn="l">
+              <a:spcAft>
+                <a:spcPts val="0"/>
+              </a:spcAft>
+              <a:defRPr sz="1400" b="0">
+                <a:solidFill>
+                  <a:srgbClr val="FFFFFF"/>
+                </a:solidFill>
+                <a:latin typeface="DejaVu Sans Mono"/>
+              </a:defRPr>
+            </a:pPr>
             <a:r>
               <a:t>    maintainer_email='student@example.com', license='Apache-2.0',</a:t>
             </a:r>
-            <a:br/>
+          </a:p>
+          <a:p>
+            <a:pPr algn="l">
+              <a:spcAft>
+                <a:spcPts val="0"/>
+              </a:spcAft>
+              <a:defRPr sz="1400" b="0">
+                <a:solidFill>
+                  <a:srgbClr val="FFFFFF"/>
+                </a:solidFill>
+                <a:latin typeface="DejaVu Sans Mono"/>
+              </a:defRPr>
+            </a:pPr>
             <a:r>
               <a:t>    entry_points={'console_scripts': ['counter_publisher = agv_control.counter_publisher:main',</a:t>
             </a:r>
-            <a:br/>
+          </a:p>
+          <a:p>
+            <a:pPr algn="l">
+              <a:spcAft>
+                <a:spcPts val="0"/>
+              </a:spcAft>
+              <a:defRPr sz="1400" b="0">
+                <a:solidFill>
+                  <a:srgbClr val="FFFFFF"/>
+                </a:solidFill>
+                <a:latin typeface="DejaVu Sans Mono"/>
+              </a:defRPr>
+            </a:pPr>
             <a:r>
               <a:t>     'counter_monitor = agv_control.counter_monitor:main', 'cmd_test_node = agv_control.cmd_test_node:main',</a:t>
             </a:r>
-            <a:br/>
+          </a:p>
+          <a:p>
+            <a:pPr algn="l">
+              <a:spcAft>
+                <a:spcPts val="0"/>
+              </a:spcAft>
+              <a:defRPr sz="1400" b="0">
+                <a:solidFill>
+                  <a:srgbClr val="FFFFFF"/>
+                </a:solidFill>
+                <a:latin typeface="DejaVu Sans Mono"/>
+              </a:defRPr>
+            </a:pPr>
             <a:r>
               <a:t>     'velocity_monitor = agv_control.velocity_monitor:main', 'safety_controller = agv_control.safety_controller:main',</a:t>
             </a:r>
-            <a:br/>
+          </a:p>
+          <a:p>
+            <a:pPr algn="l">
+              <a:spcAft>
+                <a:spcPts val="0"/>
+              </a:spcAft>
+              <a:defRPr sz="1400" b="0">
+                <a:solidFill>
+                  <a:srgbClr val="FFFFFF"/>
+                </a:solidFill>
+                <a:latin typeface="DejaVu Sans Mono"/>
+              </a:defRPr>
+            </a:pPr>
             <a:r>
               <a:t>     'pid_controller = agv_control.pid_controller:main']})</a:t>
             </a:r>
@@ -16966,7 +17584,7 @@
           </a:fontRef>
         </p:style>
         <p:txBody>
-          <a:bodyPr rtlCol="0" anchor="ctr" wrap="square" lIns="73152" rIns="73152" tIns="36576" bIns="36576"/>
+          <a:bodyPr rtlCol="0" anchor="ctr" wrap="square" lIns="109728" rIns="109728" tIns="73152" bIns="73152"/>
           <a:lstStyle/>
           <a:p>
             <a:pPr algn="l">
@@ -16983,7 +17601,19 @@
             <a:r>
               <a:t>mkdir -p ~/ros2_curri/my_agv_ws/src/agv_bringup/config</a:t>
             </a:r>
-            <a:br/>
+          </a:p>
+          <a:p>
+            <a:pPr algn="l">
+              <a:spcAft>
+                <a:spcPts val="0"/>
+              </a:spcAft>
+              <a:defRPr sz="1600" b="0">
+                <a:solidFill>
+                  <a:srgbClr val="FFFFFF"/>
+                </a:solidFill>
+                <a:latin typeface="DejaVu Sans Mono"/>
+              </a:defRPr>
+            </a:pPr>
             <a:r>
               <a:t>nano ~/ros2_curri/my_agv_ws/src/agv_bringup/config/mission.yaml</a:t>
             </a:r>
@@ -18797,7 +19427,7 @@
           </a:fontRef>
         </p:style>
         <p:txBody>
-          <a:bodyPr rtlCol="0" anchor="ctr" wrap="square" lIns="164592" rIns="164592" tIns="109728" bIns="36576"/>
+          <a:bodyPr rtlCol="0" anchor="ctr" wrap="square" lIns="164592" rIns="164592" tIns="109728" bIns="73152"/>
           <a:lstStyle/>
           <a:p>
             <a:pPr algn="l">
@@ -18814,47 +19444,179 @@
             <a:r>
               <a:t>mission_manager:</a:t>
             </a:r>
-            <a:br/>
+          </a:p>
+          <a:p>
+            <a:pPr algn="l">
+              <a:spcAft>
+                <a:spcPts val="0"/>
+              </a:spcAft>
+              <a:defRPr sz="1400" b="0">
+                <a:solidFill>
+                  <a:srgbClr val="FFFFFF"/>
+                </a:solidFill>
+                <a:latin typeface="DejaVu Sans Mono"/>
+              </a:defRPr>
+            </a:pPr>
             <a:r>
               <a:t>  ros__parameters:</a:t>
             </a:r>
-            <a:br/>
+          </a:p>
+          <a:p>
+            <a:pPr algn="l">
+              <a:spcAft>
+                <a:spcPts val="0"/>
+              </a:spcAft>
+              <a:defRPr sz="1400" b="0">
+                <a:solidFill>
+                  <a:srgbClr val="FFFFFF"/>
+                </a:solidFill>
+                <a:latin typeface="DejaVu Sans Mono"/>
+              </a:defRPr>
+            </a:pPr>
             <a:r>
               <a:t>    use_sim_time: true</a:t>
             </a:r>
-            <a:br/>
+          </a:p>
+          <a:p>
+            <a:pPr algn="l">
+              <a:spcAft>
+                <a:spcPts val="0"/>
+              </a:spcAft>
+              <a:defRPr sz="1400" b="0">
+                <a:solidFill>
+                  <a:srgbClr val="FFFFFF"/>
+                </a:solidFill>
+                <a:latin typeface="DejaVu Sans Mono"/>
+              </a:defRPr>
+            </a:pPr>
             <a:r>
               <a:t>    stop_distance: 0.50</a:t>
             </a:r>
-            <a:br/>
+          </a:p>
+          <a:p>
+            <a:pPr algn="l">
+              <a:spcAft>
+                <a:spcPts val="0"/>
+              </a:spcAft>
+              <a:defRPr sz="1400" b="0">
+                <a:solidFill>
+                  <a:srgbClr val="FFFFFF"/>
+                </a:solidFill>
+                <a:latin typeface="DejaVu Sans Mono"/>
+              </a:defRPr>
+            </a:pPr>
             <a:r>
               <a:t>    search_speed: 0.25</a:t>
             </a:r>
-            <a:br/>
+          </a:p>
+          <a:p>
+            <a:pPr algn="l">
+              <a:spcAft>
+                <a:spcPts val="0"/>
+              </a:spcAft>
+              <a:defRPr sz="1400" b="0">
+                <a:solidFill>
+                  <a:srgbClr val="FFFFFF"/>
+                </a:solidFill>
+                <a:latin typeface="DejaVu Sans Mono"/>
+              </a:defRPr>
+            </a:pPr>
             <a:r>
               <a:t>    approach_speed: 0.15</a:t>
             </a:r>
-            <a:br/>
+          </a:p>
+          <a:p>
+            <a:pPr algn="l">
+              <a:spcAft>
+                <a:spcPts val="0"/>
+              </a:spcAft>
+              <a:defRPr sz="1400" b="0">
+                <a:solidFill>
+                  <a:srgbClr val="FFFFFF"/>
+                </a:solidFill>
+                <a:latin typeface="DejaVu Sans Mono"/>
+              </a:defRPr>
+            </a:pPr>
             <a:r>
               <a:t>    image_center_x: 320</a:t>
             </a:r>
-            <a:br/>
+          </a:p>
+          <a:p>
+            <a:pPr algn="l">
+              <a:spcAft>
+                <a:spcPts val="0"/>
+              </a:spcAft>
+              <a:defRPr sz="1400" b="0">
+                <a:solidFill>
+                  <a:srgbClr val="FFFFFF"/>
+                </a:solidFill>
+                <a:latin typeface="DejaVu Sans Mono"/>
+              </a:defRPr>
+            </a:pPr>
             <a:r>
               <a:t>    target_timeout_sec: 0.70</a:t>
             </a:r>
-            <a:br/>
+          </a:p>
+          <a:p>
+            <a:pPr algn="l">
+              <a:spcAft>
+                <a:spcPts val="0"/>
+              </a:spcAft>
+              <a:defRPr sz="1400" b="0">
+                <a:solidFill>
+                  <a:srgbClr val="FFFFFF"/>
+                </a:solidFill>
+                <a:latin typeface="DejaVu Sans Mono"/>
+              </a:defRPr>
+            </a:pPr>
             <a:r>
               <a:t>safety_controller:</a:t>
             </a:r>
-            <a:br/>
+          </a:p>
+          <a:p>
+            <a:pPr algn="l">
+              <a:spcAft>
+                <a:spcPts val="0"/>
+              </a:spcAft>
+              <a:defRPr sz="1400" b="0">
+                <a:solidFill>
+                  <a:srgbClr val="FFFFFF"/>
+                </a:solidFill>
+                <a:latin typeface="DejaVu Sans Mono"/>
+              </a:defRPr>
+            </a:pPr>
             <a:r>
               <a:t>  ros__parameters:</a:t>
             </a:r>
-            <a:br/>
+          </a:p>
+          <a:p>
+            <a:pPr algn="l">
+              <a:spcAft>
+                <a:spcPts val="0"/>
+              </a:spcAft>
+              <a:defRPr sz="1400" b="0">
+                <a:solidFill>
+                  <a:srgbClr val="FFFFFF"/>
+                </a:solidFill>
+                <a:latin typeface="DejaVu Sans Mono"/>
+              </a:defRPr>
+            </a:pPr>
             <a:r>
               <a:t>    use_sim_time: true</a:t>
             </a:r>
-            <a:br/>
+          </a:p>
+          <a:p>
+            <a:pPr algn="l">
+              <a:spcAft>
+                <a:spcPts val="0"/>
+              </a:spcAft>
+              <a:defRPr sz="1400" b="0">
+                <a:solidFill>
+                  <a:srgbClr val="FFFFFF"/>
+                </a:solidFill>
+                <a:latin typeface="DejaVu Sans Mono"/>
+              </a:defRPr>
+            </a:pPr>
             <a:r>
               <a:t>    stop_distance: 0.50</a:t>
             </a:r>
@@ -19271,7 +20033,7 @@
           </a:fontRef>
         </p:style>
         <p:txBody>
-          <a:bodyPr rtlCol="0" anchor="ctr" wrap="square" lIns="164592" rIns="164592" tIns="109728" bIns="36576"/>
+          <a:bodyPr rtlCol="0" anchor="ctr" wrap="square" lIns="164592" rIns="164592" tIns="109728" bIns="73152"/>
           <a:lstStyle/>
           <a:p>
             <a:pPr algn="l">
@@ -19557,7 +20319,7 @@
               </a:defRPr>
             </a:pPr>
             <a:r>
-              <a:t>현재 단계 실행 1/2    |    현재 폴더 ~/ros2_curri/my_agv_ws    |    현재 터미널</a:t>
+              <a:t>현재 단계 실행 1/2    |    현재 폴더 ~/ros2_curri/my_agv_ws    |    터미널 1</a:t>
             </a:r>
           </a:p>
         </p:txBody>
@@ -19570,25 +20332,25 @@
         </p:nvSpPr>
         <p:spPr>
           <a:xfrm>
-            <a:off x="676656" y="1764792"/>
-            <a:ext cx="1828800" cy="347472"/>
-          </a:xfrm>
-          <a:prstGeom prst="rect">
-            <a:avLst/>
-          </a:prstGeom>
-          <a:noFill/>
-        </p:spPr>
-        <p:txBody>
-          <a:bodyPr wrap="square" lIns="73152" rIns="73152" tIns="36576" bIns="36576">
-            <a:spAutoFit/>
-          </a:bodyPr>
-          <a:lstStyle/>
-          <a:p>
-            <a:pPr algn="l">
-              <a:spcAft>
-                <a:spcPts val="0"/>
-              </a:spcAft>
-              <a:defRPr sz="1800" b="1">
+            <a:off x="676656" y="1719072"/>
+            <a:ext cx="1691640" cy="274320"/>
+          </a:xfrm>
+          <a:prstGeom prst="rect">
+            <a:avLst/>
+          </a:prstGeom>
+          <a:noFill/>
+        </p:spPr>
+        <p:txBody>
+          <a:bodyPr wrap="square" lIns="73152" rIns="73152" tIns="36576" bIns="36576">
+            <a:spAutoFit/>
+          </a:bodyPr>
+          <a:lstStyle/>
+          <a:p>
+            <a:pPr algn="l">
+              <a:spcAft>
+                <a:spcPts val="0"/>
+              </a:spcAft>
+              <a:defRPr sz="1700" b="1">
                 <a:solidFill>
                   <a:srgbClr val="225B9B"/>
                 </a:solidFill>
@@ -19596,7 +20358,7 @@
               </a:defRPr>
             </a:pPr>
             <a:r>
-              <a:t>왜 하는가</a:t>
+              <a:t>명령의 목적</a:t>
             </a:r>
           </a:p>
         </p:txBody>
@@ -19609,7 +20371,7 @@
         </p:nvSpPr>
         <p:spPr>
           <a:xfrm>
-            <a:off x="676656" y="2103120"/>
+            <a:off x="676656" y="2002536"/>
             <a:ext cx="10789920" cy="512064"/>
           </a:xfrm>
           <a:prstGeom prst="rect">
@@ -19627,7 +20389,7 @@
               <a:spcAft>
                 <a:spcPts val="0"/>
               </a:spcAft>
-              <a:defRPr sz="2000" b="0">
+              <a:defRPr sz="1800" b="0">
                 <a:solidFill>
                   <a:srgbClr val="122C4E"/>
                 </a:solidFill>
@@ -19642,14 +20404,53 @@
       </p:sp>
       <p:sp>
         <p:nvSpPr>
-          <p:cNvPr id="9" name="Rounded Rectangle 8"/>
+          <p:cNvPr id="9" name="TextBox 8"/>
+          <p:cNvSpPr txBox="1"/>
+          <p:nvPr/>
+        </p:nvSpPr>
+        <p:spPr>
+          <a:xfrm>
+            <a:off x="676656" y="2816352"/>
+            <a:ext cx="10835640" cy="256032"/>
+          </a:xfrm>
+          <a:prstGeom prst="rect">
+            <a:avLst/>
+          </a:prstGeom>
+          <a:noFill/>
+        </p:spPr>
+        <p:txBody>
+          <a:bodyPr wrap="square" lIns="73152" rIns="73152" tIns="36576" bIns="36576">
+            <a:spAutoFit/>
+          </a:bodyPr>
+          <a:lstStyle/>
+          <a:p>
+            <a:pPr algn="ctr">
+              <a:spcAft>
+                <a:spcPts val="0"/>
+              </a:spcAft>
+              <a:defRPr sz="1600" b="1">
+                <a:solidFill>
+                  <a:srgbClr val="225B9B"/>
+                </a:solidFill>
+                <a:latin typeface="Noto Sans CJK KR"/>
+              </a:defRPr>
+            </a:pPr>
+            <a:r>
+              <a:t>터미널 1 — 아래 검은 블록은 명령만 복사합니다.</a:t>
+            </a:r>
+          </a:p>
+        </p:txBody>
+      </p:sp>
+      <p:sp>
+        <p:nvSpPr>
+          <p:cNvPr id="10" name="Rounded Rectangle 9"/>
           <p:cNvSpPr/>
           <p:nvPr/>
         </p:nvSpPr>
         <p:spPr>
           <a:xfrm>
-            <a:off x="676656" y="2871216"/>
-            <a:ext cx="10835640" cy="2331720"/>
+            <a:off x="676656" y="3154680"/>
+            <a:ext cx="10835640" cy="1938528"/>
           </a:xfrm>
           <a:prstGeom prst="roundRect">
             <a:avLst/>
@@ -19678,7 +20479,7 @@
           </a:fontRef>
         </p:style>
         <p:txBody>
-          <a:bodyPr rtlCol="0" anchor="ctr" wrap="square" lIns="73152" rIns="73152" tIns="36576" bIns="36576"/>
+          <a:bodyPr rtlCol="0" anchor="ctr" wrap="square" lIns="109728" rIns="109728" tIns="73152" bIns="73152"/>
           <a:lstStyle/>
           <a:p>
             <a:pPr algn="l">
@@ -19695,7 +20496,19 @@
             <a:r>
               <a:t>ros2 run agv_control pid_controller --ros-args \</a:t>
             </a:r>
-            <a:br/>
+          </a:p>
+          <a:p>
+            <a:pPr algn="l">
+              <a:spcAft>
+                <a:spcPts val="0"/>
+              </a:spcAft>
+              <a:defRPr sz="1600" b="0">
+                <a:solidFill>
+                  <a:srgbClr val="FFFFFF"/>
+                </a:solidFill>
+                <a:latin typeface="DejaVu Sans Mono"/>
+              </a:defRPr>
+            </a:pPr>
             <a:r>
               <a:t>  -p kp_angular:=0.004 -p max_linear_speed:=0.25</a:t>
             </a:r>
@@ -19704,31 +20517,31 @@
       </p:sp>
       <p:sp>
         <p:nvSpPr>
-          <p:cNvPr id="10" name="TextBox 9"/>
-          <p:cNvSpPr txBox="1"/>
-          <p:nvPr/>
-        </p:nvSpPr>
-        <p:spPr>
-          <a:xfrm>
-            <a:off x="768096" y="5468112"/>
-            <a:ext cx="1143000" cy="256032"/>
-          </a:xfrm>
-          <a:prstGeom prst="rect">
-            <a:avLst/>
-          </a:prstGeom>
-          <a:noFill/>
-        </p:spPr>
-        <p:txBody>
-          <a:bodyPr wrap="square" lIns="73152" rIns="73152" tIns="36576" bIns="36576">
-            <a:spAutoFit/>
-          </a:bodyPr>
-          <a:lstStyle/>
-          <a:p>
-            <a:pPr algn="l">
-              <a:spcAft>
-                <a:spcPts val="0"/>
-              </a:spcAft>
-              <a:defRPr sz="1800" b="1">
+          <p:cNvPr id="11" name="TextBox 10"/>
+          <p:cNvSpPr txBox="1"/>
+          <p:nvPr/>
+        </p:nvSpPr>
+        <p:spPr>
+          <a:xfrm>
+            <a:off x="768096" y="5276088"/>
+            <a:ext cx="10561320" cy="384048"/>
+          </a:xfrm>
+          <a:prstGeom prst="rect">
+            <a:avLst/>
+          </a:prstGeom>
+          <a:noFill/>
+        </p:spPr>
+        <p:txBody>
+          <a:bodyPr wrap="square" lIns="73152" rIns="73152" tIns="36576" bIns="36576">
+            <a:spAutoFit/>
+          </a:bodyPr>
+          <a:lstStyle/>
+          <a:p>
+            <a:pPr algn="ctr">
+              <a:spcAft>
+                <a:spcPts val="0"/>
+              </a:spcAft>
+              <a:defRPr sz="1500" b="1">
                 <a:solidFill>
                   <a:srgbClr val="2A8B5A"/>
                 </a:solidFill>
@@ -19736,38 +20549,38 @@
               </a:defRPr>
             </a:pPr>
             <a:r>
-              <a:t>확인</a:t>
-            </a:r>
-          </a:p>
-        </p:txBody>
-      </p:sp>
-      <p:sp>
-        <p:nvSpPr>
-          <p:cNvPr id="11" name="TextBox 10"/>
-          <p:cNvSpPr txBox="1"/>
-          <p:nvPr/>
-        </p:nvSpPr>
-        <p:spPr>
-          <a:xfrm>
-            <a:off x="768096" y="5742432"/>
-            <a:ext cx="10561320" cy="347472"/>
-          </a:xfrm>
-          <a:prstGeom prst="rect">
-            <a:avLst/>
-          </a:prstGeom>
-          <a:noFill/>
-        </p:spPr>
-        <p:txBody>
-          <a:bodyPr wrap="square" lIns="73152" rIns="73152" tIns="36576" bIns="36576">
-            <a:spAutoFit/>
-          </a:bodyPr>
-          <a:lstStyle/>
-          <a:p>
-            <a:pPr algn="l">
-              <a:spcAft>
-                <a:spcPts val="0"/>
-              </a:spcAft>
-              <a:defRPr sz="1800" b="0">
+              <a:t>터미널 1 역할: 이 node를 실행합니다. 출력이 계속 나오는 동안 Ctrl+C로 종료하지 않습니다.</a:t>
+            </a:r>
+          </a:p>
+        </p:txBody>
+      </p:sp>
+      <p:sp>
+        <p:nvSpPr>
+          <p:cNvPr id="12" name="TextBox 11"/>
+          <p:cNvSpPr txBox="1"/>
+          <p:nvPr/>
+        </p:nvSpPr>
+        <p:spPr>
+          <a:xfrm>
+            <a:off x="768096" y="5916168"/>
+            <a:ext cx="10561320" cy="292608"/>
+          </a:xfrm>
+          <a:prstGeom prst="rect">
+            <a:avLst/>
+          </a:prstGeom>
+          <a:noFill/>
+        </p:spPr>
+        <p:txBody>
+          <a:bodyPr wrap="square" lIns="73152" rIns="73152" tIns="36576" bIns="36576">
+            <a:spAutoFit/>
+          </a:bodyPr>
+          <a:lstStyle/>
+          <a:p>
+            <a:pPr algn="ctr">
+              <a:spcAft>
+                <a:spcPts val="0"/>
+              </a:spcAft>
+              <a:defRPr sz="1500" b="1">
                 <a:solidFill>
                   <a:srgbClr val="122C4E"/>
                 </a:solidFill>
@@ -19775,7 +20588,7 @@
               </a:defRPr>
             </a:pPr>
             <a:r>
-              <a:t>출력에서 topic·frame·파일 이름 또는 성공 메시지를 찾고, 맞지 않으면 다음 파일로 가지 않습니다.</a:t>
+              <a:t>확인: 출력에서 topic·frame·파일 이름 또는 성공 메시지를 찾고, 맞지 않으면 다음 파일로 가지 않습니다.</a:t>
             </a:r>
           </a:p>
         </p:txBody>
@@ -20426,7 +21239,7 @@
               </a:defRPr>
             </a:pPr>
             <a:r>
-              <a:t>현재 단계 실행 2/2    |    현재 폴더 ~/ros2_curri/my_agv_ws    |    현재 터미널</a:t>
+              <a:t>현재 단계 실행 2/2    |    현재 폴더 ~/ros2_curri/my_agv_ws    |    터미널 1</a:t>
             </a:r>
           </a:p>
         </p:txBody>
@@ -20439,25 +21252,25 @@
         </p:nvSpPr>
         <p:spPr>
           <a:xfrm>
-            <a:off x="676656" y="1764792"/>
-            <a:ext cx="1828800" cy="347472"/>
-          </a:xfrm>
-          <a:prstGeom prst="rect">
-            <a:avLst/>
-          </a:prstGeom>
-          <a:noFill/>
-        </p:spPr>
-        <p:txBody>
-          <a:bodyPr wrap="square" lIns="73152" rIns="73152" tIns="36576" bIns="36576">
-            <a:spAutoFit/>
-          </a:bodyPr>
-          <a:lstStyle/>
-          <a:p>
-            <a:pPr algn="l">
-              <a:spcAft>
-                <a:spcPts val="0"/>
-              </a:spcAft>
-              <a:defRPr sz="1800" b="1">
+            <a:off x="676656" y="1719072"/>
+            <a:ext cx="1691640" cy="274320"/>
+          </a:xfrm>
+          <a:prstGeom prst="rect">
+            <a:avLst/>
+          </a:prstGeom>
+          <a:noFill/>
+        </p:spPr>
+        <p:txBody>
+          <a:bodyPr wrap="square" lIns="73152" rIns="73152" tIns="36576" bIns="36576">
+            <a:spAutoFit/>
+          </a:bodyPr>
+          <a:lstStyle/>
+          <a:p>
+            <a:pPr algn="l">
+              <a:spcAft>
+                <a:spcPts val="0"/>
+              </a:spcAft>
+              <a:defRPr sz="1700" b="1">
                 <a:solidFill>
                   <a:srgbClr val="225B9B"/>
                 </a:solidFill>
@@ -20465,7 +21278,7 @@
               </a:defRPr>
             </a:pPr>
             <a:r>
-              <a:t>왜 하는가</a:t>
+              <a:t>명령의 목적</a:t>
             </a:r>
           </a:p>
         </p:txBody>
@@ -20478,7 +21291,7 @@
         </p:nvSpPr>
         <p:spPr>
           <a:xfrm>
-            <a:off x="676656" y="2103120"/>
+            <a:off x="676656" y="2002536"/>
             <a:ext cx="10789920" cy="512064"/>
           </a:xfrm>
           <a:prstGeom prst="rect">
@@ -20496,7 +21309,7 @@
               <a:spcAft>
                 <a:spcPts val="0"/>
               </a:spcAft>
-              <a:defRPr sz="2000" b="0">
+              <a:defRPr sz="1800" b="0">
                 <a:solidFill>
                   <a:srgbClr val="122C4E"/>
                 </a:solidFill>
@@ -20511,14 +21324,53 @@
       </p:sp>
       <p:sp>
         <p:nvSpPr>
-          <p:cNvPr id="9" name="Rounded Rectangle 8"/>
+          <p:cNvPr id="9" name="TextBox 8"/>
+          <p:cNvSpPr txBox="1"/>
+          <p:nvPr/>
+        </p:nvSpPr>
+        <p:spPr>
+          <a:xfrm>
+            <a:off x="676656" y="2816352"/>
+            <a:ext cx="10835640" cy="256032"/>
+          </a:xfrm>
+          <a:prstGeom prst="rect">
+            <a:avLst/>
+          </a:prstGeom>
+          <a:noFill/>
+        </p:spPr>
+        <p:txBody>
+          <a:bodyPr wrap="square" lIns="73152" rIns="73152" tIns="36576" bIns="36576">
+            <a:spAutoFit/>
+          </a:bodyPr>
+          <a:lstStyle/>
+          <a:p>
+            <a:pPr algn="ctr">
+              <a:spcAft>
+                <a:spcPts val="0"/>
+              </a:spcAft>
+              <a:defRPr sz="1600" b="1">
+                <a:solidFill>
+                  <a:srgbClr val="225B9B"/>
+                </a:solidFill>
+                <a:latin typeface="Noto Sans CJK KR"/>
+              </a:defRPr>
+            </a:pPr>
+            <a:r>
+              <a:t>터미널 1 — 아래 검은 블록은 명령만 복사합니다.</a:t>
+            </a:r>
+          </a:p>
+        </p:txBody>
+      </p:sp>
+      <p:sp>
+        <p:nvSpPr>
+          <p:cNvPr id="10" name="Rounded Rectangle 9"/>
           <p:cNvSpPr/>
           <p:nvPr/>
         </p:nvSpPr>
         <p:spPr>
           <a:xfrm>
-            <a:off x="676656" y="2871216"/>
-            <a:ext cx="10835640" cy="2331720"/>
+            <a:off x="676656" y="3154680"/>
+            <a:ext cx="10835640" cy="1938528"/>
           </a:xfrm>
           <a:prstGeom prst="roundRect">
             <a:avLst/>
@@ -20547,7 +21399,7 @@
           </a:fontRef>
         </p:style>
         <p:txBody>
-          <a:bodyPr rtlCol="0" anchor="ctr" wrap="square" lIns="73152" rIns="73152" tIns="36576" bIns="36576"/>
+          <a:bodyPr rtlCol="0" anchor="ctr" wrap="square" lIns="109728" rIns="109728" tIns="73152" bIns="73152"/>
           <a:lstStyle/>
           <a:p>
             <a:pPr algn="l">
@@ -20564,7 +21416,19 @@
             <a:r>
               <a:t>ros2 topic echo /target_error</a:t>
             </a:r>
-            <a:br/>
+          </a:p>
+          <a:p>
+            <a:pPr algn="l">
+              <a:spcAft>
+                <a:spcPts val="0"/>
+              </a:spcAft>
+              <a:defRPr sz="1600" b="0">
+                <a:solidFill>
+                  <a:srgbClr val="FFFFFF"/>
+                </a:solidFill>
+                <a:latin typeface="DejaVu Sans Mono"/>
+              </a:defRPr>
+            </a:pPr>
             <a:r>
               <a:t>ros2 topic echo /cmd_vel_raw</a:t>
             </a:r>
@@ -20573,31 +21437,31 @@
       </p:sp>
       <p:sp>
         <p:nvSpPr>
-          <p:cNvPr id="10" name="TextBox 9"/>
-          <p:cNvSpPr txBox="1"/>
-          <p:nvPr/>
-        </p:nvSpPr>
-        <p:spPr>
-          <a:xfrm>
-            <a:off x="768096" y="5468112"/>
-            <a:ext cx="1143000" cy="256032"/>
-          </a:xfrm>
-          <a:prstGeom prst="rect">
-            <a:avLst/>
-          </a:prstGeom>
-          <a:noFill/>
-        </p:spPr>
-        <p:txBody>
-          <a:bodyPr wrap="square" lIns="73152" rIns="73152" tIns="36576" bIns="36576">
-            <a:spAutoFit/>
-          </a:bodyPr>
-          <a:lstStyle/>
-          <a:p>
-            <a:pPr algn="l">
-              <a:spcAft>
-                <a:spcPts val="0"/>
-              </a:spcAft>
-              <a:defRPr sz="1800" b="1">
+          <p:cNvPr id="11" name="TextBox 10"/>
+          <p:cNvSpPr txBox="1"/>
+          <p:nvPr/>
+        </p:nvSpPr>
+        <p:spPr>
+          <a:xfrm>
+            <a:off x="768096" y="5276088"/>
+            <a:ext cx="10561320" cy="384048"/>
+          </a:xfrm>
+          <a:prstGeom prst="rect">
+            <a:avLst/>
+          </a:prstGeom>
+          <a:noFill/>
+        </p:spPr>
+        <p:txBody>
+          <a:bodyPr wrap="square" lIns="73152" rIns="73152" tIns="36576" bIns="36576">
+            <a:spAutoFit/>
+          </a:bodyPr>
+          <a:lstStyle/>
+          <a:p>
+            <a:pPr algn="ctr">
+              <a:spcAft>
+                <a:spcPts val="0"/>
+              </a:spcAft>
+              <a:defRPr sz="1500" b="1">
                 <a:solidFill>
                   <a:srgbClr val="2A8B5A"/>
                 </a:solidFill>
@@ -20605,38 +21469,38 @@
               </a:defRPr>
             </a:pPr>
             <a:r>
-              <a:t>확인</a:t>
-            </a:r>
-          </a:p>
-        </p:txBody>
-      </p:sp>
-      <p:sp>
-        <p:nvSpPr>
-          <p:cNvPr id="11" name="TextBox 10"/>
-          <p:cNvSpPr txBox="1"/>
-          <p:nvPr/>
-        </p:nvSpPr>
-        <p:spPr>
-          <a:xfrm>
-            <a:off x="768096" y="5742432"/>
-            <a:ext cx="10561320" cy="347472"/>
-          </a:xfrm>
-          <a:prstGeom prst="rect">
-            <a:avLst/>
-          </a:prstGeom>
-          <a:noFill/>
-        </p:spPr>
-        <p:txBody>
-          <a:bodyPr wrap="square" lIns="73152" rIns="73152" tIns="36576" bIns="36576">
-            <a:spAutoFit/>
-          </a:bodyPr>
-          <a:lstStyle/>
-          <a:p>
-            <a:pPr algn="l">
-              <a:spcAft>
-                <a:spcPts val="0"/>
-              </a:spcAft>
-              <a:defRPr sz="1800" b="0">
+              <a:t>터미널 1 역할: 다른 터미널의 실행 결과를 이 창에서 관찰·검증합니다.</a:t>
+            </a:r>
+          </a:p>
+        </p:txBody>
+      </p:sp>
+      <p:sp>
+        <p:nvSpPr>
+          <p:cNvPr id="12" name="TextBox 11"/>
+          <p:cNvSpPr txBox="1"/>
+          <p:nvPr/>
+        </p:nvSpPr>
+        <p:spPr>
+          <a:xfrm>
+            <a:off x="768096" y="5916168"/>
+            <a:ext cx="10561320" cy="292608"/>
+          </a:xfrm>
+          <a:prstGeom prst="rect">
+            <a:avLst/>
+          </a:prstGeom>
+          <a:noFill/>
+        </p:spPr>
+        <p:txBody>
+          <a:bodyPr wrap="square" lIns="73152" rIns="73152" tIns="36576" bIns="36576">
+            <a:spAutoFit/>
+          </a:bodyPr>
+          <a:lstStyle/>
+          <a:p>
+            <a:pPr algn="ctr">
+              <a:spcAft>
+                <a:spcPts val="0"/>
+              </a:spcAft>
+              <a:defRPr sz="1500" b="1">
                 <a:solidFill>
                   <a:srgbClr val="122C4E"/>
                 </a:solidFill>
@@ -20644,7 +21508,7 @@
               </a:defRPr>
             </a:pPr>
             <a:r>
-              <a:t>출력에서 topic·frame·파일 이름 또는 성공 메시지를 찾고, 맞지 않으면 다음 파일로 가지 않습니다.</a:t>
+              <a:t>확인: 출력에서 topic·frame·파일 이름 또는 성공 메시지를 찾고, 맞지 않으면 다음 파일로 가지 않습니다.</a:t>
             </a:r>
           </a:p>
         </p:txBody>
@@ -20876,21 +21740,138 @@
               </a:defRPr>
             </a:pPr>
             <a:r>
-              <a:t>현재 단계 실행    |    현재 폴더 ~/ros2_curri/my_agv_ws    |    현재 터미널</a:t>
-            </a:r>
-          </a:p>
-        </p:txBody>
-      </p:sp>
-      <p:sp>
-        <p:nvSpPr>
-          <p:cNvPr id="7" name="Rounded Rectangle 6"/>
+              <a:t>현재 단계 실행    |    현재 폴더 ~/ros2_curri/my_agv_ws    |    터미널 1</a:t>
+            </a:r>
+          </a:p>
+        </p:txBody>
+      </p:sp>
+      <p:sp>
+        <p:nvSpPr>
+          <p:cNvPr id="7" name="TextBox 6"/>
+          <p:cNvSpPr txBox="1"/>
+          <p:nvPr/>
+        </p:nvSpPr>
+        <p:spPr>
+          <a:xfrm>
+            <a:off x="676656" y="1719072"/>
+            <a:ext cx="1691640" cy="274320"/>
+          </a:xfrm>
+          <a:prstGeom prst="rect">
+            <a:avLst/>
+          </a:prstGeom>
+          <a:noFill/>
+        </p:spPr>
+        <p:txBody>
+          <a:bodyPr wrap="square" lIns="73152" rIns="73152" tIns="36576" bIns="36576">
+            <a:spAutoFit/>
+          </a:bodyPr>
+          <a:lstStyle/>
+          <a:p>
+            <a:pPr algn="l">
+              <a:spcAft>
+                <a:spcPts val="0"/>
+              </a:spcAft>
+              <a:defRPr sz="1700" b="1">
+                <a:solidFill>
+                  <a:srgbClr val="225B9B"/>
+                </a:solidFill>
+                <a:latin typeface="Noto Sans CJK KR"/>
+              </a:defRPr>
+            </a:pPr>
+            <a:r>
+              <a:t>명령의 목적</a:t>
+            </a:r>
+          </a:p>
+        </p:txBody>
+      </p:sp>
+      <p:sp>
+        <p:nvSpPr>
+          <p:cNvPr id="8" name="TextBox 7"/>
+          <p:cNvSpPr txBox="1"/>
+          <p:nvPr/>
+        </p:nvSpPr>
+        <p:spPr>
+          <a:xfrm>
+            <a:off x="676656" y="2002536"/>
+            <a:ext cx="10789920" cy="512064"/>
+          </a:xfrm>
+          <a:prstGeom prst="rect">
+            <a:avLst/>
+          </a:prstGeom>
+          <a:noFill/>
+        </p:spPr>
+        <p:txBody>
+          <a:bodyPr wrap="square" lIns="73152" rIns="73152" tIns="36576" bIns="36576">
+            <a:spAutoFit/>
+          </a:bodyPr>
+          <a:lstStyle/>
+          <a:p>
+            <a:pPr algn="l">
+              <a:spcAft>
+                <a:spcPts val="0"/>
+              </a:spcAft>
+              <a:defRPr sz="1800" b="0">
+                <a:solidFill>
+                  <a:srgbClr val="122C4E"/>
+                </a:solidFill>
+                <a:latin typeface="Noto Sans CJK KR"/>
+              </a:defRPr>
+            </a:pPr>
+            <a:r>
+              <a:t>명령 순서를 바꾸지 않습니다. build가 끝난 뒤 source하고, 마지막 명령으로 node·Gazebo·RViz를 실행합니다.</a:t>
+            </a:r>
+          </a:p>
+        </p:txBody>
+      </p:sp>
+      <p:sp>
+        <p:nvSpPr>
+          <p:cNvPr id="9" name="TextBox 8"/>
+          <p:cNvSpPr txBox="1"/>
+          <p:nvPr/>
+        </p:nvSpPr>
+        <p:spPr>
+          <a:xfrm>
+            <a:off x="676656" y="2816352"/>
+            <a:ext cx="10835640" cy="256032"/>
+          </a:xfrm>
+          <a:prstGeom prst="rect">
+            <a:avLst/>
+          </a:prstGeom>
+          <a:noFill/>
+        </p:spPr>
+        <p:txBody>
+          <a:bodyPr wrap="square" lIns="73152" rIns="73152" tIns="36576" bIns="36576">
+            <a:spAutoFit/>
+          </a:bodyPr>
+          <a:lstStyle/>
+          <a:p>
+            <a:pPr algn="ctr">
+              <a:spcAft>
+                <a:spcPts val="0"/>
+              </a:spcAft>
+              <a:defRPr sz="1600" b="1">
+                <a:solidFill>
+                  <a:srgbClr val="225B9B"/>
+                </a:solidFill>
+                <a:latin typeface="Noto Sans CJK KR"/>
+              </a:defRPr>
+            </a:pPr>
+            <a:r>
+              <a:t>터미널 1 — 아래 검은 블록은 명령만 복사합니다.</a:t>
+            </a:r>
+          </a:p>
+        </p:txBody>
+      </p:sp>
+      <p:sp>
+        <p:nvSpPr>
+          <p:cNvPr id="10" name="Rounded Rectangle 9"/>
           <p:cNvSpPr/>
           <p:nvPr/>
         </p:nvSpPr>
         <p:spPr>
           <a:xfrm>
-            <a:off x="658368" y="1700784"/>
-            <a:ext cx="10972800" cy="3182112"/>
+            <a:off x="676656" y="3154680"/>
+            <a:ext cx="10835640" cy="1938528"/>
           </a:xfrm>
           <a:prstGeom prst="roundRect">
             <a:avLst/>
@@ -20919,7 +21900,7 @@
           </a:fontRef>
         </p:style>
         <p:txBody>
-          <a:bodyPr rtlCol="0" anchor="ctr" wrap="square" lIns="73152" rIns="73152" tIns="36576" bIns="36576"/>
+          <a:bodyPr rtlCol="0" anchor="ctr" wrap="square" lIns="109728" rIns="109728" tIns="73152" bIns="73152"/>
           <a:lstStyle/>
           <a:p>
             <a:pPr algn="l">
@@ -20936,7 +21917,19 @@
             <a:r>
               <a:t>source ~/ros2_curri/my_agv_ws/install/setup.bash</a:t>
             </a:r>
-            <a:br/>
+          </a:p>
+          <a:p>
+            <a:pPr algn="l">
+              <a:spcAft>
+                <a:spcPts val="0"/>
+              </a:spcAft>
+              <a:defRPr sz="1600" b="0">
+                <a:solidFill>
+                  <a:srgbClr val="FFFFFF"/>
+                </a:solidFill>
+                <a:latin typeface="DejaVu Sans Mono"/>
+              </a:defRPr>
+            </a:pPr>
             <a:r>
               <a:t>ros2 run agv_control pid_controller --ros-args -p kp_angular:=0.004</a:t>
             </a:r>
@@ -20945,31 +21938,31 @@
       </p:sp>
       <p:sp>
         <p:nvSpPr>
-          <p:cNvPr id="8" name="TextBox 7"/>
-          <p:cNvSpPr txBox="1"/>
-          <p:nvPr/>
-        </p:nvSpPr>
-        <p:spPr>
-          <a:xfrm>
-            <a:off x="786384" y="5239512"/>
-            <a:ext cx="1261872" cy="237744"/>
-          </a:xfrm>
-          <a:prstGeom prst="rect">
-            <a:avLst/>
-          </a:prstGeom>
-          <a:noFill/>
-        </p:spPr>
-        <p:txBody>
-          <a:bodyPr wrap="square" lIns="73152" rIns="73152" tIns="36576" bIns="36576">
-            <a:spAutoFit/>
-          </a:bodyPr>
-          <a:lstStyle/>
-          <a:p>
-            <a:pPr algn="l">
-              <a:spcAft>
-                <a:spcPts val="0"/>
-              </a:spcAft>
-              <a:defRPr sz="1800" b="1">
+          <p:cNvPr id="11" name="TextBox 10"/>
+          <p:cNvSpPr txBox="1"/>
+          <p:nvPr/>
+        </p:nvSpPr>
+        <p:spPr>
+          <a:xfrm>
+            <a:off x="768096" y="5276088"/>
+            <a:ext cx="10561320" cy="384048"/>
+          </a:xfrm>
+          <a:prstGeom prst="rect">
+            <a:avLst/>
+          </a:prstGeom>
+          <a:noFill/>
+        </p:spPr>
+        <p:txBody>
+          <a:bodyPr wrap="square" lIns="73152" rIns="73152" tIns="36576" bIns="36576">
+            <a:spAutoFit/>
+          </a:bodyPr>
+          <a:lstStyle/>
+          <a:p>
+            <a:pPr algn="ctr">
+              <a:spcAft>
+                <a:spcPts val="0"/>
+              </a:spcAft>
+              <a:defRPr sz="1500" b="1">
                 <a:solidFill>
                   <a:srgbClr val="2A8B5A"/>
                 </a:solidFill>
@@ -20977,38 +21970,38 @@
               </a:defRPr>
             </a:pPr>
             <a:r>
-              <a:t>확인 기준</a:t>
-            </a:r>
-          </a:p>
-        </p:txBody>
-      </p:sp>
-      <p:sp>
-        <p:nvSpPr>
-          <p:cNvPr id="9" name="TextBox 8"/>
-          <p:cNvSpPr txBox="1"/>
-          <p:nvPr/>
-        </p:nvSpPr>
-        <p:spPr>
-          <a:xfrm>
-            <a:off x="786384" y="5532120"/>
-            <a:ext cx="10469880" cy="420624"/>
-          </a:xfrm>
-          <a:prstGeom prst="rect">
-            <a:avLst/>
-          </a:prstGeom>
-          <a:noFill/>
-        </p:spPr>
-        <p:txBody>
-          <a:bodyPr wrap="square" lIns="73152" rIns="73152" tIns="36576" bIns="36576">
-            <a:spAutoFit/>
-          </a:bodyPr>
-          <a:lstStyle/>
-          <a:p>
-            <a:pPr algn="l">
-              <a:spcAft>
-                <a:spcPts val="0"/>
-              </a:spcAft>
-              <a:defRPr sz="1800" b="0">
+              <a:t>터미널 1 역할: 이 node를 실행합니다. 출력이 계속 나오는 동안 Ctrl+C로 종료하지 않습니다.</a:t>
+            </a:r>
+          </a:p>
+        </p:txBody>
+      </p:sp>
+      <p:sp>
+        <p:nvSpPr>
+          <p:cNvPr id="12" name="TextBox 11"/>
+          <p:cNvSpPr txBox="1"/>
+          <p:nvPr/>
+        </p:nvSpPr>
+        <p:spPr>
+          <a:xfrm>
+            <a:off x="768096" y="5916168"/>
+            <a:ext cx="10561320" cy="292608"/>
+          </a:xfrm>
+          <a:prstGeom prst="rect">
+            <a:avLst/>
+          </a:prstGeom>
+          <a:noFill/>
+        </p:spPr>
+        <p:txBody>
+          <a:bodyPr wrap="square" lIns="73152" rIns="73152" tIns="36576" bIns="36576">
+            <a:spAutoFit/>
+          </a:bodyPr>
+          <a:lstStyle/>
+          <a:p>
+            <a:pPr algn="ctr">
+              <a:spcAft>
+                <a:spcPts val="0"/>
+              </a:spcAft>
+              <a:defRPr sz="1500" b="1">
                 <a:solidFill>
                   <a:srgbClr val="122C4E"/>
                 </a:solidFill>
@@ -21016,7 +22009,7 @@
               </a:defRPr>
             </a:pPr>
             <a:r>
-              <a:t>kp_angular·max speed parameter와 saturation이 /cmd_vel_raw 출력을 제한하는 것을 확인한다.</a:t>
+              <a:t>확인: kp_angular·max speed parameter와 saturation이 /cmd_vel_raw 출력을 제한하는 것을 확인한다.</a:t>
             </a:r>
           </a:p>
         </p:txBody>
@@ -21112,7 +22105,7 @@
               </a:defRPr>
             </a:pPr>
             <a:r>
-              <a:t>실제 ROS 2 환경의 파일·패키지·구성 검증 로그</a:t>
+              <a:t>실제 RViz2: /path와 robot pose를 함께 보며 PID 전후 궤적을 비교하는 구성</a:t>
             </a:r>
           </a:p>
         </p:txBody>
@@ -21197,7 +22190,7 @@
       </p:sp>
       <p:pic>
         <p:nvPicPr>
-          <p:cNvPr id="6" name="Picture 5" descr="validation_terminal.png"/>
+          <p:cNvPr id="6" name="Picture 5" descr="02_rviz_marker_path_actual.png"/>
           <p:cNvPicPr>
             <a:picLocks noChangeAspect="1"/>
           </p:cNvPicPr>
@@ -21211,8 +22204,8 @@
         </p:blipFill>
         <p:spPr>
           <a:xfrm>
-            <a:off x="790956" y="1453970"/>
-            <a:ext cx="10607040" cy="4599282"/>
+            <a:off x="2971409" y="1353312"/>
+            <a:ext cx="6246133" cy="4800600"/>
           </a:xfrm>
           <a:prstGeom prst="rect">
             <a:avLst/>
@@ -21253,7 +22246,7 @@
               </a:defRPr>
             </a:pPr>
             <a:r>
-              <a:t>화면에서 확인: ① 명령/설정  ② 정상 출력 또는 화면  ③ 다음 검증 명령으로 재확인</a:t>
+              <a:t>화면에서 확인: 명령·설정과 화면의 topic·frame·결과 이름을 대조합니다.</a:t>
             </a:r>
           </a:p>
         </p:txBody>
@@ -21310,7 +22303,7 @@
               </a:defRPr>
             </a:pPr>
             <a:r>
-              <a:t>객관적 검증 명령으로 완료를 확인한다</a:t>
+              <a:t>정상 결과: 실제 환경에서 확인한 출력</a:t>
             </a:r>
           </a:p>
         </p:txBody>
@@ -21349,7 +22342,7 @@
               </a:defRPr>
             </a:pPr>
             <a:r>
-              <a:t>화면만 보지 말고 topic·frame·파일·parameter를 다시 확인합니다.</a:t>
+              <a:t>실제 ROS 2 환경의 파일·패키지·구성 검증 로그</a:t>
             </a:r>
           </a:p>
         </p:txBody>
@@ -21432,176 +22425,57 @@
           </a:p>
         </p:txBody>
       </p:sp>
-      <p:sp>
-        <p:nvSpPr>
-          <p:cNvPr id="6" name="Rectangle 5"/>
-          <p:cNvSpPr/>
-          <p:nvPr/>
-        </p:nvSpPr>
-        <p:spPr>
-          <a:xfrm>
-            <a:off x="566928" y="1188720"/>
-            <a:ext cx="11064240" cy="347472"/>
-          </a:xfrm>
-          <a:prstGeom prst="rect">
-            <a:avLst/>
-          </a:prstGeom>
-          <a:solidFill>
-            <a:srgbClr val="F4F7FB"/>
-          </a:solidFill>
-          <a:ln>
-            <a:solidFill>
-              <a:srgbClr val="F4F7FB"/>
-            </a:solidFill>
-          </a:ln>
-        </p:spPr>
-        <p:style>
-          <a:lnRef idx="1">
-            <a:schemeClr val="accent1"/>
-          </a:lnRef>
-          <a:fillRef idx="3">
-            <a:schemeClr val="accent1"/>
-          </a:fillRef>
-          <a:effectRef idx="2">
-            <a:schemeClr val="accent1"/>
-          </a:effectRef>
-          <a:fontRef idx="minor">
-            <a:schemeClr val="lt1"/>
-          </a:fontRef>
-        </p:style>
-        <p:txBody>
-          <a:bodyPr rtlCol="0" anchor="ctr" wrap="square" lIns="73152" rIns="73152" tIns="36576" bIns="36576"/>
-          <a:lstStyle/>
-          <a:p>
-            <a:pPr algn="l">
-              <a:spcAft>
-                <a:spcPts val="0"/>
-              </a:spcAft>
-              <a:defRPr sz="1300" b="1">
-                <a:solidFill>
-                  <a:srgbClr val="122C4E"/>
-                </a:solidFill>
-                <a:latin typeface="Noto Sans CJK KR"/>
-              </a:defRPr>
-            </a:pPr>
-            <a:r>
-              <a:t>현재 단계 검증    |    현재 폴더 ~/ros2_curri/my_agv_ws    |    현재 터미널</a:t>
-            </a:r>
-          </a:p>
-        </p:txBody>
-      </p:sp>
-      <p:sp>
-        <p:nvSpPr>
-          <p:cNvPr id="7" name="Rounded Rectangle 6"/>
-          <p:cNvSpPr/>
-          <p:nvPr/>
-        </p:nvSpPr>
-        <p:spPr>
-          <a:xfrm>
-            <a:off x="658368" y="1755648"/>
-            <a:ext cx="10972800" cy="2148840"/>
-          </a:xfrm>
-          <a:prstGeom prst="roundRect">
-            <a:avLst/>
-          </a:prstGeom>
-          <a:solidFill>
-            <a:srgbClr val="1D232D"/>
-          </a:solidFill>
-          <a:ln>
-            <a:solidFill>
-              <a:srgbClr val="1D232D"/>
-            </a:solidFill>
-          </a:ln>
-        </p:spPr>
-        <p:style>
-          <a:lnRef idx="1">
-            <a:schemeClr val="accent1"/>
-          </a:lnRef>
-          <a:fillRef idx="3">
-            <a:schemeClr val="accent1"/>
-          </a:fillRef>
-          <a:effectRef idx="2">
-            <a:schemeClr val="accent1"/>
-          </a:effectRef>
-          <a:fontRef idx="minor">
-            <a:schemeClr val="lt1"/>
-          </a:fontRef>
-        </p:style>
-        <p:txBody>
-          <a:bodyPr rtlCol="0" anchor="ctr" wrap="square" lIns="73152" rIns="73152" tIns="36576" bIns="36576"/>
-          <a:lstStyle/>
-          <a:p>
-            <a:pPr algn="l">
-              <a:spcAft>
-                <a:spcPts val="0"/>
-              </a:spcAft>
-              <a:defRPr sz="1600" b="0">
-                <a:solidFill>
-                  <a:srgbClr val="FFFFFF"/>
-                </a:solidFill>
-                <a:latin typeface="DejaVu Sans Mono"/>
-              </a:defRPr>
-            </a:pPr>
-            <a:r>
-              <a:t>ros2 topic info /target_error</a:t>
-            </a:r>
-            <a:br/>
-            <a:r>
-              <a:t>ros2 topic info /cmd_vel_raw</a:t>
-            </a:r>
-            <a:br/>
-            <a:r>
-              <a:t>ros2 param get /pid_controller kp_angular</a:t>
-            </a:r>
-          </a:p>
-        </p:txBody>
-      </p:sp>
-      <p:sp>
-        <p:nvSpPr>
-          <p:cNvPr id="8" name="Rounded Rectangle 7"/>
-          <p:cNvSpPr/>
-          <p:nvPr/>
-        </p:nvSpPr>
-        <p:spPr>
-          <a:xfrm>
-            <a:off x="658368" y="4206240"/>
-            <a:ext cx="10972800" cy="1554480"/>
-          </a:xfrm>
-          <a:prstGeom prst="roundRect">
-            <a:avLst/>
-          </a:prstGeom>
-          <a:solidFill>
-            <a:srgbClr val="F4F7FB"/>
-          </a:solidFill>
-          <a:ln>
-            <a:solidFill>
-              <a:srgbClr val="D1DFD5"/>
-            </a:solidFill>
-          </a:ln>
-        </p:spPr>
-        <p:style>
-          <a:lnRef idx="1">
-            <a:schemeClr val="accent1"/>
-          </a:lnRef>
-          <a:fillRef idx="3">
-            <a:schemeClr val="accent1"/>
-          </a:fillRef>
-          <a:effectRef idx="2">
-            <a:schemeClr val="accent1"/>
-          </a:effectRef>
-          <a:fontRef idx="minor">
-            <a:schemeClr val="lt1"/>
-          </a:fontRef>
-        </p:style>
-        <p:txBody>
-          <a:bodyPr rtlCol="0" anchor="ctr" wrap="square" lIns="73152" rIns="73152" tIns="36576" bIns="36576"/>
-          <a:lstStyle/>
-          <a:p>
-            <a:pPr algn="l">
-              <a:spcAft>
-                <a:spcPts val="0"/>
-              </a:spcAft>
-              <a:defRPr sz="1800" b="1">
+      <p:pic>
+        <p:nvPicPr>
+          <p:cNvPr id="6" name="Picture 5" descr="validation_terminal.png"/>
+          <p:cNvPicPr>
+            <a:picLocks noChangeAspect="1"/>
+          </p:cNvPicPr>
+          <p:nvPr/>
+        </p:nvPicPr>
+        <p:blipFill>
+          <a:blip r:embed="rId2"/>
+          <a:stretch>
+            <a:fillRect/>
+          </a:stretch>
+        </p:blipFill>
+        <p:spPr>
+          <a:xfrm>
+            <a:off x="790956" y="1453970"/>
+            <a:ext cx="10607040" cy="4599282"/>
+          </a:xfrm>
+          <a:prstGeom prst="rect">
+            <a:avLst/>
+          </a:prstGeom>
+        </p:spPr>
+      </p:pic>
+      <p:sp>
+        <p:nvSpPr>
+          <p:cNvPr id="7" name="TextBox 6"/>
+          <p:cNvSpPr txBox="1"/>
+          <p:nvPr/>
+        </p:nvSpPr>
+        <p:spPr>
+          <a:xfrm>
+            <a:off x="777240" y="6144768"/>
+            <a:ext cx="10607040" cy="310896"/>
+          </a:xfrm>
+          <a:prstGeom prst="rect">
+            <a:avLst/>
+          </a:prstGeom>
+          <a:noFill/>
+        </p:spPr>
+        <p:txBody>
+          <a:bodyPr wrap="square" lIns="73152" rIns="73152" tIns="36576" bIns="36576">
+            <a:spAutoFit/>
+          </a:bodyPr>
+          <a:lstStyle/>
+          <a:p>
+            <a:pPr algn="ctr">
+              <a:spcAft>
+                <a:spcPts val="0"/>
+              </a:spcAft>
+              <a:defRPr sz="1100" b="1">
                 <a:solidFill>
                   <a:srgbClr val="2A8B5A"/>
                 </a:solidFill>
@@ -21609,58 +22483,7 @@
               </a:defRPr>
             </a:pPr>
             <a:r>
-              <a:t>완료 체크</a:t>
-            </a:r>
-            <a:br/>
-            <a:r>
-              <a:t>□ 명령이 오류 없이 실행된다.</a:t>
-            </a:r>
-            <a:br/>
-            <a:r>
-              <a:t>□ 기대한 파일·topic·frame·parameter 이름이 보인다.</a:t>
-            </a:r>
-            <a:br/>
-            <a:r>
-              <a:t>□ 값의 단위와 방향을 한 문장으로 설명할 수 있다.</a:t>
-            </a:r>
-          </a:p>
-        </p:txBody>
-      </p:sp>
-      <p:sp>
-        <p:nvSpPr>
-          <p:cNvPr id="9" name="TextBox 8"/>
-          <p:cNvSpPr txBox="1"/>
-          <p:nvPr/>
-        </p:nvSpPr>
-        <p:spPr>
-          <a:xfrm>
-            <a:off x="731520" y="5989320"/>
-            <a:ext cx="10789920" cy="237744"/>
-          </a:xfrm>
-          <a:prstGeom prst="rect">
-            <a:avLst/>
-          </a:prstGeom>
-          <a:noFill/>
-        </p:spPr>
-        <p:txBody>
-          <a:bodyPr wrap="square" lIns="73152" rIns="73152" tIns="36576" bIns="36576">
-            <a:spAutoFit/>
-          </a:bodyPr>
-          <a:lstStyle/>
-          <a:p>
-            <a:pPr algn="l">
-              <a:spcAft>
-                <a:spcPts val="0"/>
-              </a:spcAft>
-              <a:defRPr sz="1500" b="1">
-                <a:solidFill>
-                  <a:srgbClr val="122C4E"/>
-                </a:solidFill>
-                <a:latin typeface="Noto Sans CJK KR"/>
-              </a:defRPr>
-            </a:pPr>
-            <a:r>
-              <a:t>완료 조건: kp_angular·max speed parameter와 saturation이 /cmd_vel_raw 출력을 제한하는 것을 확인한다.</a:t>
+              <a:t>화면에서 확인: ① 명령/설정  ② 정상 출력 또는 화면  ③ 다음 검증 명령으로 재확인</a:t>
             </a:r>
           </a:p>
         </p:txBody>
@@ -21717,7 +22540,7 @@
               </a:defRPr>
             </a:pPr>
             <a:r>
-              <a:t>막히면: 증상 → 우선 확인 → 재검증</a:t>
+              <a:t>객관적 검증 명령으로 완료를 확인한다</a:t>
             </a:r>
           </a:p>
         </p:txBody>
@@ -21756,7 +22579,7 @@
               </a:defRPr>
             </a:pPr>
             <a:r>
-              <a:t>오류 메시지를 숨기지 않고 같은 순서로 점검합니다.</a:t>
+              <a:t>화면만 보지 말고 topic·frame·파일·parameter를 다시 확인합니다.</a:t>
             </a:r>
           </a:p>
         </p:txBody>
@@ -21892,7 +22715,7 @@
               </a:defRPr>
             </a:pPr>
             <a:r>
-              <a:t>현재 단계 오류 대응    |    현재 폴더 ~/ros2_curri/my_agv_ws    |    현재 터미널</a:t>
+              <a:t>현재 단계 검증    |    현재 폴더 ~/ros2_curri/my_agv_ws    |    현재 터미널</a:t>
             </a:r>
           </a:p>
         </p:txBody>
@@ -21905,18 +22728,18 @@
         </p:nvSpPr>
         <p:spPr>
           <a:xfrm>
-            <a:off x="694944" y="1755648"/>
-            <a:ext cx="10972800" cy="1115568"/>
+            <a:off x="658368" y="1755648"/>
+            <a:ext cx="10972800" cy="2148840"/>
           </a:xfrm>
           <a:prstGeom prst="roundRect">
             <a:avLst/>
           </a:prstGeom>
           <a:solidFill>
-            <a:srgbClr val="FFF7F4"/>
+            <a:srgbClr val="1D232D"/>
           </a:solidFill>
           <a:ln>
             <a:solidFill>
-              <a:srgbClr val="EDBEB4"/>
+              <a:srgbClr val="1D232D"/>
             </a:solidFill>
           </a:ln>
         </p:spPr>
@@ -21935,72 +22758,7 @@
           </a:fontRef>
         </p:style>
         <p:txBody>
-          <a:bodyPr rtlCol="0" anchor="ctr"/>
-          <a:lstStyle/>
-          <a:p>
-            <a:pPr algn="ctr"/>
-          </a:p>
-        </p:txBody>
-      </p:sp>
-      <p:sp>
-        <p:nvSpPr>
-          <p:cNvPr id="8" name="TextBox 7"/>
-          <p:cNvSpPr txBox="1"/>
-          <p:nvPr/>
-        </p:nvSpPr>
-        <p:spPr>
-          <a:xfrm>
-            <a:off x="896112" y="1901952"/>
-            <a:ext cx="2926080" cy="274320"/>
-          </a:xfrm>
-          <a:prstGeom prst="rect">
-            <a:avLst/>
-          </a:prstGeom>
-          <a:noFill/>
-        </p:spPr>
-        <p:txBody>
-          <a:bodyPr wrap="square" lIns="73152" rIns="73152" tIns="36576" bIns="36576">
-            <a:spAutoFit/>
-          </a:bodyPr>
-          <a:lstStyle/>
-          <a:p>
-            <a:pPr algn="l">
-              <a:spcAft>
-                <a:spcPts val="0"/>
-              </a:spcAft>
-              <a:defRPr sz="1800" b="1">
-                <a:solidFill>
-                  <a:srgbClr val="BE3B3B"/>
-                </a:solidFill>
-                <a:latin typeface="Noto Sans CJK KR"/>
-              </a:defRPr>
-            </a:pPr>
-            <a:r>
-              <a:t>증상 1: 로봇이 반대 방향 회전</a:t>
-            </a:r>
-          </a:p>
-        </p:txBody>
-      </p:sp>
-      <p:sp>
-        <p:nvSpPr>
-          <p:cNvPr id="9" name="TextBox 8"/>
-          <p:cNvSpPr txBox="1"/>
-          <p:nvPr/>
-        </p:nvSpPr>
-        <p:spPr>
-          <a:xfrm>
-            <a:off x="3794760" y="1883664"/>
-            <a:ext cx="7543800" cy="621792"/>
-          </a:xfrm>
-          <a:prstGeom prst="rect">
-            <a:avLst/>
-          </a:prstGeom>
-          <a:noFill/>
-        </p:spPr>
-        <p:txBody>
-          <a:bodyPr wrap="square" lIns="73152" rIns="73152" tIns="36576" bIns="36576">
-            <a:spAutoFit/>
-          </a:bodyPr>
+          <a:bodyPr rtlCol="0" anchor="ctr" wrap="square" lIns="109728" rIns="109728" tIns="73152" bIns="73152"/>
           <a:lstStyle/>
           <a:p>
             <a:pPr algn="l">
@@ -22009,41 +22767,69 @@
               </a:spcAft>
               <a:defRPr sz="1600" b="0">
                 <a:solidFill>
-                  <a:srgbClr val="122C4E"/>
-                </a:solidFill>
-                <a:latin typeface="Noto Sans CJK KR"/>
-              </a:defRPr>
-            </a:pPr>
-            <a:r>
-              <a:t>우선 확인: error 정의와 angular.z 부호를 확인한다.</a:t>
-            </a:r>
-            <a:br/>
-            <a:r>
-              <a:t>수정 후: ros2 topic info /target_error</a:t>
-            </a:r>
-          </a:p>
-        </p:txBody>
-      </p:sp>
-      <p:sp>
-        <p:nvSpPr>
-          <p:cNvPr id="10" name="Rounded Rectangle 9"/>
+                  <a:srgbClr val="FFFFFF"/>
+                </a:solidFill>
+                <a:latin typeface="DejaVu Sans Mono"/>
+              </a:defRPr>
+            </a:pPr>
+            <a:r>
+              <a:t>ros2 topic info /target_error</a:t>
+            </a:r>
+          </a:p>
+          <a:p>
+            <a:pPr algn="l">
+              <a:spcAft>
+                <a:spcPts val="0"/>
+              </a:spcAft>
+              <a:defRPr sz="1600" b="0">
+                <a:solidFill>
+                  <a:srgbClr val="FFFFFF"/>
+                </a:solidFill>
+                <a:latin typeface="DejaVu Sans Mono"/>
+              </a:defRPr>
+            </a:pPr>
+            <a:r>
+              <a:t>ros2 topic info /cmd_vel_raw</a:t>
+            </a:r>
+          </a:p>
+          <a:p>
+            <a:pPr algn="l">
+              <a:spcAft>
+                <a:spcPts val="0"/>
+              </a:spcAft>
+              <a:defRPr sz="1600" b="0">
+                <a:solidFill>
+                  <a:srgbClr val="FFFFFF"/>
+                </a:solidFill>
+                <a:latin typeface="DejaVu Sans Mono"/>
+              </a:defRPr>
+            </a:pPr>
+            <a:r>
+              <a:t>ros2 param get /pid_controller kp_angular</a:t>
+            </a:r>
+          </a:p>
+        </p:txBody>
+      </p:sp>
+      <p:sp>
+        <p:nvSpPr>
+          <p:cNvPr id="8" name="Rounded Rectangle 7"/>
           <p:cNvSpPr/>
           <p:nvPr/>
         </p:nvSpPr>
         <p:spPr>
           <a:xfrm>
-            <a:off x="694944" y="3172968"/>
-            <a:ext cx="10972800" cy="1115568"/>
+            <a:off x="658368" y="4206240"/>
+            <a:ext cx="10972800" cy="1554480"/>
           </a:xfrm>
           <a:prstGeom prst="roundRect">
             <a:avLst/>
           </a:prstGeom>
           <a:solidFill>
-            <a:srgbClr val="FFF7F4"/>
+            <a:srgbClr val="F4F7FB"/>
           </a:solidFill>
           <a:ln>
             <a:solidFill>
-              <a:srgbClr val="EDBEB4"/>
+              <a:srgbClr val="D1DFD5"/>
             </a:solidFill>
           </a:ln>
         </p:spPr>
@@ -22062,33 +22848,7 @@
           </a:fontRef>
         </p:style>
         <p:txBody>
-          <a:bodyPr rtlCol="0" anchor="ctr"/>
-          <a:lstStyle/>
-          <a:p>
-            <a:pPr algn="ctr"/>
-          </a:p>
-        </p:txBody>
-      </p:sp>
-      <p:sp>
-        <p:nvSpPr>
-          <p:cNvPr id="11" name="TextBox 10"/>
-          <p:cNvSpPr txBox="1"/>
-          <p:nvPr/>
-        </p:nvSpPr>
-        <p:spPr>
-          <a:xfrm>
-            <a:off x="896112" y="3319272"/>
-            <a:ext cx="2926080" cy="274320"/>
-          </a:xfrm>
-          <a:prstGeom prst="rect">
-            <a:avLst/>
-          </a:prstGeom>
-          <a:noFill/>
-        </p:spPr>
-        <p:txBody>
-          <a:bodyPr wrap="square" lIns="73152" rIns="73152" tIns="36576" bIns="36576">
-            <a:spAutoFit/>
-          </a:bodyPr>
+          <a:bodyPr rtlCol="0" anchor="ctr" wrap="square" lIns="73152" rIns="73152" tIns="36576" bIns="36576"/>
           <a:lstStyle/>
           <a:p>
             <a:pPr algn="l">
@@ -22097,44 +22857,56 @@
               </a:spcAft>
               <a:defRPr sz="1800" b="1">
                 <a:solidFill>
-                  <a:srgbClr val="BE3B3B"/>
-                </a:solidFill>
-                <a:latin typeface="Noto Sans CJK KR"/>
-              </a:defRPr>
-            </a:pPr>
-            <a:r>
-              <a:t>증상 2: 진동이 심함</a:t>
-            </a:r>
-          </a:p>
-        </p:txBody>
-      </p:sp>
-      <p:sp>
-        <p:nvSpPr>
-          <p:cNvPr id="12" name="TextBox 11"/>
-          <p:cNvSpPr txBox="1"/>
-          <p:nvPr/>
-        </p:nvSpPr>
-        <p:spPr>
-          <a:xfrm>
-            <a:off x="3794760" y="3300984"/>
-            <a:ext cx="7543800" cy="621792"/>
-          </a:xfrm>
-          <a:prstGeom prst="rect">
-            <a:avLst/>
-          </a:prstGeom>
-          <a:noFill/>
-        </p:spPr>
-        <p:txBody>
-          <a:bodyPr wrap="square" lIns="73152" rIns="73152" tIns="36576" bIns="36576">
-            <a:spAutoFit/>
-          </a:bodyPr>
-          <a:lstStyle/>
-          <a:p>
-            <a:pPr algn="l">
-              <a:spcAft>
-                <a:spcPts val="0"/>
-              </a:spcAft>
-              <a:defRPr sz="1600" b="0">
+                  <a:srgbClr val="2A8B5A"/>
+                </a:solidFill>
+                <a:latin typeface="Noto Sans CJK KR"/>
+              </a:defRPr>
+            </a:pPr>
+            <a:r>
+              <a:t>완료 체크</a:t>
+            </a:r>
+            <a:br/>
+            <a:r>
+              <a:t>□ 명령이 오류 없이 실행된다.</a:t>
+            </a:r>
+            <a:br/>
+            <a:r>
+              <a:t>□ 기대한 파일·topic·frame·parameter 이름이 보인다.</a:t>
+            </a:r>
+            <a:br/>
+            <a:r>
+              <a:t>□ 값의 단위와 방향을 한 문장으로 설명할 수 있다.</a:t>
+            </a:r>
+          </a:p>
+        </p:txBody>
+      </p:sp>
+      <p:sp>
+        <p:nvSpPr>
+          <p:cNvPr id="9" name="TextBox 8"/>
+          <p:cNvSpPr txBox="1"/>
+          <p:nvPr/>
+        </p:nvSpPr>
+        <p:spPr>
+          <a:xfrm>
+            <a:off x="731520" y="5989320"/>
+            <a:ext cx="10789920" cy="237744"/>
+          </a:xfrm>
+          <a:prstGeom prst="rect">
+            <a:avLst/>
+          </a:prstGeom>
+          <a:noFill/>
+        </p:spPr>
+        <p:txBody>
+          <a:bodyPr wrap="square" lIns="73152" rIns="73152" tIns="36576" bIns="36576">
+            <a:spAutoFit/>
+          </a:bodyPr>
+          <a:lstStyle/>
+          <a:p>
+            <a:pPr algn="l">
+              <a:spcAft>
+                <a:spcPts val="0"/>
+              </a:spcAft>
+              <a:defRPr sz="1500" b="1">
                 <a:solidFill>
                   <a:srgbClr val="122C4E"/>
                 </a:solidFill>
@@ -22142,50 +22914,7 @@
               </a:defRPr>
             </a:pPr>
             <a:r>
-              <a:t>우선 확인: kp/kd·update rate·latency·saturation을 확인한다.</a:t>
-            </a:r>
-            <a:br/>
-            <a:r>
-              <a:t>수정 후: ros2 topic info /target_error</a:t>
-            </a:r>
-          </a:p>
-        </p:txBody>
-      </p:sp>
-      <p:sp>
-        <p:nvSpPr>
-          <p:cNvPr id="13" name="TextBox 12"/>
-          <p:cNvSpPr txBox="1"/>
-          <p:nvPr/>
-        </p:nvSpPr>
-        <p:spPr>
-          <a:xfrm>
-            <a:off x="822960" y="5102352"/>
-            <a:ext cx="10607040" cy="402336"/>
-          </a:xfrm>
-          <a:prstGeom prst="rect">
-            <a:avLst/>
-          </a:prstGeom>
-          <a:noFill/>
-        </p:spPr>
-        <p:txBody>
-          <a:bodyPr wrap="square" lIns="73152" rIns="73152" tIns="36576" bIns="36576">
-            <a:spAutoFit/>
-          </a:bodyPr>
-          <a:lstStyle/>
-          <a:p>
-            <a:pPr algn="ctr">
-              <a:spcAft>
-                <a:spcPts val="0"/>
-              </a:spcAft>
-              <a:defRPr sz="1800" b="1">
-                <a:solidFill>
-                  <a:srgbClr val="DB7E22"/>
-                </a:solidFill>
-                <a:latin typeface="Noto Sans CJK KR"/>
-              </a:defRPr>
-            </a:pPr>
-            <a:r>
-              <a:t>공통 순서: ① 현재 폴더 ② source ③ 파일 경로 ④ 이름/타입/단위 ⑤ build·source 후 재실행</a:t>
+              <a:t>완료 조건: kp_angular·max speed parameter와 saturation이 /cmd_vel_raw 출력을 제한하는 것을 확인한다.</a:t>
             </a:r>
           </a:p>
         </p:txBody>
@@ -22242,7 +22971,7 @@
               </a:defRPr>
             </a:pPr>
             <a:r>
-              <a:t>막혔을 때만: Complete를 복구용으로 사용한다</a:t>
+              <a:t>막히면: 증상 → 우선 확인 → 재검증</a:t>
             </a:r>
           </a:p>
         </p:txBody>
@@ -22281,7 +23010,7 @@
               </a:defRPr>
             </a:pPr>
             <a:r>
-              <a:t>이 슬라이드가 먼저가 아닙니다. 직접 입력·실행을 시도한 뒤에만 내 파일과 Complete를 비교합니다.</a:t>
+              <a:t>오류 메시지를 숨기지 않고 같은 순서로 점검합니다.</a:t>
             </a:r>
           </a:p>
         </p:txBody>
@@ -22417,70 +23146,31 @@
               </a:defRPr>
             </a:pPr>
             <a:r>
-              <a:t>현재 단계 복구용 Complete    |    현재 폴더 ~/ros2_curri    |    현재 터미널</a:t>
-            </a:r>
-          </a:p>
-        </p:txBody>
-      </p:sp>
-      <p:sp>
-        <p:nvSpPr>
-          <p:cNvPr id="7" name="TextBox 6"/>
-          <p:cNvSpPr txBox="1"/>
-          <p:nvPr/>
-        </p:nvSpPr>
-        <p:spPr>
-          <a:xfrm>
-            <a:off x="713232" y="1664208"/>
-            <a:ext cx="10698480" cy="402336"/>
-          </a:xfrm>
-          <a:prstGeom prst="rect">
-            <a:avLst/>
-          </a:prstGeom>
-          <a:noFill/>
-        </p:spPr>
-        <p:txBody>
-          <a:bodyPr wrap="square" lIns="73152" rIns="73152" tIns="36576" bIns="36576">
-            <a:spAutoFit/>
-          </a:bodyPr>
-          <a:lstStyle/>
-          <a:p>
-            <a:pPr algn="ctr">
-              <a:spcAft>
-                <a:spcPts val="0"/>
-              </a:spcAft>
-              <a:defRPr sz="1800" b="1">
-                <a:solidFill>
-                  <a:srgbClr val="DB7E22"/>
-                </a:solidFill>
-                <a:latin typeface="Noto Sans CJK KR"/>
-              </a:defRPr>
-            </a:pPr>
-            <a:r>
-              <a:t>권장 순서: ① 내 오류를 확인  ② Complete와 diff  ③ 꼭 필요할 때만 backup 후 복사</a:t>
-            </a:r>
-          </a:p>
-        </p:txBody>
-      </p:sp>
-      <p:sp>
-        <p:nvSpPr>
-          <p:cNvPr id="8" name="Rounded Rectangle 7"/>
+              <a:t>현재 단계 오류 대응    |    현재 폴더 ~/ros2_curri/my_agv_ws    |    현재 터미널</a:t>
+            </a:r>
+          </a:p>
+        </p:txBody>
+      </p:sp>
+      <p:sp>
+        <p:nvSpPr>
+          <p:cNvPr id="7" name="Rounded Rectangle 6"/>
           <p:cNvSpPr/>
           <p:nvPr/>
         </p:nvSpPr>
         <p:spPr>
           <a:xfrm>
-            <a:off x="676656" y="2423160"/>
-            <a:ext cx="10881360" cy="2606040"/>
+            <a:off x="694944" y="1755648"/>
+            <a:ext cx="10972800" cy="1115568"/>
           </a:xfrm>
           <a:prstGeom prst="roundRect">
             <a:avLst/>
           </a:prstGeom>
           <a:solidFill>
-            <a:srgbClr val="1D232D"/>
+            <a:srgbClr val="FFF7F4"/>
           </a:solidFill>
           <a:ln>
             <a:solidFill>
-              <a:srgbClr val="1D232D"/>
+              <a:srgbClr val="EDBEB4"/>
             </a:solidFill>
           </a:ln>
         </p:spPr>
@@ -22499,52 +23189,232 @@
           </a:fontRef>
         </p:style>
         <p:txBody>
-          <a:bodyPr rtlCol="0" anchor="ctr" wrap="square" lIns="73152" rIns="73152" tIns="36576" bIns="36576"/>
-          <a:lstStyle/>
-          <a:p>
-            <a:pPr algn="l">
-              <a:spcAft>
-                <a:spcPts val="0"/>
-              </a:spcAft>
-              <a:defRPr sz="1400" b="0">
-                <a:solidFill>
-                  <a:srgbClr val="FFFFFF"/>
-                </a:solidFill>
-                <a:latin typeface="DejaVu Sans Mono"/>
-              </a:defRPr>
-            </a:pPr>
-            <a:r>
-              <a:t>cd ~/ros2_curri</a:t>
+          <a:bodyPr rtlCol="0" anchor="ctr"/>
+          <a:lstStyle/>
+          <a:p>
+            <a:pPr algn="ctr"/>
+          </a:p>
+        </p:txBody>
+      </p:sp>
+      <p:sp>
+        <p:nvSpPr>
+          <p:cNvPr id="8" name="TextBox 7"/>
+          <p:cNvSpPr txBox="1"/>
+          <p:nvPr/>
+        </p:nvSpPr>
+        <p:spPr>
+          <a:xfrm>
+            <a:off x="896112" y="1901952"/>
+            <a:ext cx="2926080" cy="274320"/>
+          </a:xfrm>
+          <a:prstGeom prst="rect">
+            <a:avLst/>
+          </a:prstGeom>
+          <a:noFill/>
+        </p:spPr>
+        <p:txBody>
+          <a:bodyPr wrap="square" lIns="73152" rIns="73152" tIns="36576" bIns="36576">
+            <a:spAutoFit/>
+          </a:bodyPr>
+          <a:lstStyle/>
+          <a:p>
+            <a:pPr algn="l">
+              <a:spcAft>
+                <a:spcPts val="0"/>
+              </a:spcAft>
+              <a:defRPr sz="1800" b="1">
+                <a:solidFill>
+                  <a:srgbClr val="BE3B3B"/>
+                </a:solidFill>
+                <a:latin typeface="Noto Sans CJK KR"/>
+              </a:defRPr>
+            </a:pPr>
+            <a:r>
+              <a:t>증상 1: 로봇이 반대 방향 회전</a:t>
+            </a:r>
+          </a:p>
+        </p:txBody>
+      </p:sp>
+      <p:sp>
+        <p:nvSpPr>
+          <p:cNvPr id="9" name="TextBox 8"/>
+          <p:cNvSpPr txBox="1"/>
+          <p:nvPr/>
+        </p:nvSpPr>
+        <p:spPr>
+          <a:xfrm>
+            <a:off x="3794760" y="1883664"/>
+            <a:ext cx="7543800" cy="621792"/>
+          </a:xfrm>
+          <a:prstGeom prst="rect">
+            <a:avLst/>
+          </a:prstGeom>
+          <a:noFill/>
+        </p:spPr>
+        <p:txBody>
+          <a:bodyPr wrap="square" lIns="73152" rIns="73152" tIns="36576" bIns="36576">
+            <a:spAutoFit/>
+          </a:bodyPr>
+          <a:lstStyle/>
+          <a:p>
+            <a:pPr algn="l">
+              <a:spcAft>
+                <a:spcPts val="0"/>
+              </a:spcAft>
+              <a:defRPr sz="1600" b="0">
+                <a:solidFill>
+                  <a:srgbClr val="122C4E"/>
+                </a:solidFill>
+                <a:latin typeface="Noto Sans CJK KR"/>
+              </a:defRPr>
+            </a:pPr>
+            <a:r>
+              <a:t>우선 확인: error 정의와 angular.z 부호를 확인한다.</a:t>
             </a:r>
             <a:br/>
             <a:r>
-              <a:t>diff -ru my_agv_ws/src blocks/E_autonomy_logic/M20_pid_driving_control/complete/agv_ws/src || true</a:t>
+              <a:t>수정 후: ros2 topic info /target_error</a:t>
+            </a:r>
+          </a:p>
+        </p:txBody>
+      </p:sp>
+      <p:sp>
+        <p:nvSpPr>
+          <p:cNvPr id="10" name="Rounded Rectangle 9"/>
+          <p:cNvSpPr/>
+          <p:nvPr/>
+        </p:nvSpPr>
+        <p:spPr>
+          <a:xfrm>
+            <a:off x="694944" y="3172968"/>
+            <a:ext cx="10972800" cy="1115568"/>
+          </a:xfrm>
+          <a:prstGeom prst="roundRect">
+            <a:avLst/>
+          </a:prstGeom>
+          <a:solidFill>
+            <a:srgbClr val="FFF7F4"/>
+          </a:solidFill>
+          <a:ln>
+            <a:solidFill>
+              <a:srgbClr val="EDBEB4"/>
+            </a:solidFill>
+          </a:ln>
+        </p:spPr>
+        <p:style>
+          <a:lnRef idx="1">
+            <a:schemeClr val="accent1"/>
+          </a:lnRef>
+          <a:fillRef idx="3">
+            <a:schemeClr val="accent1"/>
+          </a:fillRef>
+          <a:effectRef idx="2">
+            <a:schemeClr val="accent1"/>
+          </a:effectRef>
+          <a:fontRef idx="minor">
+            <a:schemeClr val="lt1"/>
+          </a:fontRef>
+        </p:style>
+        <p:txBody>
+          <a:bodyPr rtlCol="0" anchor="ctr"/>
+          <a:lstStyle/>
+          <a:p>
+            <a:pPr algn="ctr"/>
+          </a:p>
+        </p:txBody>
+      </p:sp>
+      <p:sp>
+        <p:nvSpPr>
+          <p:cNvPr id="11" name="TextBox 10"/>
+          <p:cNvSpPr txBox="1"/>
+          <p:nvPr/>
+        </p:nvSpPr>
+        <p:spPr>
+          <a:xfrm>
+            <a:off x="896112" y="3319272"/>
+            <a:ext cx="2926080" cy="274320"/>
+          </a:xfrm>
+          <a:prstGeom prst="rect">
+            <a:avLst/>
+          </a:prstGeom>
+          <a:noFill/>
+        </p:spPr>
+        <p:txBody>
+          <a:bodyPr wrap="square" lIns="73152" rIns="73152" tIns="36576" bIns="36576">
+            <a:spAutoFit/>
+          </a:bodyPr>
+          <a:lstStyle/>
+          <a:p>
+            <a:pPr algn="l">
+              <a:spcAft>
+                <a:spcPts val="0"/>
+              </a:spcAft>
+              <a:defRPr sz="1800" b="1">
+                <a:solidFill>
+                  <a:srgbClr val="BE3B3B"/>
+                </a:solidFill>
+                <a:latin typeface="Noto Sans CJK KR"/>
+              </a:defRPr>
+            </a:pPr>
+            <a:r>
+              <a:t>증상 2: 진동이 심함</a:t>
+            </a:r>
+          </a:p>
+        </p:txBody>
+      </p:sp>
+      <p:sp>
+        <p:nvSpPr>
+          <p:cNvPr id="12" name="TextBox 11"/>
+          <p:cNvSpPr txBox="1"/>
+          <p:nvPr/>
+        </p:nvSpPr>
+        <p:spPr>
+          <a:xfrm>
+            <a:off x="3794760" y="3300984"/>
+            <a:ext cx="7543800" cy="621792"/>
+          </a:xfrm>
+          <a:prstGeom prst="rect">
+            <a:avLst/>
+          </a:prstGeom>
+          <a:noFill/>
+        </p:spPr>
+        <p:txBody>
+          <a:bodyPr wrap="square" lIns="73152" rIns="73152" tIns="36576" bIns="36576">
+            <a:spAutoFit/>
+          </a:bodyPr>
+          <a:lstStyle/>
+          <a:p>
+            <a:pPr algn="l">
+              <a:spcAft>
+                <a:spcPts val="0"/>
+              </a:spcAft>
+              <a:defRPr sz="1600" b="0">
+                <a:solidFill>
+                  <a:srgbClr val="122C4E"/>
+                </a:solidFill>
+                <a:latin typeface="Noto Sans CJK KR"/>
+              </a:defRPr>
+            </a:pPr>
+            <a:r>
+              <a:t>우선 확인: kp/kd·update rate·latency·saturation을 확인한다.</a:t>
             </a:r>
             <a:br/>
             <a:r>
-              <a:t>cp -a my_agv_ws/src my_agv_ws/src_before_M20</a:t>
-            </a:r>
-            <a:br/>
-            <a:r>
-              <a:t>cp -a blocks/E_autonomy_logic/M20_pid_driving_control/complete/agv_ws/src/. my_agv_ws/src/</a:t>
-            </a:r>
-            <a:br/>
-            <a:r>
-              <a:t>cd my_agv_ws &amp;&amp; colcon build --symlink-install &amp;&amp; source install/setup.bash</a:t>
-            </a:r>
-          </a:p>
-        </p:txBody>
-      </p:sp>
-      <p:sp>
-        <p:nvSpPr>
-          <p:cNvPr id="9" name="TextBox 8"/>
-          <p:cNvSpPr txBox="1"/>
-          <p:nvPr/>
-        </p:nvSpPr>
-        <p:spPr>
-          <a:xfrm>
-            <a:off x="786384" y="5413248"/>
-            <a:ext cx="10424160" cy="429768"/>
+              <a:t>수정 후: ros2 topic info /target_error</a:t>
+            </a:r>
+          </a:p>
+        </p:txBody>
+      </p:sp>
+      <p:sp>
+        <p:nvSpPr>
+          <p:cNvPr id="13" name="TextBox 12"/>
+          <p:cNvSpPr txBox="1"/>
+          <p:nvPr/>
+        </p:nvSpPr>
+        <p:spPr>
+          <a:xfrm>
+            <a:off x="822960" y="5102352"/>
+            <a:ext cx="10607040" cy="402336"/>
           </a:xfrm>
           <a:prstGeom prst="rect">
             <a:avLst/>
@@ -22561,15 +23431,15 @@
               <a:spcAft>
                 <a:spcPts val="0"/>
               </a:spcAft>
-              <a:defRPr sz="1700" b="1">
-                <a:solidFill>
-                  <a:srgbClr val="2A8B5A"/>
-                </a:solidFill>
-                <a:latin typeface="Noto Sans CJK KR"/>
-              </a:defRPr>
-            </a:pPr>
-            <a:r>
-              <a:t>복구 뒤에는 끝내지 말고, 내 파일과 Complete의 차이를 한 줄씩 설명한 뒤 다시 직접 입력해 봅니다.</a:t>
+              <a:defRPr sz="1800" b="1">
+                <a:solidFill>
+                  <a:srgbClr val="DB7E22"/>
+                </a:solidFill>
+                <a:latin typeface="Noto Sans CJK KR"/>
+              </a:defRPr>
+            </a:pPr>
+            <a:r>
+              <a:t>공통 순서: ① 현재 폴더 ② source ③ 파일 경로 ④ 이름/타입/단위 ⑤ build·source 후 재실행</a:t>
             </a:r>
           </a:p>
         </p:txBody>
@@ -22626,7 +23496,7 @@
               </a:defRPr>
             </a:pPr>
             <a:r>
-              <a:t>미니 실습: 값 하나를 바꾸고 결과를 비교한다</a:t>
+              <a:t>막혔을 때만: Complete를 복구용으로 사용한다</a:t>
             </a:r>
           </a:p>
         </p:txBody>
@@ -22665,7 +23535,7 @@
               </a:defRPr>
             </a:pPr>
             <a:r>
-              <a:t>정상 결과를 만든 뒤에는 한 번에 하나의 값만 바꿉니다.</a:t>
+              <a:t>이 슬라이드가 먼저가 아닙니다. 직접 입력·실행을 시도한 뒤에만 내 파일과 Complete를 비교합니다.</a:t>
             </a:r>
           </a:p>
         </p:txBody>
@@ -22801,31 +23671,70 @@
               </a:defRPr>
             </a:pPr>
             <a:r>
-              <a:t>현재 단계 미니 실습    |    현재 폴더 ~/ros2_curri/my_agv_ws    |    현재 터미널</a:t>
-            </a:r>
-          </a:p>
-        </p:txBody>
-      </p:sp>
-      <p:sp>
-        <p:nvSpPr>
-          <p:cNvPr id="7" name="Rounded Rectangle 6"/>
+              <a:t>현재 단계 복구용 Complete    |    현재 폴더 ~/ros2_curri    |    현재 터미널</a:t>
+            </a:r>
+          </a:p>
+        </p:txBody>
+      </p:sp>
+      <p:sp>
+        <p:nvSpPr>
+          <p:cNvPr id="7" name="TextBox 6"/>
+          <p:cNvSpPr txBox="1"/>
+          <p:nvPr/>
+        </p:nvSpPr>
+        <p:spPr>
+          <a:xfrm>
+            <a:off x="713232" y="1664208"/>
+            <a:ext cx="10698480" cy="402336"/>
+          </a:xfrm>
+          <a:prstGeom prst="rect">
+            <a:avLst/>
+          </a:prstGeom>
+          <a:noFill/>
+        </p:spPr>
+        <p:txBody>
+          <a:bodyPr wrap="square" lIns="73152" rIns="73152" tIns="36576" bIns="36576">
+            <a:spAutoFit/>
+          </a:bodyPr>
+          <a:lstStyle/>
+          <a:p>
+            <a:pPr algn="ctr">
+              <a:spcAft>
+                <a:spcPts val="0"/>
+              </a:spcAft>
+              <a:defRPr sz="1800" b="1">
+                <a:solidFill>
+                  <a:srgbClr val="DB7E22"/>
+                </a:solidFill>
+                <a:latin typeface="Noto Sans CJK KR"/>
+              </a:defRPr>
+            </a:pPr>
+            <a:r>
+              <a:t>권장 순서: ① 내 오류를 확인  ② Complete와 diff  ③ 꼭 필요할 때만 backup 후 복사</a:t>
+            </a:r>
+          </a:p>
+        </p:txBody>
+      </p:sp>
+      <p:sp>
+        <p:nvSpPr>
+          <p:cNvPr id="8" name="Rounded Rectangle 7"/>
           <p:cNvSpPr/>
           <p:nvPr/>
         </p:nvSpPr>
         <p:spPr>
           <a:xfrm>
-            <a:off x="749808" y="1874519"/>
-            <a:ext cx="10652760" cy="1993392"/>
+            <a:off x="676656" y="2423160"/>
+            <a:ext cx="10881360" cy="2606040"/>
           </a:xfrm>
           <a:prstGeom prst="roundRect">
             <a:avLst/>
           </a:prstGeom>
           <a:solidFill>
-            <a:srgbClr val="FFF8EB"/>
+            <a:srgbClr val="1D232D"/>
           </a:solidFill>
           <a:ln>
             <a:solidFill>
-              <a:srgbClr val="ECC680"/>
+              <a:srgbClr val="1D232D"/>
             </a:solidFill>
           </a:ln>
         </p:spPr>
@@ -22844,61 +23753,125 @@
           </a:fontRef>
         </p:style>
         <p:txBody>
-          <a:bodyPr rtlCol="0" anchor="ctr" wrap="square" lIns="73152" rIns="73152" tIns="36576" bIns="36576"/>
+          <a:bodyPr rtlCol="0" anchor="ctr" wrap="square" lIns="109728" rIns="109728" tIns="73152" bIns="73152"/>
+          <a:lstStyle/>
+          <a:p>
+            <a:pPr algn="l">
+              <a:spcAft>
+                <a:spcPts val="0"/>
+              </a:spcAft>
+              <a:defRPr sz="1400" b="0">
+                <a:solidFill>
+                  <a:srgbClr val="FFFFFF"/>
+                </a:solidFill>
+                <a:latin typeface="DejaVu Sans Mono"/>
+              </a:defRPr>
+            </a:pPr>
+            <a:r>
+              <a:t>cd ~/ros2_curri</a:t>
+            </a:r>
+          </a:p>
+          <a:p>
+            <a:pPr algn="l">
+              <a:spcAft>
+                <a:spcPts val="0"/>
+              </a:spcAft>
+              <a:defRPr sz="1400" b="0">
+                <a:solidFill>
+                  <a:srgbClr val="FFFFFF"/>
+                </a:solidFill>
+                <a:latin typeface="DejaVu Sans Mono"/>
+              </a:defRPr>
+            </a:pPr>
+            <a:r>
+              <a:t>diff -ru my_agv_ws/src blocks/E_autonomy_logic/M20_pid_driving_control/complete/agv_ws/src || true</a:t>
+            </a:r>
+          </a:p>
+          <a:p>
+            <a:pPr algn="l">
+              <a:spcAft>
+                <a:spcPts val="0"/>
+              </a:spcAft>
+              <a:defRPr sz="1400" b="0">
+                <a:solidFill>
+                  <a:srgbClr val="FFFFFF"/>
+                </a:solidFill>
+                <a:latin typeface="DejaVu Sans Mono"/>
+              </a:defRPr>
+            </a:pPr>
+            <a:r>
+              <a:t>cp -a my_agv_ws/src my_agv_ws/src_before_M20</a:t>
+            </a:r>
+          </a:p>
+          <a:p>
+            <a:pPr algn="l">
+              <a:spcAft>
+                <a:spcPts val="0"/>
+              </a:spcAft>
+              <a:defRPr sz="1400" b="0">
+                <a:solidFill>
+                  <a:srgbClr val="FFFFFF"/>
+                </a:solidFill>
+                <a:latin typeface="DejaVu Sans Mono"/>
+              </a:defRPr>
+            </a:pPr>
+            <a:r>
+              <a:t>cp -a blocks/E_autonomy_logic/M20_pid_driving_control/complete/agv_ws/src/. my_agv_ws/src/</a:t>
+            </a:r>
+          </a:p>
+          <a:p>
+            <a:pPr algn="l">
+              <a:spcAft>
+                <a:spcPts val="0"/>
+              </a:spcAft>
+              <a:defRPr sz="1400" b="0">
+                <a:solidFill>
+                  <a:srgbClr val="FFFFFF"/>
+                </a:solidFill>
+                <a:latin typeface="DejaVu Sans Mono"/>
+              </a:defRPr>
+            </a:pPr>
+            <a:r>
+              <a:t>cd my_agv_ws &amp;&amp; colcon build --symlink-install &amp;&amp; source install/setup.bash</a:t>
+            </a:r>
+          </a:p>
+        </p:txBody>
+      </p:sp>
+      <p:sp>
+        <p:nvSpPr>
+          <p:cNvPr id="9" name="TextBox 8"/>
+          <p:cNvSpPr txBox="1"/>
+          <p:nvPr/>
+        </p:nvSpPr>
+        <p:spPr>
+          <a:xfrm>
+            <a:off x="786384" y="5413248"/>
+            <a:ext cx="10424160" cy="429768"/>
+          </a:xfrm>
+          <a:prstGeom prst="rect">
+            <a:avLst/>
+          </a:prstGeom>
+          <a:noFill/>
+        </p:spPr>
+        <p:txBody>
+          <a:bodyPr wrap="square" lIns="73152" rIns="73152" tIns="36576" bIns="36576">
+            <a:spAutoFit/>
+          </a:bodyPr>
           <a:lstStyle/>
           <a:p>
             <a:pPr algn="ctr">
               <a:spcAft>
                 <a:spcPts val="0"/>
               </a:spcAft>
-              <a:defRPr sz="2300" b="1">
-                <a:solidFill>
-                  <a:srgbClr val="122C4E"/>
-                </a:solidFill>
-                <a:latin typeface="Noto Sans CJK KR"/>
-              </a:defRPr>
-            </a:pPr>
-            <a:r>
-              <a:t>kp_angular을 0.002, 0.004, 0.008로 바꿨을 때 반응 속도와 진동 위험을 예측해 기록한다.</a:t>
-            </a:r>
-          </a:p>
-        </p:txBody>
-      </p:sp>
-      <p:sp>
-        <p:nvSpPr>
-          <p:cNvPr id="8" name="TextBox 7"/>
-          <p:cNvSpPr txBox="1"/>
-          <p:nvPr/>
-        </p:nvSpPr>
-        <p:spPr>
-          <a:xfrm>
-            <a:off x="877824" y="4590288"/>
-            <a:ext cx="10241280" cy="594360"/>
-          </a:xfrm>
-          <a:prstGeom prst="rect">
-            <a:avLst/>
-          </a:prstGeom>
-          <a:noFill/>
-        </p:spPr>
-        <p:txBody>
-          <a:bodyPr wrap="square" lIns="73152" rIns="73152" tIns="36576" bIns="36576">
-            <a:spAutoFit/>
-          </a:bodyPr>
-          <a:lstStyle/>
-          <a:p>
-            <a:pPr algn="ctr">
-              <a:spcAft>
-                <a:spcPts val="0"/>
-              </a:spcAft>
-              <a:defRPr sz="1900" b="1">
-                <a:solidFill>
-                  <a:srgbClr val="DB7E22"/>
-                </a:solidFill>
-                <a:latin typeface="Noto Sans CJK KR"/>
-              </a:defRPr>
-            </a:pPr>
-            <a:r>
-              <a:t>기록할 것: 바꾼 값(단위) · 기대한 변화 · 실제 출력/화면 · 원래 값으로 되돌린 결과</a:t>
+              <a:defRPr sz="1700" b="1">
+                <a:solidFill>
+                  <a:srgbClr val="2A8B5A"/>
+                </a:solidFill>
+                <a:latin typeface="Noto Sans CJK KR"/>
+              </a:defRPr>
+            </a:pPr>
+            <a:r>
+              <a:t>복구 뒤에는 끝내지 말고, 내 파일과 Complete의 차이를 한 줄씩 설명한 뒤 다시 직접 입력해 봅니다.</a:t>
             </a:r>
           </a:p>
         </p:txBody>
@@ -22955,7 +23928,7 @@
               </a:defRPr>
             </a:pPr>
             <a:r>
-              <a:t>내 프로젝트 체크포인트를 저장하고 다음 모듈로 넘긴다</a:t>
+              <a:t>미니 실습: 값 하나를 바꾸고 결과를 비교한다</a:t>
             </a:r>
           </a:p>
         </p:txBody>
@@ -22994,7 +23967,7 @@
               </a:defRPr>
             </a:pPr>
             <a:r>
-              <a:t>Complete는 복구용 비교 기준이고, 다음 단계는 내가 직접 만든 workspace에서 계속합니다.</a:t>
+              <a:t>정상 결과를 만든 뒤에는 한 번에 하나의 값만 바꿉니다.</a:t>
             </a:r>
           </a:p>
         </p:txBody>
@@ -23130,7 +24103,7 @@
               </a:defRPr>
             </a:pPr>
             <a:r>
-              <a:t>현재 단계 체크포인트    |    현재 폴더 ~/ros2_curri/my_agv_ws    |    현재 터미널</a:t>
+              <a:t>현재 단계 미니 실습    |    현재 폴더 ~/ros2_curri/my_agv_ws    |    현재 터미널</a:t>
             </a:r>
           </a:p>
         </p:txBody>
@@ -23143,18 +24116,18 @@
         </p:nvSpPr>
         <p:spPr>
           <a:xfrm>
-            <a:off x="685800" y="1737360"/>
-            <a:ext cx="10972800" cy="3611880"/>
+            <a:off x="749808" y="1874519"/>
+            <a:ext cx="10652760" cy="1993392"/>
           </a:xfrm>
           <a:prstGeom prst="roundRect">
             <a:avLst/>
           </a:prstGeom>
           <a:solidFill>
-            <a:srgbClr val="F4F7FB"/>
+            <a:srgbClr val="FFF8EB"/>
           </a:solidFill>
           <a:ln>
             <a:solidFill>
-              <a:srgbClr val="D2DCE8"/>
+              <a:srgbClr val="ECC680"/>
             </a:solidFill>
           </a:ln>
         </p:spPr>
@@ -23173,10 +24146,23 @@
           </a:fontRef>
         </p:style>
         <p:txBody>
-          <a:bodyPr rtlCol="0" anchor="ctr"/>
-          <a:lstStyle/>
-          <a:p>
-            <a:pPr algn="ctr"/>
+          <a:bodyPr rtlCol="0" anchor="ctr" wrap="square" lIns="73152" rIns="73152" tIns="36576" bIns="36576"/>
+          <a:lstStyle/>
+          <a:p>
+            <a:pPr algn="ctr">
+              <a:spcAft>
+                <a:spcPts val="0"/>
+              </a:spcAft>
+              <a:defRPr sz="2300" b="1">
+                <a:solidFill>
+                  <a:srgbClr val="122C4E"/>
+                </a:solidFill>
+                <a:latin typeface="Noto Sans CJK KR"/>
+              </a:defRPr>
+            </a:pPr>
+            <a:r>
+              <a:t>kp_angular을 0.002, 0.004, 0.008로 바꿨을 때 반응 속도와 진동 위험을 예측해 기록한다.</a:t>
+            </a:r>
           </a:p>
         </p:txBody>
       </p:sp>
@@ -23188,111 +24174,8 @@
         </p:nvSpPr>
         <p:spPr>
           <a:xfrm>
-            <a:off x="896112" y="1993392"/>
-            <a:ext cx="10332720" cy="2971800"/>
-          </a:xfrm>
-          <a:prstGeom prst="rect">
-            <a:avLst/>
-          </a:prstGeom>
-          <a:noFill/>
-        </p:spPr>
-        <p:txBody>
-          <a:bodyPr wrap="square" lIns="109728" rIns="109728">
-            <a:spAutoFit/>
-          </a:bodyPr>
-          <a:lstStyle/>
-          <a:p>
-            <a:pPr>
-              <a:spcAft>
-                <a:spcPts val="800"/>
-              </a:spcAft>
-              <a:defRPr sz="1800">
-                <a:solidFill>
-                  <a:srgbClr val="122C4E"/>
-                </a:solidFill>
-                <a:latin typeface="Noto Sans CJK KR"/>
-              </a:defRPr>
-            </a:pPr>
-            <a:r>
-              <a:t>• □ 완료 화면: kp_angular·max speed parameter와 saturation이 /cmd_vel_raw 출력을 제한하는 것을 확인한다.</a:t>
-            </a:r>
-          </a:p>
-          <a:p>
-            <a:pPr>
-              <a:spcAft>
-                <a:spcPts val="800"/>
-              </a:spcAft>
-              <a:defRPr sz="1800">
-                <a:solidFill>
-                  <a:srgbClr val="122C4E"/>
-                </a:solidFill>
-                <a:latin typeface="Noto Sans CJK KR"/>
-              </a:defRPr>
-            </a:pPr>
-            <a:r>
-              <a:t>• □ 막혔을 때 비교할 Complete: blocks/E_autonomy_logic/M20_pid_driving_control/complete/</a:t>
-            </a:r>
-          </a:p>
-          <a:p>
-            <a:pPr>
-              <a:spcAft>
-                <a:spcPts val="800"/>
-              </a:spcAft>
-              <a:defRPr sz="1800">
-                <a:solidFill>
-                  <a:srgbClr val="122C4E"/>
-                </a:solidFill>
-                <a:latin typeface="Noto Sans CJK KR"/>
-              </a:defRPr>
-            </a:pPr>
-            <a:r>
-              <a:t>• □ 정상 로그·캡처: logs/validation.log, screenshots/validation_terminal.png</a:t>
-            </a:r>
-          </a:p>
-          <a:p>
-            <a:pPr>
-              <a:spcAft>
-                <a:spcPts val="800"/>
-              </a:spcAft>
-              <a:defRPr sz="1800">
-                <a:solidFill>
-                  <a:srgbClr val="122C4E"/>
-                </a:solidFill>
-                <a:latin typeface="Noto Sans CJK KR"/>
-              </a:defRPr>
-            </a:pPr>
-            <a:r>
-              <a:t>• □ 버전 식별: CHECKSUM_or_TAG.txt의 SHA-256 manifest</a:t>
-            </a:r>
-          </a:p>
-          <a:p>
-            <a:pPr>
-              <a:spcAft>
-                <a:spcPts val="800"/>
-              </a:spcAft>
-              <a:defRPr sz="1800">
-                <a:solidFill>
-                  <a:srgbClr val="122C4E"/>
-                </a:solidFill>
-                <a:latin typeface="Noto Sans CJK KR"/>
-              </a:defRPr>
-            </a:pPr>
-            <a:r>
-              <a:t>• □ 다음 시작 조건: M21 YAML/Launch</a:t>
-            </a:r>
-          </a:p>
-        </p:txBody>
-      </p:sp>
-      <p:sp>
-        <p:nvSpPr>
-          <p:cNvPr id="9" name="TextBox 8"/>
-          <p:cNvSpPr txBox="1"/>
-          <p:nvPr/>
-        </p:nvSpPr>
-        <p:spPr>
-          <a:xfrm>
-            <a:off x="868680" y="5596128"/>
-            <a:ext cx="10515600" cy="338328"/>
+            <a:off x="877824" y="4590288"/>
+            <a:ext cx="10241280" cy="594360"/>
           </a:xfrm>
           <a:prstGeom prst="rect">
             <a:avLst/>
@@ -23309,15 +24192,15 @@
               <a:spcAft>
                 <a:spcPts val="0"/>
               </a:spcAft>
-              <a:defRPr sz="1700" b="1">
-                <a:solidFill>
-                  <a:srgbClr val="2A8B5A"/>
-                </a:solidFill>
-                <a:latin typeface="Noto Sans CJK KR"/>
-              </a:defRPr>
-            </a:pPr>
-            <a:r>
-              <a:t>다음 모듈을 시작하기 전, 내 src의 변경사항을 저장하고 현재 완료 조건을 다시 확인합니다.</a:t>
+              <a:defRPr sz="1900" b="1">
+                <a:solidFill>
+                  <a:srgbClr val="DB7E22"/>
+                </a:solidFill>
+                <a:latin typeface="Noto Sans CJK KR"/>
+              </a:defRPr>
+            </a:pPr>
+            <a:r>
+              <a:t>기록할 것: 바꾼 값(단위) · 기대한 변화 · 실제 출력/화면 · 원래 값으로 되돌린 결과</a:t>
             </a:r>
           </a:p>
         </p:txBody>
@@ -23331,6 +24214,425 @@
 </file>
 
 <file path=ppt/slides/slide38.xml><?xml version="1.0" encoding="utf-8"?>
+<p:sld xmlns:a="http://schemas.openxmlformats.org/drawingml/2006/main" xmlns:p="http://schemas.openxmlformats.org/presentationml/2006/main" xmlns:r="http://schemas.openxmlformats.org/officeDocument/2006/relationships">
+  <p:cSld>
+    <p:spTree>
+      <p:nvGrpSpPr>
+        <p:cNvPr id="1" name=""/>
+        <p:cNvGrpSpPr/>
+        <p:nvPr/>
+      </p:nvGrpSpPr>
+      <p:grpSpPr/>
+      <p:sp>
+        <p:nvSpPr>
+          <p:cNvPr id="2" name="TextBox 1"/>
+          <p:cNvSpPr txBox="1"/>
+          <p:nvPr/>
+        </p:nvSpPr>
+        <p:spPr>
+          <a:xfrm>
+            <a:off x="566928" y="347472"/>
+            <a:ext cx="10881360" cy="438912"/>
+          </a:xfrm>
+          <a:prstGeom prst="rect">
+            <a:avLst/>
+          </a:prstGeom>
+          <a:noFill/>
+        </p:spPr>
+        <p:txBody>
+          <a:bodyPr wrap="square" lIns="73152" rIns="73152" tIns="36576" bIns="36576">
+            <a:spAutoFit/>
+          </a:bodyPr>
+          <a:lstStyle/>
+          <a:p>
+            <a:pPr algn="l">
+              <a:spcAft>
+                <a:spcPts val="0"/>
+              </a:spcAft>
+              <a:defRPr sz="3200" b="1">
+                <a:solidFill>
+                  <a:srgbClr val="122C4E"/>
+                </a:solidFill>
+                <a:latin typeface="Noto Sans CJK KR"/>
+              </a:defRPr>
+            </a:pPr>
+            <a:r>
+              <a:t>내 프로젝트 체크포인트를 저장하고 다음 모듈로 넘긴다</a:t>
+            </a:r>
+          </a:p>
+        </p:txBody>
+      </p:sp>
+      <p:sp>
+        <p:nvSpPr>
+          <p:cNvPr id="3" name="TextBox 2"/>
+          <p:cNvSpPr txBox="1"/>
+          <p:nvPr/>
+        </p:nvSpPr>
+        <p:spPr>
+          <a:xfrm>
+            <a:off x="603504" y="859536"/>
+            <a:ext cx="10698480" cy="292608"/>
+          </a:xfrm>
+          <a:prstGeom prst="rect">
+            <a:avLst/>
+          </a:prstGeom>
+          <a:noFill/>
+        </p:spPr>
+        <p:txBody>
+          <a:bodyPr wrap="square" lIns="73152" rIns="73152" tIns="36576" bIns="36576">
+            <a:spAutoFit/>
+          </a:bodyPr>
+          <a:lstStyle/>
+          <a:p>
+            <a:pPr algn="l">
+              <a:spcAft>
+                <a:spcPts val="0"/>
+              </a:spcAft>
+              <a:defRPr sz="1700" b="0">
+                <a:solidFill>
+                  <a:srgbClr val="5C6672"/>
+                </a:solidFill>
+                <a:latin typeface="Noto Sans CJK KR"/>
+              </a:defRPr>
+            </a:pPr>
+            <a:r>
+              <a:t>Complete는 복구용 비교 기준이고, 다음 단계는 내가 직접 만든 workspace에서 계속합니다.</a:t>
+            </a:r>
+          </a:p>
+        </p:txBody>
+      </p:sp>
+      <p:sp>
+        <p:nvSpPr>
+          <p:cNvPr id="4" name="TextBox 3"/>
+          <p:cNvSpPr txBox="1"/>
+          <p:nvPr/>
+        </p:nvSpPr>
+        <p:spPr>
+          <a:xfrm>
+            <a:off x="530352" y="6510528"/>
+            <a:ext cx="7772400" cy="201168"/>
+          </a:xfrm>
+          <a:prstGeom prst="rect">
+            <a:avLst/>
+          </a:prstGeom>
+          <a:noFill/>
+        </p:spPr>
+        <p:txBody>
+          <a:bodyPr wrap="square" lIns="73152" rIns="73152" tIns="36576" bIns="36576">
+            <a:spAutoFit/>
+          </a:bodyPr>
+          <a:lstStyle/>
+          <a:p>
+            <a:pPr algn="l">
+              <a:spcAft>
+                <a:spcPts val="0"/>
+              </a:spcAft>
+              <a:defRPr sz="900" b="0">
+                <a:solidFill>
+                  <a:srgbClr val="5C6672"/>
+                </a:solidFill>
+                <a:latin typeface="Noto Sans CJK KR"/>
+              </a:defRPr>
+            </a:pPr>
+            <a:r>
+              <a:t>ROS 2 기반 AGV End-to-End 개발 커리큘럼 · M20 · Block E</a:t>
+            </a:r>
+          </a:p>
+        </p:txBody>
+      </p:sp>
+      <p:sp>
+        <p:nvSpPr>
+          <p:cNvPr id="5" name="TextBox 4"/>
+          <p:cNvSpPr txBox="1"/>
+          <p:nvPr/>
+        </p:nvSpPr>
+        <p:spPr>
+          <a:xfrm>
+            <a:off x="9144000" y="6510528"/>
+            <a:ext cx="2468880" cy="201168"/>
+          </a:xfrm>
+          <a:prstGeom prst="rect">
+            <a:avLst/>
+          </a:prstGeom>
+          <a:noFill/>
+        </p:spPr>
+        <p:txBody>
+          <a:bodyPr wrap="square" lIns="73152" rIns="73152" tIns="36576" bIns="36576">
+            <a:spAutoFit/>
+          </a:bodyPr>
+          <a:lstStyle/>
+          <a:p>
+            <a:pPr algn="r">
+              <a:spcAft>
+                <a:spcPts val="0"/>
+              </a:spcAft>
+              <a:defRPr sz="1000" b="0">
+                <a:solidFill>
+                  <a:srgbClr val="5C6672"/>
+                </a:solidFill>
+                <a:latin typeface="Noto Sans CJK KR"/>
+              </a:defRPr>
+            </a:pPr>
+            <a:r>
+              <a:t>명령·파일 경로는 슬라이드에서 복사 가능</a:t>
+            </a:r>
+          </a:p>
+        </p:txBody>
+      </p:sp>
+      <p:sp>
+        <p:nvSpPr>
+          <p:cNvPr id="6" name="Rectangle 5"/>
+          <p:cNvSpPr/>
+          <p:nvPr/>
+        </p:nvSpPr>
+        <p:spPr>
+          <a:xfrm>
+            <a:off x="566928" y="1188720"/>
+            <a:ext cx="11064240" cy="347472"/>
+          </a:xfrm>
+          <a:prstGeom prst="rect">
+            <a:avLst/>
+          </a:prstGeom>
+          <a:solidFill>
+            <a:srgbClr val="F4F7FB"/>
+          </a:solidFill>
+          <a:ln>
+            <a:solidFill>
+              <a:srgbClr val="F4F7FB"/>
+            </a:solidFill>
+          </a:ln>
+        </p:spPr>
+        <p:style>
+          <a:lnRef idx="1">
+            <a:schemeClr val="accent1"/>
+          </a:lnRef>
+          <a:fillRef idx="3">
+            <a:schemeClr val="accent1"/>
+          </a:fillRef>
+          <a:effectRef idx="2">
+            <a:schemeClr val="accent1"/>
+          </a:effectRef>
+          <a:fontRef idx="minor">
+            <a:schemeClr val="lt1"/>
+          </a:fontRef>
+        </p:style>
+        <p:txBody>
+          <a:bodyPr rtlCol="0" anchor="ctr" wrap="square" lIns="73152" rIns="73152" tIns="36576" bIns="36576"/>
+          <a:lstStyle/>
+          <a:p>
+            <a:pPr algn="l">
+              <a:spcAft>
+                <a:spcPts val="0"/>
+              </a:spcAft>
+              <a:defRPr sz="1300" b="1">
+                <a:solidFill>
+                  <a:srgbClr val="122C4E"/>
+                </a:solidFill>
+                <a:latin typeface="Noto Sans CJK KR"/>
+              </a:defRPr>
+            </a:pPr>
+            <a:r>
+              <a:t>현재 단계 체크포인트    |    현재 폴더 ~/ros2_curri/my_agv_ws    |    현재 터미널</a:t>
+            </a:r>
+          </a:p>
+        </p:txBody>
+      </p:sp>
+      <p:sp>
+        <p:nvSpPr>
+          <p:cNvPr id="7" name="Rounded Rectangle 6"/>
+          <p:cNvSpPr/>
+          <p:nvPr/>
+        </p:nvSpPr>
+        <p:spPr>
+          <a:xfrm>
+            <a:off x="685800" y="1737360"/>
+            <a:ext cx="10972800" cy="3611880"/>
+          </a:xfrm>
+          <a:prstGeom prst="roundRect">
+            <a:avLst/>
+          </a:prstGeom>
+          <a:solidFill>
+            <a:srgbClr val="F4F7FB"/>
+          </a:solidFill>
+          <a:ln>
+            <a:solidFill>
+              <a:srgbClr val="D2DCE8"/>
+            </a:solidFill>
+          </a:ln>
+        </p:spPr>
+        <p:style>
+          <a:lnRef idx="1">
+            <a:schemeClr val="accent1"/>
+          </a:lnRef>
+          <a:fillRef idx="3">
+            <a:schemeClr val="accent1"/>
+          </a:fillRef>
+          <a:effectRef idx="2">
+            <a:schemeClr val="accent1"/>
+          </a:effectRef>
+          <a:fontRef idx="minor">
+            <a:schemeClr val="lt1"/>
+          </a:fontRef>
+        </p:style>
+        <p:txBody>
+          <a:bodyPr rtlCol="0" anchor="ctr"/>
+          <a:lstStyle/>
+          <a:p>
+            <a:pPr algn="ctr"/>
+          </a:p>
+        </p:txBody>
+      </p:sp>
+      <p:sp>
+        <p:nvSpPr>
+          <p:cNvPr id="8" name="TextBox 7"/>
+          <p:cNvSpPr txBox="1"/>
+          <p:nvPr/>
+        </p:nvSpPr>
+        <p:spPr>
+          <a:xfrm>
+            <a:off x="896112" y="1993392"/>
+            <a:ext cx="10332720" cy="2971800"/>
+          </a:xfrm>
+          <a:prstGeom prst="rect">
+            <a:avLst/>
+          </a:prstGeom>
+          <a:noFill/>
+        </p:spPr>
+        <p:txBody>
+          <a:bodyPr wrap="square" lIns="109728" rIns="109728">
+            <a:spAutoFit/>
+          </a:bodyPr>
+          <a:lstStyle/>
+          <a:p>
+            <a:pPr>
+              <a:spcAft>
+                <a:spcPts val="800"/>
+              </a:spcAft>
+              <a:defRPr sz="1800">
+                <a:solidFill>
+                  <a:srgbClr val="122C4E"/>
+                </a:solidFill>
+                <a:latin typeface="Noto Sans CJK KR"/>
+              </a:defRPr>
+            </a:pPr>
+            <a:r>
+              <a:t>• □ 완료 화면: kp_angular·max speed parameter와 saturation이 /cmd_vel_raw 출력을 제한하는 것을 확인한다.</a:t>
+            </a:r>
+          </a:p>
+          <a:p>
+            <a:pPr>
+              <a:spcAft>
+                <a:spcPts val="800"/>
+              </a:spcAft>
+              <a:defRPr sz="1800">
+                <a:solidFill>
+                  <a:srgbClr val="122C4E"/>
+                </a:solidFill>
+                <a:latin typeface="Noto Sans CJK KR"/>
+              </a:defRPr>
+            </a:pPr>
+            <a:r>
+              <a:t>• □ 막혔을 때 비교할 Complete: blocks/E_autonomy_logic/M20_pid_driving_control/complete/</a:t>
+            </a:r>
+          </a:p>
+          <a:p>
+            <a:pPr>
+              <a:spcAft>
+                <a:spcPts val="800"/>
+              </a:spcAft>
+              <a:defRPr sz="1800">
+                <a:solidFill>
+                  <a:srgbClr val="122C4E"/>
+                </a:solidFill>
+                <a:latin typeface="Noto Sans CJK KR"/>
+              </a:defRPr>
+            </a:pPr>
+            <a:r>
+              <a:t>• □ 정상 로그·캡처: logs/validation.log, screenshots/validation_terminal.png</a:t>
+            </a:r>
+          </a:p>
+          <a:p>
+            <a:pPr>
+              <a:spcAft>
+                <a:spcPts val="800"/>
+              </a:spcAft>
+              <a:defRPr sz="1800">
+                <a:solidFill>
+                  <a:srgbClr val="122C4E"/>
+                </a:solidFill>
+                <a:latin typeface="Noto Sans CJK KR"/>
+              </a:defRPr>
+            </a:pPr>
+            <a:r>
+              <a:t>• □ 버전 식별: CHECKSUM_or_TAG.txt의 SHA-256 manifest</a:t>
+            </a:r>
+          </a:p>
+          <a:p>
+            <a:pPr>
+              <a:spcAft>
+                <a:spcPts val="800"/>
+              </a:spcAft>
+              <a:defRPr sz="1800">
+                <a:solidFill>
+                  <a:srgbClr val="122C4E"/>
+                </a:solidFill>
+                <a:latin typeface="Noto Sans CJK KR"/>
+              </a:defRPr>
+            </a:pPr>
+            <a:r>
+              <a:t>• □ 다음 시작 조건: M21 YAML/Launch</a:t>
+            </a:r>
+          </a:p>
+        </p:txBody>
+      </p:sp>
+      <p:sp>
+        <p:nvSpPr>
+          <p:cNvPr id="9" name="TextBox 8"/>
+          <p:cNvSpPr txBox="1"/>
+          <p:nvPr/>
+        </p:nvSpPr>
+        <p:spPr>
+          <a:xfrm>
+            <a:off x="868680" y="5596128"/>
+            <a:ext cx="10515600" cy="338328"/>
+          </a:xfrm>
+          <a:prstGeom prst="rect">
+            <a:avLst/>
+          </a:prstGeom>
+          <a:noFill/>
+        </p:spPr>
+        <p:txBody>
+          <a:bodyPr wrap="square" lIns="73152" rIns="73152" tIns="36576" bIns="36576">
+            <a:spAutoFit/>
+          </a:bodyPr>
+          <a:lstStyle/>
+          <a:p>
+            <a:pPr algn="ctr">
+              <a:spcAft>
+                <a:spcPts val="0"/>
+              </a:spcAft>
+              <a:defRPr sz="1700" b="1">
+                <a:solidFill>
+                  <a:srgbClr val="2A8B5A"/>
+                </a:solidFill>
+                <a:latin typeface="Noto Sans CJK KR"/>
+              </a:defRPr>
+            </a:pPr>
+            <a:r>
+              <a:t>다음 모듈을 시작하기 전, 내 src의 변경사항을 저장하고 현재 완료 조건을 다시 확인합니다.</a:t>
+            </a:r>
+          </a:p>
+        </p:txBody>
+      </p:sp>
+    </p:spTree>
+  </p:cSld>
+  <p:clrMapOvr>
+    <a:masterClrMapping/>
+  </p:clrMapOvr>
+</p:sld>
+</file>
+
+<file path=ppt/slides/slide39.xml><?xml version="1.0" encoding="utf-8"?>
 <p:sld xmlns:a="http://schemas.openxmlformats.org/drawingml/2006/main" xmlns:p="http://schemas.openxmlformats.org/presentationml/2006/main" xmlns:r="http://schemas.openxmlformats.org/officeDocument/2006/relationships">
   <p:cSld>
     <p:spTree>
